--- a/output/Mini-Boom-en-Cali_Presentacion.pptx
+++ b/output/Mini-Boom-en-Cali_Presentacion.pptx
@@ -15,6 +15,7 @@
     <p:sldId id="263" r:id="rId14"/>
     <p:sldId id="264" r:id="rId15"/>
     <p:sldId id="265" r:id="rId16"/>
+    <p:sldId id="266" r:id="rId17"/>
   </p:sldIdLst>
   <p:sldSz cx="12191695" cy="6858000" type="screen4x3"/>
   <p:notesSz cx="6858000" cy="9144000"/>
@@ -134,7 +135,7 @@
               <c:strCache>
                 <c:ptCount val="1"/>
                 <c:pt idx="0">
-                  <c:v>Puntaje</c:v>
+                  <c:v>v</c:v>
                 </c:pt>
               </c:strCache>
             </c:strRef>
@@ -236,140 +237,6 @@
                 </c:pt>
                 <c:pt idx="5">
                   <c:v>71.2</c:v>
-                </c:pt>
-              </c:numCache>
-            </c:numRef>
-          </c:val>
-        </c:ser>
-        <c:axId val="-2068027336"/>
-        <c:axId val="-2113994440"/>
-      </c:barChart>
-      <c:catAx>
-        <c:axId val="-2068027336"/>
-        <c:scaling>
-          <c:orientation val="minMax"/>
-        </c:scaling>
-        <c:delete val="0"/>
-        <c:axPos val="l"/>
-        <c:majorTickMark val="out"/>
-        <c:minorTickMark val="none"/>
-        <c:tickLblPos val="nextTo"/>
-        <c:crossAx val="-2113994440"/>
-        <c:crosses val="autoZero"/>
-        <c:auto val="1"/>
-        <c:lblAlgn val="ctr"/>
-        <c:lblOffset val="100"/>
-        <c:noMultiLvlLbl val="0"/>
-      </c:catAx>
-      <c:valAx>
-        <c:axId val="-2113994440"/>
-        <c:scaling/>
-        <c:delete val="0"/>
-        <c:axPos val="b"/>
-        <c:majorGridlines/>
-        <c:majorTickMark val="out"/>
-        <c:minorTickMark val="none"/>
-        <c:tickLblPos val="nextTo"/>
-        <c:crossAx val="-2068027336"/>
-        <c:crosses val="autoZero"/>
-      </c:valAx>
-    </c:plotArea>
-    <c:dispBlanksAs val="gap"/>
-  </c:chart>
-  <c:txPr>
-    <a:bodyPr/>
-    <a:lstStyle/>
-    <a:p>
-      <a:pPr>
-        <a:defRPr sz="1800"/>
-      </a:pPr>
-      <a:endParaRPr lang="en-US"/>
-    </a:p>
-  </c:txPr>
-  <c:externalData r:id="rId1">
-    <c:autoUpdate val="0"/>
-  </c:externalData>
-</c:chartSpace>
-</file>
-
-<file path=ppt/charts/chart2.xml><?xml version="1.0" encoding="utf-8"?>
-<c:chartSpace xmlns:c="http://schemas.openxmlformats.org/drawingml/2006/chart" xmlns:a="http://schemas.openxmlformats.org/drawingml/2006/main" xmlns:r="http://schemas.openxmlformats.org/officeDocument/2006/relationships">
-  <c:date1904 val="0"/>
-  <c:chart>
-    <c:autoTitleDeleted val="0"/>
-    <c:plotArea>
-      <c:barChart>
-        <c:barDir val="bar"/>
-        <c:grouping val="clustered"/>
-        <c:ser>
-          <c:idx val="0"/>
-          <c:order val="0"/>
-          <c:tx>
-            <c:strRef>
-              <c:f>Sheet1!$B$1</c:f>
-              <c:strCache>
-                <c:ptCount val="1"/>
-                <c:pt idx="0">
-                  <c:v>Por persona (COP)</c:v>
-                </c:pt>
-              </c:strCache>
-            </c:strRef>
-          </c:tx>
-          <c:dPt>
-            <c:idx val="0"/>
-            <c:spPr>
-              <a:solidFill>
-                <a:srgbClr val="D9A75E"/>
-              </a:solidFill>
-            </c:spPr>
-          </c:dPt>
-          <c:dPt>
-            <c:idx val="1"/>
-            <c:spPr>
-              <a:solidFill>
-                <a:srgbClr val="D8C4B2"/>
-              </a:solidFill>
-            </c:spPr>
-          </c:dPt>
-          <c:dPt>
-            <c:idx val="2"/>
-            <c:spPr>
-              <a:solidFill>
-                <a:srgbClr val="D8C4B2"/>
-              </a:solidFill>
-            </c:spPr>
-          </c:dPt>
-          <c:cat>
-            <c:strRef>
-              <c:f>Sheet1!$A$2:$A$4</c:f>
-              <c:strCache>
-                <c:ptCount val="3"/>
-                <c:pt idx="0">
-                  <c:v>Carro todo el viaje</c:v>
-                </c:pt>
-                <c:pt idx="1">
-                  <c:v>Carro solo 3 días</c:v>
-                </c:pt>
-                <c:pt idx="2">
-                  <c:v>Sin carro propio</c:v>
-                </c:pt>
-              </c:strCache>
-            </c:strRef>
-          </c:cat>
-          <c:val>
-            <c:numRef>
-              <c:f>Sheet1!$B$2:$B$4</c:f>
-              <c:numCache>
-                <c:formatCode>General</c:formatCode>
-                <c:ptCount val="3"/>
-                <c:pt idx="0">
-                  <c:v>150000</c:v>
-                </c:pt>
-                <c:pt idx="1">
-                  <c:v>140000</c:v>
-                </c:pt>
-                <c:pt idx="2">
-                  <c:v>125000</c:v>
                 </c:pt>
               </c:numCache>
             </c:numRef>
@@ -3415,9 +3282,61 @@
         <p:nvPr/>
       </p:nvGrpSpPr>
       <p:grpSpPr/>
+      <p:sp>
+        <p:nvSpPr>
+          <p:cNvPr id="2" name="Rounded Rectangle 1"/>
+          <p:cNvSpPr/>
+          <p:nvPr/>
+        </p:nvSpPr>
+        <p:spPr>
+          <a:xfrm>
+            <a:off x="3840480" y="502920"/>
+            <a:ext cx="4507992" cy="1572768"/>
+          </a:xfrm>
+          <a:prstGeom prst="roundRect">
+            <a:avLst>
+              <a:gd name="adj" fmla="val 22000"/>
+            </a:avLst>
+          </a:prstGeom>
+          <a:solidFill>
+            <a:srgbClr val="FFFFFF"/>
+          </a:solidFill>
+          <a:ln>
+            <a:noFill/>
+          </a:ln>
+          <a:effectLst>
+            <a:outerShdw blurRad="95000" dist="40000" dir="5400000" rotWithShape="0">
+              <a:srgbClr val="6E5B4E">
+                <a:alpha val="32000"/>
+              </a:srgbClr>
+            </a:outerShdw>
+          </a:effectLst>
+        </p:spPr>
+        <p:style>
+          <a:lnRef idx="1">
+            <a:schemeClr val="accent1"/>
+          </a:lnRef>
+          <a:fillRef idx="3">
+            <a:schemeClr val="accent1"/>
+          </a:fillRef>
+          <a:effectRef idx="2">
+            <a:schemeClr val="accent1"/>
+          </a:effectRef>
+          <a:fontRef idx="minor">
+            <a:schemeClr val="lt1"/>
+          </a:fontRef>
+        </p:style>
+        <p:txBody>
+          <a:bodyPr rtlCol="0" anchor="ctr"/>
+          <a:lstStyle/>
+          <a:p>
+            <a:pPr algn="ctr"/>
+          </a:p>
+        </p:txBody>
+      </p:sp>
       <p:pic>
         <p:nvPicPr>
-          <p:cNvPr id="2" name="Picture 1" descr="flag_cartagena_rgb.png"/>
+          <p:cNvPr id="3" name="Picture 2" descr="flag_cartagena_rgb.png"/>
           <p:cNvPicPr>
             <a:picLocks noChangeAspect="1"/>
           </p:cNvPicPr>
@@ -3431,39 +3350,41 @@
         </p:blipFill>
         <p:spPr>
           <a:xfrm>
-            <a:off x="3977639" y="640080"/>
-            <a:ext cx="1752600" cy="1051560"/>
+            <a:off x="4370832" y="658368"/>
+            <a:ext cx="1402080" cy="841248"/>
+          </a:xfrm>
+          <a:prstGeom prst="roundRect">
+            <a:avLst>
+              <a:gd name="adj" fmla="val 9000"/>
+            </a:avLst>
+          </a:prstGeom>
+        </p:spPr>
+      </p:pic>
+      <p:sp>
+        <p:nvSpPr>
+          <p:cNvPr id="4" name="TextBox 3"/>
+          <p:cNvSpPr txBox="1"/>
+          <p:nvPr/>
+        </p:nvSpPr>
+        <p:spPr>
+          <a:xfrm>
+            <a:off x="5870448" y="822960"/>
+            <a:ext cx="822960" cy="548640"/>
           </a:xfrm>
           <a:prstGeom prst="rect">
             <a:avLst/>
           </a:prstGeom>
-        </p:spPr>
-      </p:pic>
-      <p:sp>
-        <p:nvSpPr>
-          <p:cNvPr id="3" name="TextBox 2"/>
-          <p:cNvSpPr txBox="1"/>
-          <p:nvPr/>
-        </p:nvSpPr>
-        <p:spPr>
-          <a:xfrm>
-            <a:off x="5532120" y="868680"/>
-            <a:ext cx="1005840" cy="548640"/>
-          </a:xfrm>
-          <a:prstGeom prst="rect">
-            <a:avLst/>
-          </a:prstGeom>
           <a:noFill/>
         </p:spPr>
         <p:txBody>
-          <a:bodyPr wrap="square">
+          <a:bodyPr wrap="square" anchor="t">
             <a:spAutoFit/>
           </a:bodyPr>
           <a:lstStyle/>
           <a:p>
             <a:pPr algn="ctr"/>
             <a:r>
-              <a:rPr sz="3000" b="1">
+              <a:rPr sz="2600" b="1">
                 <a:solidFill>
                   <a:srgbClr val="B5765C"/>
                 </a:solidFill>
@@ -3475,7 +3396,7 @@
       </p:sp>
       <p:pic>
         <p:nvPicPr>
-          <p:cNvPr id="4" name="Picture 3" descr="flag_cali_rgb.png"/>
+          <p:cNvPr id="5" name="Picture 4" descr="flag_cali_rgb.png"/>
           <p:cNvPicPr>
             <a:picLocks noChangeAspect="1"/>
           </p:cNvPicPr>
@@ -3489,39 +3410,41 @@
         </p:blipFill>
         <p:spPr>
           <a:xfrm>
-            <a:off x="6583680" y="640080"/>
-            <a:ext cx="1577340" cy="1051560"/>
+            <a:off x="6601968" y="658368"/>
+            <a:ext cx="1261872" cy="841248"/>
+          </a:xfrm>
+          <a:prstGeom prst="roundRect">
+            <a:avLst>
+              <a:gd name="adj" fmla="val 9000"/>
+            </a:avLst>
+          </a:prstGeom>
+        </p:spPr>
+      </p:pic>
+      <p:sp>
+        <p:nvSpPr>
+          <p:cNvPr id="6" name="TextBox 5"/>
+          <p:cNvSpPr txBox="1"/>
+          <p:nvPr/>
+        </p:nvSpPr>
+        <p:spPr>
+          <a:xfrm>
+            <a:off x="3840480" y="1572768"/>
+            <a:ext cx="4507992" cy="384048"/>
           </a:xfrm>
           <a:prstGeom prst="rect">
             <a:avLst/>
           </a:prstGeom>
-        </p:spPr>
-      </p:pic>
-      <p:sp>
-        <p:nvSpPr>
-          <p:cNvPr id="5" name="TextBox 4"/>
-          <p:cNvSpPr txBox="1"/>
-          <p:nvPr/>
-        </p:nvSpPr>
-        <p:spPr>
-          <a:xfrm>
-            <a:off x="3200400" y="1783080"/>
-            <a:ext cx="5788152" cy="365760"/>
-          </a:xfrm>
-          <a:prstGeom prst="rect">
-            <a:avLst/>
-          </a:prstGeom>
           <a:noFill/>
         </p:spPr>
         <p:txBody>
-          <a:bodyPr wrap="square">
+          <a:bodyPr wrap="square" anchor="t">
             <a:spAutoFit/>
           </a:bodyPr>
           <a:lstStyle/>
           <a:p>
             <a:pPr algn="ctr"/>
             <a:r>
-              <a:rPr sz="1300" b="0">
+              <a:rPr sz="1200" b="0">
                 <a:solidFill>
                   <a:srgbClr val="8A7A6E"/>
                 </a:solidFill>
@@ -3533,24 +3456,33 @@
       </p:sp>
       <p:sp>
         <p:nvSpPr>
-          <p:cNvPr id="6" name="Rectangle 5"/>
+          <p:cNvPr id="7" name="Rounded Rectangle 6"/>
           <p:cNvSpPr/>
           <p:nvPr/>
         </p:nvSpPr>
         <p:spPr>
           <a:xfrm>
-            <a:off x="0" y="2926080"/>
-            <a:ext cx="12191695" cy="1280160"/>
-          </a:xfrm>
-          <a:prstGeom prst="rect">
-            <a:avLst/>
+            <a:off x="1188720" y="2697480"/>
+            <a:ext cx="9811512" cy="3200400"/>
+          </a:xfrm>
+          <a:prstGeom prst="roundRect">
+            <a:avLst>
+              <a:gd name="adj" fmla="val 7000"/>
+            </a:avLst>
           </a:prstGeom>
           <a:solidFill>
-            <a:srgbClr val="B5765C"/>
+            <a:srgbClr val="FFFFFF"/>
           </a:solidFill>
           <a:ln>
             <a:noFill/>
           </a:ln>
+          <a:effectLst>
+            <a:outerShdw blurRad="95000" dist="40000" dir="5400000" rotWithShape="0">
+              <a:srgbClr val="6E5B4E">
+                <a:alpha val="32000"/>
+              </a:srgbClr>
+            </a:outerShdw>
+          </a:effectLst>
         </p:spPr>
         <p:style>
           <a:lnRef idx="1">
@@ -3576,14 +3508,14 @@
       </p:sp>
       <p:sp>
         <p:nvSpPr>
-          <p:cNvPr id="7" name="TextBox 6"/>
+          <p:cNvPr id="8" name="TextBox 7"/>
           <p:cNvSpPr txBox="1"/>
           <p:nvPr/>
         </p:nvSpPr>
         <p:spPr>
           <a:xfrm>
-            <a:off x="731520" y="3063240"/>
-            <a:ext cx="10698480" cy="914400"/>
+            <a:off x="1463040" y="2971800"/>
+            <a:ext cx="9235440" cy="1005840"/>
           </a:xfrm>
           <a:prstGeom prst="rect">
             <a:avLst/>
@@ -3591,7 +3523,7 @@
           <a:noFill/>
         </p:spPr>
         <p:txBody>
-          <a:bodyPr wrap="square">
+          <a:bodyPr wrap="square" anchor="t">
             <a:spAutoFit/>
           </a:bodyPr>
           <a:lstStyle/>
@@ -3600,7 +3532,7 @@
             <a:r>
               <a:rPr sz="4600" b="1">
                 <a:solidFill>
-                  <a:srgbClr val="FFFFFF"/>
+                  <a:srgbClr val="8F5A44"/>
                 </a:solidFill>
               </a:rPr>
               <a:t>Mini-Boom en Cali</a:t>
@@ -3610,14 +3542,14 @@
       </p:sp>
       <p:sp>
         <p:nvSpPr>
-          <p:cNvPr id="8" name="TextBox 7"/>
+          <p:cNvPr id="9" name="TextBox 8"/>
           <p:cNvSpPr txBox="1"/>
           <p:nvPr/>
         </p:nvSpPr>
         <p:spPr>
           <a:xfrm>
-            <a:off x="731520" y="4434840"/>
-            <a:ext cx="10698480" cy="548640"/>
+            <a:off x="1463040" y="4069080"/>
+            <a:ext cx="9235440" cy="457200"/>
           </a:xfrm>
           <a:prstGeom prst="rect">
             <a:avLst/>
@@ -3625,16 +3557,16 @@
           <a:noFill/>
         </p:spPr>
         <p:txBody>
-          <a:bodyPr wrap="square">
+          <a:bodyPr wrap="square" anchor="t">
             <a:spAutoFit/>
           </a:bodyPr>
           <a:lstStyle/>
           <a:p>
             <a:pPr algn="ctr"/>
             <a:r>
-              <a:rPr sz="1900" b="0">
-                <a:solidFill>
-                  <a:srgbClr val="8F5A44"/>
+              <a:rPr sz="1800" b="0">
+                <a:solidFill>
+                  <a:srgbClr val="8A7A6E"/>
                 </a:solidFill>
               </a:rPr>
               <a:t>Dossier de logística · transporte y estadía para siete</a:t>
@@ -3644,14 +3576,59 @@
       </p:sp>
       <p:sp>
         <p:nvSpPr>
-          <p:cNvPr id="9" name="TextBox 8"/>
+          <p:cNvPr id="10" name="Rounded Rectangle 9"/>
+          <p:cNvSpPr/>
+          <p:nvPr/>
+        </p:nvSpPr>
+        <p:spPr>
+          <a:xfrm>
+            <a:off x="5641848" y="4617720"/>
+            <a:ext cx="914400" cy="384048"/>
+          </a:xfrm>
+          <a:prstGeom prst="roundRect">
+            <a:avLst>
+              <a:gd name="adj" fmla="val 50000"/>
+            </a:avLst>
+          </a:prstGeom>
+          <a:solidFill>
+            <a:srgbClr val="D9A75E"/>
+          </a:solidFill>
+          <a:ln>
+            <a:noFill/>
+          </a:ln>
+        </p:spPr>
+        <p:style>
+          <a:lnRef idx="1">
+            <a:schemeClr val="accent1"/>
+          </a:lnRef>
+          <a:fillRef idx="3">
+            <a:schemeClr val="accent1"/>
+          </a:fillRef>
+          <a:effectRef idx="2">
+            <a:schemeClr val="accent1"/>
+          </a:effectRef>
+          <a:fontRef idx="minor">
+            <a:schemeClr val="lt1"/>
+          </a:fontRef>
+        </p:style>
+        <p:txBody>
+          <a:bodyPr rtlCol="0" anchor="ctr"/>
+          <a:lstStyle/>
+          <a:p>
+            <a:pPr algn="ctr"/>
+          </a:p>
+        </p:txBody>
+      </p:sp>
+      <p:sp>
+        <p:nvSpPr>
+          <p:cNvPr id="11" name="TextBox 10"/>
           <p:cNvSpPr txBox="1"/>
           <p:nvPr/>
         </p:nvSpPr>
         <p:spPr>
           <a:xfrm>
-            <a:off x="731520" y="5257800"/>
-            <a:ext cx="10698480" cy="914400"/>
+            <a:off x="5641848" y="4617720"/>
+            <a:ext cx="914400" cy="384048"/>
           </a:xfrm>
           <a:prstGeom prst="rect">
             <a:avLst/>
@@ -3659,30 +3636,64 @@
           <a:noFill/>
         </p:spPr>
         <p:txBody>
-          <a:bodyPr wrap="square">
+          <a:bodyPr wrap="square" anchor="ctr">
             <a:spAutoFit/>
           </a:bodyPr>
           <a:lstStyle/>
           <a:p>
             <a:pPr algn="ctr"/>
             <a:r>
+              <a:rPr sz="1300" b="1">
+                <a:solidFill>
+                  <a:srgbClr val="463A32"/>
+                </a:solidFill>
+              </a:rPr>
+              <a:t>v2</a:t>
+            </a:r>
+          </a:p>
+        </p:txBody>
+      </p:sp>
+      <p:sp>
+        <p:nvSpPr>
+          <p:cNvPr id="12" name="TextBox 11"/>
+          <p:cNvSpPr txBox="1"/>
+          <p:nvPr/>
+        </p:nvSpPr>
+        <p:spPr>
+          <a:xfrm>
+            <a:off x="1463040" y="5120640"/>
+            <a:ext cx="9235440" cy="731520"/>
+          </a:xfrm>
+          <a:prstGeom prst="rect">
+            <a:avLst/>
+          </a:prstGeom>
+          <a:noFill/>
+        </p:spPr>
+        <p:txBody>
+          <a:bodyPr wrap="square" anchor="t">
+            <a:spAutoFit/>
+          </a:bodyPr>
+          <a:lstStyle/>
+          <a:p>
+            <a:pPr algn="ctr"/>
+            <a:r>
               <a:rPr sz="1400" b="0">
                 <a:solidFill>
+                  <a:srgbClr val="463A32"/>
+                </a:solidFill>
+              </a:rPr>
+              <a:t>7 personas    ·    30 oct – 2 nov 2026 (viernes a lunes · 3 noches)</a:t>
+            </a:r>
+          </a:p>
+          <a:p>
+            <a:pPr algn="ctr"/>
+            <a:r>
+              <a:rPr sz="1200" b="0">
+                <a:solidFill>
                   <a:srgbClr val="8A7A6E"/>
                 </a:solidFill>
               </a:rPr>
-              <a:t>7 personas   ·   30 oct – 2 nov 2026 (viernes a lunes · 3 noches)</a:t>
-            </a:r>
-          </a:p>
-          <a:p>
-            <a:pPr algn="ctr"/>
-            <a:r>
-              <a:rPr sz="1400" b="0">
-                <a:solidFill>
-                  <a:srgbClr val="8A7A6E"/>
-                </a:solidFill>
-              </a:rPr>
-              <a:t>Salida 30 oct 7:00 am de Cartagena · regreso en vuelo 9:00 pm del 2 nov</a:t>
+              <a:t>Ida 30 oct: sale 6:00 pm de Cartagena, llega 8:00 pm · regreso en vuelo 9:00 pm del 2 nov</a:t>
             </a:r>
           </a:p>
         </p:txBody>
@@ -3701,7 +3712,7 @@
     <p:bg>
       <p:bgPr>
         <a:solidFill>
-          <a:srgbClr val="FFFFFF"/>
+          <a:srgbClr val="FCF5EC"/>
         </a:solidFill>
         <a:effectLst/>
       </p:bgPr>
@@ -3715,17 +3726,481 @@
       <p:grpSpPr/>
       <p:sp>
         <p:nvSpPr>
-          <p:cNvPr id="2" name="Rectangle 1"/>
-          <p:cNvSpPr/>
-          <p:nvPr/>
-        </p:nvSpPr>
-        <p:spPr>
-          <a:xfrm>
-            <a:off x="0" y="0"/>
-            <a:ext cx="12191695" cy="960120"/>
+          <p:cNvPr id="2" name="TextBox 1"/>
+          <p:cNvSpPr txBox="1"/>
+          <p:nvPr/>
+        </p:nvSpPr>
+        <p:spPr>
+          <a:xfrm>
+            <a:off x="731520" y="457200"/>
+            <a:ext cx="10698480" cy="822960"/>
           </a:xfrm>
           <a:prstGeom prst="rect">
             <a:avLst/>
+          </a:prstGeom>
+          <a:noFill/>
+        </p:spPr>
+        <p:txBody>
+          <a:bodyPr wrap="square" anchor="t">
+            <a:spAutoFit/>
+          </a:bodyPr>
+          <a:lstStyle/>
+          <a:p>
+            <a:pPr algn="ctr"/>
+            <a:r>
+              <a:rPr sz="3400" b="1">
+                <a:solidFill>
+                  <a:srgbClr val="8F5A44"/>
+                </a:solidFill>
+              </a:rPr>
+              <a:t>🏆  La recomendación</a:t>
+            </a:r>
+          </a:p>
+        </p:txBody>
+      </p:sp>
+      <p:sp>
+        <p:nvSpPr>
+          <p:cNvPr id="3" name="Rounded Rectangle 2"/>
+          <p:cNvSpPr/>
+          <p:nvPr/>
+        </p:nvSpPr>
+        <p:spPr>
+          <a:xfrm>
+            <a:off x="1280160" y="1600200"/>
+            <a:ext cx="9628632" cy="2286000"/>
+          </a:xfrm>
+          <a:prstGeom prst="roundRect">
+            <a:avLst>
+              <a:gd name="adj" fmla="val 10000"/>
+            </a:avLst>
+          </a:prstGeom>
+          <a:solidFill>
+            <a:srgbClr val="FFFFFF"/>
+          </a:solidFill>
+          <a:ln w="25400">
+            <a:solidFill>
+              <a:srgbClr val="D9A75E"/>
+            </a:solidFill>
+          </a:ln>
+          <a:effectLst>
+            <a:outerShdw blurRad="95000" dist="40000" dir="5400000" rotWithShape="0">
+              <a:srgbClr val="6E5B4E">
+                <a:alpha val="32000"/>
+              </a:srgbClr>
+            </a:outerShdw>
+          </a:effectLst>
+        </p:spPr>
+        <p:style>
+          <a:lnRef idx="1">
+            <a:schemeClr val="accent1"/>
+          </a:lnRef>
+          <a:fillRef idx="3">
+            <a:schemeClr val="accent1"/>
+          </a:fillRef>
+          <a:effectRef idx="2">
+            <a:schemeClr val="accent1"/>
+          </a:effectRef>
+          <a:fontRef idx="minor">
+            <a:schemeClr val="lt1"/>
+          </a:fontRef>
+        </p:style>
+        <p:txBody>
+          <a:bodyPr rtlCol="0" anchor="ctr"/>
+          <a:lstStyle/>
+          <a:p>
+            <a:pPr algn="ctr"/>
+          </a:p>
+        </p:txBody>
+      </p:sp>
+      <p:sp>
+        <p:nvSpPr>
+          <p:cNvPr id="4" name="TextBox 3"/>
+          <p:cNvSpPr txBox="1"/>
+          <p:nvPr/>
+        </p:nvSpPr>
+        <p:spPr>
+          <a:xfrm>
+            <a:off x="1554480" y="1828800"/>
+            <a:ext cx="9052560" cy="1737360"/>
+          </a:xfrm>
+          <a:prstGeom prst="rect">
+            <a:avLst/>
+          </a:prstGeom>
+          <a:noFill/>
+        </p:spPr>
+        <p:txBody>
+          <a:bodyPr wrap="square" anchor="ctr">
+            <a:spAutoFit/>
+          </a:bodyPr>
+          <a:lstStyle/>
+          <a:p>
+            <a:pPr algn="ctr"/>
+            <a:r>
+              <a:rPr sz="2100" b="1">
+                <a:solidFill>
+                  <a:srgbClr val="463A32"/>
+                </a:solidFill>
+              </a:rPr>
+              <a:t>Viajero Hostel &amp; Salsa School  +  carro local (entrega coordinada)</a:t>
+            </a:r>
+          </a:p>
+          <a:p>
+            <a:pPr algn="ctr"/>
+            <a:r>
+              <a:rPr sz="800" b="0">
+                <a:solidFill>
+                  <a:srgbClr val="463A32"/>
+                </a:solidFill>
+              </a:rPr>
+              <a:t/>
+            </a:r>
+          </a:p>
+          <a:p>
+            <a:pPr algn="ctr"/>
+            <a:r>
+              <a:rPr sz="3000" b="1">
+                <a:solidFill>
+                  <a:srgbClr val="8F5A44"/>
+                </a:solidFill>
+              </a:rPr>
+              <a:t>≈ $452.282 por persona</a:t>
+            </a:r>
+          </a:p>
+        </p:txBody>
+      </p:sp>
+      <p:sp>
+        <p:nvSpPr>
+          <p:cNvPr id="5" name="Rounded Rectangle 4"/>
+          <p:cNvSpPr/>
+          <p:nvPr/>
+        </p:nvSpPr>
+        <p:spPr>
+          <a:xfrm>
+            <a:off x="822960" y="4206240"/>
+            <a:ext cx="3383280" cy="1371600"/>
+          </a:xfrm>
+          <a:prstGeom prst="roundRect">
+            <a:avLst>
+              <a:gd name="adj" fmla="val 12000"/>
+            </a:avLst>
+          </a:prstGeom>
+          <a:solidFill>
+            <a:srgbClr val="FFFFFF"/>
+          </a:solidFill>
+          <a:ln>
+            <a:noFill/>
+          </a:ln>
+          <a:effectLst>
+            <a:outerShdw blurRad="95000" dist="40000" dir="5400000" rotWithShape="0">
+              <a:srgbClr val="6E5B4E">
+                <a:alpha val="32000"/>
+              </a:srgbClr>
+            </a:outerShdw>
+          </a:effectLst>
+        </p:spPr>
+        <p:style>
+          <a:lnRef idx="1">
+            <a:schemeClr val="accent1"/>
+          </a:lnRef>
+          <a:fillRef idx="3">
+            <a:schemeClr val="accent1"/>
+          </a:fillRef>
+          <a:effectRef idx="2">
+            <a:schemeClr val="accent1"/>
+          </a:effectRef>
+          <a:fontRef idx="minor">
+            <a:schemeClr val="lt1"/>
+          </a:fontRef>
+        </p:style>
+        <p:txBody>
+          <a:bodyPr rtlCol="0" anchor="ctr"/>
+          <a:lstStyle/>
+          <a:p>
+            <a:pPr algn="ctr"/>
+          </a:p>
+        </p:txBody>
+      </p:sp>
+      <p:sp>
+        <p:nvSpPr>
+          <p:cNvPr id="6" name="TextBox 5"/>
+          <p:cNvSpPr txBox="1"/>
+          <p:nvPr/>
+        </p:nvSpPr>
+        <p:spPr>
+          <a:xfrm>
+            <a:off x="1051560" y="4206240"/>
+            <a:ext cx="2926080" cy="1371600"/>
+          </a:xfrm>
+          <a:prstGeom prst="rect">
+            <a:avLst/>
+          </a:prstGeom>
+          <a:noFill/>
+        </p:spPr>
+        <p:txBody>
+          <a:bodyPr wrap="square" anchor="ctr">
+            <a:spAutoFit/>
+          </a:bodyPr>
+          <a:lstStyle/>
+          <a:p>
+            <a:pPr algn="ctr"/>
+            <a:r>
+              <a:rPr sz="1400" b="1">
+                <a:solidFill>
+                  <a:srgbClr val="463A32"/>
+                </a:solidFill>
+              </a:rPr>
+              <a:t>Mostrador (Kayak): $432.282</a:t>
+            </a:r>
+          </a:p>
+        </p:txBody>
+      </p:sp>
+      <p:sp>
+        <p:nvSpPr>
+          <p:cNvPr id="7" name="Rounded Rectangle 6"/>
+          <p:cNvSpPr/>
+          <p:nvPr/>
+        </p:nvSpPr>
+        <p:spPr>
+          <a:xfrm>
+            <a:off x="4434840" y="4206240"/>
+            <a:ext cx="3383280" cy="1371600"/>
+          </a:xfrm>
+          <a:prstGeom prst="roundRect">
+            <a:avLst>
+              <a:gd name="adj" fmla="val 12000"/>
+            </a:avLst>
+          </a:prstGeom>
+          <a:solidFill>
+            <a:srgbClr val="FFFFFF"/>
+          </a:solidFill>
+          <a:ln>
+            <a:noFill/>
+          </a:ln>
+          <a:effectLst>
+            <a:outerShdw blurRad="95000" dist="40000" dir="5400000" rotWithShape="0">
+              <a:srgbClr val="6E5B4E">
+                <a:alpha val="32000"/>
+              </a:srgbClr>
+            </a:outerShdw>
+          </a:effectLst>
+        </p:spPr>
+        <p:style>
+          <a:lnRef idx="1">
+            <a:schemeClr val="accent1"/>
+          </a:lnRef>
+          <a:fillRef idx="3">
+            <a:schemeClr val="accent1"/>
+          </a:fillRef>
+          <a:effectRef idx="2">
+            <a:schemeClr val="accent1"/>
+          </a:effectRef>
+          <a:fontRef idx="minor">
+            <a:schemeClr val="lt1"/>
+          </a:fontRef>
+        </p:style>
+        <p:txBody>
+          <a:bodyPr rtlCol="0" anchor="ctr"/>
+          <a:lstStyle/>
+          <a:p>
+            <a:pPr algn="ctr"/>
+          </a:p>
+        </p:txBody>
+      </p:sp>
+      <p:sp>
+        <p:nvSpPr>
+          <p:cNvPr id="8" name="TextBox 7"/>
+          <p:cNvSpPr txBox="1"/>
+          <p:nvPr/>
+        </p:nvSpPr>
+        <p:spPr>
+          <a:xfrm>
+            <a:off x="4663440" y="4206240"/>
+            <a:ext cx="2926080" cy="1371600"/>
+          </a:xfrm>
+          <a:prstGeom prst="rect">
+            <a:avLst/>
+          </a:prstGeom>
+          <a:noFill/>
+        </p:spPr>
+        <p:txBody>
+          <a:bodyPr wrap="square" anchor="ctr">
+            <a:spAutoFit/>
+          </a:bodyPr>
+          <a:lstStyle/>
+          <a:p>
+            <a:pPr algn="ctr"/>
+            <a:r>
+              <a:rPr sz="1400" b="1">
+                <a:solidFill>
+                  <a:srgbClr val="463A32"/>
+                </a:solidFill>
+              </a:rPr>
+              <a:t>Sin carro propio: $377.282 (en meta)</a:t>
+            </a:r>
+          </a:p>
+        </p:txBody>
+      </p:sp>
+      <p:sp>
+        <p:nvSpPr>
+          <p:cNvPr id="9" name="Rounded Rectangle 8"/>
+          <p:cNvSpPr/>
+          <p:nvPr/>
+        </p:nvSpPr>
+        <p:spPr>
+          <a:xfrm>
+            <a:off x="8046720" y="4206240"/>
+            <a:ext cx="3383280" cy="1371600"/>
+          </a:xfrm>
+          <a:prstGeom prst="roundRect">
+            <a:avLst>
+              <a:gd name="adj" fmla="val 12000"/>
+            </a:avLst>
+          </a:prstGeom>
+          <a:solidFill>
+            <a:srgbClr val="FFFFFF"/>
+          </a:solidFill>
+          <a:ln>
+            <a:noFill/>
+          </a:ln>
+          <a:effectLst>
+            <a:outerShdw blurRad="95000" dist="40000" dir="5400000" rotWithShape="0">
+              <a:srgbClr val="6E5B4E">
+                <a:alpha val="32000"/>
+              </a:srgbClr>
+            </a:outerShdw>
+          </a:effectLst>
+        </p:spPr>
+        <p:style>
+          <a:lnRef idx="1">
+            <a:schemeClr val="accent1"/>
+          </a:lnRef>
+          <a:fillRef idx="3">
+            <a:schemeClr val="accent1"/>
+          </a:fillRef>
+          <a:effectRef idx="2">
+            <a:schemeClr val="accent1"/>
+          </a:effectRef>
+          <a:fontRef idx="minor">
+            <a:schemeClr val="lt1"/>
+          </a:fontRef>
+        </p:style>
+        <p:txBody>
+          <a:bodyPr rtlCol="0" anchor="ctr"/>
+          <a:lstStyle/>
+          <a:p>
+            <a:pPr algn="ctr"/>
+          </a:p>
+        </p:txBody>
+      </p:sp>
+      <p:sp>
+        <p:nvSpPr>
+          <p:cNvPr id="10" name="TextBox 9"/>
+          <p:cNvSpPr txBox="1"/>
+          <p:nvPr/>
+        </p:nvSpPr>
+        <p:spPr>
+          <a:xfrm>
+            <a:off x="8275320" y="4206240"/>
+            <a:ext cx="2926080" cy="1371600"/>
+          </a:xfrm>
+          <a:prstGeom prst="rect">
+            <a:avLst/>
+          </a:prstGeom>
+          <a:noFill/>
+        </p:spPr>
+        <p:txBody>
+          <a:bodyPr wrap="square" anchor="ctr">
+            <a:spAutoFit/>
+          </a:bodyPr>
+          <a:lstStyle/>
+          <a:p>
+            <a:pPr algn="ctr"/>
+            <a:r>
+              <a:rPr sz="1400" b="1">
+                <a:solidFill>
+                  <a:srgbClr val="463A32"/>
+                </a:solidFill>
+              </a:rPr>
+              <a:t>En meta de estadía: Patio del Río $389.750</a:t>
+            </a:r>
+          </a:p>
+        </p:txBody>
+      </p:sp>
+      <p:sp>
+        <p:nvSpPr>
+          <p:cNvPr id="11" name="TextBox 10"/>
+          <p:cNvSpPr txBox="1"/>
+          <p:nvPr/>
+        </p:nvSpPr>
+        <p:spPr>
+          <a:xfrm>
+            <a:off x="731520" y="5852160"/>
+            <a:ext cx="10698480" cy="548640"/>
+          </a:xfrm>
+          <a:prstGeom prst="rect">
+            <a:avLst/>
+          </a:prstGeom>
+          <a:noFill/>
+        </p:spPr>
+        <p:txBody>
+          <a:bodyPr wrap="square" anchor="t">
+            <a:spAutoFit/>
+          </a:bodyPr>
+          <a:lstStyle/>
+          <a:p>
+            <a:pPr algn="ctr"/>
+            <a:r>
+              <a:rPr sz="1300" b="0">
+                <a:solidFill>
+                  <a:srgbClr val="8A7A6E"/>
+                </a:solidFill>
+              </a:rPr>
+              <a:t>El hostal dice sí a todo (seguridad, piscina, aire, bar, rumba y salsa); el carro local da libertad sin pelear con el horario.</a:t>
+            </a:r>
+          </a:p>
+        </p:txBody>
+      </p:sp>
+    </p:spTree>
+  </p:cSld>
+  <p:clrMapOvr>
+    <a:masterClrMapping/>
+  </p:clrMapOvr>
+</p:sld>
+</file>
+
+<file path=ppt/slides/slide11.xml><?xml version="1.0" encoding="utf-8"?>
+<p:sld xmlns:a="http://schemas.openxmlformats.org/drawingml/2006/main" xmlns:p="http://schemas.openxmlformats.org/presentationml/2006/main" xmlns:r="http://schemas.openxmlformats.org/officeDocument/2006/relationships">
+  <p:cSld>
+    <p:bg>
+      <p:bgPr>
+        <a:solidFill>
+          <a:srgbClr val="FCF5EC"/>
+        </a:solidFill>
+        <a:effectLst/>
+      </p:bgPr>
+    </p:bg>
+    <p:spTree>
+      <p:nvGrpSpPr>
+        <p:cNvPr id="1" name=""/>
+        <p:cNvGrpSpPr/>
+        <p:nvPr/>
+      </p:nvGrpSpPr>
+      <p:grpSpPr/>
+      <p:sp>
+        <p:nvSpPr>
+          <p:cNvPr id="2" name="Rounded Rectangle 1"/>
+          <p:cNvSpPr/>
+          <p:nvPr/>
+        </p:nvSpPr>
+        <p:spPr>
+          <a:xfrm>
+            <a:off x="365760" y="274320"/>
+            <a:ext cx="11457432" cy="749808"/>
+          </a:xfrm>
+          <a:prstGeom prst="roundRect">
+            <a:avLst>
+              <a:gd name="adj" fmla="val 50000"/>
+            </a:avLst>
           </a:prstGeom>
           <a:solidFill>
             <a:srgbClr val="B5765C"/>
@@ -3733,6 +4208,13 @@
           <a:ln>
             <a:noFill/>
           </a:ln>
+          <a:effectLst>
+            <a:outerShdw blurRad="95000" dist="40000" dir="5400000" rotWithShape="0">
+              <a:srgbClr val="6E5B4E">
+                <a:alpha val="32000"/>
+              </a:srgbClr>
+            </a:outerShdw>
+          </a:effectLst>
         </p:spPr>
         <p:style>
           <a:lnRef idx="1">
@@ -3749,18 +4231,10 @@
           </a:fontRef>
         </p:style>
         <p:txBody>
-          <a:bodyPr rtlCol="0" anchor="ctr" wrap="square"/>
+          <a:bodyPr rtlCol="0" anchor="ctr"/>
           <a:lstStyle/>
           <a:p>
             <a:pPr algn="ctr"/>
-            <a:r>
-              <a:rPr sz="2600" b="1">
-                <a:solidFill>
-                  <a:srgbClr val="FFFFFF"/>
-                </a:solidFill>
-              </a:rPr>
-              <a:t>   Antes de reservar</a:t>
-            </a:r>
           </a:p>
         </p:txBody>
       </p:sp>
@@ -3772,8 +4246,642 @@
         </p:nvSpPr>
         <p:spPr>
           <a:xfrm>
-            <a:off x="822960" y="1371600"/>
-            <a:ext cx="10515600" cy="2743200"/>
+            <a:off x="777240" y="274320"/>
+            <a:ext cx="10789920" cy="749808"/>
+          </a:xfrm>
+          <a:prstGeom prst="rect">
+            <a:avLst/>
+          </a:prstGeom>
+          <a:noFill/>
+        </p:spPr>
+        <p:txBody>
+          <a:bodyPr wrap="square" anchor="ctr">
+            <a:spAutoFit/>
+          </a:bodyPr>
+          <a:lstStyle/>
+          <a:p>
+            <a:pPr algn="l"/>
+            <a:r>
+              <a:rPr sz="2400" b="1">
+                <a:solidFill>
+                  <a:srgbClr val="FFFFFF"/>
+                </a:solidFill>
+              </a:rPr>
+              <a:t>📋   Antes de reservar</a:t>
+            </a:r>
+          </a:p>
+        </p:txBody>
+      </p:sp>
+      <p:sp>
+        <p:nvSpPr>
+          <p:cNvPr id="4" name="Rounded Rectangle 3"/>
+          <p:cNvSpPr/>
+          <p:nvPr/>
+        </p:nvSpPr>
+        <p:spPr>
+          <a:xfrm>
+            <a:off x="548640" y="1417320"/>
+            <a:ext cx="5440680" cy="1417320"/>
+          </a:xfrm>
+          <a:prstGeom prst="roundRect">
+            <a:avLst>
+              <a:gd name="adj" fmla="val 12000"/>
+            </a:avLst>
+          </a:prstGeom>
+          <a:solidFill>
+            <a:srgbClr val="FFFFFF"/>
+          </a:solidFill>
+          <a:ln>
+            <a:noFill/>
+          </a:ln>
+          <a:effectLst>
+            <a:outerShdw blurRad="95000" dist="40000" dir="5400000" rotWithShape="0">
+              <a:srgbClr val="6E5B4E">
+                <a:alpha val="32000"/>
+              </a:srgbClr>
+            </a:outerShdw>
+          </a:effectLst>
+        </p:spPr>
+        <p:style>
+          <a:lnRef idx="1">
+            <a:schemeClr val="accent1"/>
+          </a:lnRef>
+          <a:fillRef idx="3">
+            <a:schemeClr val="accent1"/>
+          </a:fillRef>
+          <a:effectRef idx="2">
+            <a:schemeClr val="accent1"/>
+          </a:effectRef>
+          <a:fontRef idx="minor">
+            <a:schemeClr val="lt1"/>
+          </a:fontRef>
+        </p:style>
+        <p:txBody>
+          <a:bodyPr rtlCol="0" anchor="ctr"/>
+          <a:lstStyle/>
+          <a:p>
+            <a:pPr algn="ctr"/>
+          </a:p>
+        </p:txBody>
+      </p:sp>
+      <p:sp>
+        <p:nvSpPr>
+          <p:cNvPr id="5" name="Oval 4"/>
+          <p:cNvSpPr/>
+          <p:nvPr/>
+        </p:nvSpPr>
+        <p:spPr>
+          <a:xfrm>
+            <a:off x="822959" y="1801368"/>
+            <a:ext cx="658368" cy="658368"/>
+          </a:xfrm>
+          <a:prstGeom prst="ellipse">
+            <a:avLst/>
+          </a:prstGeom>
+          <a:solidFill>
+            <a:srgbClr val="E6EDDC"/>
+          </a:solidFill>
+          <a:ln>
+            <a:noFill/>
+          </a:ln>
+        </p:spPr>
+        <p:style>
+          <a:lnRef idx="1">
+            <a:schemeClr val="accent1"/>
+          </a:lnRef>
+          <a:fillRef idx="3">
+            <a:schemeClr val="accent1"/>
+          </a:fillRef>
+          <a:effectRef idx="2">
+            <a:schemeClr val="accent1"/>
+          </a:effectRef>
+          <a:fontRef idx="minor">
+            <a:schemeClr val="lt1"/>
+          </a:fontRef>
+        </p:style>
+        <p:txBody>
+          <a:bodyPr rtlCol="0" anchor="ctr"/>
+          <a:lstStyle/>
+          <a:p>
+            <a:pPr algn="ctr"/>
+            <a:r>
+              <a:rPr sz="2400">
+                <a:solidFill>
+                  <a:srgbClr val="5B7D4F"/>
+                </a:solidFill>
+              </a:rPr>
+              <a:t>✓</a:t>
+            </a:r>
+          </a:p>
+        </p:txBody>
+      </p:sp>
+      <p:sp>
+        <p:nvSpPr>
+          <p:cNvPr id="6" name="TextBox 5"/>
+          <p:cNvSpPr txBox="1"/>
+          <p:nvPr/>
+        </p:nvSpPr>
+        <p:spPr>
+          <a:xfrm>
+            <a:off x="1737360" y="1581912"/>
+            <a:ext cx="4114800" cy="1143000"/>
+          </a:xfrm>
+          <a:prstGeom prst="rect">
+            <a:avLst/>
+          </a:prstGeom>
+          <a:noFill/>
+        </p:spPr>
+        <p:txBody>
+          <a:bodyPr wrap="square" anchor="ctr">
+            <a:spAutoFit/>
+          </a:bodyPr>
+          <a:lstStyle/>
+          <a:p>
+            <a:pPr algn="l"/>
+            <a:r>
+              <a:rPr sz="1300" b="0">
+                <a:solidFill>
+                  <a:srgbClr val="463A32"/>
+                </a:solidFill>
+              </a:rPr>
+              <a:t>Estadía: ¿precio por persona o por habitación? Y capacidad para 7 (camas ≥5).</a:t>
+            </a:r>
+          </a:p>
+        </p:txBody>
+      </p:sp>
+      <p:sp>
+        <p:nvSpPr>
+          <p:cNvPr id="7" name="Rounded Rectangle 6"/>
+          <p:cNvSpPr/>
+          <p:nvPr/>
+        </p:nvSpPr>
+        <p:spPr>
+          <a:xfrm>
+            <a:off x="6263640" y="1417320"/>
+            <a:ext cx="5440680" cy="1417320"/>
+          </a:xfrm>
+          <a:prstGeom prst="roundRect">
+            <a:avLst>
+              <a:gd name="adj" fmla="val 12000"/>
+            </a:avLst>
+          </a:prstGeom>
+          <a:solidFill>
+            <a:srgbClr val="FFFFFF"/>
+          </a:solidFill>
+          <a:ln>
+            <a:noFill/>
+          </a:ln>
+          <a:effectLst>
+            <a:outerShdw blurRad="95000" dist="40000" dir="5400000" rotWithShape="0">
+              <a:srgbClr val="6E5B4E">
+                <a:alpha val="32000"/>
+              </a:srgbClr>
+            </a:outerShdw>
+          </a:effectLst>
+        </p:spPr>
+        <p:style>
+          <a:lnRef idx="1">
+            <a:schemeClr val="accent1"/>
+          </a:lnRef>
+          <a:fillRef idx="3">
+            <a:schemeClr val="accent1"/>
+          </a:fillRef>
+          <a:effectRef idx="2">
+            <a:schemeClr val="accent1"/>
+          </a:effectRef>
+          <a:fontRef idx="minor">
+            <a:schemeClr val="lt1"/>
+          </a:fontRef>
+        </p:style>
+        <p:txBody>
+          <a:bodyPr rtlCol="0" anchor="ctr"/>
+          <a:lstStyle/>
+          <a:p>
+            <a:pPr algn="ctr"/>
+          </a:p>
+        </p:txBody>
+      </p:sp>
+      <p:sp>
+        <p:nvSpPr>
+          <p:cNvPr id="8" name="Oval 7"/>
+          <p:cNvSpPr/>
+          <p:nvPr/>
+        </p:nvSpPr>
+        <p:spPr>
+          <a:xfrm>
+            <a:off x="6537959" y="1801368"/>
+            <a:ext cx="658368" cy="658368"/>
+          </a:xfrm>
+          <a:prstGeom prst="ellipse">
+            <a:avLst/>
+          </a:prstGeom>
+          <a:solidFill>
+            <a:srgbClr val="E6EDDC"/>
+          </a:solidFill>
+          <a:ln>
+            <a:noFill/>
+          </a:ln>
+        </p:spPr>
+        <p:style>
+          <a:lnRef idx="1">
+            <a:schemeClr val="accent1"/>
+          </a:lnRef>
+          <a:fillRef idx="3">
+            <a:schemeClr val="accent1"/>
+          </a:fillRef>
+          <a:effectRef idx="2">
+            <a:schemeClr val="accent1"/>
+          </a:effectRef>
+          <a:fontRef idx="minor">
+            <a:schemeClr val="lt1"/>
+          </a:fontRef>
+        </p:style>
+        <p:txBody>
+          <a:bodyPr rtlCol="0" anchor="ctr"/>
+          <a:lstStyle/>
+          <a:p>
+            <a:pPr algn="ctr"/>
+            <a:r>
+              <a:rPr sz="2400">
+                <a:solidFill>
+                  <a:srgbClr val="5B7D4F"/>
+                </a:solidFill>
+              </a:rPr>
+              <a:t>✓</a:t>
+            </a:r>
+          </a:p>
+        </p:txBody>
+      </p:sp>
+      <p:sp>
+        <p:nvSpPr>
+          <p:cNvPr id="9" name="TextBox 8"/>
+          <p:cNvSpPr txBox="1"/>
+          <p:nvPr/>
+        </p:nvSpPr>
+        <p:spPr>
+          <a:xfrm>
+            <a:off x="7452360" y="1581912"/>
+            <a:ext cx="4114800" cy="1143000"/>
+          </a:xfrm>
+          <a:prstGeom prst="rect">
+            <a:avLst/>
+          </a:prstGeom>
+          <a:noFill/>
+        </p:spPr>
+        <p:txBody>
+          <a:bodyPr wrap="square" anchor="ctr">
+            <a:spAutoFit/>
+          </a:bodyPr>
+          <a:lstStyle/>
+          <a:p>
+            <a:pPr algn="l"/>
+            <a:r>
+              <a:rPr sz="1300" b="0">
+                <a:solidFill>
+                  <a:srgbClr val="463A32"/>
+                </a:solidFill>
+              </a:rPr>
+              <a:t>Carro: cotizar por WhatsApp la entrega en el aeropuerto coordinando el vuelo de las 8 pm, y el total de 3 días.</a:t>
+            </a:r>
+          </a:p>
+        </p:txBody>
+      </p:sp>
+      <p:sp>
+        <p:nvSpPr>
+          <p:cNvPr id="10" name="Rounded Rectangle 9"/>
+          <p:cNvSpPr/>
+          <p:nvPr/>
+        </p:nvSpPr>
+        <p:spPr>
+          <a:xfrm>
+            <a:off x="548640" y="3017520"/>
+            <a:ext cx="5440680" cy="1417320"/>
+          </a:xfrm>
+          <a:prstGeom prst="roundRect">
+            <a:avLst>
+              <a:gd name="adj" fmla="val 12000"/>
+            </a:avLst>
+          </a:prstGeom>
+          <a:solidFill>
+            <a:srgbClr val="FFFFFF"/>
+          </a:solidFill>
+          <a:ln>
+            <a:noFill/>
+          </a:ln>
+          <a:effectLst>
+            <a:outerShdw blurRad="95000" dist="40000" dir="5400000" rotWithShape="0">
+              <a:srgbClr val="6E5B4E">
+                <a:alpha val="32000"/>
+              </a:srgbClr>
+            </a:outerShdw>
+          </a:effectLst>
+        </p:spPr>
+        <p:style>
+          <a:lnRef idx="1">
+            <a:schemeClr val="accent1"/>
+          </a:lnRef>
+          <a:fillRef idx="3">
+            <a:schemeClr val="accent1"/>
+          </a:fillRef>
+          <a:effectRef idx="2">
+            <a:schemeClr val="accent1"/>
+          </a:effectRef>
+          <a:fontRef idx="minor">
+            <a:schemeClr val="lt1"/>
+          </a:fontRef>
+        </p:style>
+        <p:txBody>
+          <a:bodyPr rtlCol="0" anchor="ctr"/>
+          <a:lstStyle/>
+          <a:p>
+            <a:pPr algn="ctr"/>
+          </a:p>
+        </p:txBody>
+      </p:sp>
+      <p:sp>
+        <p:nvSpPr>
+          <p:cNvPr id="11" name="Oval 10"/>
+          <p:cNvSpPr/>
+          <p:nvPr/>
+        </p:nvSpPr>
+        <p:spPr>
+          <a:xfrm>
+            <a:off x="822959" y="3401568"/>
+            <a:ext cx="658368" cy="658368"/>
+          </a:xfrm>
+          <a:prstGeom prst="ellipse">
+            <a:avLst/>
+          </a:prstGeom>
+          <a:solidFill>
+            <a:srgbClr val="E6EDDC"/>
+          </a:solidFill>
+          <a:ln>
+            <a:noFill/>
+          </a:ln>
+        </p:spPr>
+        <p:style>
+          <a:lnRef idx="1">
+            <a:schemeClr val="accent1"/>
+          </a:lnRef>
+          <a:fillRef idx="3">
+            <a:schemeClr val="accent1"/>
+          </a:fillRef>
+          <a:effectRef idx="2">
+            <a:schemeClr val="accent1"/>
+          </a:effectRef>
+          <a:fontRef idx="minor">
+            <a:schemeClr val="lt1"/>
+          </a:fontRef>
+        </p:style>
+        <p:txBody>
+          <a:bodyPr rtlCol="0" anchor="ctr"/>
+          <a:lstStyle/>
+          <a:p>
+            <a:pPr algn="ctr"/>
+            <a:r>
+              <a:rPr sz="2400">
+                <a:solidFill>
+                  <a:srgbClr val="5B7D4F"/>
+                </a:solidFill>
+              </a:rPr>
+              <a:t>✓</a:t>
+            </a:r>
+          </a:p>
+        </p:txBody>
+      </p:sp>
+      <p:sp>
+        <p:nvSpPr>
+          <p:cNvPr id="12" name="TextBox 11"/>
+          <p:cNvSpPr txBox="1"/>
+          <p:nvPr/>
+        </p:nvSpPr>
+        <p:spPr>
+          <a:xfrm>
+            <a:off x="1737360" y="3182112"/>
+            <a:ext cx="4114800" cy="1143000"/>
+          </a:xfrm>
+          <a:prstGeom prst="rect">
+            <a:avLst/>
+          </a:prstGeom>
+          <a:noFill/>
+        </p:spPr>
+        <p:txBody>
+          <a:bodyPr wrap="square" anchor="ctr">
+            <a:spAutoFit/>
+          </a:bodyPr>
+          <a:lstStyle/>
+          <a:p>
+            <a:pPr algn="l"/>
+            <a:r>
+              <a:rPr sz="1300" b="0">
+                <a:solidFill>
+                  <a:srgbClr val="463A32"/>
+                </a:solidFill>
+              </a:rPr>
+              <a:t>Si usan el mostrador (Kayak): reservar recogida fuera de horario (24 h) por si el vuelo se retrasa.</a:t>
+            </a:r>
+          </a:p>
+        </p:txBody>
+      </p:sp>
+      <p:sp>
+        <p:nvSpPr>
+          <p:cNvPr id="13" name="Rounded Rectangle 12"/>
+          <p:cNvSpPr/>
+          <p:nvPr/>
+        </p:nvSpPr>
+        <p:spPr>
+          <a:xfrm>
+            <a:off x="6263640" y="3017520"/>
+            <a:ext cx="5440680" cy="1417320"/>
+          </a:xfrm>
+          <a:prstGeom prst="roundRect">
+            <a:avLst>
+              <a:gd name="adj" fmla="val 12000"/>
+            </a:avLst>
+          </a:prstGeom>
+          <a:solidFill>
+            <a:srgbClr val="FFFFFF"/>
+          </a:solidFill>
+          <a:ln>
+            <a:noFill/>
+          </a:ln>
+          <a:effectLst>
+            <a:outerShdw blurRad="95000" dist="40000" dir="5400000" rotWithShape="0">
+              <a:srgbClr val="6E5B4E">
+                <a:alpha val="32000"/>
+              </a:srgbClr>
+            </a:outerShdw>
+          </a:effectLst>
+        </p:spPr>
+        <p:style>
+          <a:lnRef idx="1">
+            <a:schemeClr val="accent1"/>
+          </a:lnRef>
+          <a:fillRef idx="3">
+            <a:schemeClr val="accent1"/>
+          </a:fillRef>
+          <a:effectRef idx="2">
+            <a:schemeClr val="accent1"/>
+          </a:effectRef>
+          <a:fontRef idx="minor">
+            <a:schemeClr val="lt1"/>
+          </a:fontRef>
+        </p:style>
+        <p:txBody>
+          <a:bodyPr rtlCol="0" anchor="ctr"/>
+          <a:lstStyle/>
+          <a:p>
+            <a:pPr algn="ctr"/>
+          </a:p>
+        </p:txBody>
+      </p:sp>
+      <p:sp>
+        <p:nvSpPr>
+          <p:cNvPr id="14" name="Oval 13"/>
+          <p:cNvSpPr/>
+          <p:nvPr/>
+        </p:nvSpPr>
+        <p:spPr>
+          <a:xfrm>
+            <a:off x="6537959" y="3401568"/>
+            <a:ext cx="658368" cy="658368"/>
+          </a:xfrm>
+          <a:prstGeom prst="ellipse">
+            <a:avLst/>
+          </a:prstGeom>
+          <a:solidFill>
+            <a:srgbClr val="E6EDDC"/>
+          </a:solidFill>
+          <a:ln>
+            <a:noFill/>
+          </a:ln>
+        </p:spPr>
+        <p:style>
+          <a:lnRef idx="1">
+            <a:schemeClr val="accent1"/>
+          </a:lnRef>
+          <a:fillRef idx="3">
+            <a:schemeClr val="accent1"/>
+          </a:fillRef>
+          <a:effectRef idx="2">
+            <a:schemeClr val="accent1"/>
+          </a:effectRef>
+          <a:fontRef idx="minor">
+            <a:schemeClr val="lt1"/>
+          </a:fontRef>
+        </p:style>
+        <p:txBody>
+          <a:bodyPr rtlCol="0" anchor="ctr"/>
+          <a:lstStyle/>
+          <a:p>
+            <a:pPr algn="ctr"/>
+            <a:r>
+              <a:rPr sz="2400">
+                <a:solidFill>
+                  <a:srgbClr val="5B7D4F"/>
+                </a:solidFill>
+              </a:rPr>
+              <a:t>✓</a:t>
+            </a:r>
+          </a:p>
+        </p:txBody>
+      </p:sp>
+      <p:sp>
+        <p:nvSpPr>
+          <p:cNvPr id="15" name="TextBox 14"/>
+          <p:cNvSpPr txBox="1"/>
+          <p:nvPr/>
+        </p:nvSpPr>
+        <p:spPr>
+          <a:xfrm>
+            <a:off x="7452360" y="3182112"/>
+            <a:ext cx="4114800" cy="1143000"/>
+          </a:xfrm>
+          <a:prstGeom prst="rect">
+            <a:avLst/>
+          </a:prstGeom>
+          <a:noFill/>
+        </p:spPr>
+        <p:txBody>
+          <a:bodyPr wrap="square" anchor="ctr">
+            <a:spAutoFit/>
+          </a:bodyPr>
+          <a:lstStyle/>
+          <a:p>
+            <a:pPr algn="l"/>
+            <a:r>
+              <a:rPr sz="1300" b="0">
+                <a:solidFill>
+                  <a:srgbClr val="463A32"/>
+                </a:solidFill>
+              </a:rPr>
+              <a:t>Reservar pronto: cuatro semanas y fin de semana de Halloween.</a:t>
+            </a:r>
+          </a:p>
+        </p:txBody>
+      </p:sp>
+      <p:sp>
+        <p:nvSpPr>
+          <p:cNvPr id="16" name="Rounded Rectangle 15"/>
+          <p:cNvSpPr/>
+          <p:nvPr/>
+        </p:nvSpPr>
+        <p:spPr>
+          <a:xfrm>
+            <a:off x="548640" y="4754880"/>
+            <a:ext cx="11064240" cy="1371600"/>
+          </a:xfrm>
+          <a:prstGeom prst="roundRect">
+            <a:avLst>
+              <a:gd name="adj" fmla="val 12000"/>
+            </a:avLst>
+          </a:prstGeom>
+          <a:solidFill>
+            <a:srgbClr val="F0E0C6"/>
+          </a:solidFill>
+          <a:ln>
+            <a:noFill/>
+          </a:ln>
+          <a:effectLst>
+            <a:outerShdw blurRad="95000" dist="40000" dir="5400000" rotWithShape="0">
+              <a:srgbClr val="6E5B4E">
+                <a:alpha val="32000"/>
+              </a:srgbClr>
+            </a:outerShdw>
+          </a:effectLst>
+        </p:spPr>
+        <p:style>
+          <a:lnRef idx="1">
+            <a:schemeClr val="accent1"/>
+          </a:lnRef>
+          <a:fillRef idx="3">
+            <a:schemeClr val="accent1"/>
+          </a:fillRef>
+          <a:effectRef idx="2">
+            <a:schemeClr val="accent1"/>
+          </a:effectRef>
+          <a:fontRef idx="minor">
+            <a:schemeClr val="lt1"/>
+          </a:fontRef>
+        </p:style>
+        <p:txBody>
+          <a:bodyPr rtlCol="0" anchor="ctr"/>
+          <a:lstStyle/>
+          <a:p>
+            <a:pPr algn="ctr"/>
+          </a:p>
+        </p:txBody>
+      </p:sp>
+      <p:sp>
+        <p:nvSpPr>
+          <p:cNvPr id="17" name="TextBox 16"/>
+          <p:cNvSpPr txBox="1"/>
+          <p:nvPr/>
+        </p:nvSpPr>
+        <p:spPr>
+          <a:xfrm>
+            <a:off x="868680" y="4892040"/>
+            <a:ext cx="10515600" cy="1188720"/>
           </a:xfrm>
           <a:prstGeom prst="rect">
             <a:avLst/>
@@ -3786,72 +4894,127 @@
           </a:bodyPr>
           <a:lstStyle/>
           <a:p>
-            <a:pPr algn="l"/>
-            <a:r>
-              <a:rPr sz="1800" b="0">
-                <a:solidFill>
-                  <a:srgbClr val="463A32"/>
-                </a:solidFill>
-              </a:rPr>
-              <a:t>1. Estadía: confirmar si el precio es por persona o por habitación, y capacidad para 7 (camas ≥5).</a:t>
-            </a:r>
-          </a:p>
-          <a:p>
-            <a:pPr algn="l"/>
-            <a:r>
-              <a:rPr sz="1800" b="0">
-                <a:solidFill>
-                  <a:srgbClr val="463A32"/>
-                </a:solidFill>
-              </a:rPr>
-              <a:t>2. Carro: llamar por WhatsApp a Farallones o WayCarCali para cerrar la van de 7 puestos y la entrega</a:t>
-            </a:r>
-          </a:p>
-          <a:p>
-            <a:pPr algn="l"/>
-            <a:r>
-              <a:rPr sz="1800" b="0">
-                <a:solidFill>
-                  <a:srgbClr val="463A32"/>
-                </a:solidFill>
-              </a:rPr>
-              <a:t>     en el aeropuerto.</a:t>
-            </a:r>
-          </a:p>
-          <a:p>
-            <a:pPr algn="l"/>
-            <a:r>
-              <a:rPr sz="1800" b="0">
-                <a:solidFill>
-                  <a:srgbClr val="463A32"/>
-                </a:solidFill>
-              </a:rPr>
-              <a:t>3. Confirmar el precio del cuarto día para conservar el carro hasta el vuelo de la noche.</a:t>
-            </a:r>
-          </a:p>
-          <a:p>
-            <a:pPr algn="l"/>
-            <a:r>
-              <a:rPr sz="1800" b="0">
-                <a:solidFill>
-                  <a:srgbClr val="463A32"/>
-                </a:solidFill>
-              </a:rPr>
-              <a:t>4. Reservar pronto: cinco semanas y fin de semana de Halloween.</a:t>
-            </a:r>
-          </a:p>
-        </p:txBody>
-      </p:sp>
-      <p:sp>
-        <p:nvSpPr>
-          <p:cNvPr id="4" name="TextBox 3"/>
+            <a:r>
+              <a:rPr sz="1300" b="1">
+                <a:solidFill>
+                  <a:srgbClr val="8F5A44"/>
+                </a:solidFill>
+              </a:rPr>
+              <a:t>Estadía:  </a:t>
+            </a:r>
+            <a:r>
+              <a:rPr sz="1200" u="sng">
+                <a:solidFill>
+                  <a:srgbClr val="8F5A44"/>
+                </a:solidFill>
+                <a:hlinkClick r:id="rId2"/>
+              </a:rPr>
+              <a:t>Viajero Hostel &amp; Salsa School   </a:t>
+            </a:r>
+            <a:r>
+              <a:rPr sz="1200" u="sng">
+                <a:solidFill>
+                  <a:srgbClr val="8F5A44"/>
+                </a:solidFill>
+                <a:hlinkClick r:id="rId3"/>
+              </a:rPr>
+              <a:t>La Palmera Hostel   </a:t>
+            </a:r>
+            <a:r>
+              <a:rPr sz="1200" u="sng">
+                <a:solidFill>
+                  <a:srgbClr val="8F5A44"/>
+                </a:solidFill>
+                <a:hlinkClick r:id="rId4"/>
+              </a:rPr>
+              <a:t>Oasis Cali Hostel   </a:t>
+            </a:r>
+            <a:r>
+              <a:rPr sz="1200" u="sng">
+                <a:solidFill>
+                  <a:srgbClr val="8F5A44"/>
+                </a:solidFill>
+                <a:hlinkClick r:id="rId5"/>
+              </a:rPr>
+              <a:t>La Chanca Hostel   </a:t>
+            </a:r>
+            <a:r>
+              <a:rPr sz="1200" u="sng">
+                <a:solidFill>
+                  <a:srgbClr val="8F5A44"/>
+                </a:solidFill>
+                <a:hlinkClick r:id="rId6"/>
+              </a:rPr>
+              <a:t>Hostal Patio del Río   </a:t>
+            </a:r>
+            <a:r>
+              <a:rPr sz="1200" u="sng">
+                <a:solidFill>
+                  <a:srgbClr val="8F5A44"/>
+                </a:solidFill>
+                <a:hlinkClick r:id="rId7"/>
+              </a:rPr>
+              <a:t>Casa/Apto entero   </a:t>
+            </a:r>
+          </a:p>
+          <a:p>
+            <a:r>
+              <a:rPr sz="1300" b="1">
+                <a:solidFill>
+                  <a:srgbClr val="8F5A44"/>
+                </a:solidFill>
+              </a:rPr>
+              <a:t>Agencias:  </a:t>
+            </a:r>
+            <a:r>
+              <a:rPr sz="1200" u="sng">
+                <a:solidFill>
+                  <a:srgbClr val="8F5A44"/>
+                </a:solidFill>
+                <a:hlinkClick r:id="rId8"/>
+              </a:rPr>
+              <a:t>Farallones   </a:t>
+            </a:r>
+            <a:r>
+              <a:rPr sz="1200" u="sng">
+                <a:solidFill>
+                  <a:srgbClr val="8F5A44"/>
+                </a:solidFill>
+                <a:hlinkClick r:id="rId9"/>
+              </a:rPr>
+              <a:t>WayCarCali   </a:t>
+            </a:r>
+            <a:r>
+              <a:rPr sz="1200" u="sng">
+                <a:solidFill>
+                  <a:srgbClr val="8F5A44"/>
+                </a:solidFill>
+                <a:hlinkClick r:id="rId10"/>
+              </a:rPr>
+              <a:t>Car Rent   </a:t>
+            </a:r>
+            <a:r>
+              <a:rPr sz="1200" u="sng">
+                <a:solidFill>
+                  <a:srgbClr val="8F5A44"/>
+                </a:solidFill>
+                <a:hlinkClick r:id="rId11"/>
+              </a:rPr>
+              <a:t>Kayak (aeropuerto)   </a:t>
+            </a:r>
+          </a:p>
+        </p:txBody>
+      </p:sp>
+      <p:sp>
+        <p:nvSpPr>
+          <p:cNvPr id="18" name="TextBox 17"/>
           <p:cNvSpPr txBox="1"/>
           <p:nvPr/>
         </p:nvSpPr>
         <p:spPr>
           <a:xfrm>
-            <a:off x="822960" y="4572000"/>
-            <a:ext cx="10515600" cy="1463040"/>
+            <a:off x="548640" y="6355080"/>
+            <a:ext cx="11064240" cy="365760"/>
           </a:xfrm>
           <a:prstGeom prst="rect">
             <a:avLst/>
@@ -3859,138 +5022,14 @@
           <a:noFill/>
         </p:spPr>
         <p:txBody>
-          <a:bodyPr wrap="square">
+          <a:bodyPr wrap="square" anchor="t">
             <a:spAutoFit/>
           </a:bodyPr>
           <a:lstStyle/>
           <a:p>
-            <a:r>
-              <a:rPr sz="1300">
-                <a:solidFill>
-                  <a:srgbClr val="8A7A6E"/>
-                </a:solidFill>
-              </a:rPr>
-              <a:t>Estadía:  </a:t>
-            </a:r>
-            <a:r>
-              <a:rPr sz="1300">
-                <a:solidFill>
-                  <a:srgbClr val="8F5A44"/>
-                </a:solidFill>
-                <a:hlinkClick r:id="rId2"/>
-              </a:rPr>
-              <a:t>Viajero Hostel &amp; Salsa School   </a:t>
-            </a:r>
-            <a:r>
-              <a:rPr sz="1300">
-                <a:solidFill>
-                  <a:srgbClr val="8F5A44"/>
-                </a:solidFill>
-                <a:hlinkClick r:id="rId3"/>
-              </a:rPr>
-              <a:t>La Palmera Hostel   </a:t>
-            </a:r>
-            <a:r>
-              <a:rPr sz="1300">
-                <a:solidFill>
-                  <a:srgbClr val="8F5A44"/>
-                </a:solidFill>
-                <a:hlinkClick r:id="rId4"/>
-              </a:rPr>
-              <a:t>Oasis Cali Hostel   </a:t>
-            </a:r>
-            <a:r>
-              <a:rPr sz="1300">
-                <a:solidFill>
-                  <a:srgbClr val="8F5A44"/>
-                </a:solidFill>
-                <a:hlinkClick r:id="rId5"/>
-              </a:rPr>
-              <a:t>La Chanca Hostel   </a:t>
-            </a:r>
-            <a:r>
-              <a:rPr sz="1300">
-                <a:solidFill>
-                  <a:srgbClr val="8F5A44"/>
-                </a:solidFill>
-                <a:hlinkClick r:id="rId6"/>
-              </a:rPr>
-              <a:t>Hostal Patio del Río   </a:t>
-            </a:r>
-            <a:r>
-              <a:rPr sz="1300">
-                <a:solidFill>
-                  <a:srgbClr val="8F5A44"/>
-                </a:solidFill>
-                <a:hlinkClick r:id="rId7"/>
-              </a:rPr>
-              <a:t>Casa/Apto entero   </a:t>
-            </a:r>
-          </a:p>
-          <a:p>
-            <a:r>
-              <a:rPr sz="1300">
-                <a:solidFill>
-                  <a:srgbClr val="8A7A6E"/>
-                </a:solidFill>
-              </a:rPr>
-              <a:t>Carro:  </a:t>
-            </a:r>
-            <a:r>
-              <a:rPr sz="1300">
-                <a:solidFill>
-                  <a:srgbClr val="8F5A44"/>
-                </a:solidFill>
-                <a:hlinkClick r:id="rId8"/>
-              </a:rPr>
-              <a:t>Farallones   </a:t>
-            </a:r>
-            <a:r>
-              <a:rPr sz="1300">
-                <a:solidFill>
-                  <a:srgbClr val="8F5A44"/>
-                </a:solidFill>
-                <a:hlinkClick r:id="rId9"/>
-              </a:rPr>
-              <a:t>WayCarCali   </a:t>
-            </a:r>
-            <a:r>
-              <a:rPr sz="1300">
-                <a:solidFill>
-                  <a:srgbClr val="8F5A44"/>
-                </a:solidFill>
-                <a:hlinkClick r:id="rId10"/>
-              </a:rPr>
-              <a:t>Kayak   </a:t>
-            </a:r>
-          </a:p>
-        </p:txBody>
-      </p:sp>
-      <p:sp>
-        <p:nvSpPr>
-          <p:cNvPr id="5" name="TextBox 4"/>
-          <p:cNvSpPr txBox="1"/>
-          <p:nvPr/>
-        </p:nvSpPr>
-        <p:spPr>
-          <a:xfrm>
-            <a:off x="822960" y="6035040"/>
-            <a:ext cx="10515600" cy="457200"/>
-          </a:xfrm>
-          <a:prstGeom prst="rect">
-            <a:avLst/>
-          </a:prstGeom>
-          <a:noFill/>
-        </p:spPr>
-        <p:txBody>
-          <a:bodyPr wrap="square">
-            <a:spAutoFit/>
-          </a:bodyPr>
-          <a:lstStyle/>
-          <a:p>
             <a:pPr algn="l"/>
             <a:r>
-              <a:rPr sz="1200" b="0">
+              <a:rPr sz="1000" b="0">
                 <a:solidFill>
                   <a:srgbClr val="8A7A6E"/>
                 </a:solidFill>
@@ -4014,7 +5053,7 @@
     <p:bg>
       <p:bgPr>
         <a:solidFill>
-          <a:srgbClr val="FFFFFF"/>
+          <a:srgbClr val="FCF5EC"/>
         </a:solidFill>
         <a:effectLst/>
       </p:bgPr>
@@ -4028,17 +5067,19 @@
       <p:grpSpPr/>
       <p:sp>
         <p:nvSpPr>
-          <p:cNvPr id="2" name="Rectangle 1"/>
+          <p:cNvPr id="2" name="Rounded Rectangle 1"/>
           <p:cNvSpPr/>
           <p:nvPr/>
         </p:nvSpPr>
         <p:spPr>
           <a:xfrm>
-            <a:off x="0" y="0"/>
-            <a:ext cx="12191695" cy="960120"/>
-          </a:xfrm>
-          <a:prstGeom prst="rect">
-            <a:avLst/>
+            <a:off x="365760" y="274320"/>
+            <a:ext cx="11457432" cy="749808"/>
+          </a:xfrm>
+          <a:prstGeom prst="roundRect">
+            <a:avLst>
+              <a:gd name="adj" fmla="val 50000"/>
+            </a:avLst>
           </a:prstGeom>
           <a:solidFill>
             <a:srgbClr val="B5765C"/>
@@ -4046,6 +5087,13 @@
           <a:ln>
             <a:noFill/>
           </a:ln>
+          <a:effectLst>
+            <a:outerShdw blurRad="95000" dist="40000" dir="5400000" rotWithShape="0">
+              <a:srgbClr val="6E5B4E">
+                <a:alpha val="32000"/>
+              </a:srgbClr>
+            </a:outerShdw>
+          </a:effectLst>
         </p:spPr>
         <p:style>
           <a:lnRef idx="1">
@@ -4062,18 +5110,10 @@
           </a:fontRef>
         </p:style>
         <p:txBody>
-          <a:bodyPr rtlCol="0" anchor="ctr" wrap="square"/>
+          <a:bodyPr rtlCol="0" anchor="ctr"/>
           <a:lstStyle/>
           <a:p>
             <a:pPr algn="ctr"/>
-            <a:r>
-              <a:rPr sz="2600" b="1">
-                <a:solidFill>
-                  <a:srgbClr val="FFFFFF"/>
-                </a:solidFill>
-              </a:rPr>
-              <a:t>   Punto de partida</a:t>
-            </a:r>
           </a:p>
         </p:txBody>
       </p:sp>
@@ -4085,8 +5125,8 @@
         </p:nvSpPr>
         <p:spPr>
           <a:xfrm>
-            <a:off x="822960" y="1371600"/>
-            <a:ext cx="10515600" cy="4754880"/>
+            <a:off x="777240" y="274320"/>
+            <a:ext cx="10789920" cy="749808"/>
           </a:xfrm>
           <a:prstGeom prst="rect">
             <a:avLst/>
@@ -4094,85 +5134,611 @@
           <a:noFill/>
         </p:spPr>
         <p:txBody>
-          <a:bodyPr wrap="square">
+          <a:bodyPr wrap="square" anchor="ctr">
             <a:spAutoFit/>
           </a:bodyPr>
           <a:lstStyle/>
           <a:p>
             <a:pPr algn="l"/>
             <a:r>
-              <a:rPr sz="2000" b="0">
+              <a:rPr sz="2400" b="1">
+                <a:solidFill>
+                  <a:srgbClr val="FFFFFF"/>
+                </a:solidFill>
+              </a:rPr>
+              <a:t>🧭   Punto de partida</a:t>
+            </a:r>
+          </a:p>
+        </p:txBody>
+      </p:sp>
+      <p:sp>
+        <p:nvSpPr>
+          <p:cNvPr id="4" name="Rounded Rectangle 3"/>
+          <p:cNvSpPr/>
+          <p:nvPr/>
+        </p:nvSpPr>
+        <p:spPr>
+          <a:xfrm>
+            <a:off x="548640" y="1371600"/>
+            <a:ext cx="5394960" cy="2011680"/>
+          </a:xfrm>
+          <a:prstGeom prst="roundRect">
+            <a:avLst>
+              <a:gd name="adj" fmla="val 12000"/>
+            </a:avLst>
+          </a:prstGeom>
+          <a:solidFill>
+            <a:srgbClr val="FFFFFF"/>
+          </a:solidFill>
+          <a:ln>
+            <a:noFill/>
+          </a:ln>
+          <a:effectLst>
+            <a:outerShdw blurRad="95000" dist="40000" dir="5400000" rotWithShape="0">
+              <a:srgbClr val="6E5B4E">
+                <a:alpha val="32000"/>
+              </a:srgbClr>
+            </a:outerShdw>
+          </a:effectLst>
+        </p:spPr>
+        <p:style>
+          <a:lnRef idx="1">
+            <a:schemeClr val="accent1"/>
+          </a:lnRef>
+          <a:fillRef idx="3">
+            <a:schemeClr val="accent1"/>
+          </a:fillRef>
+          <a:effectRef idx="2">
+            <a:schemeClr val="accent1"/>
+          </a:effectRef>
+          <a:fontRef idx="minor">
+            <a:schemeClr val="lt1"/>
+          </a:fontRef>
+        </p:style>
+        <p:txBody>
+          <a:bodyPr rtlCol="0" anchor="ctr"/>
+          <a:lstStyle/>
+          <a:p>
+            <a:pPr algn="ctr"/>
+          </a:p>
+        </p:txBody>
+      </p:sp>
+      <p:sp>
+        <p:nvSpPr>
+          <p:cNvPr id="5" name="Oval 4"/>
+          <p:cNvSpPr/>
+          <p:nvPr/>
+        </p:nvSpPr>
+        <p:spPr>
+          <a:xfrm>
+            <a:off x="914400" y="1874519"/>
+            <a:ext cx="1005840" cy="1005840"/>
+          </a:xfrm>
+          <a:prstGeom prst="ellipse">
+            <a:avLst/>
+          </a:prstGeom>
+          <a:solidFill>
+            <a:srgbClr val="F0E0C6"/>
+          </a:solidFill>
+          <a:ln>
+            <a:noFill/>
+          </a:ln>
+        </p:spPr>
+        <p:style>
+          <a:lnRef idx="1">
+            <a:schemeClr val="accent1"/>
+          </a:lnRef>
+          <a:fillRef idx="3">
+            <a:schemeClr val="accent1"/>
+          </a:fillRef>
+          <a:effectRef idx="2">
+            <a:schemeClr val="accent1"/>
+          </a:effectRef>
+          <a:fontRef idx="minor">
+            <a:schemeClr val="lt1"/>
+          </a:fontRef>
+        </p:style>
+        <p:txBody>
+          <a:bodyPr rtlCol="0" anchor="ctr"/>
+          <a:lstStyle/>
+          <a:p>
+            <a:pPr algn="ctr"/>
+            <a:r>
+              <a:rPr sz="3200">
                 <a:solidFill>
                   <a:srgbClr val="463A32"/>
                 </a:solidFill>
               </a:rPr>
-              <a:t>Siete personas, tres noches, una ciudad que premia al que planea. Fin de semana de Halloween.</a:t>
-            </a:r>
-          </a:p>
+              <a:t>👥</a:t>
+            </a:r>
+          </a:p>
+        </p:txBody>
+      </p:sp>
+      <p:sp>
+        <p:nvSpPr>
+          <p:cNvPr id="6" name="TextBox 5"/>
+          <p:cNvSpPr txBox="1"/>
+          <p:nvPr/>
+        </p:nvSpPr>
+        <p:spPr>
+          <a:xfrm>
+            <a:off x="2148840" y="1828800"/>
+            <a:ext cx="3566160" cy="1188720"/>
+          </a:xfrm>
+          <a:prstGeom prst="rect">
+            <a:avLst/>
+          </a:prstGeom>
+          <a:noFill/>
+        </p:spPr>
+        <p:txBody>
+          <a:bodyPr wrap="square" anchor="ctr">
+            <a:spAutoFit/>
+          </a:bodyPr>
+          <a:lstStyle/>
           <a:p>
             <a:pPr algn="l"/>
             <a:r>
-              <a:rPr sz="2000" b="0">
+              <a:rPr sz="1400" b="1">
+                <a:solidFill>
+                  <a:srgbClr val="8A7A6E"/>
+                </a:solidFill>
+              </a:rPr>
+              <a:t>El grupo</a:t>
+            </a:r>
+          </a:p>
+          <a:p>
+            <a:pPr algn="l"/>
+            <a:r>
+              <a:rPr sz="1900" b="1">
                 <a:solidFill>
                   <a:srgbClr val="463A32"/>
                 </a:solidFill>
               </a:rPr>
-              <a:t/>
-            </a:r>
-          </a:p>
+              <a:t>7 personas · 3 noches</a:t>
+            </a:r>
+          </a:p>
+        </p:txBody>
+      </p:sp>
+      <p:sp>
+        <p:nvSpPr>
+          <p:cNvPr id="7" name="Rounded Rectangle 6"/>
+          <p:cNvSpPr/>
+          <p:nvPr/>
+        </p:nvSpPr>
+        <p:spPr>
+          <a:xfrm>
+            <a:off x="6245352" y="1371600"/>
+            <a:ext cx="5394960" cy="2011680"/>
+          </a:xfrm>
+          <a:prstGeom prst="roundRect">
+            <a:avLst>
+              <a:gd name="adj" fmla="val 12000"/>
+            </a:avLst>
+          </a:prstGeom>
+          <a:solidFill>
+            <a:srgbClr val="FFFFFF"/>
+          </a:solidFill>
+          <a:ln>
+            <a:noFill/>
+          </a:ln>
+          <a:effectLst>
+            <a:outerShdw blurRad="95000" dist="40000" dir="5400000" rotWithShape="0">
+              <a:srgbClr val="6E5B4E">
+                <a:alpha val="32000"/>
+              </a:srgbClr>
+            </a:outerShdw>
+          </a:effectLst>
+        </p:spPr>
+        <p:style>
+          <a:lnRef idx="1">
+            <a:schemeClr val="accent1"/>
+          </a:lnRef>
+          <a:fillRef idx="3">
+            <a:schemeClr val="accent1"/>
+          </a:fillRef>
+          <a:effectRef idx="2">
+            <a:schemeClr val="accent1"/>
+          </a:effectRef>
+          <a:fontRef idx="minor">
+            <a:schemeClr val="lt1"/>
+          </a:fontRef>
+        </p:style>
+        <p:txBody>
+          <a:bodyPr rtlCol="0" anchor="ctr"/>
+          <a:lstStyle/>
+          <a:p>
+            <a:pPr algn="ctr"/>
+          </a:p>
+        </p:txBody>
+      </p:sp>
+      <p:sp>
+        <p:nvSpPr>
+          <p:cNvPr id="8" name="Oval 7"/>
+          <p:cNvSpPr/>
+          <p:nvPr/>
+        </p:nvSpPr>
+        <p:spPr>
+          <a:xfrm>
+            <a:off x="6611112" y="1874519"/>
+            <a:ext cx="1005840" cy="1005840"/>
+          </a:xfrm>
+          <a:prstGeom prst="ellipse">
+            <a:avLst/>
+          </a:prstGeom>
+          <a:solidFill>
+            <a:srgbClr val="F0E0C6"/>
+          </a:solidFill>
+          <a:ln>
+            <a:noFill/>
+          </a:ln>
+        </p:spPr>
+        <p:style>
+          <a:lnRef idx="1">
+            <a:schemeClr val="accent1"/>
+          </a:lnRef>
+          <a:fillRef idx="3">
+            <a:schemeClr val="accent1"/>
+          </a:fillRef>
+          <a:effectRef idx="2">
+            <a:schemeClr val="accent1"/>
+          </a:effectRef>
+          <a:fontRef idx="minor">
+            <a:schemeClr val="lt1"/>
+          </a:fontRef>
+        </p:style>
+        <p:txBody>
+          <a:bodyPr rtlCol="0" anchor="ctr"/>
+          <a:lstStyle/>
+          <a:p>
+            <a:pPr algn="ctr"/>
+            <a:r>
+              <a:rPr sz="3200">
+                <a:solidFill>
+                  <a:srgbClr val="463A32"/>
+                </a:solidFill>
+              </a:rPr>
+              <a:t>🗓️</a:t>
+            </a:r>
+          </a:p>
+        </p:txBody>
+      </p:sp>
+      <p:sp>
+        <p:nvSpPr>
+          <p:cNvPr id="9" name="TextBox 8"/>
+          <p:cNvSpPr txBox="1"/>
+          <p:nvPr/>
+        </p:nvSpPr>
+        <p:spPr>
+          <a:xfrm>
+            <a:off x="7845552" y="1828800"/>
+            <a:ext cx="3566160" cy="1188720"/>
+          </a:xfrm>
+          <a:prstGeom prst="rect">
+            <a:avLst/>
+          </a:prstGeom>
+          <a:noFill/>
+        </p:spPr>
+        <p:txBody>
+          <a:bodyPr wrap="square" anchor="ctr">
+            <a:spAutoFit/>
+          </a:bodyPr>
+          <a:lstStyle/>
           <a:p>
             <a:pPr algn="l"/>
             <a:r>
-              <a:rPr sz="2000" b="0">
+              <a:rPr sz="1400" b="1">
+                <a:solidFill>
+                  <a:srgbClr val="8A7A6E"/>
+                </a:solidFill>
+              </a:rPr>
+              <a:t>Las fechas</a:t>
+            </a:r>
+          </a:p>
+          <a:p>
+            <a:pPr algn="l"/>
+            <a:r>
+              <a:rPr sz="1900" b="1">
                 <a:solidFill>
                   <a:srgbClr val="463A32"/>
                 </a:solidFill>
               </a:rPr>
-              <a:t>Salida 7:00 am del 30 desde Cartagena; regreso en el vuelo de las 9:00 pm del 2. El reto no es</a:t>
-            </a:r>
-          </a:p>
+              <a:t>30 oct – 2 nov · llega 8 pm</a:t>
+            </a:r>
+          </a:p>
+        </p:txBody>
+      </p:sp>
+      <p:sp>
+        <p:nvSpPr>
+          <p:cNvPr id="10" name="Rounded Rectangle 9"/>
+          <p:cNvSpPr/>
+          <p:nvPr/>
+        </p:nvSpPr>
+        <p:spPr>
+          <a:xfrm>
+            <a:off x="548640" y="3657600"/>
+            <a:ext cx="5394960" cy="2011680"/>
+          </a:xfrm>
+          <a:prstGeom prst="roundRect">
+            <a:avLst>
+              <a:gd name="adj" fmla="val 12000"/>
+            </a:avLst>
+          </a:prstGeom>
+          <a:solidFill>
+            <a:srgbClr val="FFFFFF"/>
+          </a:solidFill>
+          <a:ln>
+            <a:noFill/>
+          </a:ln>
+          <a:effectLst>
+            <a:outerShdw blurRad="95000" dist="40000" dir="5400000" rotWithShape="0">
+              <a:srgbClr val="6E5B4E">
+                <a:alpha val="32000"/>
+              </a:srgbClr>
+            </a:outerShdw>
+          </a:effectLst>
+        </p:spPr>
+        <p:style>
+          <a:lnRef idx="1">
+            <a:schemeClr val="accent1"/>
+          </a:lnRef>
+          <a:fillRef idx="3">
+            <a:schemeClr val="accent1"/>
+          </a:fillRef>
+          <a:effectRef idx="2">
+            <a:schemeClr val="accent1"/>
+          </a:effectRef>
+          <a:fontRef idx="minor">
+            <a:schemeClr val="lt1"/>
+          </a:fontRef>
+        </p:style>
+        <p:txBody>
+          <a:bodyPr rtlCol="0" anchor="ctr"/>
+          <a:lstStyle/>
+          <a:p>
+            <a:pPr algn="ctr"/>
+          </a:p>
+        </p:txBody>
+      </p:sp>
+      <p:sp>
+        <p:nvSpPr>
+          <p:cNvPr id="11" name="Oval 10"/>
+          <p:cNvSpPr/>
+          <p:nvPr/>
+        </p:nvSpPr>
+        <p:spPr>
+          <a:xfrm>
+            <a:off x="914400" y="4160520"/>
+            <a:ext cx="1005840" cy="1005840"/>
+          </a:xfrm>
+          <a:prstGeom prst="ellipse">
+            <a:avLst/>
+          </a:prstGeom>
+          <a:solidFill>
+            <a:srgbClr val="F0E0C6"/>
+          </a:solidFill>
+          <a:ln>
+            <a:noFill/>
+          </a:ln>
+        </p:spPr>
+        <p:style>
+          <a:lnRef idx="1">
+            <a:schemeClr val="accent1"/>
+          </a:lnRef>
+          <a:fillRef idx="3">
+            <a:schemeClr val="accent1"/>
+          </a:fillRef>
+          <a:effectRef idx="2">
+            <a:schemeClr val="accent1"/>
+          </a:effectRef>
+          <a:fontRef idx="minor">
+            <a:schemeClr val="lt1"/>
+          </a:fontRef>
+        </p:style>
+        <p:txBody>
+          <a:bodyPr rtlCol="0" anchor="ctr"/>
+          <a:lstStyle/>
+          <a:p>
+            <a:pPr algn="ctr"/>
+            <a:r>
+              <a:rPr sz="3200">
+                <a:solidFill>
+                  <a:srgbClr val="463A32"/>
+                </a:solidFill>
+              </a:rPr>
+              <a:t>💰</a:t>
+            </a:r>
+          </a:p>
+        </p:txBody>
+      </p:sp>
+      <p:sp>
+        <p:nvSpPr>
+          <p:cNvPr id="12" name="TextBox 11"/>
+          <p:cNvSpPr txBox="1"/>
+          <p:nvPr/>
+        </p:nvSpPr>
+        <p:spPr>
+          <a:xfrm>
+            <a:off x="2148840" y="4114800"/>
+            <a:ext cx="3566160" cy="1188720"/>
+          </a:xfrm>
+          <a:prstGeom prst="rect">
+            <a:avLst/>
+          </a:prstGeom>
+          <a:noFill/>
+        </p:spPr>
+        <p:txBody>
+          <a:bodyPr wrap="square" anchor="ctr">
+            <a:spAutoFit/>
+          </a:bodyPr>
+          <a:lstStyle/>
           <a:p>
             <a:pPr algn="l"/>
             <a:r>
-              <a:rPr sz="2000" b="0">
+              <a:rPr sz="1400" b="1">
+                <a:solidFill>
+                  <a:srgbClr val="8A7A6E"/>
+                </a:solidFill>
+              </a:rPr>
+              <a:t>El presupuesto</a:t>
+            </a:r>
+          </a:p>
+          <a:p>
+            <a:pPr algn="l"/>
+            <a:r>
+              <a:rPr sz="1900" b="1">
                 <a:solidFill>
                   <a:srgbClr val="463A32"/>
                 </a:solidFill>
               </a:rPr>
-              <a:t>llegar, sino movernos por Cali y dónde dormir.</a:t>
-            </a:r>
-          </a:p>
+              <a:t>$300–400k p/p · flex $480k</a:t>
+            </a:r>
+          </a:p>
+        </p:txBody>
+      </p:sp>
+      <p:sp>
+        <p:nvSpPr>
+          <p:cNvPr id="13" name="Rounded Rectangle 12"/>
+          <p:cNvSpPr/>
+          <p:nvPr/>
+        </p:nvSpPr>
+        <p:spPr>
+          <a:xfrm>
+            <a:off x="6245352" y="3657600"/>
+            <a:ext cx="5394960" cy="2011680"/>
+          </a:xfrm>
+          <a:prstGeom prst="roundRect">
+            <a:avLst>
+              <a:gd name="adj" fmla="val 12000"/>
+            </a:avLst>
+          </a:prstGeom>
+          <a:solidFill>
+            <a:srgbClr val="FFFFFF"/>
+          </a:solidFill>
+          <a:ln>
+            <a:noFill/>
+          </a:ln>
+          <a:effectLst>
+            <a:outerShdw blurRad="95000" dist="40000" dir="5400000" rotWithShape="0">
+              <a:srgbClr val="6E5B4E">
+                <a:alpha val="32000"/>
+              </a:srgbClr>
+            </a:outerShdw>
+          </a:effectLst>
+        </p:spPr>
+        <p:style>
+          <a:lnRef idx="1">
+            <a:schemeClr val="accent1"/>
+          </a:lnRef>
+          <a:fillRef idx="3">
+            <a:schemeClr val="accent1"/>
+          </a:fillRef>
+          <a:effectRef idx="2">
+            <a:schemeClr val="accent1"/>
+          </a:effectRef>
+          <a:fontRef idx="minor">
+            <a:schemeClr val="lt1"/>
+          </a:fontRef>
+        </p:style>
+        <p:txBody>
+          <a:bodyPr rtlCol="0" anchor="ctr"/>
+          <a:lstStyle/>
+          <a:p>
+            <a:pPr algn="ctr"/>
+          </a:p>
+        </p:txBody>
+      </p:sp>
+      <p:sp>
+        <p:nvSpPr>
+          <p:cNvPr id="14" name="Oval 13"/>
+          <p:cNvSpPr/>
+          <p:nvPr/>
+        </p:nvSpPr>
+        <p:spPr>
+          <a:xfrm>
+            <a:off x="6611112" y="4160520"/>
+            <a:ext cx="1005840" cy="1005840"/>
+          </a:xfrm>
+          <a:prstGeom prst="ellipse">
+            <a:avLst/>
+          </a:prstGeom>
+          <a:solidFill>
+            <a:srgbClr val="F0E0C6"/>
+          </a:solidFill>
+          <a:ln>
+            <a:noFill/>
+          </a:ln>
+        </p:spPr>
+        <p:style>
+          <a:lnRef idx="1">
+            <a:schemeClr val="accent1"/>
+          </a:lnRef>
+          <a:fillRef idx="3">
+            <a:schemeClr val="accent1"/>
+          </a:fillRef>
+          <a:effectRef idx="2">
+            <a:schemeClr val="accent1"/>
+          </a:effectRef>
+          <a:fontRef idx="minor">
+            <a:schemeClr val="lt1"/>
+          </a:fontRef>
+        </p:style>
+        <p:txBody>
+          <a:bodyPr rtlCol="0" anchor="ctr"/>
+          <a:lstStyle/>
+          <a:p>
+            <a:pPr algn="ctr"/>
+            <a:r>
+              <a:rPr sz="3200">
+                <a:solidFill>
+                  <a:srgbClr val="463A32"/>
+                </a:solidFill>
+              </a:rPr>
+              <a:t>🔒</a:t>
+            </a:r>
+          </a:p>
+        </p:txBody>
+      </p:sp>
+      <p:sp>
+        <p:nvSpPr>
+          <p:cNvPr id="15" name="TextBox 14"/>
+          <p:cNvSpPr txBox="1"/>
+          <p:nvPr/>
+        </p:nvSpPr>
+        <p:spPr>
+          <a:xfrm>
+            <a:off x="7845552" y="4114800"/>
+            <a:ext cx="3566160" cy="1188720"/>
+          </a:xfrm>
+          <a:prstGeom prst="rect">
+            <a:avLst/>
+          </a:prstGeom>
+          <a:noFill/>
+        </p:spPr>
+        <p:txBody>
+          <a:bodyPr wrap="square" anchor="ctr">
+            <a:spAutoFit/>
+          </a:bodyPr>
+          <a:lstStyle/>
           <a:p>
             <a:pPr algn="l"/>
             <a:r>
-              <a:rPr sz="2000" b="0">
+              <a:rPr sz="1400" b="1">
+                <a:solidFill>
+                  <a:srgbClr val="8A7A6E"/>
+                </a:solidFill>
+              </a:rPr>
+              <a:t>La prioridad</a:t>
+            </a:r>
+          </a:p>
+          <a:p>
+            <a:pPr algn="l"/>
+            <a:r>
+              <a:rPr sz="1900" b="1">
                 <a:solidFill>
                   <a:srgbClr val="463A32"/>
                 </a:solidFill>
               </a:rPr>
-              <a:t/>
-            </a:r>
-          </a:p>
-          <a:p>
-            <a:pPr algn="l"/>
-            <a:r>
-              <a:rPr sz="2000" b="0">
-                <a:solidFill>
-                  <a:srgbClr val="463A32"/>
-                </a:solidFill>
-              </a:rPr>
-              <a:t>Margen: $300.000–$400.000 por persona (flex $480.000). Condición innegociable: la seguridad primero.</a:t>
-            </a:r>
-          </a:p>
-          <a:p>
-            <a:pPr algn="l"/>
-            <a:r>
-              <a:rPr sz="2000" b="0">
-                <a:solidFill>
-                  <a:srgbClr val="463A32"/>
-                </a:solidFill>
-              </a:rPr>
-              <a:t>Después: piscina, aire, cocina y rumba a distancia de caminar.</a:t>
+              <a:t>Seguridad, siempre primero</a:t>
             </a:r>
           </a:p>
         </p:txBody>
@@ -4191,7 +5757,7 @@
     <p:bg>
       <p:bgPr>
         <a:solidFill>
-          <a:srgbClr val="FFFFFF"/>
+          <a:srgbClr val="FCF5EC"/>
         </a:solidFill>
         <a:effectLst/>
       </p:bgPr>
@@ -4205,17 +5771,19 @@
       <p:grpSpPr/>
       <p:sp>
         <p:nvSpPr>
-          <p:cNvPr id="2" name="Rectangle 1"/>
+          <p:cNvPr id="2" name="Rounded Rectangle 1"/>
           <p:cNvSpPr/>
           <p:nvPr/>
         </p:nvSpPr>
         <p:spPr>
           <a:xfrm>
-            <a:off x="0" y="0"/>
-            <a:ext cx="12191695" cy="960120"/>
-          </a:xfrm>
-          <a:prstGeom prst="rect">
-            <a:avLst/>
+            <a:off x="365760" y="274320"/>
+            <a:ext cx="11457432" cy="749808"/>
+          </a:xfrm>
+          <a:prstGeom prst="roundRect">
+            <a:avLst>
+              <a:gd name="adj" fmla="val 50000"/>
+            </a:avLst>
           </a:prstGeom>
           <a:solidFill>
             <a:srgbClr val="B5765C"/>
@@ -4223,6 +5791,13 @@
           <a:ln>
             <a:noFill/>
           </a:ln>
+          <a:effectLst>
+            <a:outerShdw blurRad="95000" dist="40000" dir="5400000" rotWithShape="0">
+              <a:srgbClr val="6E5B4E">
+                <a:alpha val="32000"/>
+              </a:srgbClr>
+            </a:outerShdw>
+          </a:effectLst>
         </p:spPr>
         <p:style>
           <a:lnRef idx="1">
@@ -4239,18 +5814,10 @@
           </a:fontRef>
         </p:style>
         <p:txBody>
-          <a:bodyPr rtlCol="0" anchor="ctr" wrap="square"/>
+          <a:bodyPr rtlCol="0" anchor="ctr"/>
           <a:lstStyle/>
           <a:p>
             <a:pPr algn="ctr"/>
-            <a:r>
-              <a:rPr sz="2600" b="1">
-                <a:solidFill>
-                  <a:srgbClr val="FFFFFF"/>
-                </a:solidFill>
-              </a:rPr>
-              <a:t>   Cómo se hizo esto</a:t>
-            </a:r>
           </a:p>
         </p:txBody>
       </p:sp>
@@ -4262,8 +5829,8 @@
         </p:nvSpPr>
         <p:spPr>
           <a:xfrm>
-            <a:off x="822960" y="1371600"/>
-            <a:ext cx="10515600" cy="4572000"/>
+            <a:off x="777240" y="274320"/>
+            <a:ext cx="10789920" cy="749808"/>
           </a:xfrm>
           <a:prstGeom prst="rect">
             <a:avLst/>
@@ -4271,85 +5838,655 @@
           <a:noFill/>
         </p:spPr>
         <p:txBody>
-          <a:bodyPr wrap="square">
+          <a:bodyPr wrap="square" anchor="ctr">
             <a:spAutoFit/>
           </a:bodyPr>
           <a:lstStyle/>
           <a:p>
             <a:pPr algn="l"/>
             <a:r>
-              <a:rPr sz="1900" b="0">
+              <a:rPr sz="2400" b="1">
+                <a:solidFill>
+                  <a:srgbClr val="FFFFFF"/>
+                </a:solidFill>
+              </a:rPr>
+              <a:t>🧪   Cómo se hizo esto</a:t>
+            </a:r>
+          </a:p>
+        </p:txBody>
+      </p:sp>
+      <p:sp>
+        <p:nvSpPr>
+          <p:cNvPr id="4" name="Rounded Rectangle 3"/>
+          <p:cNvSpPr/>
+          <p:nvPr/>
+        </p:nvSpPr>
+        <p:spPr>
+          <a:xfrm>
+            <a:off x="457200" y="1508760"/>
+            <a:ext cx="2697480" cy="4206240"/>
+          </a:xfrm>
+          <a:prstGeom prst="roundRect">
+            <a:avLst>
+              <a:gd name="adj" fmla="val 12000"/>
+            </a:avLst>
+          </a:prstGeom>
+          <a:solidFill>
+            <a:srgbClr val="FFFFFF"/>
+          </a:solidFill>
+          <a:ln>
+            <a:noFill/>
+          </a:ln>
+          <a:effectLst>
+            <a:outerShdw blurRad="95000" dist="40000" dir="5400000" rotWithShape="0">
+              <a:srgbClr val="6E5B4E">
+                <a:alpha val="32000"/>
+              </a:srgbClr>
+            </a:outerShdw>
+          </a:effectLst>
+        </p:spPr>
+        <p:style>
+          <a:lnRef idx="1">
+            <a:schemeClr val="accent1"/>
+          </a:lnRef>
+          <a:fillRef idx="3">
+            <a:schemeClr val="accent1"/>
+          </a:fillRef>
+          <a:effectRef idx="2">
+            <a:schemeClr val="accent1"/>
+          </a:effectRef>
+          <a:fontRef idx="minor">
+            <a:schemeClr val="lt1"/>
+          </a:fontRef>
+        </p:style>
+        <p:txBody>
+          <a:bodyPr rtlCol="0" anchor="ctr"/>
+          <a:lstStyle/>
+          <a:p>
+            <a:pPr algn="ctr"/>
+          </a:p>
+        </p:txBody>
+      </p:sp>
+      <p:sp>
+        <p:nvSpPr>
+          <p:cNvPr id="5" name="Oval 4"/>
+          <p:cNvSpPr/>
+          <p:nvPr/>
+        </p:nvSpPr>
+        <p:spPr>
+          <a:xfrm>
+            <a:off x="1417320" y="1828800"/>
+            <a:ext cx="777240" cy="777240"/>
+          </a:xfrm>
+          <a:prstGeom prst="ellipse">
+            <a:avLst/>
+          </a:prstGeom>
+          <a:solidFill>
+            <a:srgbClr val="D9A75E"/>
+          </a:solidFill>
+          <a:ln>
+            <a:noFill/>
+          </a:ln>
+        </p:spPr>
+        <p:style>
+          <a:lnRef idx="1">
+            <a:schemeClr val="accent1"/>
+          </a:lnRef>
+          <a:fillRef idx="3">
+            <a:schemeClr val="accent1"/>
+          </a:fillRef>
+          <a:effectRef idx="2">
+            <a:schemeClr val="accent1"/>
+          </a:effectRef>
+          <a:fontRef idx="minor">
+            <a:schemeClr val="lt1"/>
+          </a:fontRef>
+        </p:style>
+        <p:txBody>
+          <a:bodyPr rtlCol="0" anchor="ctr"/>
+          <a:lstStyle/>
+          <a:p>
+            <a:pPr algn="ctr"/>
+            <a:r>
+              <a:rPr sz="2600">
+                <a:solidFill>
+                  <a:srgbClr val="FFFFFF"/>
+                </a:solidFill>
+              </a:rPr>
+              <a:t>1</a:t>
+            </a:r>
+          </a:p>
+        </p:txBody>
+      </p:sp>
+      <p:sp>
+        <p:nvSpPr>
+          <p:cNvPr id="6" name="TextBox 5"/>
+          <p:cNvSpPr txBox="1"/>
+          <p:nvPr/>
+        </p:nvSpPr>
+        <p:spPr>
+          <a:xfrm>
+            <a:off x="640080" y="2743200"/>
+            <a:ext cx="2331720" cy="2834640"/>
+          </a:xfrm>
+          <a:prstGeom prst="rect">
+            <a:avLst/>
+          </a:prstGeom>
+          <a:noFill/>
+        </p:spPr>
+        <p:txBody>
+          <a:bodyPr wrap="square" anchor="t">
+            <a:spAutoFit/>
+          </a:bodyPr>
+          <a:lstStyle/>
+          <a:p>
+            <a:pPr algn="l"/>
+            <a:r>
+              <a:rPr sz="1600" b="1">
+                <a:solidFill>
+                  <a:srgbClr val="8F5A44"/>
+                </a:solidFill>
+              </a:rPr>
+              <a:t>La vara primero</a:t>
+            </a:r>
+          </a:p>
+          <a:p>
+            <a:pPr algn="l"/>
+            <a:r>
+              <a:rPr sz="600" b="0">
                 <a:solidFill>
                   <a:srgbClr val="463A32"/>
                 </a:solidFill>
               </a:rPr>
-              <a:t>Un pequeño proyecto de datos, no a ojo:</a:t>
+              <a:t/>
             </a:r>
           </a:p>
           <a:p>
             <a:pPr algn="l"/>
             <a:r>
-              <a:rPr sz="1900" b="0">
+              <a:rPr sz="1250" b="0">
                 <a:solidFill>
                   <a:srgbClr val="463A32"/>
                 </a:solidFill>
               </a:rPr>
+              <a:t>Pesos de cada criterio (seguridad al frente) antes de ver un solo precio.</a:t>
+            </a:r>
+          </a:p>
+        </p:txBody>
+      </p:sp>
+      <p:sp>
+        <p:nvSpPr>
+          <p:cNvPr id="7" name="Rounded Rectangle 6"/>
+          <p:cNvSpPr/>
+          <p:nvPr/>
+        </p:nvSpPr>
+        <p:spPr>
+          <a:xfrm>
+            <a:off x="3291840" y="1508760"/>
+            <a:ext cx="2697480" cy="4206240"/>
+          </a:xfrm>
+          <a:prstGeom prst="roundRect">
+            <a:avLst>
+              <a:gd name="adj" fmla="val 12000"/>
+            </a:avLst>
+          </a:prstGeom>
+          <a:solidFill>
+            <a:srgbClr val="FFFFFF"/>
+          </a:solidFill>
+          <a:ln>
+            <a:noFill/>
+          </a:ln>
+          <a:effectLst>
+            <a:outerShdw blurRad="95000" dist="40000" dir="5400000" rotWithShape="0">
+              <a:srgbClr val="6E5B4E">
+                <a:alpha val="32000"/>
+              </a:srgbClr>
+            </a:outerShdw>
+          </a:effectLst>
+        </p:spPr>
+        <p:style>
+          <a:lnRef idx="1">
+            <a:schemeClr val="accent1"/>
+          </a:lnRef>
+          <a:fillRef idx="3">
+            <a:schemeClr val="accent1"/>
+          </a:fillRef>
+          <a:effectRef idx="2">
+            <a:schemeClr val="accent1"/>
+          </a:effectRef>
+          <a:fontRef idx="minor">
+            <a:schemeClr val="lt1"/>
+          </a:fontRef>
+        </p:style>
+        <p:txBody>
+          <a:bodyPr rtlCol="0" anchor="ctr"/>
+          <a:lstStyle/>
+          <a:p>
+            <a:pPr algn="ctr"/>
+          </a:p>
+        </p:txBody>
+      </p:sp>
+      <p:sp>
+        <p:nvSpPr>
+          <p:cNvPr id="8" name="Oval 7"/>
+          <p:cNvSpPr/>
+          <p:nvPr/>
+        </p:nvSpPr>
+        <p:spPr>
+          <a:xfrm>
+            <a:off x="4251960" y="1828800"/>
+            <a:ext cx="777240" cy="777240"/>
+          </a:xfrm>
+          <a:prstGeom prst="ellipse">
+            <a:avLst/>
+          </a:prstGeom>
+          <a:solidFill>
+            <a:srgbClr val="D9A75E"/>
+          </a:solidFill>
+          <a:ln>
+            <a:noFill/>
+          </a:ln>
+        </p:spPr>
+        <p:style>
+          <a:lnRef idx="1">
+            <a:schemeClr val="accent1"/>
+          </a:lnRef>
+          <a:fillRef idx="3">
+            <a:schemeClr val="accent1"/>
+          </a:fillRef>
+          <a:effectRef idx="2">
+            <a:schemeClr val="accent1"/>
+          </a:effectRef>
+          <a:fontRef idx="minor">
+            <a:schemeClr val="lt1"/>
+          </a:fontRef>
+        </p:style>
+        <p:txBody>
+          <a:bodyPr rtlCol="0" anchor="ctr"/>
+          <a:lstStyle/>
+          <a:p>
+            <a:pPr algn="ctr"/>
+            <a:r>
+              <a:rPr sz="2600">
+                <a:solidFill>
+                  <a:srgbClr val="FFFFFF"/>
+                </a:solidFill>
+              </a:rPr>
+              <a:t>2</a:t>
+            </a:r>
+          </a:p>
+        </p:txBody>
+      </p:sp>
+      <p:sp>
+        <p:nvSpPr>
+          <p:cNvPr id="9" name="TextBox 8"/>
+          <p:cNvSpPr txBox="1"/>
+          <p:nvPr/>
+        </p:nvSpPr>
+        <p:spPr>
+          <a:xfrm>
+            <a:off x="3474720" y="2743200"/>
+            <a:ext cx="2331720" cy="2834640"/>
+          </a:xfrm>
+          <a:prstGeom prst="rect">
+            <a:avLst/>
+          </a:prstGeom>
+          <a:noFill/>
+        </p:spPr>
+        <p:txBody>
+          <a:bodyPr wrap="square" anchor="t">
+            <a:spAutoFit/>
+          </a:bodyPr>
+          <a:lstStyle/>
+          <a:p>
+            <a:pPr algn="l"/>
+            <a:r>
+              <a:rPr sz="1600" b="1">
+                <a:solidFill>
+                  <a:srgbClr val="8F5A44"/>
+                </a:solidFill>
+              </a:rPr>
+              <a:t>Precios reales</a:t>
+            </a:r>
+          </a:p>
+          <a:p>
+            <a:pPr algn="l"/>
+            <a:r>
+              <a:rPr sz="600" b="0">
+                <a:solidFill>
+                  <a:srgbClr val="463A32"/>
+                </a:solidFill>
+              </a:rPr>
               <a:t/>
             </a:r>
           </a:p>
           <a:p>
             <a:pPr algn="l"/>
             <a:r>
-              <a:rPr sz="1900" b="0">
+              <a:rPr sz="1250" b="0">
                 <a:solidFill>
                   <a:srgbClr val="463A32"/>
                 </a:solidFill>
               </a:rPr>
-              <a:t>1. Primero la vara: los pesos de cada criterio (seguridad al frente) antes de ver un solo precio.</a:t>
-            </a:r>
-          </a:p>
+              <a:t>Un robot recorrió Hostelworld con las fechas reales; el transporte, contra Kayak y locales.</a:t>
+            </a:r>
+          </a:p>
+        </p:txBody>
+      </p:sp>
+      <p:sp>
+        <p:nvSpPr>
+          <p:cNvPr id="10" name="Rounded Rectangle 9"/>
+          <p:cNvSpPr/>
+          <p:nvPr/>
+        </p:nvSpPr>
+        <p:spPr>
+          <a:xfrm>
+            <a:off x="6126480" y="1508760"/>
+            <a:ext cx="2697480" cy="4206240"/>
+          </a:xfrm>
+          <a:prstGeom prst="roundRect">
+            <a:avLst>
+              <a:gd name="adj" fmla="val 12000"/>
+            </a:avLst>
+          </a:prstGeom>
+          <a:solidFill>
+            <a:srgbClr val="FFFFFF"/>
+          </a:solidFill>
+          <a:ln>
+            <a:noFill/>
+          </a:ln>
+          <a:effectLst>
+            <a:outerShdw blurRad="95000" dist="40000" dir="5400000" rotWithShape="0">
+              <a:srgbClr val="6E5B4E">
+                <a:alpha val="32000"/>
+              </a:srgbClr>
+            </a:outerShdw>
+          </a:effectLst>
+        </p:spPr>
+        <p:style>
+          <a:lnRef idx="1">
+            <a:schemeClr val="accent1"/>
+          </a:lnRef>
+          <a:fillRef idx="3">
+            <a:schemeClr val="accent1"/>
+          </a:fillRef>
+          <a:effectRef idx="2">
+            <a:schemeClr val="accent1"/>
+          </a:effectRef>
+          <a:fontRef idx="minor">
+            <a:schemeClr val="lt1"/>
+          </a:fontRef>
+        </p:style>
+        <p:txBody>
+          <a:bodyPr rtlCol="0" anchor="ctr"/>
+          <a:lstStyle/>
+          <a:p>
+            <a:pPr algn="ctr"/>
+          </a:p>
+        </p:txBody>
+      </p:sp>
+      <p:sp>
+        <p:nvSpPr>
+          <p:cNvPr id="11" name="Oval 10"/>
+          <p:cNvSpPr/>
+          <p:nvPr/>
+        </p:nvSpPr>
+        <p:spPr>
+          <a:xfrm>
+            <a:off x="7086600" y="1828800"/>
+            <a:ext cx="777240" cy="777240"/>
+          </a:xfrm>
+          <a:prstGeom prst="ellipse">
+            <a:avLst/>
+          </a:prstGeom>
+          <a:solidFill>
+            <a:srgbClr val="D9A75E"/>
+          </a:solidFill>
+          <a:ln>
+            <a:noFill/>
+          </a:ln>
+        </p:spPr>
+        <p:style>
+          <a:lnRef idx="1">
+            <a:schemeClr val="accent1"/>
+          </a:lnRef>
+          <a:fillRef idx="3">
+            <a:schemeClr val="accent1"/>
+          </a:fillRef>
+          <a:effectRef idx="2">
+            <a:schemeClr val="accent1"/>
+          </a:effectRef>
+          <a:fontRef idx="minor">
+            <a:schemeClr val="lt1"/>
+          </a:fontRef>
+        </p:style>
+        <p:txBody>
+          <a:bodyPr rtlCol="0" anchor="ctr"/>
+          <a:lstStyle/>
+          <a:p>
+            <a:pPr algn="ctr"/>
+            <a:r>
+              <a:rPr sz="2600">
+                <a:solidFill>
+                  <a:srgbClr val="FFFFFF"/>
+                </a:solidFill>
+              </a:rPr>
+              <a:t>3</a:t>
+            </a:r>
+          </a:p>
+        </p:txBody>
+      </p:sp>
+      <p:sp>
+        <p:nvSpPr>
+          <p:cNvPr id="12" name="TextBox 11"/>
+          <p:cNvSpPr txBox="1"/>
+          <p:nvPr/>
+        </p:nvSpPr>
+        <p:spPr>
+          <a:xfrm>
+            <a:off x="6309360" y="2743200"/>
+            <a:ext cx="2331720" cy="2834640"/>
+          </a:xfrm>
+          <a:prstGeom prst="rect">
+            <a:avLst/>
+          </a:prstGeom>
+          <a:noFill/>
+        </p:spPr>
+        <p:txBody>
+          <a:bodyPr wrap="square" anchor="t">
+            <a:spAutoFit/>
+          </a:bodyPr>
+          <a:lstStyle/>
           <a:p>
             <a:pPr algn="l"/>
             <a:r>
-              <a:rPr sz="1900" b="0">
+              <a:rPr sz="1600" b="1">
+                <a:solidFill>
+                  <a:srgbClr val="8F5A44"/>
+                </a:solidFill>
+              </a:rPr>
+              <a:t>Puntaje propio</a:t>
+            </a:r>
+          </a:p>
+          <a:p>
+            <a:pPr algn="l"/>
+            <a:r>
+              <a:rPr sz="600" b="0">
                 <a:solidFill>
                   <a:srgbClr val="463A32"/>
                 </a:solidFill>
               </a:rPr>
-              <a:t>2. Precios reales: un navegador automatizado recorrió Hostelworld con las fechas y siete huéspedes;</a:t>
+              <a:t/>
             </a:r>
           </a:p>
           <a:p>
             <a:pPr algn="l"/>
             <a:r>
-              <a:rPr sz="1900" b="0">
+              <a:rPr sz="1250" b="0">
                 <a:solidFill>
                   <a:srgbClr val="463A32"/>
                 </a:solidFill>
               </a:rPr>
-              <a:t>     el transporte, contra Kayak y agencias locales.</a:t>
-            </a:r>
-          </a:p>
+              <a:t>Nota de 1 a 5 por criterio × su peso, auditable; aparte del rating externo.</a:t>
+            </a:r>
+          </a:p>
+        </p:txBody>
+      </p:sp>
+      <p:sp>
+        <p:nvSpPr>
+          <p:cNvPr id="13" name="Rounded Rectangle 12"/>
+          <p:cNvSpPr/>
+          <p:nvPr/>
+        </p:nvSpPr>
+        <p:spPr>
+          <a:xfrm>
+            <a:off x="8961120" y="1508760"/>
+            <a:ext cx="2697480" cy="4206240"/>
+          </a:xfrm>
+          <a:prstGeom prst="roundRect">
+            <a:avLst>
+              <a:gd name="adj" fmla="val 12000"/>
+            </a:avLst>
+          </a:prstGeom>
+          <a:solidFill>
+            <a:srgbClr val="FFFFFF"/>
+          </a:solidFill>
+          <a:ln>
+            <a:noFill/>
+          </a:ln>
+          <a:effectLst>
+            <a:outerShdw blurRad="95000" dist="40000" dir="5400000" rotWithShape="0">
+              <a:srgbClr val="6E5B4E">
+                <a:alpha val="32000"/>
+              </a:srgbClr>
+            </a:outerShdw>
+          </a:effectLst>
+        </p:spPr>
+        <p:style>
+          <a:lnRef idx="1">
+            <a:schemeClr val="accent1"/>
+          </a:lnRef>
+          <a:fillRef idx="3">
+            <a:schemeClr val="accent1"/>
+          </a:fillRef>
+          <a:effectRef idx="2">
+            <a:schemeClr val="accent1"/>
+          </a:effectRef>
+          <a:fontRef idx="minor">
+            <a:schemeClr val="lt1"/>
+          </a:fontRef>
+        </p:style>
+        <p:txBody>
+          <a:bodyPr rtlCol="0" anchor="ctr"/>
+          <a:lstStyle/>
+          <a:p>
+            <a:pPr algn="ctr"/>
+          </a:p>
+        </p:txBody>
+      </p:sp>
+      <p:sp>
+        <p:nvSpPr>
+          <p:cNvPr id="14" name="Oval 13"/>
+          <p:cNvSpPr/>
+          <p:nvPr/>
+        </p:nvSpPr>
+        <p:spPr>
+          <a:xfrm>
+            <a:off x="9921240" y="1828800"/>
+            <a:ext cx="777240" cy="777240"/>
+          </a:xfrm>
+          <a:prstGeom prst="ellipse">
+            <a:avLst/>
+          </a:prstGeom>
+          <a:solidFill>
+            <a:srgbClr val="D9A75E"/>
+          </a:solidFill>
+          <a:ln>
+            <a:noFill/>
+          </a:ln>
+        </p:spPr>
+        <p:style>
+          <a:lnRef idx="1">
+            <a:schemeClr val="accent1"/>
+          </a:lnRef>
+          <a:fillRef idx="3">
+            <a:schemeClr val="accent1"/>
+          </a:fillRef>
+          <a:effectRef idx="2">
+            <a:schemeClr val="accent1"/>
+          </a:effectRef>
+          <a:fontRef idx="minor">
+            <a:schemeClr val="lt1"/>
+          </a:fontRef>
+        </p:style>
+        <p:txBody>
+          <a:bodyPr rtlCol="0" anchor="ctr"/>
+          <a:lstStyle/>
+          <a:p>
+            <a:pPr algn="ctr"/>
+            <a:r>
+              <a:rPr sz="2600">
+                <a:solidFill>
+                  <a:srgbClr val="FFFFFF"/>
+                </a:solidFill>
+              </a:rPr>
+              <a:t>4</a:t>
+            </a:r>
+          </a:p>
+        </p:txBody>
+      </p:sp>
+      <p:sp>
+        <p:nvSpPr>
+          <p:cNvPr id="15" name="TextBox 14"/>
+          <p:cNvSpPr txBox="1"/>
+          <p:nvPr/>
+        </p:nvSpPr>
+        <p:spPr>
+          <a:xfrm>
+            <a:off x="9144000" y="2743200"/>
+            <a:ext cx="2331720" cy="2834640"/>
+          </a:xfrm>
+          <a:prstGeom prst="rect">
+            <a:avLst/>
+          </a:prstGeom>
+          <a:noFill/>
+        </p:spPr>
+        <p:txBody>
+          <a:bodyPr wrap="square" anchor="t">
+            <a:spAutoFit/>
+          </a:bodyPr>
+          <a:lstStyle/>
           <a:p>
             <a:pPr algn="l"/>
             <a:r>
-              <a:rPr sz="1900" b="0">
+              <a:rPr sz="1600" b="1">
+                <a:solidFill>
+                  <a:srgbClr val="8F5A44"/>
+                </a:solidFill>
+              </a:rPr>
+              <a:t>Una sola fuente</a:t>
+            </a:r>
+          </a:p>
+          <a:p>
+            <a:pPr algn="l"/>
+            <a:r>
+              <a:rPr sz="600" b="0">
                 <a:solidFill>
                   <a:srgbClr val="463A32"/>
                 </a:solidFill>
               </a:rPr>
-              <a:t>3. Un puntaje propio y auditable para la estadía, aparte de la calificación de huéspedes.</a:t>
+              <a:t/>
             </a:r>
           </a:p>
           <a:p>
             <a:pPr algn="l"/>
             <a:r>
-              <a:rPr sz="1900" b="0">
+              <a:rPr sz="1250" b="0">
                 <a:solidFill>
                   <a:srgbClr val="463A32"/>
                 </a:solidFill>
               </a:rPr>
-              <a:t>4. Una sola fuente de datos genera los cuatro documentos: cambiar un número los actualiza todos.</a:t>
+              <a:t>Los mismos datos generan los 4 documentos: cambiar un número los actualiza todos.</a:t>
             </a:r>
           </a:p>
         </p:txBody>
@@ -4368,7 +6505,7 @@
     <p:bg>
       <p:bgPr>
         <a:solidFill>
-          <a:srgbClr val="FFFFFF"/>
+          <a:srgbClr val="FCF5EC"/>
         </a:solidFill>
         <a:effectLst/>
       </p:bgPr>
@@ -4382,17 +6519,19 @@
       <p:grpSpPr/>
       <p:sp>
         <p:nvSpPr>
-          <p:cNvPr id="2" name="Rectangle 1"/>
+          <p:cNvPr id="2" name="Rounded Rectangle 1"/>
           <p:cNvSpPr/>
           <p:nvPr/>
         </p:nvSpPr>
         <p:spPr>
           <a:xfrm>
-            <a:off x="0" y="0"/>
-            <a:ext cx="12191695" cy="960120"/>
-          </a:xfrm>
-          <a:prstGeom prst="rect">
-            <a:avLst/>
+            <a:off x="365760" y="274320"/>
+            <a:ext cx="11457432" cy="749808"/>
+          </a:xfrm>
+          <a:prstGeom prst="roundRect">
+            <a:avLst>
+              <a:gd name="adj" fmla="val 50000"/>
+            </a:avLst>
           </a:prstGeom>
           <a:solidFill>
             <a:srgbClr val="B5765C"/>
@@ -4400,6 +6539,13 @@
           <a:ln>
             <a:noFill/>
           </a:ln>
+          <a:effectLst>
+            <a:outerShdw blurRad="95000" dist="40000" dir="5400000" rotWithShape="0">
+              <a:srgbClr val="6E5B4E">
+                <a:alpha val="32000"/>
+              </a:srgbClr>
+            </a:outerShdw>
+          </a:effectLst>
         </p:spPr>
         <p:style>
           <a:lnRef idx="1">
@@ -4416,18 +6562,10 @@
           </a:fontRef>
         </p:style>
         <p:txBody>
-          <a:bodyPr rtlCol="0" anchor="ctr" wrap="square"/>
+          <a:bodyPr rtlCol="0" anchor="ctr"/>
           <a:lstStyle/>
           <a:p>
             <a:pPr algn="ctr"/>
-            <a:r>
-              <a:rPr sz="2600" b="1">
-                <a:solidFill>
-                  <a:srgbClr val="FFFFFF"/>
-                </a:solidFill>
-              </a:rPr>
-              <a:t>   Geografía de la seguridad</a:t>
-            </a:r>
           </a:p>
         </p:txBody>
       </p:sp>
@@ -4439,8 +6577,8 @@
         </p:nvSpPr>
         <p:spPr>
           <a:xfrm>
-            <a:off x="822960" y="1371600"/>
-            <a:ext cx="5120640" cy="548640"/>
+            <a:off x="777240" y="274320"/>
+            <a:ext cx="10789920" cy="749808"/>
           </a:xfrm>
           <a:prstGeom prst="rect">
             <a:avLst/>
@@ -4448,19 +6586,19 @@
           <a:noFill/>
         </p:spPr>
         <p:txBody>
-          <a:bodyPr wrap="square">
+          <a:bodyPr wrap="square" anchor="ctr">
             <a:spAutoFit/>
           </a:bodyPr>
           <a:lstStyle/>
           <a:p>
             <a:pPr algn="l"/>
             <a:r>
-              <a:rPr sz="2200" b="1">
-                <a:solidFill>
-                  <a:srgbClr val="8B9B5E"/>
-                </a:solidFill>
-              </a:rPr>
-              <a:t>Donde sí</a:t>
+              <a:rPr sz="2400" b="1">
+                <a:solidFill>
+                  <a:srgbClr val="FFFFFF"/>
+                </a:solidFill>
+              </a:rPr>
+              <a:t>🎯   Cómo se puntuó la estadía</a:t>
             </a:r>
           </a:p>
         </p:txBody>
@@ -4473,8 +6611,8 @@
         </p:nvSpPr>
         <p:spPr>
           <a:xfrm>
-            <a:off x="822960" y="2011680"/>
-            <a:ext cx="5120640" cy="3657600"/>
+            <a:off x="548640" y="1188720"/>
+            <a:ext cx="11064240" cy="640080"/>
           </a:xfrm>
           <a:prstGeom prst="rect">
             <a:avLst/>
@@ -4482,77 +6620,85 @@
           <a:noFill/>
         </p:spPr>
         <p:txBody>
-          <a:bodyPr wrap="square">
+          <a:bodyPr wrap="square" anchor="t">
             <a:spAutoFit/>
           </a:bodyPr>
           <a:lstStyle/>
           <a:p>
             <a:pPr algn="l"/>
             <a:r>
-              <a:rPr sz="1800" b="0">
+              <a:rPr sz="1400" b="0">
                 <a:solidFill>
                   <a:srgbClr val="463A32"/>
                 </a:solidFill>
               </a:rPr>
-              <a:t>•  San Antonio</a:t>
-            </a:r>
-          </a:p>
-          <a:p>
-            <a:pPr algn="l"/>
-            <a:r>
-              <a:rPr sz="1800" b="0">
-                <a:solidFill>
-                  <a:srgbClr val="463A32"/>
-                </a:solidFill>
-              </a:rPr>
-              <a:t>•  Granada</a:t>
-            </a:r>
-          </a:p>
-          <a:p>
-            <a:pPr algn="l"/>
-            <a:r>
-              <a:rPr sz="1800" b="0">
-                <a:solidFill>
-                  <a:srgbClr val="463A32"/>
-                </a:solidFill>
-              </a:rPr>
-              <a:t>•  El Peñón</a:t>
-            </a:r>
-          </a:p>
-          <a:p>
-            <a:pPr algn="l"/>
-            <a:r>
-              <a:rPr sz="1800" b="0">
-                <a:solidFill>
-                  <a:srgbClr val="463A32"/>
-                </a:solidFill>
-              </a:rPr>
-              <a:t>•  Santa Teresita</a:t>
-            </a:r>
-          </a:p>
-          <a:p>
-            <a:pPr algn="l"/>
-            <a:r>
-              <a:rPr sz="1800" b="0">
-                <a:solidFill>
-                  <a:srgbClr val="463A32"/>
-                </a:solidFill>
-              </a:rPr>
-              <a:t>•  Ciudad Jardín</a:t>
-            </a:r>
-          </a:p>
-        </p:txBody>
-      </p:sp>
-      <p:sp>
-        <p:nvSpPr>
-          <p:cNvPr id="5" name="TextBox 4"/>
+              <a:t>La calificación de huéspedes (9.6, 9.8…) es externa. El puntaje 0–100 es propio: nota 1–5 por criterio × su peso.   Puntaje = suma de (peso × nota⁄5).</a:t>
+            </a:r>
+          </a:p>
+        </p:txBody>
+      </p:sp>
+      <p:sp>
+        <p:nvSpPr>
+          <p:cNvPr id="5" name="Rounded Rectangle 4"/>
+          <p:cNvSpPr/>
+          <p:nvPr/>
+        </p:nvSpPr>
+        <p:spPr>
+          <a:xfrm>
+            <a:off x="502920" y="2057400"/>
+            <a:ext cx="3566160" cy="1783080"/>
+          </a:xfrm>
+          <a:prstGeom prst="roundRect">
+            <a:avLst>
+              <a:gd name="adj" fmla="val 12000"/>
+            </a:avLst>
+          </a:prstGeom>
+          <a:solidFill>
+            <a:srgbClr val="FFFFFF"/>
+          </a:solidFill>
+          <a:ln>
+            <a:noFill/>
+          </a:ln>
+          <a:effectLst>
+            <a:outerShdw blurRad="95000" dist="40000" dir="5400000" rotWithShape="0">
+              <a:srgbClr val="6E5B4E">
+                <a:alpha val="32000"/>
+              </a:srgbClr>
+            </a:outerShdw>
+          </a:effectLst>
+        </p:spPr>
+        <p:style>
+          <a:lnRef idx="1">
+            <a:schemeClr val="accent1"/>
+          </a:lnRef>
+          <a:fillRef idx="3">
+            <a:schemeClr val="accent1"/>
+          </a:fillRef>
+          <a:effectRef idx="2">
+            <a:schemeClr val="accent1"/>
+          </a:effectRef>
+          <a:fontRef idx="minor">
+            <a:schemeClr val="lt1"/>
+          </a:fontRef>
+        </p:style>
+        <p:txBody>
+          <a:bodyPr rtlCol="0" anchor="ctr"/>
+          <a:lstStyle/>
+          <a:p>
+            <a:pPr algn="ctr"/>
+          </a:p>
+        </p:txBody>
+      </p:sp>
+      <p:sp>
+        <p:nvSpPr>
+          <p:cNvPr id="6" name="TextBox 5"/>
           <p:cNvSpPr txBox="1"/>
           <p:nvPr/>
         </p:nvSpPr>
         <p:spPr>
           <a:xfrm>
-            <a:off x="6400800" y="1371600"/>
-            <a:ext cx="4937760" cy="548640"/>
+            <a:off x="685800" y="2221992"/>
+            <a:ext cx="1234440" cy="1481328"/>
           </a:xfrm>
           <a:prstGeom prst="rect">
             <a:avLst/>
@@ -4560,33 +6706,44 @@
           <a:noFill/>
         </p:spPr>
         <p:txBody>
-          <a:bodyPr wrap="square">
+          <a:bodyPr wrap="square" anchor="ctr">
             <a:spAutoFit/>
           </a:bodyPr>
           <a:lstStyle/>
           <a:p>
-            <a:pPr algn="l"/>
-            <a:r>
-              <a:rPr sz="2200" b="1">
-                <a:solidFill>
-                  <a:srgbClr val="B5765C"/>
-                </a:solidFill>
-              </a:rPr>
-              <a:t>Donde no</a:t>
-            </a:r>
-          </a:p>
-        </p:txBody>
-      </p:sp>
-      <p:sp>
-        <p:nvSpPr>
-          <p:cNvPr id="6" name="TextBox 5"/>
+            <a:pPr algn="ctr"/>
+            <a:r>
+              <a:rPr sz="2600" b="0">
+                <a:solidFill>
+                  <a:srgbClr val="463A32"/>
+                </a:solidFill>
+              </a:rPr>
+              <a:t>🔒</a:t>
+            </a:r>
+          </a:p>
+          <a:p>
+            <a:pPr algn="ctr"/>
+            <a:r>
+              <a:rPr sz="2700" b="1">
+                <a:solidFill>
+                  <a:srgbClr val="D9A75E"/>
+                </a:solidFill>
+              </a:rPr>
+              <a:t>30%</a:t>
+            </a:r>
+          </a:p>
+        </p:txBody>
+      </p:sp>
+      <p:sp>
+        <p:nvSpPr>
+          <p:cNvPr id="7" name="TextBox 6"/>
           <p:cNvSpPr txBox="1"/>
           <p:nvPr/>
         </p:nvSpPr>
         <p:spPr>
           <a:xfrm>
-            <a:off x="6400800" y="2011680"/>
-            <a:ext cx="4937760" cy="3657600"/>
+            <a:off x="1965960" y="2286000"/>
+            <a:ext cx="2011680" cy="1371600"/>
           </a:xfrm>
           <a:prstGeom prst="rect">
             <a:avLst/>
@@ -4594,41 +6751,740 @@
           <a:noFill/>
         </p:spPr>
         <p:txBody>
-          <a:bodyPr wrap="square">
+          <a:bodyPr wrap="square" anchor="ctr">
             <a:spAutoFit/>
           </a:bodyPr>
           <a:lstStyle/>
           <a:p>
             <a:pPr algn="l"/>
             <a:r>
-              <a:rPr sz="1800" b="0">
+              <a:rPr sz="1400" b="1">
+                <a:solidFill>
+                  <a:srgbClr val="8F5A44"/>
+                </a:solidFill>
+              </a:rPr>
+              <a:t>Seguridad del barrio</a:t>
+            </a:r>
+          </a:p>
+          <a:p>
+            <a:pPr algn="l"/>
+            <a:r>
+              <a:rPr sz="1150" b="0">
+                <a:solidFill>
+                  <a:srgbClr val="8A7A6E"/>
+                </a:solidFill>
+              </a:rPr>
+              <a:t>Por zona (San Antonio / Granada = 5)</a:t>
+            </a:r>
+          </a:p>
+        </p:txBody>
+      </p:sp>
+      <p:sp>
+        <p:nvSpPr>
+          <p:cNvPr id="8" name="Rounded Rectangle 7"/>
+          <p:cNvSpPr/>
+          <p:nvPr/>
+        </p:nvSpPr>
+        <p:spPr>
+          <a:xfrm>
+            <a:off x="4233672" y="2057400"/>
+            <a:ext cx="3566160" cy="1783080"/>
+          </a:xfrm>
+          <a:prstGeom prst="roundRect">
+            <a:avLst>
+              <a:gd name="adj" fmla="val 12000"/>
+            </a:avLst>
+          </a:prstGeom>
+          <a:solidFill>
+            <a:srgbClr val="FFFFFF"/>
+          </a:solidFill>
+          <a:ln>
+            <a:noFill/>
+          </a:ln>
+          <a:effectLst>
+            <a:outerShdw blurRad="95000" dist="40000" dir="5400000" rotWithShape="0">
+              <a:srgbClr val="6E5B4E">
+                <a:alpha val="32000"/>
+              </a:srgbClr>
+            </a:outerShdw>
+          </a:effectLst>
+        </p:spPr>
+        <p:style>
+          <a:lnRef idx="1">
+            <a:schemeClr val="accent1"/>
+          </a:lnRef>
+          <a:fillRef idx="3">
+            <a:schemeClr val="accent1"/>
+          </a:fillRef>
+          <a:effectRef idx="2">
+            <a:schemeClr val="accent1"/>
+          </a:effectRef>
+          <a:fontRef idx="minor">
+            <a:schemeClr val="lt1"/>
+          </a:fontRef>
+        </p:style>
+        <p:txBody>
+          <a:bodyPr rtlCol="0" anchor="ctr"/>
+          <a:lstStyle/>
+          <a:p>
+            <a:pPr algn="ctr"/>
+          </a:p>
+        </p:txBody>
+      </p:sp>
+      <p:sp>
+        <p:nvSpPr>
+          <p:cNvPr id="9" name="TextBox 8"/>
+          <p:cNvSpPr txBox="1"/>
+          <p:nvPr/>
+        </p:nvSpPr>
+        <p:spPr>
+          <a:xfrm>
+            <a:off x="4416552" y="2221992"/>
+            <a:ext cx="1234440" cy="1481328"/>
+          </a:xfrm>
+          <a:prstGeom prst="rect">
+            <a:avLst/>
+          </a:prstGeom>
+          <a:noFill/>
+        </p:spPr>
+        <p:txBody>
+          <a:bodyPr wrap="square" anchor="ctr">
+            <a:spAutoFit/>
+          </a:bodyPr>
+          <a:lstStyle/>
+          <a:p>
+            <a:pPr algn="ctr"/>
+            <a:r>
+              <a:rPr sz="2600" b="0">
                 <a:solidFill>
                   <a:srgbClr val="463A32"/>
                 </a:solidFill>
               </a:rPr>
-              <a:t>•  Aguablanca (oriente)</a:t>
-            </a:r>
-          </a:p>
+              <a:t>✨</a:t>
+            </a:r>
+          </a:p>
+          <a:p>
+            <a:pPr algn="ctr"/>
+            <a:r>
+              <a:rPr sz="2700" b="1">
+                <a:solidFill>
+                  <a:srgbClr val="D9A75E"/>
+                </a:solidFill>
+              </a:rPr>
+              <a:t>20%</a:t>
+            </a:r>
+          </a:p>
+        </p:txBody>
+      </p:sp>
+      <p:sp>
+        <p:nvSpPr>
+          <p:cNvPr id="10" name="TextBox 9"/>
+          <p:cNvSpPr txBox="1"/>
+          <p:nvPr/>
+        </p:nvSpPr>
+        <p:spPr>
+          <a:xfrm>
+            <a:off x="5696712" y="2286000"/>
+            <a:ext cx="2011680" cy="1371600"/>
+          </a:xfrm>
+          <a:prstGeom prst="rect">
+            <a:avLst/>
+          </a:prstGeom>
+          <a:noFill/>
+        </p:spPr>
+        <p:txBody>
+          <a:bodyPr wrap="square" anchor="ctr">
+            <a:spAutoFit/>
+          </a:bodyPr>
+          <a:lstStyle/>
           <a:p>
             <a:pPr algn="l"/>
             <a:r>
-              <a:rPr sz="1800" b="0">
+              <a:rPr sz="1400" b="1">
+                <a:solidFill>
+                  <a:srgbClr val="8F5A44"/>
+                </a:solidFill>
+              </a:rPr>
+              <a:t>Amenidades y comodidad</a:t>
+            </a:r>
+          </a:p>
+          <a:p>
+            <a:pPr algn="l"/>
+            <a:r>
+              <a:rPr sz="1150" b="0">
+                <a:solidFill>
+                  <a:srgbClr val="8A7A6E"/>
+                </a:solidFill>
+              </a:rPr>
+              <a:t>Aire +2, piscina +2, cocina +1</a:t>
+            </a:r>
+          </a:p>
+        </p:txBody>
+      </p:sp>
+      <p:sp>
+        <p:nvSpPr>
+          <p:cNvPr id="11" name="Rounded Rectangle 10"/>
+          <p:cNvSpPr/>
+          <p:nvPr/>
+        </p:nvSpPr>
+        <p:spPr>
+          <a:xfrm>
+            <a:off x="7964424" y="2057400"/>
+            <a:ext cx="3566160" cy="1783080"/>
+          </a:xfrm>
+          <a:prstGeom prst="roundRect">
+            <a:avLst>
+              <a:gd name="adj" fmla="val 12000"/>
+            </a:avLst>
+          </a:prstGeom>
+          <a:solidFill>
+            <a:srgbClr val="FFFFFF"/>
+          </a:solidFill>
+          <a:ln>
+            <a:noFill/>
+          </a:ln>
+          <a:effectLst>
+            <a:outerShdw blurRad="95000" dist="40000" dir="5400000" rotWithShape="0">
+              <a:srgbClr val="6E5B4E">
+                <a:alpha val="32000"/>
+              </a:srgbClr>
+            </a:outerShdw>
+          </a:effectLst>
+        </p:spPr>
+        <p:style>
+          <a:lnRef idx="1">
+            <a:schemeClr val="accent1"/>
+          </a:lnRef>
+          <a:fillRef idx="3">
+            <a:schemeClr val="accent1"/>
+          </a:fillRef>
+          <a:effectRef idx="2">
+            <a:schemeClr val="accent1"/>
+          </a:effectRef>
+          <a:fontRef idx="minor">
+            <a:schemeClr val="lt1"/>
+          </a:fontRef>
+        </p:style>
+        <p:txBody>
+          <a:bodyPr rtlCol="0" anchor="ctr"/>
+          <a:lstStyle/>
+          <a:p>
+            <a:pPr algn="ctr"/>
+          </a:p>
+        </p:txBody>
+      </p:sp>
+      <p:sp>
+        <p:nvSpPr>
+          <p:cNvPr id="12" name="TextBox 11"/>
+          <p:cNvSpPr txBox="1"/>
+          <p:nvPr/>
+        </p:nvSpPr>
+        <p:spPr>
+          <a:xfrm>
+            <a:off x="8147304" y="2221992"/>
+            <a:ext cx="1234440" cy="1481328"/>
+          </a:xfrm>
+          <a:prstGeom prst="rect">
+            <a:avLst/>
+          </a:prstGeom>
+          <a:noFill/>
+        </p:spPr>
+        <p:txBody>
+          <a:bodyPr wrap="square" anchor="ctr">
+            <a:spAutoFit/>
+          </a:bodyPr>
+          <a:lstStyle/>
+          <a:p>
+            <a:pPr algn="ctr"/>
+            <a:r>
+              <a:rPr sz="2600" b="0">
                 <a:solidFill>
                   <a:srgbClr val="463A32"/>
                 </a:solidFill>
               </a:rPr>
-              <a:t>•  Siloé</a:t>
-            </a:r>
-          </a:p>
+              <a:t>💰</a:t>
+            </a:r>
+          </a:p>
+          <a:p>
+            <a:pPr algn="ctr"/>
+            <a:r>
+              <a:rPr sz="2700" b="1">
+                <a:solidFill>
+                  <a:srgbClr val="D9A75E"/>
+                </a:solidFill>
+              </a:rPr>
+              <a:t>20%</a:t>
+            </a:r>
+          </a:p>
+        </p:txBody>
+      </p:sp>
+      <p:sp>
+        <p:nvSpPr>
+          <p:cNvPr id="13" name="TextBox 12"/>
+          <p:cNvSpPr txBox="1"/>
+          <p:nvPr/>
+        </p:nvSpPr>
+        <p:spPr>
+          <a:xfrm>
+            <a:off x="9427464" y="2286000"/>
+            <a:ext cx="2011680" cy="1371600"/>
+          </a:xfrm>
+          <a:prstGeom prst="rect">
+            <a:avLst/>
+          </a:prstGeom>
+          <a:noFill/>
+        </p:spPr>
+        <p:txBody>
+          <a:bodyPr wrap="square" anchor="ctr">
+            <a:spAutoFit/>
+          </a:bodyPr>
+          <a:lstStyle/>
           <a:p>
             <a:pPr algn="l"/>
             <a:r>
-              <a:rPr sz="1800" b="0">
+              <a:rPr sz="1400" b="1">
+                <a:solidFill>
+                  <a:srgbClr val="8F5A44"/>
+                </a:solidFill>
+              </a:rPr>
+              <a:t>Precio por persona</a:t>
+            </a:r>
+          </a:p>
+          <a:p>
+            <a:pPr algn="l"/>
+            <a:r>
+              <a:rPr sz="1150" b="0">
+                <a:solidFill>
+                  <a:srgbClr val="8A7A6E"/>
+                </a:solidFill>
+              </a:rPr>
+              <a:t>Más barato = 5; lineal al más caro</a:t>
+            </a:r>
+          </a:p>
+        </p:txBody>
+      </p:sp>
+      <p:sp>
+        <p:nvSpPr>
+          <p:cNvPr id="14" name="Rounded Rectangle 13"/>
+          <p:cNvSpPr/>
+          <p:nvPr/>
+        </p:nvSpPr>
+        <p:spPr>
+          <a:xfrm>
+            <a:off x="502920" y="4023360"/>
+            <a:ext cx="3566160" cy="1783080"/>
+          </a:xfrm>
+          <a:prstGeom prst="roundRect">
+            <a:avLst>
+              <a:gd name="adj" fmla="val 12000"/>
+            </a:avLst>
+          </a:prstGeom>
+          <a:solidFill>
+            <a:srgbClr val="FFFFFF"/>
+          </a:solidFill>
+          <a:ln>
+            <a:noFill/>
+          </a:ln>
+          <a:effectLst>
+            <a:outerShdw blurRad="95000" dist="40000" dir="5400000" rotWithShape="0">
+              <a:srgbClr val="6E5B4E">
+                <a:alpha val="32000"/>
+              </a:srgbClr>
+            </a:outerShdw>
+          </a:effectLst>
+        </p:spPr>
+        <p:style>
+          <a:lnRef idx="1">
+            <a:schemeClr val="accent1"/>
+          </a:lnRef>
+          <a:fillRef idx="3">
+            <a:schemeClr val="accent1"/>
+          </a:fillRef>
+          <a:effectRef idx="2">
+            <a:schemeClr val="accent1"/>
+          </a:effectRef>
+          <a:fontRef idx="minor">
+            <a:schemeClr val="lt1"/>
+          </a:fontRef>
+        </p:style>
+        <p:txBody>
+          <a:bodyPr rtlCol="0" anchor="ctr"/>
+          <a:lstStyle/>
+          <a:p>
+            <a:pPr algn="ctr"/>
+          </a:p>
+        </p:txBody>
+      </p:sp>
+      <p:sp>
+        <p:nvSpPr>
+          <p:cNvPr id="15" name="TextBox 14"/>
+          <p:cNvSpPr txBox="1"/>
+          <p:nvPr/>
+        </p:nvSpPr>
+        <p:spPr>
+          <a:xfrm>
+            <a:off x="685800" y="4187952"/>
+            <a:ext cx="1234440" cy="1481328"/>
+          </a:xfrm>
+          <a:prstGeom prst="rect">
+            <a:avLst/>
+          </a:prstGeom>
+          <a:noFill/>
+        </p:spPr>
+        <p:txBody>
+          <a:bodyPr wrap="square" anchor="ctr">
+            <a:spAutoFit/>
+          </a:bodyPr>
+          <a:lstStyle/>
+          <a:p>
+            <a:pPr algn="ctr"/>
+            <a:r>
+              <a:rPr sz="2600" b="0">
                 <a:solidFill>
                   <a:srgbClr val="463A32"/>
                 </a:solidFill>
               </a:rPr>
-              <a:t>•  Terrón Colorado (ladera oeste alta)</a:t>
+              <a:t>📍</a:t>
+            </a:r>
+          </a:p>
+          <a:p>
+            <a:pPr algn="ctr"/>
+            <a:r>
+              <a:rPr sz="2700" b="1">
+                <a:solidFill>
+                  <a:srgbClr val="D9A75E"/>
+                </a:solidFill>
+              </a:rPr>
+              <a:t>12%</a:t>
+            </a:r>
+          </a:p>
+        </p:txBody>
+      </p:sp>
+      <p:sp>
+        <p:nvSpPr>
+          <p:cNvPr id="16" name="TextBox 15"/>
+          <p:cNvSpPr txBox="1"/>
+          <p:nvPr/>
+        </p:nvSpPr>
+        <p:spPr>
+          <a:xfrm>
+            <a:off x="1965960" y="4251960"/>
+            <a:ext cx="2011680" cy="1371600"/>
+          </a:xfrm>
+          <a:prstGeom prst="rect">
+            <a:avLst/>
+          </a:prstGeom>
+          <a:noFill/>
+        </p:spPr>
+        <p:txBody>
+          <a:bodyPr wrap="square" anchor="ctr">
+            <a:spAutoFit/>
+          </a:bodyPr>
+          <a:lstStyle/>
+          <a:p>
+            <a:pPr algn="l"/>
+            <a:r>
+              <a:rPr sz="1400" b="1">
+                <a:solidFill>
+                  <a:srgbClr val="8F5A44"/>
+                </a:solidFill>
+              </a:rPr>
+              <a:t>Cercanía a zona turística</a:t>
+            </a:r>
+          </a:p>
+          <a:p>
+            <a:pPr algn="l"/>
+            <a:r>
+              <a:rPr sz="1150" b="0">
+                <a:solidFill>
+                  <a:srgbClr val="8A7A6E"/>
+                </a:solidFill>
+              </a:rPr>
+              <a:t>Qué tan a pie de lo turístico</a:t>
+            </a:r>
+          </a:p>
+        </p:txBody>
+      </p:sp>
+      <p:sp>
+        <p:nvSpPr>
+          <p:cNvPr id="17" name="Rounded Rectangle 16"/>
+          <p:cNvSpPr/>
+          <p:nvPr/>
+        </p:nvSpPr>
+        <p:spPr>
+          <a:xfrm>
+            <a:off x="4233672" y="4023360"/>
+            <a:ext cx="3566160" cy="1783080"/>
+          </a:xfrm>
+          <a:prstGeom prst="roundRect">
+            <a:avLst>
+              <a:gd name="adj" fmla="val 12000"/>
+            </a:avLst>
+          </a:prstGeom>
+          <a:solidFill>
+            <a:srgbClr val="FFFFFF"/>
+          </a:solidFill>
+          <a:ln>
+            <a:noFill/>
+          </a:ln>
+          <a:effectLst>
+            <a:outerShdw blurRad="95000" dist="40000" dir="5400000" rotWithShape="0">
+              <a:srgbClr val="6E5B4E">
+                <a:alpha val="32000"/>
+              </a:srgbClr>
+            </a:outerShdw>
+          </a:effectLst>
+        </p:spPr>
+        <p:style>
+          <a:lnRef idx="1">
+            <a:schemeClr val="accent1"/>
+          </a:lnRef>
+          <a:fillRef idx="3">
+            <a:schemeClr val="accent1"/>
+          </a:fillRef>
+          <a:effectRef idx="2">
+            <a:schemeClr val="accent1"/>
+          </a:effectRef>
+          <a:fontRef idx="minor">
+            <a:schemeClr val="lt1"/>
+          </a:fontRef>
+        </p:style>
+        <p:txBody>
+          <a:bodyPr rtlCol="0" anchor="ctr"/>
+          <a:lstStyle/>
+          <a:p>
+            <a:pPr algn="ctr"/>
+          </a:p>
+        </p:txBody>
+      </p:sp>
+      <p:sp>
+        <p:nvSpPr>
+          <p:cNvPr id="18" name="TextBox 17"/>
+          <p:cNvSpPr txBox="1"/>
+          <p:nvPr/>
+        </p:nvSpPr>
+        <p:spPr>
+          <a:xfrm>
+            <a:off x="4416552" y="4187952"/>
+            <a:ext cx="1234440" cy="1481328"/>
+          </a:xfrm>
+          <a:prstGeom prst="rect">
+            <a:avLst/>
+          </a:prstGeom>
+          <a:noFill/>
+        </p:spPr>
+        <p:txBody>
+          <a:bodyPr wrap="square" anchor="ctr">
+            <a:spAutoFit/>
+          </a:bodyPr>
+          <a:lstStyle/>
+          <a:p>
+            <a:pPr algn="ctr"/>
+            <a:r>
+              <a:rPr sz="2600" b="0">
+                <a:solidFill>
+                  <a:srgbClr val="463A32"/>
+                </a:solidFill>
+              </a:rPr>
+              <a:t>🅿️</a:t>
+            </a:r>
+          </a:p>
+          <a:p>
+            <a:pPr algn="ctr"/>
+            <a:r>
+              <a:rPr sz="2700" b="1">
+                <a:solidFill>
+                  <a:srgbClr val="D9A75E"/>
+                </a:solidFill>
+              </a:rPr>
+              <a:t>10%</a:t>
+            </a:r>
+          </a:p>
+        </p:txBody>
+      </p:sp>
+      <p:sp>
+        <p:nvSpPr>
+          <p:cNvPr id="19" name="TextBox 18"/>
+          <p:cNvSpPr txBox="1"/>
+          <p:nvPr/>
+        </p:nvSpPr>
+        <p:spPr>
+          <a:xfrm>
+            <a:off x="5696712" y="4251960"/>
+            <a:ext cx="2011680" cy="1371600"/>
+          </a:xfrm>
+          <a:prstGeom prst="rect">
+            <a:avLst/>
+          </a:prstGeom>
+          <a:noFill/>
+        </p:spPr>
+        <p:txBody>
+          <a:bodyPr wrap="square" anchor="ctr">
+            <a:spAutoFit/>
+          </a:bodyPr>
+          <a:lstStyle/>
+          <a:p>
+            <a:pPr algn="l"/>
+            <a:r>
+              <a:rPr sz="1400" b="1">
+                <a:solidFill>
+                  <a:srgbClr val="8F5A44"/>
+                </a:solidFill>
+              </a:rPr>
+              <a:t>Parqueadero</a:t>
+            </a:r>
+          </a:p>
+          <a:p>
+            <a:pPr algn="l"/>
+            <a:r>
+              <a:rPr sz="1150" b="0">
+                <a:solidFill>
+                  <a:srgbClr val="8A7A6E"/>
+                </a:solidFill>
+              </a:rPr>
+              <a:t>Disponibilidad estimada (baja certeza)</a:t>
+            </a:r>
+          </a:p>
+        </p:txBody>
+      </p:sp>
+      <p:sp>
+        <p:nvSpPr>
+          <p:cNvPr id="20" name="Rounded Rectangle 19"/>
+          <p:cNvSpPr/>
+          <p:nvPr/>
+        </p:nvSpPr>
+        <p:spPr>
+          <a:xfrm>
+            <a:off x="7964424" y="4023360"/>
+            <a:ext cx="3566160" cy="1783080"/>
+          </a:xfrm>
+          <a:prstGeom prst="roundRect">
+            <a:avLst>
+              <a:gd name="adj" fmla="val 12000"/>
+            </a:avLst>
+          </a:prstGeom>
+          <a:solidFill>
+            <a:srgbClr val="FFFFFF"/>
+          </a:solidFill>
+          <a:ln>
+            <a:noFill/>
+          </a:ln>
+          <a:effectLst>
+            <a:outerShdw blurRad="95000" dist="40000" dir="5400000" rotWithShape="0">
+              <a:srgbClr val="6E5B4E">
+                <a:alpha val="32000"/>
+              </a:srgbClr>
+            </a:outerShdw>
+          </a:effectLst>
+        </p:spPr>
+        <p:style>
+          <a:lnRef idx="1">
+            <a:schemeClr val="accent1"/>
+          </a:lnRef>
+          <a:fillRef idx="3">
+            <a:schemeClr val="accent1"/>
+          </a:fillRef>
+          <a:effectRef idx="2">
+            <a:schemeClr val="accent1"/>
+          </a:effectRef>
+          <a:fontRef idx="minor">
+            <a:schemeClr val="lt1"/>
+          </a:fontRef>
+        </p:style>
+        <p:txBody>
+          <a:bodyPr rtlCol="0" anchor="ctr"/>
+          <a:lstStyle/>
+          <a:p>
+            <a:pPr algn="ctr"/>
+          </a:p>
+        </p:txBody>
+      </p:sp>
+      <p:sp>
+        <p:nvSpPr>
+          <p:cNvPr id="21" name="TextBox 20"/>
+          <p:cNvSpPr txBox="1"/>
+          <p:nvPr/>
+        </p:nvSpPr>
+        <p:spPr>
+          <a:xfrm>
+            <a:off x="8147304" y="4187952"/>
+            <a:ext cx="1234440" cy="1481328"/>
+          </a:xfrm>
+          <a:prstGeom prst="rect">
+            <a:avLst/>
+          </a:prstGeom>
+          <a:noFill/>
+        </p:spPr>
+        <p:txBody>
+          <a:bodyPr wrap="square" anchor="ctr">
+            <a:spAutoFit/>
+          </a:bodyPr>
+          <a:lstStyle/>
+          <a:p>
+            <a:pPr algn="ctr"/>
+            <a:r>
+              <a:rPr sz="2600" b="0">
+                <a:solidFill>
+                  <a:srgbClr val="463A32"/>
+                </a:solidFill>
+              </a:rPr>
+              <a:t>🎉</a:t>
+            </a:r>
+          </a:p>
+          <a:p>
+            <a:pPr algn="ctr"/>
+            <a:r>
+              <a:rPr sz="2700" b="1">
+                <a:solidFill>
+                  <a:srgbClr val="D9A75E"/>
+                </a:solidFill>
+              </a:rPr>
+              <a:t>8%</a:t>
+            </a:r>
+          </a:p>
+        </p:txBody>
+      </p:sp>
+      <p:sp>
+        <p:nvSpPr>
+          <p:cNvPr id="22" name="TextBox 21"/>
+          <p:cNvSpPr txBox="1"/>
+          <p:nvPr/>
+        </p:nvSpPr>
+        <p:spPr>
+          <a:xfrm>
+            <a:off x="9427464" y="4251960"/>
+            <a:ext cx="2011680" cy="1371600"/>
+          </a:xfrm>
+          <a:prstGeom prst="rect">
+            <a:avLst/>
+          </a:prstGeom>
+          <a:noFill/>
+        </p:spPr>
+        <p:txBody>
+          <a:bodyPr wrap="square" anchor="ctr">
+            <a:spAutoFit/>
+          </a:bodyPr>
+          <a:lstStyle/>
+          <a:p>
+            <a:pPr algn="l"/>
+            <a:r>
+              <a:rPr sz="1400" b="1">
+                <a:solidFill>
+                  <a:srgbClr val="8F5A44"/>
+                </a:solidFill>
+              </a:rPr>
+              <a:t>Ambiente social</a:t>
+            </a:r>
+          </a:p>
+          <a:p>
+            <a:pPr algn="l"/>
+            <a:r>
+              <a:rPr sz="1150" b="0">
+                <a:solidFill>
+                  <a:srgbClr val="8A7A6E"/>
+                </a:solidFill>
+              </a:rPr>
+              <a:t>Facilidad para conocer gente</a:t>
             </a:r>
           </a:p>
         </p:txBody>
@@ -4647,7 +7503,7 @@
     <p:bg>
       <p:bgPr>
         <a:solidFill>
-          <a:srgbClr val="FFFFFF"/>
+          <a:srgbClr val="FCF5EC"/>
         </a:solidFill>
         <a:effectLst/>
       </p:bgPr>
@@ -4661,17 +7517,19 @@
       <p:grpSpPr/>
       <p:sp>
         <p:nvSpPr>
-          <p:cNvPr id="2" name="Rectangle 1"/>
+          <p:cNvPr id="2" name="Rounded Rectangle 1"/>
           <p:cNvSpPr/>
           <p:nvPr/>
         </p:nvSpPr>
         <p:spPr>
           <a:xfrm>
-            <a:off x="0" y="0"/>
-            <a:ext cx="12191695" cy="960120"/>
-          </a:xfrm>
-          <a:prstGeom prst="rect">
-            <a:avLst/>
+            <a:off x="365760" y="274320"/>
+            <a:ext cx="11457432" cy="749808"/>
+          </a:xfrm>
+          <a:prstGeom prst="roundRect">
+            <a:avLst>
+              <a:gd name="adj" fmla="val 50000"/>
+            </a:avLst>
           </a:prstGeom>
           <a:solidFill>
             <a:srgbClr val="B5765C"/>
@@ -4679,6 +7537,13 @@
           <a:ln>
             <a:noFill/>
           </a:ln>
+          <a:effectLst>
+            <a:outerShdw blurRad="95000" dist="40000" dir="5400000" rotWithShape="0">
+              <a:srgbClr val="6E5B4E">
+                <a:alpha val="32000"/>
+              </a:srgbClr>
+            </a:outerShdw>
+          </a:effectLst>
         </p:spPr>
         <p:style>
           <a:lnRef idx="1">
@@ -4695,18 +7560,10 @@
           </a:fontRef>
         </p:style>
         <p:txBody>
-          <a:bodyPr rtlCol="0" anchor="ctr" wrap="square"/>
+          <a:bodyPr rtlCol="0" anchor="ctr"/>
           <a:lstStyle/>
           <a:p>
             <a:pPr algn="ctr"/>
-            <a:r>
-              <a:rPr sz="2600" b="1">
-                <a:solidFill>
-                  <a:srgbClr val="FFFFFF"/>
-                </a:solidFill>
-              </a:rPr>
-              <a:t>   Cómo se puntuó la estadía</a:t>
-            </a:r>
           </a:p>
         </p:txBody>
       </p:sp>
@@ -4718,8 +7575,8 @@
         </p:nvSpPr>
         <p:spPr>
           <a:xfrm>
-            <a:off x="822960" y="1143000"/>
-            <a:ext cx="10515600" cy="1005840"/>
+            <a:off x="777240" y="274320"/>
+            <a:ext cx="10789920" cy="749808"/>
           </a:xfrm>
           <a:prstGeom prst="rect">
             <a:avLst/>
@@ -4727,45 +7584,369 @@
           <a:noFill/>
         </p:spPr>
         <p:txBody>
-          <a:bodyPr wrap="square">
+          <a:bodyPr wrap="square" anchor="ctr">
             <a:spAutoFit/>
           </a:bodyPr>
           <a:lstStyle/>
           <a:p>
             <a:pPr algn="l"/>
             <a:r>
-              <a:rPr sz="1600" b="0">
-                <a:solidFill>
-                  <a:srgbClr val="463A32"/>
-                </a:solidFill>
-              </a:rPr>
-              <a:t>La calificación de huéspedes (9.6, 9.8…) es un dato externo. El puntaje de 0 a 100 es propio:</a:t>
-            </a:r>
-          </a:p>
-          <a:p>
-            <a:pPr algn="l"/>
-            <a:r>
-              <a:rPr sz="1600" b="0">
-                <a:solidFill>
-                  <a:srgbClr val="463A32"/>
-                </a:solidFill>
-              </a:rPr>
-              <a:t>una nota de 1 a 5 por criterio, multiplicada por su peso.   Puntaje = suma de (peso × nota⁄5).</a:t>
-            </a:r>
+              <a:rPr sz="2400" b="1">
+                <a:solidFill>
+                  <a:srgbClr val="FFFFFF"/>
+                </a:solidFill>
+              </a:rPr>
+              <a:t>🏨   Estadía — los finalistas</a:t>
+            </a:r>
+          </a:p>
+        </p:txBody>
+      </p:sp>
+      <p:sp>
+        <p:nvSpPr>
+          <p:cNvPr id="4" name="Rounded Rectangle 3"/>
+          <p:cNvSpPr/>
+          <p:nvPr/>
+        </p:nvSpPr>
+        <p:spPr>
+          <a:xfrm>
+            <a:off x="457200" y="1325880"/>
+            <a:ext cx="7589520" cy="4937760"/>
+          </a:xfrm>
+          <a:prstGeom prst="roundRect">
+            <a:avLst>
+              <a:gd name="adj" fmla="val 5000"/>
+            </a:avLst>
+          </a:prstGeom>
+          <a:solidFill>
+            <a:srgbClr val="FFFFFF"/>
+          </a:solidFill>
+          <a:ln>
+            <a:noFill/>
+          </a:ln>
+          <a:effectLst>
+            <a:outerShdw blurRad="95000" dist="40000" dir="5400000" rotWithShape="0">
+              <a:srgbClr val="6E5B4E">
+                <a:alpha val="32000"/>
+              </a:srgbClr>
+            </a:outerShdw>
+          </a:effectLst>
+        </p:spPr>
+        <p:style>
+          <a:lnRef idx="1">
+            <a:schemeClr val="accent1"/>
+          </a:lnRef>
+          <a:fillRef idx="3">
+            <a:schemeClr val="accent1"/>
+          </a:fillRef>
+          <a:effectRef idx="2">
+            <a:schemeClr val="accent1"/>
+          </a:effectRef>
+          <a:fontRef idx="minor">
+            <a:schemeClr val="lt1"/>
+          </a:fontRef>
+        </p:style>
+        <p:txBody>
+          <a:bodyPr rtlCol="0" anchor="ctr"/>
+          <a:lstStyle/>
+          <a:p>
+            <a:pPr algn="ctr"/>
           </a:p>
         </p:txBody>
       </p:sp>
       <p:graphicFrame>
         <p:nvGraphicFramePr>
-          <p:cNvPr id="4" name="Table 3"/>
+          <p:cNvPr id="5" name="Chart 4"/>
           <p:cNvGraphicFramePr>
             <a:graphicFrameLocks noGrp="1"/>
           </p:cNvGraphicFramePr>
           <p:nvPr/>
         </p:nvGraphicFramePr>
         <p:xfrm>
-          <a:off x="822960" y="2331720"/>
-          <a:ext cx="10515600" cy="3749039"/>
+          <a:off x="685800" y="1463040"/>
+          <a:ext cx="7223760" cy="4663440"/>
+        </p:xfrm>
+        <a:graphic>
+          <a:graphicData uri="http://schemas.openxmlformats.org/drawingml/2006/chart">
+            <c:chart xmlns:c="http://schemas.openxmlformats.org/drawingml/2006/chart" r:id="rId2"/>
+          </a:graphicData>
+        </a:graphic>
+      </p:graphicFrame>
+      <p:sp>
+        <p:nvSpPr>
+          <p:cNvPr id="6" name="Rounded Rectangle 5"/>
+          <p:cNvSpPr/>
+          <p:nvPr/>
+        </p:nvSpPr>
+        <p:spPr>
+          <a:xfrm>
+            <a:off x="8275320" y="1645920"/>
+            <a:ext cx="3520440" cy="3291840"/>
+          </a:xfrm>
+          <a:prstGeom prst="roundRect">
+            <a:avLst>
+              <a:gd name="adj" fmla="val 12000"/>
+            </a:avLst>
+          </a:prstGeom>
+          <a:solidFill>
+            <a:srgbClr val="F0E0C6"/>
+          </a:solidFill>
+          <a:ln>
+            <a:noFill/>
+          </a:ln>
+          <a:effectLst>
+            <a:outerShdw blurRad="95000" dist="40000" dir="5400000" rotWithShape="0">
+              <a:srgbClr val="6E5B4E">
+                <a:alpha val="32000"/>
+              </a:srgbClr>
+            </a:outerShdw>
+          </a:effectLst>
+        </p:spPr>
+        <p:style>
+          <a:lnRef idx="1">
+            <a:schemeClr val="accent1"/>
+          </a:lnRef>
+          <a:fillRef idx="3">
+            <a:schemeClr val="accent1"/>
+          </a:fillRef>
+          <a:effectRef idx="2">
+            <a:schemeClr val="accent1"/>
+          </a:effectRef>
+          <a:fontRef idx="minor">
+            <a:schemeClr val="lt1"/>
+          </a:fontRef>
+        </p:style>
+        <p:txBody>
+          <a:bodyPr rtlCol="0" anchor="ctr"/>
+          <a:lstStyle/>
+          <a:p>
+            <a:pPr algn="ctr"/>
+          </a:p>
+        </p:txBody>
+      </p:sp>
+      <p:sp>
+        <p:nvSpPr>
+          <p:cNvPr id="7" name="TextBox 6"/>
+          <p:cNvSpPr txBox="1"/>
+          <p:nvPr/>
+        </p:nvSpPr>
+        <p:spPr>
+          <a:xfrm>
+            <a:off x="8549640" y="1920240"/>
+            <a:ext cx="3017520" cy="2834640"/>
+          </a:xfrm>
+          <a:prstGeom prst="rect">
+            <a:avLst/>
+          </a:prstGeom>
+          <a:noFill/>
+        </p:spPr>
+        <p:txBody>
+          <a:bodyPr wrap="square" anchor="ctr">
+            <a:spAutoFit/>
+          </a:bodyPr>
+          <a:lstStyle/>
+          <a:p>
+            <a:pPr algn="l"/>
+            <a:r>
+              <a:rPr sz="1700" b="1">
+                <a:solidFill>
+                  <a:srgbClr val="8F5A44"/>
+                </a:solidFill>
+              </a:rPr>
+              <a:t>★ Viajero Hostel &amp; Salsa School</a:t>
+            </a:r>
+          </a:p>
+          <a:p>
+            <a:pPr algn="l"/>
+            <a:r>
+              <a:rPr sz="1500" b="0">
+                <a:solidFill>
+                  <a:srgbClr val="463A32"/>
+                </a:solidFill>
+              </a:rPr>
+              <a:t>lidera con 77.6/100.</a:t>
+            </a:r>
+          </a:p>
+          <a:p>
+            <a:pPr algn="l"/>
+            <a:r>
+              <a:rPr sz="800" b="0">
+                <a:solidFill>
+                  <a:srgbClr val="463A32"/>
+                </a:solidFill>
+              </a:rPr>
+              <a:t/>
+            </a:r>
+          </a:p>
+          <a:p>
+            <a:pPr algn="l"/>
+            <a:r>
+              <a:rPr sz="1300" b="0">
+                <a:solidFill>
+                  <a:srgbClr val="463A32"/>
+                </a:solidFill>
+              </a:rPr>
+              <a:t>Puntaje propio (seguridad, amenidades, precio, cercanía, parqueo, social), no el rating externo.</a:t>
+            </a:r>
+          </a:p>
+        </p:txBody>
+      </p:sp>
+    </p:spTree>
+  </p:cSld>
+  <p:clrMapOvr>
+    <a:masterClrMapping/>
+  </p:clrMapOvr>
+</p:sld>
+</file>
+
+<file path=ppt/slides/slide6.xml><?xml version="1.0" encoding="utf-8"?>
+<p:sld xmlns:a="http://schemas.openxmlformats.org/drawingml/2006/main" xmlns:p="http://schemas.openxmlformats.org/presentationml/2006/main" xmlns:r="http://schemas.openxmlformats.org/officeDocument/2006/relationships">
+  <p:cSld>
+    <p:bg>
+      <p:bgPr>
+        <a:solidFill>
+          <a:srgbClr val="FCF5EC"/>
+        </a:solidFill>
+        <a:effectLst/>
+      </p:bgPr>
+    </p:bg>
+    <p:spTree>
+      <p:nvGrpSpPr>
+        <p:cNvPr id="1" name=""/>
+        <p:cNvGrpSpPr/>
+        <p:nvPr/>
+      </p:nvGrpSpPr>
+      <p:grpSpPr/>
+      <p:sp>
+        <p:nvSpPr>
+          <p:cNvPr id="2" name="Rounded Rectangle 1"/>
+          <p:cNvSpPr/>
+          <p:nvPr/>
+        </p:nvSpPr>
+        <p:spPr>
+          <a:xfrm>
+            <a:off x="365760" y="274320"/>
+            <a:ext cx="11457432" cy="749808"/>
+          </a:xfrm>
+          <a:prstGeom prst="roundRect">
+            <a:avLst>
+              <a:gd name="adj" fmla="val 50000"/>
+            </a:avLst>
+          </a:prstGeom>
+          <a:solidFill>
+            <a:srgbClr val="B5765C"/>
+          </a:solidFill>
+          <a:ln>
+            <a:noFill/>
+          </a:ln>
+          <a:effectLst>
+            <a:outerShdw blurRad="95000" dist="40000" dir="5400000" rotWithShape="0">
+              <a:srgbClr val="6E5B4E">
+                <a:alpha val="32000"/>
+              </a:srgbClr>
+            </a:outerShdw>
+          </a:effectLst>
+        </p:spPr>
+        <p:style>
+          <a:lnRef idx="1">
+            <a:schemeClr val="accent1"/>
+          </a:lnRef>
+          <a:fillRef idx="3">
+            <a:schemeClr val="accent1"/>
+          </a:fillRef>
+          <a:effectRef idx="2">
+            <a:schemeClr val="accent1"/>
+          </a:effectRef>
+          <a:fontRef idx="minor">
+            <a:schemeClr val="lt1"/>
+          </a:fontRef>
+        </p:style>
+        <p:txBody>
+          <a:bodyPr rtlCol="0" anchor="ctr"/>
+          <a:lstStyle/>
+          <a:p>
+            <a:pPr algn="ctr"/>
+          </a:p>
+        </p:txBody>
+      </p:sp>
+      <p:sp>
+        <p:nvSpPr>
+          <p:cNvPr id="3" name="TextBox 2"/>
+          <p:cNvSpPr txBox="1"/>
+          <p:nvPr/>
+        </p:nvSpPr>
+        <p:spPr>
+          <a:xfrm>
+            <a:off x="777240" y="274320"/>
+            <a:ext cx="10789920" cy="749808"/>
+          </a:xfrm>
+          <a:prstGeom prst="rect">
+            <a:avLst/>
+          </a:prstGeom>
+          <a:noFill/>
+        </p:spPr>
+        <p:txBody>
+          <a:bodyPr wrap="square" anchor="ctr">
+            <a:spAutoFit/>
+          </a:bodyPr>
+          <a:lstStyle/>
+          <a:p>
+            <a:pPr algn="l"/>
+            <a:r>
+              <a:rPr sz="2400" b="1">
+                <a:solidFill>
+                  <a:srgbClr val="FFFFFF"/>
+                </a:solidFill>
+              </a:rPr>
+              <a:t>🏨   Estadía — comparación</a:t>
+            </a:r>
+          </a:p>
+        </p:txBody>
+      </p:sp>
+      <p:sp>
+        <p:nvSpPr>
+          <p:cNvPr id="4" name="TextBox 3"/>
+          <p:cNvSpPr txBox="1"/>
+          <p:nvPr/>
+        </p:nvSpPr>
+        <p:spPr>
+          <a:xfrm>
+            <a:off x="548640" y="1143000"/>
+            <a:ext cx="11064240" cy="457200"/>
+          </a:xfrm>
+          <a:prstGeom prst="rect">
+            <a:avLst/>
+          </a:prstGeom>
+          <a:noFill/>
+        </p:spPr>
+        <p:txBody>
+          <a:bodyPr wrap="square" anchor="t">
+            <a:spAutoFit/>
+          </a:bodyPr>
+          <a:lstStyle/>
+          <a:p>
+            <a:pPr algn="l"/>
+            <a:r>
+              <a:rPr sz="1400" b="0">
+                <a:solidFill>
+                  <a:srgbClr val="463A32"/>
+                </a:solidFill>
+              </a:rPr>
+              <a:t>Ordenadas por nuestro puntaje. 'Por persona' = las 3 noches. Toca 'ver' para revisar cada una.</a:t>
+            </a:r>
+          </a:p>
+        </p:txBody>
+      </p:sp>
+      <p:graphicFrame>
+        <p:nvGraphicFramePr>
+          <p:cNvPr id="5" name="Table 4"/>
+          <p:cNvGraphicFramePr>
+            <a:graphicFrameLocks noGrp="1"/>
+          </p:cNvGraphicFramePr>
+          <p:nvPr/>
+        </p:nvGraphicFramePr>
+        <p:xfrm>
+          <a:off x="457200" y="1737360"/>
+          <a:ext cx="11274552" cy="4114800"/>
         </p:xfrm>
         <a:graphic>
           <a:graphicData uri="http://schemas.openxmlformats.org/drawingml/2006/table">
@@ -4774,23 +7955,26 @@
                 <a:tableStyleId>{5C22544A-7EE6-4342-B048-85BDC9FD1C3A}</a:tableStyleId>
               </a:tblPr>
               <a:tblGrid>
-                <a:gridCol w="3931920"/>
-                <a:gridCol w="1188720"/>
-                <a:gridCol w="5394960"/>
+                <a:gridCol w="3566160"/>
+                <a:gridCol w="2011680"/>
+                <a:gridCol w="1280160"/>
+                <a:gridCol w="1783080"/>
+                <a:gridCol w="1810512"/>
+                <a:gridCol w="822960"/>
               </a:tblGrid>
-              <a:tr h="535577">
+              <a:tr h="587828">
                 <a:tc>
                   <a:txBody>
                     <a:bodyPr/>
                     <a:lstStyle/>
                     <a:p>
                       <a:r>
-                        <a:rPr b="1" sz="1400">
+                        <a:rPr b="1" sz="1200">
                           <a:solidFill>
                             <a:srgbClr val="FFFFFF"/>
                           </a:solidFill>
                         </a:rPr>
-                        <a:t>Criterio</a:t>
+                        <a:t>Hostal</a:t>
                       </a:r>
                     </a:p>
                   </a:txBody>
@@ -4806,12 +7990,12 @@
                     <a:lstStyle/>
                     <a:p>
                       <a:r>
-                        <a:rPr b="1" sz="1400">
+                        <a:rPr b="1" sz="1200">
                           <a:solidFill>
                             <a:srgbClr val="FFFFFF"/>
                           </a:solidFill>
                         </a:rPr>
-                        <a:t>Peso</a:t>
+                        <a:t>Zona</a:t>
                       </a:r>
                     </a:p>
                   </a:txBody>
@@ -4827,12 +8011,75 @@
                     <a:lstStyle/>
                     <a:p>
                       <a:r>
-                        <a:rPr b="1" sz="1400">
+                        <a:rPr b="1" sz="1200">
                           <a:solidFill>
                             <a:srgbClr val="FFFFFF"/>
                           </a:solidFill>
                         </a:rPr>
-                        <a:t>Cómo se asigna la nota (de 1 a 5)</a:t>
+                        <a:t>Puntaje</a:t>
+                      </a:r>
+                    </a:p>
+                  </a:txBody>
+                  <a:tcPr>
+                    <a:solidFill>
+                      <a:srgbClr val="B5765C"/>
+                    </a:solidFill>
+                  </a:tcPr>
+                </a:tc>
+                <a:tc>
+                  <a:txBody>
+                    <a:bodyPr/>
+                    <a:lstStyle/>
+                    <a:p>
+                      <a:r>
+                        <a:rPr b="1" sz="1200">
+                          <a:solidFill>
+                            <a:srgbClr val="FFFFFF"/>
+                          </a:solidFill>
+                        </a:rPr>
+                        <a:t>Precio/noche</a:t>
+                      </a:r>
+                    </a:p>
+                  </a:txBody>
+                  <a:tcPr>
+                    <a:solidFill>
+                      <a:srgbClr val="B5765C"/>
+                    </a:solidFill>
+                  </a:tcPr>
+                </a:tc>
+                <a:tc>
+                  <a:txBody>
+                    <a:bodyPr/>
+                    <a:lstStyle/>
+                    <a:p>
+                      <a:r>
+                        <a:rPr b="1" sz="1200">
+                          <a:solidFill>
+                            <a:srgbClr val="FFFFFF"/>
+                          </a:solidFill>
+                        </a:rPr>
+                        <a:t>Por persona (3n)</a:t>
+                      </a:r>
+                    </a:p>
+                  </a:txBody>
+                  <a:tcPr>
+                    <a:solidFill>
+                      <a:srgbClr val="B5765C"/>
+                    </a:solidFill>
+                  </a:tcPr>
+                </a:tc>
+                <a:tc>
+                  <a:txBody>
+                    <a:bodyPr/>
+                    <a:lstStyle/>
+                    <a:p>
+                      <a:r>
+                        <a:rPr b="1" sz="1200">
+                          <a:solidFill>
+                            <a:srgbClr val="FFFFFF"/>
+                          </a:solidFill>
+                        </a:rPr>
+                        <a:t>Ver</a:t>
                       </a:r>
                     </a:p>
                   </a:txBody>
@@ -4843,19 +8090,306 @@
                   </a:tcPr>
                 </a:tc>
               </a:tr>
-              <a:tr h="535577">
+              <a:tr h="587828">
                 <a:tc>
                   <a:txBody>
                     <a:bodyPr/>
                     <a:lstStyle/>
                     <a:p>
                       <a:r>
-                        <a:rPr sz="1300">
+                        <a:rPr sz="1100">
                           <a:solidFill>
                             <a:srgbClr val="463A32"/>
                           </a:solidFill>
                         </a:rPr>
-                        <a:t>Seguridad del barrio</a:t>
+                        <a:t>Viajero Hostel &amp; Salsa School ★</a:t>
+                      </a:r>
+                    </a:p>
+                  </a:txBody>
+                  <a:tcPr>
+                    <a:solidFill>
+                      <a:srgbClr val="F0E0C6"/>
+                    </a:solidFill>
+                  </a:tcPr>
+                </a:tc>
+                <a:tc>
+                  <a:txBody>
+                    <a:bodyPr/>
+                    <a:lstStyle/>
+                    <a:p>
+                      <a:r>
+                        <a:rPr sz="1100">
+                          <a:solidFill>
+                            <a:srgbClr val="463A32"/>
+                          </a:solidFill>
+                        </a:rPr>
+                        <a:t>San Antonio</a:t>
+                      </a:r>
+                    </a:p>
+                  </a:txBody>
+                  <a:tcPr>
+                    <a:solidFill>
+                      <a:srgbClr val="F0E0C6"/>
+                    </a:solidFill>
+                  </a:tcPr>
+                </a:tc>
+                <a:tc>
+                  <a:txBody>
+                    <a:bodyPr/>
+                    <a:lstStyle/>
+                    <a:p>
+                      <a:pPr algn="ctr"/>
+                      <a:r>
+                        <a:rPr sz="1100">
+                          <a:solidFill>
+                            <a:srgbClr val="463A32"/>
+                          </a:solidFill>
+                        </a:rPr>
+                        <a:t>77.6</a:t>
+                      </a:r>
+                    </a:p>
+                  </a:txBody>
+                  <a:tcPr>
+                    <a:solidFill>
+                      <a:srgbClr val="F0E0C6"/>
+                    </a:solidFill>
+                  </a:tcPr>
+                </a:tc>
+                <a:tc>
+                  <a:txBody>
+                    <a:bodyPr/>
+                    <a:lstStyle/>
+                    <a:p>
+                      <a:pPr algn="ctr"/>
+                      <a:r>
+                        <a:rPr sz="1100">
+                          <a:solidFill>
+                            <a:srgbClr val="463A32"/>
+                          </a:solidFill>
+                        </a:rPr>
+                        <a:t>$84.094</a:t>
+                      </a:r>
+                    </a:p>
+                  </a:txBody>
+                  <a:tcPr>
+                    <a:solidFill>
+                      <a:srgbClr val="F0E0C6"/>
+                    </a:solidFill>
+                  </a:tcPr>
+                </a:tc>
+                <a:tc>
+                  <a:txBody>
+                    <a:bodyPr/>
+                    <a:lstStyle/>
+                    <a:p>
+                      <a:pPr algn="ctr"/>
+                      <a:r>
+                        <a:rPr sz="1100">
+                          <a:solidFill>
+                            <a:srgbClr val="463A32"/>
+                          </a:solidFill>
+                        </a:rPr>
+                        <a:t>$252.282</a:t>
+                      </a:r>
+                    </a:p>
+                  </a:txBody>
+                  <a:tcPr>
+                    <a:solidFill>
+                      <a:srgbClr val="F0E0C6"/>
+                    </a:solidFill>
+                  </a:tcPr>
+                </a:tc>
+                <a:tc>
+                  <a:txBody>
+                    <a:bodyPr/>
+                    <a:lstStyle/>
+                    <a:p>
+                      <a:pPr algn="ctr"/>
+                      <a:r>
+                        <a:rPr sz="1100" u="sng">
+                          <a:solidFill>
+                            <a:srgbClr val="8F5A44"/>
+                          </a:solidFill>
+                          <a:hlinkClick r:id="rId2"/>
+                        </a:rPr>
+                        <a:t>ver</a:t>
+                      </a:r>
+                    </a:p>
+                  </a:txBody>
+                  <a:tcPr>
+                    <a:solidFill>
+                      <a:srgbClr val="F0E0C6"/>
+                    </a:solidFill>
+                  </a:tcPr>
+                </a:tc>
+              </a:tr>
+              <a:tr h="587828">
+                <a:tc>
+                  <a:txBody>
+                    <a:bodyPr/>
+                    <a:lstStyle/>
+                    <a:p>
+                      <a:r>
+                        <a:rPr sz="1100">
+                          <a:solidFill>
+                            <a:srgbClr val="463A32"/>
+                          </a:solidFill>
+                        </a:rPr>
+                        <a:t>La Palmera Hostel</a:t>
+                      </a:r>
+                    </a:p>
+                  </a:txBody>
+                  <a:tcPr>
+                    <a:solidFill>
+                      <a:srgbClr val="F4E8DA"/>
+                    </a:solidFill>
+                  </a:tcPr>
+                </a:tc>
+                <a:tc>
+                  <a:txBody>
+                    <a:bodyPr/>
+                    <a:lstStyle/>
+                    <a:p>
+                      <a:r>
+                        <a:rPr sz="1100">
+                          <a:solidFill>
+                            <a:srgbClr val="463A32"/>
+                          </a:solidFill>
+                        </a:rPr>
+                        <a:t>San Antonio</a:t>
+                      </a:r>
+                    </a:p>
+                  </a:txBody>
+                  <a:tcPr>
+                    <a:solidFill>
+                      <a:srgbClr val="F4E8DA"/>
+                    </a:solidFill>
+                  </a:tcPr>
+                </a:tc>
+                <a:tc>
+                  <a:txBody>
+                    <a:bodyPr/>
+                    <a:lstStyle/>
+                    <a:p>
+                      <a:pPr algn="ctr"/>
+                      <a:r>
+                        <a:rPr sz="1100">
+                          <a:solidFill>
+                            <a:srgbClr val="463A32"/>
+                          </a:solidFill>
+                        </a:rPr>
+                        <a:t>75.8</a:t>
+                      </a:r>
+                    </a:p>
+                  </a:txBody>
+                  <a:tcPr>
+                    <a:solidFill>
+                      <a:srgbClr val="F4E8DA"/>
+                    </a:solidFill>
+                  </a:tcPr>
+                </a:tc>
+                <a:tc>
+                  <a:txBody>
+                    <a:bodyPr/>
+                    <a:lstStyle/>
+                    <a:p>
+                      <a:pPr algn="ctr"/>
+                      <a:r>
+                        <a:rPr sz="1100">
+                          <a:solidFill>
+                            <a:srgbClr val="463A32"/>
+                          </a:solidFill>
+                        </a:rPr>
+                        <a:t>$50.000</a:t>
+                      </a:r>
+                    </a:p>
+                  </a:txBody>
+                  <a:tcPr>
+                    <a:solidFill>
+                      <a:srgbClr val="F4E8DA"/>
+                    </a:solidFill>
+                  </a:tcPr>
+                </a:tc>
+                <a:tc>
+                  <a:txBody>
+                    <a:bodyPr/>
+                    <a:lstStyle/>
+                    <a:p>
+                      <a:pPr algn="ctr"/>
+                      <a:r>
+                        <a:rPr sz="1100">
+                          <a:solidFill>
+                            <a:srgbClr val="463A32"/>
+                          </a:solidFill>
+                        </a:rPr>
+                        <a:t>$150.000</a:t>
+                      </a:r>
+                    </a:p>
+                  </a:txBody>
+                  <a:tcPr>
+                    <a:solidFill>
+                      <a:srgbClr val="F4E8DA"/>
+                    </a:solidFill>
+                  </a:tcPr>
+                </a:tc>
+                <a:tc>
+                  <a:txBody>
+                    <a:bodyPr/>
+                    <a:lstStyle/>
+                    <a:p>
+                      <a:pPr algn="ctr"/>
+                      <a:r>
+                        <a:rPr sz="1100" u="sng">
+                          <a:solidFill>
+                            <a:srgbClr val="8F5A44"/>
+                          </a:solidFill>
+                          <a:hlinkClick r:id="rId3"/>
+                        </a:rPr>
+                        <a:t>ver</a:t>
+                      </a:r>
+                    </a:p>
+                  </a:txBody>
+                  <a:tcPr>
+                    <a:solidFill>
+                      <a:srgbClr val="F4E8DA"/>
+                    </a:solidFill>
+                  </a:tcPr>
+                </a:tc>
+              </a:tr>
+              <a:tr h="587828">
+                <a:tc>
+                  <a:txBody>
+                    <a:bodyPr/>
+                    <a:lstStyle/>
+                    <a:p>
+                      <a:r>
+                        <a:rPr sz="1100">
+                          <a:solidFill>
+                            <a:srgbClr val="463A32"/>
+                          </a:solidFill>
+                        </a:rPr>
+                        <a:t>Oasis Cali Hostel</a:t>
+                      </a:r>
+                    </a:p>
+                  </a:txBody>
+                  <a:tcPr>
+                    <a:solidFill>
+                      <a:srgbClr val="FFFFFF"/>
+                    </a:solidFill>
+                  </a:tcPr>
+                </a:tc>
+                <a:tc>
+                  <a:txBody>
+                    <a:bodyPr/>
+                    <a:lstStyle/>
+                    <a:p>
+                      <a:r>
+                        <a:rPr sz="1100">
+                          <a:solidFill>
+                            <a:srgbClr val="463A32"/>
+                          </a:solidFill>
+                        </a:rPr>
+                        <a:t>Granada</a:t>
                       </a:r>
                     </a:p>
                   </a:txBody>
@@ -4872,12 +8406,12 @@
                     <a:p>
                       <a:pPr algn="ctr"/>
                       <a:r>
-                        <a:rPr sz="1300" b="1">
+                        <a:rPr sz="1100">
                           <a:solidFill>
                             <a:srgbClr val="463A32"/>
                           </a:solidFill>
                         </a:rPr>
-                        <a:t>30%</a:t>
+                        <a:t>75.4</a:t>
                       </a:r>
                     </a:p>
                   </a:txBody>
@@ -4892,13 +8426,59 @@
                     <a:bodyPr/>
                     <a:lstStyle/>
                     <a:p>
+                      <a:pPr algn="ctr"/>
                       <a:r>
-                        <a:rPr sz="1300">
+                        <a:rPr sz="1100">
                           <a:solidFill>
                             <a:srgbClr val="463A32"/>
                           </a:solidFill>
                         </a:rPr>
-                        <a:t>Por zona (San Antonio / Granada / El Peñón = 5)</a:t>
+                        <a:t>$50.000</a:t>
+                      </a:r>
+                    </a:p>
+                  </a:txBody>
+                  <a:tcPr>
+                    <a:solidFill>
+                      <a:srgbClr val="FFFFFF"/>
+                    </a:solidFill>
+                  </a:tcPr>
+                </a:tc>
+                <a:tc>
+                  <a:txBody>
+                    <a:bodyPr/>
+                    <a:lstStyle/>
+                    <a:p>
+                      <a:pPr algn="ctr"/>
+                      <a:r>
+                        <a:rPr sz="1100">
+                          <a:solidFill>
+                            <a:srgbClr val="463A32"/>
+                          </a:solidFill>
+                        </a:rPr>
+                        <a:t>$150.000</a:t>
+                      </a:r>
+                    </a:p>
+                  </a:txBody>
+                  <a:tcPr>
+                    <a:solidFill>
+                      <a:srgbClr val="FFFFFF"/>
+                    </a:solidFill>
+                  </a:tcPr>
+                </a:tc>
+                <a:tc>
+                  <a:txBody>
+                    <a:bodyPr/>
+                    <a:lstStyle/>
+                    <a:p>
+                      <a:pPr algn="ctr"/>
+                      <a:r>
+                        <a:rPr sz="1100" u="sng">
+                          <a:solidFill>
+                            <a:srgbClr val="8F5A44"/>
+                          </a:solidFill>
+                          <a:hlinkClick r:id="rId4"/>
+                        </a:rPr>
+                        <a:t>ver</a:t>
                       </a:r>
                     </a:p>
                   </a:txBody>
@@ -4909,19 +8489,40 @@
                   </a:tcPr>
                 </a:tc>
               </a:tr>
-              <a:tr h="535577">
+              <a:tr h="587828">
                 <a:tc>
                   <a:txBody>
                     <a:bodyPr/>
                     <a:lstStyle/>
                     <a:p>
                       <a:r>
-                        <a:rPr sz="1300">
+                        <a:rPr sz="1100">
                           <a:solidFill>
                             <a:srgbClr val="463A32"/>
                           </a:solidFill>
                         </a:rPr>
-                        <a:t>Amenidades y comodidad</a:t>
+                        <a:t>La Chanca Hostel</a:t>
+                      </a:r>
+                    </a:p>
+                  </a:txBody>
+                  <a:tcPr>
+                    <a:solidFill>
+                      <a:srgbClr val="F4E8DA"/>
+                    </a:solidFill>
+                  </a:tcPr>
+                </a:tc>
+                <a:tc>
+                  <a:txBody>
+                    <a:bodyPr/>
+                    <a:lstStyle/>
+                    <a:p>
+                      <a:r>
+                        <a:rPr sz="1100">
+                          <a:solidFill>
+                            <a:srgbClr val="463A32"/>
+                          </a:solidFill>
+                        </a:rPr>
+                        <a:t>San Antonio</a:t>
                       </a:r>
                     </a:p>
                   </a:txBody>
@@ -4938,12 +8539,12 @@
                     <a:p>
                       <a:pPr algn="ctr"/>
                       <a:r>
-                        <a:rPr sz="1300" b="1">
+                        <a:rPr sz="1100">
                           <a:solidFill>
                             <a:srgbClr val="463A32"/>
                           </a:solidFill>
                         </a:rPr>
-                        <a:t>20%</a:t>
+                        <a:t>74.8</a:t>
                       </a:r>
                     </a:p>
                   </a:txBody>
@@ -4958,13 +8559,59 @@
                     <a:bodyPr/>
                     <a:lstStyle/>
                     <a:p>
+                      <a:pPr algn="ctr"/>
                       <a:r>
-                        <a:rPr sz="1300">
+                        <a:rPr sz="1100">
                           <a:solidFill>
                             <a:srgbClr val="463A32"/>
                           </a:solidFill>
                         </a:rPr>
-                        <a:t>Aire +2, piscina +2, cocina +1 (tope 5)</a:t>
+                        <a:t>$29.950</a:t>
+                      </a:r>
+                    </a:p>
+                  </a:txBody>
+                  <a:tcPr>
+                    <a:solidFill>
+                      <a:srgbClr val="F4E8DA"/>
+                    </a:solidFill>
+                  </a:tcPr>
+                </a:tc>
+                <a:tc>
+                  <a:txBody>
+                    <a:bodyPr/>
+                    <a:lstStyle/>
+                    <a:p>
+                      <a:pPr algn="ctr"/>
+                      <a:r>
+                        <a:rPr sz="1100">
+                          <a:solidFill>
+                            <a:srgbClr val="463A32"/>
+                          </a:solidFill>
+                        </a:rPr>
+                        <a:t>$89.850</a:t>
+                      </a:r>
+                    </a:p>
+                  </a:txBody>
+                  <a:tcPr>
+                    <a:solidFill>
+                      <a:srgbClr val="F4E8DA"/>
+                    </a:solidFill>
+                  </a:tcPr>
+                </a:tc>
+                <a:tc>
+                  <a:txBody>
+                    <a:bodyPr/>
+                    <a:lstStyle/>
+                    <a:p>
+                      <a:pPr algn="ctr"/>
+                      <a:r>
+                        <a:rPr sz="1100" u="sng">
+                          <a:solidFill>
+                            <a:srgbClr val="8F5A44"/>
+                          </a:solidFill>
+                          <a:hlinkClick r:id="rId5"/>
+                        </a:rPr>
+                        <a:t>ver</a:t>
                       </a:r>
                     </a:p>
                   </a:txBody>
@@ -4975,19 +8622,40 @@
                   </a:tcPr>
                 </a:tc>
               </a:tr>
-              <a:tr h="535577">
+              <a:tr h="587828">
                 <a:tc>
                   <a:txBody>
                     <a:bodyPr/>
                     <a:lstStyle/>
                     <a:p>
                       <a:r>
-                        <a:rPr sz="1300">
+                        <a:rPr sz="1100">
                           <a:solidFill>
                             <a:srgbClr val="463A32"/>
                           </a:solidFill>
                         </a:rPr>
-                        <a:t>Precio por persona</a:t>
+                        <a:t>Hostal Patio del Río</a:t>
+                      </a:r>
+                    </a:p>
+                  </a:txBody>
+                  <a:tcPr>
+                    <a:solidFill>
+                      <a:srgbClr val="FFFFFF"/>
+                    </a:solidFill>
+                  </a:tcPr>
+                </a:tc>
+                <a:tc>
+                  <a:txBody>
+                    <a:bodyPr/>
+                    <a:lstStyle/>
+                    <a:p>
+                      <a:r>
+                        <a:rPr sz="1100">
+                          <a:solidFill>
+                            <a:srgbClr val="463A32"/>
+                          </a:solidFill>
+                        </a:rPr>
+                        <a:t>Oeste (Cali)</a:t>
                       </a:r>
                     </a:p>
                   </a:txBody>
@@ -5004,12 +8672,12 @@
                     <a:p>
                       <a:pPr algn="ctr"/>
                       <a:r>
-                        <a:rPr sz="1300" b="1">
+                        <a:rPr sz="1100">
                           <a:solidFill>
                             <a:srgbClr val="463A32"/>
                           </a:solidFill>
                         </a:rPr>
-                        <a:t>20%</a:t>
+                        <a:t>72.8</a:t>
                       </a:r>
                     </a:p>
                   </a:txBody>
@@ -5024,13 +8692,59 @@
                     <a:bodyPr/>
                     <a:lstStyle/>
                     <a:p>
+                      <a:pPr algn="ctr"/>
                       <a:r>
-                        <a:rPr sz="1300">
+                        <a:rPr sz="1100">
                           <a:solidFill>
                             <a:srgbClr val="463A32"/>
                           </a:solidFill>
                         </a:rPr>
-                        <a:t>El más barato = 5; lineal hasta el más caro = 1</a:t>
+                        <a:t>$63.250</a:t>
+                      </a:r>
+                    </a:p>
+                  </a:txBody>
+                  <a:tcPr>
+                    <a:solidFill>
+                      <a:srgbClr val="FFFFFF"/>
+                    </a:solidFill>
+                  </a:tcPr>
+                </a:tc>
+                <a:tc>
+                  <a:txBody>
+                    <a:bodyPr/>
+                    <a:lstStyle/>
+                    <a:p>
+                      <a:pPr algn="ctr"/>
+                      <a:r>
+                        <a:rPr sz="1100">
+                          <a:solidFill>
+                            <a:srgbClr val="463A32"/>
+                          </a:solidFill>
+                        </a:rPr>
+                        <a:t>$189.750</a:t>
+                      </a:r>
+                    </a:p>
+                  </a:txBody>
+                  <a:tcPr>
+                    <a:solidFill>
+                      <a:srgbClr val="FFFFFF"/>
+                    </a:solidFill>
+                  </a:tcPr>
+                </a:tc>
+                <a:tc>
+                  <a:txBody>
+                    <a:bodyPr/>
+                    <a:lstStyle/>
+                    <a:p>
+                      <a:pPr algn="ctr"/>
+                      <a:r>
+                        <a:rPr sz="1100" u="sng">
+                          <a:solidFill>
+                            <a:srgbClr val="8F5A44"/>
+                          </a:solidFill>
+                          <a:hlinkClick r:id="rId6"/>
+                        </a:rPr>
+                        <a:t>ver</a:t>
                       </a:r>
                     </a:p>
                   </a:txBody>
@@ -5041,19 +8755,40 @@
                   </a:tcPr>
                 </a:tc>
               </a:tr>
-              <a:tr h="535577">
+              <a:tr h="587832">
                 <a:tc>
                   <a:txBody>
                     <a:bodyPr/>
                     <a:lstStyle/>
                     <a:p>
                       <a:r>
-                        <a:rPr sz="1300">
+                        <a:rPr sz="1100">
                           <a:solidFill>
                             <a:srgbClr val="463A32"/>
                           </a:solidFill>
                         </a:rPr>
-                        <a:t>Cercanía a zona turística</a:t>
+                        <a:t>Casa/Apto entero</a:t>
+                      </a:r>
+                    </a:p>
+                  </a:txBody>
+                  <a:tcPr>
+                    <a:solidFill>
+                      <a:srgbClr val="F4E8DA"/>
+                    </a:solidFill>
+                  </a:tcPr>
+                </a:tc>
+                <a:tc>
+                  <a:txBody>
+                    <a:bodyPr/>
+                    <a:lstStyle/>
+                    <a:p>
+                      <a:r>
+                        <a:rPr sz="1100">
+                          <a:solidFill>
+                            <a:srgbClr val="463A32"/>
+                          </a:solidFill>
+                        </a:rPr>
+                        <a:t>San Antonio (Oeste)</a:t>
                       </a:r>
                     </a:p>
                   </a:txBody>
@@ -5070,122 +8805,12 @@
                     <a:p>
                       <a:pPr algn="ctr"/>
                       <a:r>
-                        <a:rPr sz="1300" b="1">
+                        <a:rPr sz="1100">
                           <a:solidFill>
                             <a:srgbClr val="463A32"/>
                           </a:solidFill>
                         </a:rPr>
-                        <a:t>12%</a:t>
-                      </a:r>
-                    </a:p>
-                  </a:txBody>
-                  <a:tcPr>
-                    <a:solidFill>
-                      <a:srgbClr val="F4E8DA"/>
-                    </a:solidFill>
-                  </a:tcPr>
-                </a:tc>
-                <a:tc>
-                  <a:txBody>
-                    <a:bodyPr/>
-                    <a:lstStyle/>
-                    <a:p>
-                      <a:r>
-                        <a:rPr sz="1300">
-                          <a:solidFill>
-                            <a:srgbClr val="463A32"/>
-                          </a:solidFill>
-                        </a:rPr>
-                        <a:t>Qué tan a pie queda de lo turístico</a:t>
-                      </a:r>
-                    </a:p>
-                  </a:txBody>
-                  <a:tcPr>
-                    <a:solidFill>
-                      <a:srgbClr val="F4E8DA"/>
-                    </a:solidFill>
-                  </a:tcPr>
-                </a:tc>
-              </a:tr>
-              <a:tr h="535577">
-                <a:tc>
-                  <a:txBody>
-                    <a:bodyPr/>
-                    <a:lstStyle/>
-                    <a:p>
-                      <a:r>
-                        <a:rPr sz="1300">
-                          <a:solidFill>
-                            <a:srgbClr val="463A32"/>
-                          </a:solidFill>
-                        </a:rPr>
-                        <a:t>Parqueadero</a:t>
-                      </a:r>
-                    </a:p>
-                  </a:txBody>
-                  <a:tcPr>
-                    <a:solidFill>
-                      <a:srgbClr val="FFFFFF"/>
-                    </a:solidFill>
-                  </a:tcPr>
-                </a:tc>
-                <a:tc>
-                  <a:txBody>
-                    <a:bodyPr/>
-                    <a:lstStyle/>
-                    <a:p>
-                      <a:pPr algn="ctr"/>
-                      <a:r>
-                        <a:rPr sz="1300" b="1">
-                          <a:solidFill>
-                            <a:srgbClr val="463A32"/>
-                          </a:solidFill>
-                        </a:rPr>
-                        <a:t>10%</a:t>
-                      </a:r>
-                    </a:p>
-                  </a:txBody>
-                  <a:tcPr>
-                    <a:solidFill>
-                      <a:srgbClr val="FFFFFF"/>
-                    </a:solidFill>
-                  </a:tcPr>
-                </a:tc>
-                <a:tc>
-                  <a:txBody>
-                    <a:bodyPr/>
-                    <a:lstStyle/>
-                    <a:p>
-                      <a:r>
-                        <a:rPr sz="1300">
-                          <a:solidFill>
-                            <a:srgbClr val="463A32"/>
-                          </a:solidFill>
-                        </a:rPr>
-                        <a:t>Disponibilidad estimada (baja certeza)</a:t>
-                      </a:r>
-                    </a:p>
-                  </a:txBody>
-                  <a:tcPr>
-                    <a:solidFill>
-                      <a:srgbClr val="FFFFFF"/>
-                    </a:solidFill>
-                  </a:tcPr>
-                </a:tc>
-              </a:tr>
-              <a:tr h="535577">
-                <a:tc>
-                  <a:txBody>
-                    <a:bodyPr/>
-                    <a:lstStyle/>
-                    <a:p>
-                      <a:r>
-                        <a:rPr sz="1300">
-                          <a:solidFill>
-                            <a:srgbClr val="463A32"/>
-                          </a:solidFill>
-                        </a:rPr>
-                        <a:t>Ambiente social</a:t>
+                        <a:t>71.2</a:t>
                       </a:r>
                     </a:p>
                   </a:txBody>
@@ -5202,12 +8827,12 @@
                     <a:p>
                       <a:pPr algn="ctr"/>
                       <a:r>
-                        <a:rPr sz="1300" b="1">
+                        <a:rPr sz="1100">
                           <a:solidFill>
                             <a:srgbClr val="463A32"/>
                           </a:solidFill>
                         </a:rPr>
-                        <a:t>8%</a:t>
+                        <a:t>—</a:t>
                       </a:r>
                     </a:p>
                   </a:txBody>
@@ -5222,13 +8847,37 @@
                     <a:bodyPr/>
                     <a:lstStyle/>
                     <a:p>
+                      <a:pPr algn="ctr"/>
                       <a:r>
-                        <a:rPr sz="1300">
+                        <a:rPr sz="1100">
                           <a:solidFill>
                             <a:srgbClr val="463A32"/>
                           </a:solidFill>
                         </a:rPr>
-                        <a:t>Facilidad para conocer gente</a:t>
+                        <a:t>$300.000</a:t>
+                      </a:r>
+                    </a:p>
+                  </a:txBody>
+                  <a:tcPr>
+                    <a:solidFill>
+                      <a:srgbClr val="F4E8DA"/>
+                    </a:solidFill>
+                  </a:tcPr>
+                </a:tc>
+                <a:tc>
+                  <a:txBody>
+                    <a:bodyPr/>
+                    <a:lstStyle/>
+                    <a:p>
+                      <a:pPr algn="ctr"/>
+                      <a:r>
+                        <a:rPr sz="1100" u="sng">
+                          <a:solidFill>
+                            <a:srgbClr val="8F5A44"/>
+                          </a:solidFill>
+                          <a:hlinkClick r:id="rId7"/>
+                        </a:rPr>
+                        <a:t>ver</a:t>
                       </a:r>
                     </a:p>
                   </a:txBody>
@@ -5251,13 +8900,13 @@
 </p:sld>
 </file>
 
-<file path=ppt/slides/slide6.xml><?xml version="1.0" encoding="utf-8"?>
+<file path=ppt/slides/slide7.xml><?xml version="1.0" encoding="utf-8"?>
 <p:sld xmlns:a="http://schemas.openxmlformats.org/drawingml/2006/main" xmlns:p="http://schemas.openxmlformats.org/presentationml/2006/main" xmlns:r="http://schemas.openxmlformats.org/officeDocument/2006/relationships">
   <p:cSld>
     <p:bg>
       <p:bgPr>
         <a:solidFill>
-          <a:srgbClr val="FFFFFF"/>
+          <a:srgbClr val="FCF5EC"/>
         </a:solidFill>
         <a:effectLst/>
       </p:bgPr>
@@ -5271,17 +8920,19 @@
       <p:grpSpPr/>
       <p:sp>
         <p:nvSpPr>
-          <p:cNvPr id="2" name="Rectangle 1"/>
+          <p:cNvPr id="2" name="Rounded Rectangle 1"/>
           <p:cNvSpPr/>
           <p:nvPr/>
         </p:nvSpPr>
         <p:spPr>
           <a:xfrm>
-            <a:off x="0" y="0"/>
-            <a:ext cx="12191695" cy="960120"/>
-          </a:xfrm>
-          <a:prstGeom prst="rect">
-            <a:avLst/>
+            <a:off x="365760" y="274320"/>
+            <a:ext cx="11457432" cy="749808"/>
+          </a:xfrm>
+          <a:prstGeom prst="roundRect">
+            <a:avLst>
+              <a:gd name="adj" fmla="val 50000"/>
+            </a:avLst>
           </a:prstGeom>
           <a:solidFill>
             <a:srgbClr val="B5765C"/>
@@ -5289,6 +8940,13 @@
           <a:ln>
             <a:noFill/>
           </a:ln>
+          <a:effectLst>
+            <a:outerShdw blurRad="95000" dist="40000" dir="5400000" rotWithShape="0">
+              <a:srgbClr val="6E5B4E">
+                <a:alpha val="32000"/>
+              </a:srgbClr>
+            </a:outerShdw>
+          </a:effectLst>
         </p:spPr>
         <p:style>
           <a:lnRef idx="1">
@@ -5305,49 +8963,23 @@
           </a:fontRef>
         </p:style>
         <p:txBody>
-          <a:bodyPr rtlCol="0" anchor="ctr" wrap="square"/>
+          <a:bodyPr rtlCol="0" anchor="ctr"/>
           <a:lstStyle/>
           <a:p>
             <a:pPr algn="ctr"/>
-            <a:r>
-              <a:rPr sz="2600" b="1">
-                <a:solidFill>
-                  <a:srgbClr val="FFFFFF"/>
-                </a:solidFill>
-              </a:rPr>
-              <a:t>   Estadía — los finalistas</a:t>
-            </a:r>
-          </a:p>
-        </p:txBody>
-      </p:sp>
-      <p:graphicFrame>
-        <p:nvGraphicFramePr>
-          <p:cNvPr id="3" name="Chart 2"/>
-          <p:cNvGraphicFramePr>
-            <a:graphicFrameLocks noGrp="1"/>
-          </p:cNvGraphicFramePr>
-          <p:nvPr/>
-        </p:nvGraphicFramePr>
-        <p:xfrm>
-          <a:off x="640080" y="1280160"/>
-          <a:ext cx="7680960" cy="4937760"/>
-        </p:xfrm>
-        <a:graphic>
-          <a:graphicData uri="http://schemas.openxmlformats.org/drawingml/2006/chart">
-            <c:chart xmlns:c="http://schemas.openxmlformats.org/drawingml/2006/chart" r:id="rId2"/>
-          </a:graphicData>
-        </a:graphic>
-      </p:graphicFrame>
-      <p:sp>
-        <p:nvSpPr>
-          <p:cNvPr id="4" name="TextBox 3"/>
+          </a:p>
+        </p:txBody>
+      </p:sp>
+      <p:sp>
+        <p:nvSpPr>
+          <p:cNvPr id="3" name="TextBox 2"/>
           <p:cNvSpPr txBox="1"/>
           <p:nvPr/>
         </p:nvSpPr>
         <p:spPr>
           <a:xfrm>
-            <a:off x="8503920" y="1737360"/>
-            <a:ext cx="3383280" cy="4023360"/>
+            <a:off x="777240" y="274320"/>
+            <a:ext cx="10789920" cy="749808"/>
           </a:xfrm>
           <a:prstGeom prst="rect">
             <a:avLst/>
@@ -5355,91 +8987,52 @@
           <a:noFill/>
         </p:spPr>
         <p:txBody>
-          <a:bodyPr wrap="square">
+          <a:bodyPr wrap="square" anchor="ctr">
             <a:spAutoFit/>
           </a:bodyPr>
           <a:lstStyle/>
           <a:p>
             <a:pPr algn="l"/>
             <a:r>
-              <a:rPr sz="1600" b="0">
-                <a:solidFill>
-                  <a:srgbClr val="8F5A44"/>
-                </a:solidFill>
-              </a:rPr>
-              <a:t>Viajero Hostel &amp; Salsa School lidera con 77.6/100.</a:t>
-            </a:r>
-          </a:p>
-          <a:p>
-            <a:pPr algn="l"/>
-            <a:r>
-              <a:rPr sz="1600" b="0">
-                <a:solidFill>
-                  <a:srgbClr val="8F5A44"/>
-                </a:solidFill>
-              </a:rPr>
-              <a:t/>
-            </a:r>
-          </a:p>
-          <a:p>
-            <a:pPr algn="l"/>
-            <a:r>
-              <a:rPr sz="1600" b="0">
-                <a:solidFill>
-                  <a:srgbClr val="8F5A44"/>
-                </a:solidFill>
-              </a:rPr>
-              <a:t>Puntaje propio (seguridad 30%, amenidades, precio, cercanía, parqueo, social), no la calificación externa.</a:t>
-            </a:r>
-          </a:p>
-        </p:txBody>
-      </p:sp>
-    </p:spTree>
-  </p:cSld>
-  <p:clrMapOvr>
-    <a:masterClrMapping/>
-  </p:clrMapOvr>
-</p:sld>
-</file>
-
-<file path=ppt/slides/slide7.xml><?xml version="1.0" encoding="utf-8"?>
-<p:sld xmlns:a="http://schemas.openxmlformats.org/drawingml/2006/main" xmlns:p="http://schemas.openxmlformats.org/presentationml/2006/main" xmlns:r="http://schemas.openxmlformats.org/officeDocument/2006/relationships">
-  <p:cSld>
-    <p:bg>
-      <p:bgPr>
-        <a:solidFill>
-          <a:srgbClr val="FFFFFF"/>
-        </a:solidFill>
-        <a:effectLst/>
-      </p:bgPr>
-    </p:bg>
-    <p:spTree>
-      <p:nvGrpSpPr>
-        <p:cNvPr id="1" name=""/>
-        <p:cNvGrpSpPr/>
-        <p:nvPr/>
-      </p:nvGrpSpPr>
-      <p:grpSpPr/>
-      <p:sp>
-        <p:nvSpPr>
-          <p:cNvPr id="2" name="Rectangle 1"/>
+              <a:rPr sz="2400" b="1">
+                <a:solidFill>
+                  <a:srgbClr val="FFFFFF"/>
+                </a:solidFill>
+              </a:rPr>
+              <a:t>🌙   La llegada es de noche</a:t>
+            </a:r>
+          </a:p>
+        </p:txBody>
+      </p:sp>
+      <p:sp>
+        <p:nvSpPr>
+          <p:cNvPr id="4" name="Rounded Rectangle 3"/>
           <p:cNvSpPr/>
           <p:nvPr/>
         </p:nvSpPr>
         <p:spPr>
           <a:xfrm>
-            <a:off x="0" y="0"/>
-            <a:ext cx="12191695" cy="960120"/>
-          </a:xfrm>
-          <a:prstGeom prst="rect">
-            <a:avLst/>
+            <a:off x="502920" y="1508760"/>
+            <a:ext cx="3566160" cy="3566160"/>
+          </a:xfrm>
+          <a:prstGeom prst="roundRect">
+            <a:avLst>
+              <a:gd name="adj" fmla="val 12000"/>
+            </a:avLst>
           </a:prstGeom>
           <a:solidFill>
-            <a:srgbClr val="B5765C"/>
+            <a:srgbClr val="FFFFFF"/>
           </a:solidFill>
           <a:ln>
             <a:noFill/>
           </a:ln>
+          <a:effectLst>
+            <a:outerShdw blurRad="95000" dist="40000" dir="5400000" rotWithShape="0">
+              <a:srgbClr val="6E5B4E">
+                <a:alpha val="32000"/>
+              </a:srgbClr>
+            </a:outerShdw>
+          </a:effectLst>
         </p:spPr>
         <p:style>
           <a:lnRef idx="1">
@@ -5456,31 +9049,74 @@
           </a:fontRef>
         </p:style>
         <p:txBody>
-          <a:bodyPr rtlCol="0" anchor="ctr" wrap="square"/>
+          <a:bodyPr rtlCol="0" anchor="ctr"/>
           <a:lstStyle/>
           <a:p>
             <a:pPr algn="ctr"/>
-            <a:r>
-              <a:rPr sz="2600" b="1">
-                <a:solidFill>
-                  <a:srgbClr val="FFFFFF"/>
-                </a:solidFill>
-              </a:rPr>
-              <a:t>   ¿El carro en el aeropuerto o en la ciudad?</a:t>
-            </a:r>
-          </a:p>
-        </p:txBody>
-      </p:sp>
-      <p:sp>
-        <p:nvSpPr>
-          <p:cNvPr id="3" name="TextBox 2"/>
+          </a:p>
+        </p:txBody>
+      </p:sp>
+      <p:sp>
+        <p:nvSpPr>
+          <p:cNvPr id="5" name="Oval 4"/>
+          <p:cNvSpPr/>
+          <p:nvPr/>
+        </p:nvSpPr>
+        <p:spPr>
+          <a:xfrm>
+            <a:off x="1828800" y="1828800"/>
+            <a:ext cx="914400" cy="914400"/>
+          </a:xfrm>
+          <a:prstGeom prst="ellipse">
+            <a:avLst/>
+          </a:prstGeom>
+          <a:solidFill>
+            <a:srgbClr val="F0E0C6"/>
+          </a:solidFill>
+          <a:ln>
+            <a:noFill/>
+          </a:ln>
+        </p:spPr>
+        <p:style>
+          <a:lnRef idx="1">
+            <a:schemeClr val="accent1"/>
+          </a:lnRef>
+          <a:fillRef idx="3">
+            <a:schemeClr val="accent1"/>
+          </a:fillRef>
+          <a:effectRef idx="2">
+            <a:schemeClr val="accent1"/>
+          </a:effectRef>
+          <a:fontRef idx="minor">
+            <a:schemeClr val="lt1"/>
+          </a:fontRef>
+        </p:style>
+        <p:txBody>
+          <a:bodyPr rtlCol="0" anchor="ctr"/>
+          <a:lstStyle/>
+          <a:p>
+            <a:pPr algn="ctr"/>
+            <a:r>
+              <a:rPr sz="3000">
+                <a:solidFill>
+                  <a:srgbClr val="463A32"/>
+                </a:solidFill>
+              </a:rPr>
+              <a:t>🕘</a:t>
+            </a:r>
+          </a:p>
+        </p:txBody>
+      </p:sp>
+      <p:sp>
+        <p:nvSpPr>
+          <p:cNvPr id="6" name="TextBox 5"/>
           <p:cNvSpPr txBox="1"/>
           <p:nvPr/>
         </p:nvSpPr>
         <p:spPr>
           <a:xfrm>
-            <a:off x="822960" y="1280160"/>
-            <a:ext cx="10515600" cy="1005840"/>
+            <a:off x="777240" y="2880360"/>
+            <a:ext cx="3017520" cy="2103120"/>
           </a:xfrm>
           <a:prstGeom prst="rect">
             <a:avLst/>
@@ -5488,33 +9124,160 @@
           <a:noFill/>
         </p:spPr>
         <p:txBody>
-          <a:bodyPr wrap="square">
+          <a:bodyPr wrap="square" anchor="t">
             <a:spAutoFit/>
           </a:bodyPr>
           <a:lstStyle/>
           <a:p>
-            <a:pPr algn="l"/>
-            <a:r>
-              <a:rPr sz="3000" b="1">
+            <a:pPr algn="ctr"/>
+            <a:r>
+              <a:rPr sz="1800" b="1">
                 <a:solidFill>
                   <a:srgbClr val="8F5A44"/>
                 </a:solidFill>
               </a:rPr>
-              <a:t>En el aeropuerto.</a:t>
-            </a:r>
-          </a:p>
-        </p:txBody>
-      </p:sp>
-      <p:sp>
-        <p:nvSpPr>
-          <p:cNvPr id="4" name="TextBox 3"/>
+              <a:t>3 días limpios</a:t>
+            </a:r>
+          </a:p>
+          <a:p>
+            <a:pPr algn="ctr"/>
+            <a:r>
+              <a:rPr sz="600" b="0">
+                <a:solidFill>
+                  <a:srgbClr val="463A32"/>
+                </a:solidFill>
+              </a:rPr>
+              <a:t/>
+            </a:r>
+          </a:p>
+          <a:p>
+            <a:pPr algn="ctr"/>
+            <a:r>
+              <a:rPr sz="1350" b="0">
+                <a:solidFill>
+                  <a:srgbClr val="463A32"/>
+                </a:solidFill>
+              </a:rPr>
+              <a:t>Recoger esa noche y devolver ~7 pm del 2: por debajo de las 72 h.</a:t>
+            </a:r>
+          </a:p>
+        </p:txBody>
+      </p:sp>
+      <p:sp>
+        <p:nvSpPr>
+          <p:cNvPr id="7" name="Rounded Rectangle 6"/>
+          <p:cNvSpPr/>
+          <p:nvPr/>
+        </p:nvSpPr>
+        <p:spPr>
+          <a:xfrm>
+            <a:off x="4233672" y="1508760"/>
+            <a:ext cx="3566160" cy="3566160"/>
+          </a:xfrm>
+          <a:prstGeom prst="roundRect">
+            <a:avLst>
+              <a:gd name="adj" fmla="val 12000"/>
+            </a:avLst>
+          </a:prstGeom>
+          <a:solidFill>
+            <a:srgbClr val="FFFFFF"/>
+          </a:solidFill>
+          <a:ln w="25400">
+            <a:solidFill>
+              <a:srgbClr val="D9A75E"/>
+            </a:solidFill>
+          </a:ln>
+          <a:effectLst>
+            <a:outerShdw blurRad="95000" dist="40000" dir="5400000" rotWithShape="0">
+              <a:srgbClr val="6E5B4E">
+                <a:alpha val="32000"/>
+              </a:srgbClr>
+            </a:outerShdw>
+          </a:effectLst>
+        </p:spPr>
+        <p:style>
+          <a:lnRef idx="1">
+            <a:schemeClr val="accent1"/>
+          </a:lnRef>
+          <a:fillRef idx="3">
+            <a:schemeClr val="accent1"/>
+          </a:fillRef>
+          <a:effectRef idx="2">
+            <a:schemeClr val="accent1"/>
+          </a:effectRef>
+          <a:fontRef idx="minor">
+            <a:schemeClr val="lt1"/>
+          </a:fontRef>
+        </p:style>
+        <p:txBody>
+          <a:bodyPr rtlCol="0" anchor="ctr"/>
+          <a:lstStyle/>
+          <a:p>
+            <a:pPr algn="ctr"/>
+          </a:p>
+        </p:txBody>
+      </p:sp>
+      <p:sp>
+        <p:nvSpPr>
+          <p:cNvPr id="8" name="Oval 7"/>
+          <p:cNvSpPr/>
+          <p:nvPr/>
+        </p:nvSpPr>
+        <p:spPr>
+          <a:xfrm>
+            <a:off x="5559552" y="1828800"/>
+            <a:ext cx="914400" cy="914400"/>
+          </a:xfrm>
+          <a:prstGeom prst="ellipse">
+            <a:avLst/>
+          </a:prstGeom>
+          <a:solidFill>
+            <a:srgbClr val="F0E0C6"/>
+          </a:solidFill>
+          <a:ln>
+            <a:noFill/>
+          </a:ln>
+        </p:spPr>
+        <p:style>
+          <a:lnRef idx="1">
+            <a:schemeClr val="accent1"/>
+          </a:lnRef>
+          <a:fillRef idx="3">
+            <a:schemeClr val="accent1"/>
+          </a:fillRef>
+          <a:effectRef idx="2">
+            <a:schemeClr val="accent1"/>
+          </a:effectRef>
+          <a:fontRef idx="minor">
+            <a:schemeClr val="lt1"/>
+          </a:fontRef>
+        </p:style>
+        <p:txBody>
+          <a:bodyPr rtlCol="0" anchor="ctr"/>
+          <a:lstStyle/>
+          <a:p>
+            <a:pPr algn="ctr"/>
+            <a:r>
+              <a:rPr sz="3000">
+                <a:solidFill>
+                  <a:srgbClr val="463A32"/>
+                </a:solidFill>
+              </a:rPr>
+              <a:t>✅</a:t>
+            </a:r>
+          </a:p>
+        </p:txBody>
+      </p:sp>
+      <p:sp>
+        <p:nvSpPr>
+          <p:cNvPr id="9" name="TextBox 8"/>
           <p:cNvSpPr txBox="1"/>
           <p:nvPr/>
         </p:nvSpPr>
         <p:spPr>
           <a:xfrm>
-            <a:off x="822960" y="2377440"/>
-            <a:ext cx="10515600" cy="3657600"/>
+            <a:off x="4507992" y="2880360"/>
+            <a:ext cx="3017520" cy="2103120"/>
           </a:xfrm>
           <a:prstGeom prst="rect">
             <a:avLst/>
@@ -5522,96 +9285,234 @@
           <a:noFill/>
         </p:spPr>
         <p:txBody>
-          <a:bodyPr wrap="square">
+          <a:bodyPr wrap="square" anchor="t">
             <a:spAutoFit/>
           </a:bodyPr>
           <a:lstStyle/>
           <a:p>
-            <a:pPr algn="l"/>
-            <a:r>
-              <a:rPr sz="1800" b="0">
+            <a:pPr algn="ctr"/>
+            <a:r>
+              <a:rPr sz="1800" b="1">
+                <a:solidFill>
+                  <a:srgbClr val="8F5A44"/>
+                </a:solidFill>
+              </a:rPr>
+              <a:t>Local = cuadra</a:t>
+            </a:r>
+          </a:p>
+          <a:p>
+            <a:pPr algn="ctr"/>
+            <a:r>
+              <a:rPr sz="600" b="0">
                 <a:solidFill>
                   <a:srgbClr val="463A32"/>
                 </a:solidFill>
               </a:rPr>
-              <a:t>No hay que elegir entre barato y cómodo. Hay agencias locales —más económicas que las marcas grandes— que tienen oficina en el propio aeropuerto (Farallones) o llevan el carro hasta allá</a:t>
-            </a:r>
-          </a:p>
-          <a:p>
-            <a:pPr algn="l"/>
-            <a:r>
-              <a:rPr sz="1800" b="0">
+              <a:t/>
+            </a:r>
+          </a:p>
+          <a:p>
+            <a:pPr algn="ctr"/>
+            <a:r>
+              <a:rPr sz="1350" b="0">
                 <a:solidFill>
                   <a:srgbClr val="463A32"/>
                 </a:solidFill>
               </a:rPr>
-              <a:t>sin costo si el alquiler es de 3 días o más (WayCarCali).</a:t>
-            </a:r>
-          </a:p>
-          <a:p>
-            <a:pPr algn="l"/>
-            <a:r>
-              <a:rPr sz="1800" b="0">
+              <a:t>Farallones / WayCarCali entregan el carro coordinando el vuelo de las 8 pm.</a:t>
+            </a:r>
+          </a:p>
+        </p:txBody>
+      </p:sp>
+      <p:sp>
+        <p:nvSpPr>
+          <p:cNvPr id="10" name="Rounded Rectangle 9"/>
+          <p:cNvSpPr/>
+          <p:nvPr/>
+        </p:nvSpPr>
+        <p:spPr>
+          <a:xfrm>
+            <a:off x="7964424" y="1508760"/>
+            <a:ext cx="3566160" cy="3566160"/>
+          </a:xfrm>
+          <a:prstGeom prst="roundRect">
+            <a:avLst>
+              <a:gd name="adj" fmla="val 12000"/>
+            </a:avLst>
+          </a:prstGeom>
+          <a:solidFill>
+            <a:srgbClr val="FFFFFF"/>
+          </a:solidFill>
+          <a:ln>
+            <a:noFill/>
+          </a:ln>
+          <a:effectLst>
+            <a:outerShdw blurRad="95000" dist="40000" dir="5400000" rotWithShape="0">
+              <a:srgbClr val="6E5B4E">
+                <a:alpha val="32000"/>
+              </a:srgbClr>
+            </a:outerShdw>
+          </a:effectLst>
+        </p:spPr>
+        <p:style>
+          <a:lnRef idx="1">
+            <a:schemeClr val="accent1"/>
+          </a:lnRef>
+          <a:fillRef idx="3">
+            <a:schemeClr val="accent1"/>
+          </a:fillRef>
+          <a:effectRef idx="2">
+            <a:schemeClr val="accent1"/>
+          </a:effectRef>
+          <a:fontRef idx="minor">
+            <a:schemeClr val="lt1"/>
+          </a:fontRef>
+        </p:style>
+        <p:txBody>
+          <a:bodyPr rtlCol="0" anchor="ctr"/>
+          <a:lstStyle/>
+          <a:p>
+            <a:pPr algn="ctr"/>
+          </a:p>
+        </p:txBody>
+      </p:sp>
+      <p:sp>
+        <p:nvSpPr>
+          <p:cNvPr id="11" name="Oval 10"/>
+          <p:cNvSpPr/>
+          <p:nvPr/>
+        </p:nvSpPr>
+        <p:spPr>
+          <a:xfrm>
+            <a:off x="9290304" y="1828800"/>
+            <a:ext cx="914400" cy="914400"/>
+          </a:xfrm>
+          <a:prstGeom prst="ellipse">
+            <a:avLst/>
+          </a:prstGeom>
+          <a:solidFill>
+            <a:srgbClr val="F0E0C6"/>
+          </a:solidFill>
+          <a:ln>
+            <a:noFill/>
+          </a:ln>
+        </p:spPr>
+        <p:style>
+          <a:lnRef idx="1">
+            <a:schemeClr val="accent1"/>
+          </a:lnRef>
+          <a:fillRef idx="3">
+            <a:schemeClr val="accent1"/>
+          </a:fillRef>
+          <a:effectRef idx="2">
+            <a:schemeClr val="accent1"/>
+          </a:effectRef>
+          <a:fontRef idx="minor">
+            <a:schemeClr val="lt1"/>
+          </a:fontRef>
+        </p:style>
+        <p:txBody>
+          <a:bodyPr rtlCol="0" anchor="ctr"/>
+          <a:lstStyle/>
+          <a:p>
+            <a:pPr algn="ctr"/>
+            <a:r>
+              <a:rPr sz="3000">
                 <a:solidFill>
                   <a:srgbClr val="463A32"/>
                 </a:solidFill>
               </a:rPr>
+              <a:t>⚠️</a:t>
+            </a:r>
+          </a:p>
+        </p:txBody>
+      </p:sp>
+      <p:sp>
+        <p:nvSpPr>
+          <p:cNvPr id="12" name="TextBox 11"/>
+          <p:cNvSpPr txBox="1"/>
+          <p:nvPr/>
+        </p:nvSpPr>
+        <p:spPr>
+          <a:xfrm>
+            <a:off x="8238744" y="2880360"/>
+            <a:ext cx="3017520" cy="2103120"/>
+          </a:xfrm>
+          <a:prstGeom prst="rect">
+            <a:avLst/>
+          </a:prstGeom>
+          <a:noFill/>
+        </p:spPr>
+        <p:txBody>
+          <a:bodyPr wrap="square" anchor="t">
+            <a:spAutoFit/>
+          </a:bodyPr>
+          <a:lstStyle/>
+          <a:p>
+            <a:pPr algn="ctr"/>
+            <a:r>
+              <a:rPr sz="1800" b="1">
+                <a:solidFill>
+                  <a:srgbClr val="8F5A44"/>
+                </a:solidFill>
+              </a:rPr>
+              <a:t>Mostrador = ojo</a:t>
+            </a:r>
+          </a:p>
+          <a:p>
+            <a:pPr algn="ctr"/>
+            <a:r>
+              <a:rPr sz="600" b="0">
+                <a:solidFill>
+                  <a:srgbClr val="463A32"/>
+                </a:solidFill>
+              </a:rPr>
               <a:t/>
             </a:r>
           </a:p>
           <a:p>
-            <a:pPr algn="l"/>
-            <a:r>
-              <a:rPr sz="1800" b="0">
+            <a:pPr algn="ctr"/>
+            <a:r>
+              <a:rPr sz="1350" b="0">
                 <a:solidFill>
                   <a:srgbClr val="463A32"/>
                 </a:solidFill>
               </a:rPr>
-              <a:t>Se aterriza, se recoge el carro ahí mismo y se devuelve en el aeropuerto antes de volar.</a:t>
-            </a:r>
-          </a:p>
-          <a:p>
-            <a:pPr algn="l"/>
-            <a:r>
-              <a:rPr sz="1800" b="0">
-                <a:solidFill>
-                  <a:srgbClr val="463A32"/>
-                </a:solidFill>
-              </a:rPr>
-              <a:t>Ir a la ciudad a buscarlo solo sumaría un taxi y tiempo, sin ahorrar nada.</a:t>
-            </a:r>
-          </a:p>
-          <a:p>
-            <a:pPr algn="l"/>
-            <a:r>
-              <a:rPr sz="1800" b="0">
-                <a:solidFill>
-                  <a:srgbClr val="463A32"/>
-                </a:solidFill>
-              </a:rPr>
-              <a:t/>
-            </a:r>
-          </a:p>
-          <a:p>
-            <a:pPr algn="l"/>
-            <a:r>
-              <a:rPr sz="1800" b="0">
-                <a:solidFill>
-                  <a:srgbClr val="463A32"/>
-                </a:solidFill>
-              </a:rPr>
-              <a:t>El carro se cobra por días de 24 h; conservarlo hasta el vuelo de la noche suma un cuarto día,</a:t>
-            </a:r>
-          </a:p>
-          <a:p>
-            <a:pPr algn="l"/>
-            <a:r>
-              <a:rPr sz="1800" b="0">
-                <a:solidFill>
-                  <a:srgbClr val="463A32"/>
-                </a:solidFill>
-              </a:rPr>
-              <a:t>pero cubre el tramo entre dejar el hostal y volar, con las maletas encima.</a:t>
+              <a:t>Alamo / Localiza: más baratos, pero cierran ~10 pm. Reservar fuera de horario (24 h).</a:t>
+            </a:r>
+          </a:p>
+        </p:txBody>
+      </p:sp>
+      <p:sp>
+        <p:nvSpPr>
+          <p:cNvPr id="13" name="TextBox 12"/>
+          <p:cNvSpPr txBox="1"/>
+          <p:nvPr/>
+        </p:nvSpPr>
+        <p:spPr>
+          <a:xfrm>
+            <a:off x="548640" y="5303520"/>
+            <a:ext cx="11064240" cy="548640"/>
+          </a:xfrm>
+          <a:prstGeom prst="rect">
+            <a:avLst/>
+          </a:prstGeom>
+          <a:noFill/>
+        </p:spPr>
+        <p:txBody>
+          <a:bodyPr wrap="square" anchor="t">
+            <a:spAutoFit/>
+          </a:bodyPr>
+          <a:lstStyle/>
+          <a:p>
+            <a:pPr algn="ctr"/>
+            <a:r>
+              <a:rPr sz="1300" b="0">
+                <a:solidFill>
+                  <a:srgbClr val="8A7A6E"/>
+                </a:solidFill>
+              </a:rPr>
+              <a:t>Red de seguridad: los taxis oficiales del aeropuerto operan 24/7 (distintivo amarillo, tarifados).</a:t>
             </a:r>
           </a:p>
         </p:txBody>
@@ -5630,7 +9531,7 @@
     <p:bg>
       <p:bgPr>
         <a:solidFill>
-          <a:srgbClr val="FFFFFF"/>
+          <a:srgbClr val="FCF5EC"/>
         </a:solidFill>
         <a:effectLst/>
       </p:bgPr>
@@ -5644,17 +9545,19 @@
       <p:grpSpPr/>
       <p:sp>
         <p:nvSpPr>
-          <p:cNvPr id="2" name="Rectangle 1"/>
+          <p:cNvPr id="2" name="Rounded Rectangle 1"/>
           <p:cNvSpPr/>
           <p:nvPr/>
         </p:nvSpPr>
         <p:spPr>
           <a:xfrm>
-            <a:off x="0" y="0"/>
-            <a:ext cx="12191695" cy="960120"/>
-          </a:xfrm>
-          <a:prstGeom prst="rect">
-            <a:avLst/>
+            <a:off x="365760" y="274320"/>
+            <a:ext cx="11457432" cy="749808"/>
+          </a:xfrm>
+          <a:prstGeom prst="roundRect">
+            <a:avLst>
+              <a:gd name="adj" fmla="val 50000"/>
+            </a:avLst>
           </a:prstGeom>
           <a:solidFill>
             <a:srgbClr val="B5765C"/>
@@ -5662,6 +9565,13 @@
           <a:ln>
             <a:noFill/>
           </a:ln>
+          <a:effectLst>
+            <a:outerShdw blurRad="95000" dist="40000" dir="5400000" rotWithShape="0">
+              <a:srgbClr val="6E5B4E">
+                <a:alpha val="32000"/>
+              </a:srgbClr>
+            </a:outerShdw>
+          </a:effectLst>
         </p:spPr>
         <p:style>
           <a:lnRef idx="1">
@@ -5678,49 +9588,23 @@
           </a:fontRef>
         </p:style>
         <p:txBody>
-          <a:bodyPr rtlCol="0" anchor="ctr" wrap="square"/>
+          <a:bodyPr rtlCol="0" anchor="ctr"/>
           <a:lstStyle/>
           <a:p>
             <a:pPr algn="ctr"/>
-            <a:r>
-              <a:rPr sz="2600" b="1">
-                <a:solidFill>
-                  <a:srgbClr val="FFFFFF"/>
-                </a:solidFill>
-              </a:rPr>
-              <a:t>   Cuánto carro llevar</a:t>
-            </a:r>
-          </a:p>
-        </p:txBody>
-      </p:sp>
-      <p:graphicFrame>
-        <p:nvGraphicFramePr>
-          <p:cNvPr id="3" name="Chart 2"/>
-          <p:cNvGraphicFramePr>
-            <a:graphicFrameLocks noGrp="1"/>
-          </p:cNvGraphicFramePr>
-          <p:nvPr/>
-        </p:nvGraphicFramePr>
-        <p:xfrm>
-          <a:off x="640080" y="1280160"/>
-          <a:ext cx="7498079" cy="4937760"/>
-        </p:xfrm>
-        <a:graphic>
-          <a:graphicData uri="http://schemas.openxmlformats.org/drawingml/2006/chart">
-            <c:chart xmlns:c="http://schemas.openxmlformats.org/drawingml/2006/chart" r:id="rId2"/>
-          </a:graphicData>
-        </a:graphic>
-      </p:graphicFrame>
-      <p:sp>
-        <p:nvSpPr>
-          <p:cNvPr id="4" name="TextBox 3"/>
+          </a:p>
+        </p:txBody>
+      </p:sp>
+      <p:sp>
+        <p:nvSpPr>
+          <p:cNvPr id="3" name="TextBox 2"/>
           <p:cNvSpPr txBox="1"/>
           <p:nvPr/>
         </p:nvSpPr>
         <p:spPr>
           <a:xfrm>
-            <a:off x="8321040" y="1645920"/>
-            <a:ext cx="3566160" cy="4206240"/>
+            <a:off x="777240" y="274320"/>
+            <a:ext cx="10789920" cy="749808"/>
           </a:xfrm>
           <a:prstGeom prst="rect">
             <a:avLst/>
@@ -5728,63 +9612,595 @@
           <a:noFill/>
         </p:spPr>
         <p:txBody>
-          <a:bodyPr wrap="square">
+          <a:bodyPr wrap="square" anchor="ctr">
             <a:spAutoFit/>
           </a:bodyPr>
           <a:lstStyle/>
           <a:p>
             <a:pPr algn="l"/>
             <a:r>
-              <a:rPr sz="1600" b="0">
+              <a:rPr sz="2400" b="1">
+                <a:solidFill>
+                  <a:srgbClr val="FFFFFF"/>
+                </a:solidFill>
+              </a:rPr>
+              <a:t>🚗   Cómo moverse — tres opciones</a:t>
+            </a:r>
+          </a:p>
+        </p:txBody>
+      </p:sp>
+      <p:sp>
+        <p:nvSpPr>
+          <p:cNvPr id="4" name="Rounded Rectangle 3"/>
+          <p:cNvSpPr/>
+          <p:nvPr/>
+        </p:nvSpPr>
+        <p:spPr>
+          <a:xfrm>
+            <a:off x="502920" y="1554480"/>
+            <a:ext cx="3566160" cy="4114800"/>
+          </a:xfrm>
+          <a:prstGeom prst="roundRect">
+            <a:avLst>
+              <a:gd name="adj" fmla="val 12000"/>
+            </a:avLst>
+          </a:prstGeom>
+          <a:solidFill>
+            <a:srgbClr val="F0E0C6"/>
+          </a:solidFill>
+          <a:ln w="25400">
+            <a:solidFill>
+              <a:srgbClr val="D9A75E"/>
+            </a:solidFill>
+          </a:ln>
+          <a:effectLst>
+            <a:outerShdw blurRad="95000" dist="40000" dir="5400000" rotWithShape="0">
+              <a:srgbClr val="6E5B4E">
+                <a:alpha val="32000"/>
+              </a:srgbClr>
+            </a:outerShdw>
+          </a:effectLst>
+        </p:spPr>
+        <p:style>
+          <a:lnRef idx="1">
+            <a:schemeClr val="accent1"/>
+          </a:lnRef>
+          <a:fillRef idx="3">
+            <a:schemeClr val="accent1"/>
+          </a:fillRef>
+          <a:effectRef idx="2">
+            <a:schemeClr val="accent1"/>
+          </a:effectRef>
+          <a:fontRef idx="minor">
+            <a:schemeClr val="lt1"/>
+          </a:fontRef>
+        </p:style>
+        <p:txBody>
+          <a:bodyPr rtlCol="0" anchor="ctr"/>
+          <a:lstStyle/>
+          <a:p>
+            <a:pPr algn="ctr"/>
+          </a:p>
+        </p:txBody>
+      </p:sp>
+      <p:sp>
+        <p:nvSpPr>
+          <p:cNvPr id="5" name="Rounded Rectangle 4"/>
+          <p:cNvSpPr/>
+          <p:nvPr/>
+        </p:nvSpPr>
+        <p:spPr>
+          <a:xfrm>
+            <a:off x="1508760" y="1325880"/>
+            <a:ext cx="1554480" cy="457200"/>
+          </a:xfrm>
+          <a:prstGeom prst="roundRect">
+            <a:avLst>
+              <a:gd name="adj" fmla="val 50000"/>
+            </a:avLst>
+          </a:prstGeom>
+          <a:solidFill>
+            <a:srgbClr val="D9A75E"/>
+          </a:solidFill>
+          <a:ln>
+            <a:noFill/>
+          </a:ln>
+        </p:spPr>
+        <p:style>
+          <a:lnRef idx="1">
+            <a:schemeClr val="accent1"/>
+          </a:lnRef>
+          <a:fillRef idx="3">
+            <a:schemeClr val="accent1"/>
+          </a:fillRef>
+          <a:effectRef idx="2">
+            <a:schemeClr val="accent1"/>
+          </a:effectRef>
+          <a:fontRef idx="minor">
+            <a:schemeClr val="lt1"/>
+          </a:fontRef>
+        </p:style>
+        <p:txBody>
+          <a:bodyPr rtlCol="0" anchor="ctr"/>
+          <a:lstStyle/>
+          <a:p>
+            <a:pPr algn="ctr"/>
+          </a:p>
+        </p:txBody>
+      </p:sp>
+      <p:sp>
+        <p:nvSpPr>
+          <p:cNvPr id="6" name="TextBox 5"/>
+          <p:cNvSpPr txBox="1"/>
+          <p:nvPr/>
+        </p:nvSpPr>
+        <p:spPr>
+          <a:xfrm>
+            <a:off x="1508760" y="1325880"/>
+            <a:ext cx="1554480" cy="457200"/>
+          </a:xfrm>
+          <a:prstGeom prst="rect">
+            <a:avLst/>
+          </a:prstGeom>
+          <a:noFill/>
+        </p:spPr>
+        <p:txBody>
+          <a:bodyPr wrap="square" anchor="ctr">
+            <a:spAutoFit/>
+          </a:bodyPr>
+          <a:lstStyle/>
+          <a:p>
+            <a:pPr algn="ctr"/>
+            <a:r>
+              <a:rPr sz="1200" b="1">
+                <a:solidFill>
+                  <a:srgbClr val="463A32"/>
+                </a:solidFill>
+              </a:rPr>
+              <a:t>★ Recomendado</a:t>
+            </a:r>
+          </a:p>
+        </p:txBody>
+      </p:sp>
+      <p:sp>
+        <p:nvSpPr>
+          <p:cNvPr id="7" name="TextBox 6"/>
+          <p:cNvSpPr txBox="1"/>
+          <p:nvPr/>
+        </p:nvSpPr>
+        <p:spPr>
+          <a:xfrm>
+            <a:off x="777240" y="1920240"/>
+            <a:ext cx="3017520" cy="731520"/>
+          </a:xfrm>
+          <a:prstGeom prst="rect">
+            <a:avLst/>
+          </a:prstGeom>
+          <a:noFill/>
+        </p:spPr>
+        <p:txBody>
+          <a:bodyPr wrap="square" anchor="t">
+            <a:spAutoFit/>
+          </a:bodyPr>
+          <a:lstStyle/>
+          <a:p>
+            <a:pPr algn="ctr"/>
+            <a:r>
+              <a:rPr sz="1800" b="1">
                 <a:solidFill>
                   <a:srgbClr val="8F5A44"/>
                 </a:solidFill>
               </a:rPr>
-              <a:t>★ Recomendado: carro propio todo el viaje, $150.000 por persona.</a:t>
-            </a:r>
-          </a:p>
-          <a:p>
-            <a:pPr algn="l"/>
-            <a:r>
-              <a:rPr sz="1600" b="0">
+              <a:t>Carro local (entrega)</a:t>
+            </a:r>
+          </a:p>
+        </p:txBody>
+      </p:sp>
+      <p:sp>
+        <p:nvSpPr>
+          <p:cNvPr id="8" name="TextBox 7"/>
+          <p:cNvSpPr txBox="1"/>
+          <p:nvPr/>
+        </p:nvSpPr>
+        <p:spPr>
+          <a:xfrm>
+            <a:off x="777240" y="2743200"/>
+            <a:ext cx="3017520" cy="1005840"/>
+          </a:xfrm>
+          <a:prstGeom prst="rect">
+            <a:avLst/>
+          </a:prstGeom>
+          <a:noFill/>
+        </p:spPr>
+        <p:txBody>
+          <a:bodyPr wrap="square" anchor="t">
+            <a:spAutoFit/>
+          </a:bodyPr>
+          <a:lstStyle/>
+          <a:p>
+            <a:pPr algn="ctr"/>
+            <a:r>
+              <a:rPr sz="3400" b="1">
+                <a:solidFill>
+                  <a:srgbClr val="D9A75E"/>
+                </a:solidFill>
+              </a:rPr>
+              <a:t>$200.000</a:t>
+            </a:r>
+          </a:p>
+          <a:p>
+            <a:pPr algn="ctr"/>
+            <a:r>
+              <a:rPr sz="1300" b="0">
+                <a:solidFill>
+                  <a:srgbClr val="8A7A6E"/>
+                </a:solidFill>
+              </a:rPr>
+              <a:t>por persona</a:t>
+            </a:r>
+          </a:p>
+        </p:txBody>
+      </p:sp>
+      <p:sp>
+        <p:nvSpPr>
+          <p:cNvPr id="9" name="TextBox 8"/>
+          <p:cNvSpPr txBox="1"/>
+          <p:nvPr/>
+        </p:nvSpPr>
+        <p:spPr>
+          <a:xfrm>
+            <a:off x="822960" y="4069080"/>
+            <a:ext cx="2926080" cy="1463040"/>
+          </a:xfrm>
+          <a:prstGeom prst="rect">
+            <a:avLst/>
+          </a:prstGeom>
+          <a:noFill/>
+        </p:spPr>
+        <p:txBody>
+          <a:bodyPr wrap="square" anchor="t">
+            <a:spAutoFit/>
+          </a:bodyPr>
+          <a:lstStyle/>
+          <a:p>
+            <a:pPr algn="ctr"/>
+            <a:r>
+              <a:rPr sz="1350" b="0">
+                <a:solidFill>
+                  <a:srgbClr val="463A32"/>
+                </a:solidFill>
+              </a:rPr>
+              <a:t>Cuadra con la llegada de noche; libertad para salir de Cali.</a:t>
+            </a:r>
+          </a:p>
+        </p:txBody>
+      </p:sp>
+      <p:sp>
+        <p:nvSpPr>
+          <p:cNvPr id="10" name="Rounded Rectangle 9"/>
+          <p:cNvSpPr/>
+          <p:nvPr/>
+        </p:nvSpPr>
+        <p:spPr>
+          <a:xfrm>
+            <a:off x="4233672" y="1554480"/>
+            <a:ext cx="3566160" cy="4114800"/>
+          </a:xfrm>
+          <a:prstGeom prst="roundRect">
+            <a:avLst>
+              <a:gd name="adj" fmla="val 12000"/>
+            </a:avLst>
+          </a:prstGeom>
+          <a:solidFill>
+            <a:srgbClr val="FFFFFF"/>
+          </a:solidFill>
+          <a:ln>
+            <a:noFill/>
+          </a:ln>
+          <a:effectLst>
+            <a:outerShdw blurRad="95000" dist="40000" dir="5400000" rotWithShape="0">
+              <a:srgbClr val="6E5B4E">
+                <a:alpha val="32000"/>
+              </a:srgbClr>
+            </a:outerShdw>
+          </a:effectLst>
+        </p:spPr>
+        <p:style>
+          <a:lnRef idx="1">
+            <a:schemeClr val="accent1"/>
+          </a:lnRef>
+          <a:fillRef idx="3">
+            <a:schemeClr val="accent1"/>
+          </a:fillRef>
+          <a:effectRef idx="2">
+            <a:schemeClr val="accent1"/>
+          </a:effectRef>
+          <a:fontRef idx="minor">
+            <a:schemeClr val="lt1"/>
+          </a:fontRef>
+        </p:style>
+        <p:txBody>
+          <a:bodyPr rtlCol="0" anchor="ctr"/>
+          <a:lstStyle/>
+          <a:p>
+            <a:pPr algn="ctr"/>
+          </a:p>
+        </p:txBody>
+      </p:sp>
+      <p:sp>
+        <p:nvSpPr>
+          <p:cNvPr id="11" name="TextBox 10"/>
+          <p:cNvSpPr txBox="1"/>
+          <p:nvPr/>
+        </p:nvSpPr>
+        <p:spPr>
+          <a:xfrm>
+            <a:off x="4507992" y="1920240"/>
+            <a:ext cx="3017520" cy="731520"/>
+          </a:xfrm>
+          <a:prstGeom prst="rect">
+            <a:avLst/>
+          </a:prstGeom>
+          <a:noFill/>
+        </p:spPr>
+        <p:txBody>
+          <a:bodyPr wrap="square" anchor="t">
+            <a:spAutoFit/>
+          </a:bodyPr>
+          <a:lstStyle/>
+          <a:p>
+            <a:pPr algn="ctr"/>
+            <a:r>
+              <a:rPr sz="1800" b="1">
                 <a:solidFill>
                   <a:srgbClr val="8F5A44"/>
                 </a:solidFill>
               </a:rPr>
-              <a:t/>
-            </a:r>
-          </a:p>
-          <a:p>
-            <a:pPr algn="l"/>
-            <a:r>
-              <a:rPr sz="1600" b="0">
+              <a:t>Mostrador (Kayak)</a:t>
+            </a:r>
+          </a:p>
+        </p:txBody>
+      </p:sp>
+      <p:sp>
+        <p:nvSpPr>
+          <p:cNvPr id="12" name="TextBox 11"/>
+          <p:cNvSpPr txBox="1"/>
+          <p:nvPr/>
+        </p:nvSpPr>
+        <p:spPr>
+          <a:xfrm>
+            <a:off x="4507992" y="2743200"/>
+            <a:ext cx="3017520" cy="1005840"/>
+          </a:xfrm>
+          <a:prstGeom prst="rect">
+            <a:avLst/>
+          </a:prstGeom>
+          <a:noFill/>
+        </p:spPr>
+        <p:txBody>
+          <a:bodyPr wrap="square" anchor="t">
+            <a:spAutoFit/>
+          </a:bodyPr>
+          <a:lstStyle/>
+          <a:p>
+            <a:pPr algn="ctr"/>
+            <a:r>
+              <a:rPr sz="3400" b="1">
+                <a:solidFill>
+                  <a:srgbClr val="D9A75E"/>
+                </a:solidFill>
+              </a:rPr>
+              <a:t>$180.000</a:t>
+            </a:r>
+          </a:p>
+          <a:p>
+            <a:pPr algn="ctr"/>
+            <a:r>
+              <a:rPr sz="1300" b="0">
+                <a:solidFill>
+                  <a:srgbClr val="8A7A6E"/>
+                </a:solidFill>
+              </a:rPr>
+              <a:t>por persona</a:t>
+            </a:r>
+          </a:p>
+        </p:txBody>
+      </p:sp>
+      <p:sp>
+        <p:nvSpPr>
+          <p:cNvPr id="13" name="TextBox 12"/>
+          <p:cNvSpPr txBox="1"/>
+          <p:nvPr/>
+        </p:nvSpPr>
+        <p:spPr>
+          <a:xfrm>
+            <a:off x="4553712" y="4069080"/>
+            <a:ext cx="2926080" cy="1463040"/>
+          </a:xfrm>
+          <a:prstGeom prst="rect">
+            <a:avLst/>
+          </a:prstGeom>
+          <a:noFill/>
+        </p:spPr>
+        <p:txBody>
+          <a:bodyPr wrap="square" anchor="t">
+            <a:spAutoFit/>
+          </a:bodyPr>
+          <a:lstStyle/>
+          <a:p>
+            <a:pPr algn="ctr"/>
+            <a:r>
+              <a:rPr sz="1350" b="0">
+                <a:solidFill>
+                  <a:srgbClr val="463A32"/>
+                </a:solidFill>
+              </a:rPr>
+              <a:t>Más barato, pero el mostrador cierra ~10 pm.</a:t>
+            </a:r>
+          </a:p>
+        </p:txBody>
+      </p:sp>
+      <p:sp>
+        <p:nvSpPr>
+          <p:cNvPr id="14" name="Rounded Rectangle 13"/>
+          <p:cNvSpPr/>
+          <p:nvPr/>
+        </p:nvSpPr>
+        <p:spPr>
+          <a:xfrm>
+            <a:off x="7964424" y="1554480"/>
+            <a:ext cx="3566160" cy="4114800"/>
+          </a:xfrm>
+          <a:prstGeom prst="roundRect">
+            <a:avLst>
+              <a:gd name="adj" fmla="val 12000"/>
+            </a:avLst>
+          </a:prstGeom>
+          <a:solidFill>
+            <a:srgbClr val="FFFFFF"/>
+          </a:solidFill>
+          <a:ln>
+            <a:noFill/>
+          </a:ln>
+          <a:effectLst>
+            <a:outerShdw blurRad="95000" dist="40000" dir="5400000" rotWithShape="0">
+              <a:srgbClr val="6E5B4E">
+                <a:alpha val="32000"/>
+              </a:srgbClr>
+            </a:outerShdw>
+          </a:effectLst>
+        </p:spPr>
+        <p:style>
+          <a:lnRef idx="1">
+            <a:schemeClr val="accent1"/>
+          </a:lnRef>
+          <a:fillRef idx="3">
+            <a:schemeClr val="accent1"/>
+          </a:fillRef>
+          <a:effectRef idx="2">
+            <a:schemeClr val="accent1"/>
+          </a:effectRef>
+          <a:fontRef idx="minor">
+            <a:schemeClr val="lt1"/>
+          </a:fontRef>
+        </p:style>
+        <p:txBody>
+          <a:bodyPr rtlCol="0" anchor="ctr"/>
+          <a:lstStyle/>
+          <a:p>
+            <a:pPr algn="ctr"/>
+          </a:p>
+        </p:txBody>
+      </p:sp>
+      <p:sp>
+        <p:nvSpPr>
+          <p:cNvPr id="15" name="TextBox 14"/>
+          <p:cNvSpPr txBox="1"/>
+          <p:nvPr/>
+        </p:nvSpPr>
+        <p:spPr>
+          <a:xfrm>
+            <a:off x="8238744" y="1920240"/>
+            <a:ext cx="3017520" cy="731520"/>
+          </a:xfrm>
+          <a:prstGeom prst="rect">
+            <a:avLst/>
+          </a:prstGeom>
+          <a:noFill/>
+        </p:spPr>
+        <p:txBody>
+          <a:bodyPr wrap="square" anchor="t">
+            <a:spAutoFit/>
+          </a:bodyPr>
+          <a:lstStyle/>
+          <a:p>
+            <a:pPr algn="ctr"/>
+            <a:r>
+              <a:rPr sz="1800" b="1">
                 <a:solidFill>
                   <a:srgbClr val="8F5A44"/>
                 </a:solidFill>
               </a:rPr>
-              <a:t>Ahorro máximo sin carro propio: $125.000.</a:t>
-            </a:r>
-          </a:p>
-          <a:p>
-            <a:pPr algn="l"/>
-            <a:r>
-              <a:rPr sz="1600" b="0">
-                <a:solidFill>
-                  <a:srgbClr val="8F5A44"/>
-                </a:solidFill>
-              </a:rPr>
-              <a:t/>
-            </a:r>
-          </a:p>
-          <a:p>
-            <a:pPr algn="l"/>
-            <a:r>
-              <a:rPr sz="1600" b="0">
-                <a:solidFill>
-                  <a:srgbClr val="8F5A44"/>
-                </a:solidFill>
-              </a:rPr>
-              <a:t>El mostrador de las marcas grandes costaría casi el doble: no hace falta.</a:t>
+              <a:t>Sin carro propio</a:t>
+            </a:r>
+          </a:p>
+        </p:txBody>
+      </p:sp>
+      <p:sp>
+        <p:nvSpPr>
+          <p:cNvPr id="16" name="TextBox 15"/>
+          <p:cNvSpPr txBox="1"/>
+          <p:nvPr/>
+        </p:nvSpPr>
+        <p:spPr>
+          <a:xfrm>
+            <a:off x="8238744" y="2743200"/>
+            <a:ext cx="3017520" cy="1005840"/>
+          </a:xfrm>
+          <a:prstGeom prst="rect">
+            <a:avLst/>
+          </a:prstGeom>
+          <a:noFill/>
+        </p:spPr>
+        <p:txBody>
+          <a:bodyPr wrap="square" anchor="t">
+            <a:spAutoFit/>
+          </a:bodyPr>
+          <a:lstStyle/>
+          <a:p>
+            <a:pPr algn="ctr"/>
+            <a:r>
+              <a:rPr sz="3400" b="1">
+                <a:solidFill>
+                  <a:srgbClr val="D9A75E"/>
+                </a:solidFill>
+              </a:rPr>
+              <a:t>$125.000</a:t>
+            </a:r>
+          </a:p>
+          <a:p>
+            <a:pPr algn="ctr"/>
+            <a:r>
+              <a:rPr sz="1300" b="0">
+                <a:solidFill>
+                  <a:srgbClr val="8A7A6E"/>
+                </a:solidFill>
+              </a:rPr>
+              <a:t>por persona</a:t>
+            </a:r>
+          </a:p>
+        </p:txBody>
+      </p:sp>
+      <p:sp>
+        <p:nvSpPr>
+          <p:cNvPr id="17" name="TextBox 16"/>
+          <p:cNvSpPr txBox="1"/>
+          <p:nvPr/>
+        </p:nvSpPr>
+        <p:spPr>
+          <a:xfrm>
+            <a:off x="8284464" y="4069080"/>
+            <a:ext cx="2926080" cy="1463040"/>
+          </a:xfrm>
+          <a:prstGeom prst="rect">
+            <a:avLst/>
+          </a:prstGeom>
+          <a:noFill/>
+        </p:spPr>
+        <p:txBody>
+          <a:bodyPr wrap="square" anchor="t">
+            <a:spAutoFit/>
+          </a:bodyPr>
+          <a:lstStyle/>
+          <a:p>
+            <a:pPr algn="ctr"/>
+            <a:r>
+              <a:rPr sz="1350" b="0">
+                <a:solidFill>
+                  <a:srgbClr val="463A32"/>
+                </a:solidFill>
+              </a:rPr>
+              <a:t>Lo más barato: taxis + una van con conductor para el paseo.</a:t>
             </a:r>
           </a:p>
         </p:txBody>
@@ -5803,7 +10219,7 @@
     <p:bg>
       <p:bgPr>
         <a:solidFill>
-          <a:srgbClr val="B5765C"/>
+          <a:srgbClr val="FCF5EC"/>
         </a:solidFill>
         <a:effectLst/>
       </p:bgPr>
@@ -5817,58 +10233,33 @@
       <p:grpSpPr/>
       <p:sp>
         <p:nvSpPr>
-          <p:cNvPr id="2" name="TextBox 1"/>
-          <p:cNvSpPr txBox="1"/>
-          <p:nvPr/>
-        </p:nvSpPr>
-        <p:spPr>
-          <a:xfrm>
-            <a:off x="731520" y="548640"/>
-            <a:ext cx="10698480" cy="822960"/>
-          </a:xfrm>
-          <a:prstGeom prst="rect">
-            <a:avLst/>
-          </a:prstGeom>
-          <a:noFill/>
-        </p:spPr>
-        <p:txBody>
-          <a:bodyPr wrap="square">
-            <a:spAutoFit/>
-          </a:bodyPr>
-          <a:lstStyle/>
-          <a:p>
-            <a:pPr algn="l"/>
-            <a:r>
-              <a:rPr sz="3200" b="1">
-                <a:solidFill>
-                  <a:srgbClr val="FFFFFF"/>
-                </a:solidFill>
-              </a:rPr>
-              <a:t>La recomendación</a:t>
-            </a:r>
-          </a:p>
-        </p:txBody>
-      </p:sp>
-      <p:sp>
-        <p:nvSpPr>
-          <p:cNvPr id="3" name="Rectangle 2"/>
+          <p:cNvPr id="2" name="Rounded Rectangle 1"/>
           <p:cNvSpPr/>
           <p:nvPr/>
         </p:nvSpPr>
         <p:spPr>
           <a:xfrm>
-            <a:off x="731520" y="1645920"/>
-            <a:ext cx="10698480" cy="1143000"/>
-          </a:xfrm>
-          <a:prstGeom prst="rect">
-            <a:avLst/>
+            <a:off x="365760" y="274320"/>
+            <a:ext cx="11457432" cy="749808"/>
+          </a:xfrm>
+          <a:prstGeom prst="roundRect">
+            <a:avLst>
+              <a:gd name="adj" fmla="val 50000"/>
+            </a:avLst>
           </a:prstGeom>
           <a:solidFill>
-            <a:srgbClr val="D9A75E"/>
+            <a:srgbClr val="B5765C"/>
           </a:solidFill>
           <a:ln>
             <a:noFill/>
           </a:ln>
+          <a:effectLst>
+            <a:outerShdw blurRad="95000" dist="40000" dir="5400000" rotWithShape="0">
+              <a:srgbClr val="6E5B4E">
+                <a:alpha val="32000"/>
+              </a:srgbClr>
+            </a:outerShdw>
+          </a:effectLst>
         </p:spPr>
         <p:style>
           <a:lnRef idx="1">
@@ -5885,17 +10276,43 @@
           </a:fontRef>
         </p:style>
         <p:txBody>
-          <a:bodyPr rtlCol="0" anchor="ctr" wrap="square"/>
+          <a:bodyPr rtlCol="0" anchor="ctr"/>
           <a:lstStyle/>
           <a:p>
             <a:pPr algn="ctr"/>
-            <a:r>
-              <a:rPr sz="2000" b="1">
-                <a:solidFill>
-                  <a:srgbClr val="463A32"/>
-                </a:solidFill>
-              </a:rPr>
-              <a:t>Viajero Hostel &amp; Salsa School  +  carro propio todo el viaje  ≈  $402.282 por persona</a:t>
+          </a:p>
+        </p:txBody>
+      </p:sp>
+      <p:sp>
+        <p:nvSpPr>
+          <p:cNvPr id="3" name="TextBox 2"/>
+          <p:cNvSpPr txBox="1"/>
+          <p:nvPr/>
+        </p:nvSpPr>
+        <p:spPr>
+          <a:xfrm>
+            <a:off x="777240" y="274320"/>
+            <a:ext cx="10789920" cy="749808"/>
+          </a:xfrm>
+          <a:prstGeom prst="rect">
+            <a:avLst/>
+          </a:prstGeom>
+          <a:noFill/>
+        </p:spPr>
+        <p:txBody>
+          <a:bodyPr wrap="square" anchor="ctr">
+            <a:spAutoFit/>
+          </a:bodyPr>
+          <a:lstStyle/>
+          <a:p>
+            <a:pPr algn="l"/>
+            <a:r>
+              <a:rPr sz="2400" b="1">
+                <a:solidFill>
+                  <a:srgbClr val="FFFFFF"/>
+                </a:solidFill>
+              </a:rPr>
+              <a:t>🚙   Opciones de vehículo (7 puestos)</a:t>
             </a:r>
           </a:p>
         </p:txBody>
@@ -5908,8 +10325,8 @@
         </p:nvSpPr>
         <p:spPr>
           <a:xfrm>
-            <a:off x="822960" y="3108960"/>
-            <a:ext cx="10515600" cy="3108960"/>
+            <a:off x="548640" y="1097280"/>
+            <a:ext cx="11064240" cy="502920"/>
           </a:xfrm>
           <a:prstGeom prst="rect">
             <a:avLst/>
@@ -5917,63 +10334,997 @@
           <a:noFill/>
         </p:spPr>
         <p:txBody>
-          <a:bodyPr wrap="square">
+          <a:bodyPr wrap="square" anchor="t">
             <a:spAutoFit/>
           </a:bodyPr>
           <a:lstStyle/>
           <a:p>
             <a:pPr algn="l"/>
             <a:r>
-              <a:rPr sz="1800" b="0">
-                <a:solidFill>
-                  <a:srgbClr val="FFFFFF"/>
-                </a:solidFill>
-              </a:rPr>
-              <a:t>Hostal que dice sí a todo (seguridad, piscina, aire, bar, rumba y salsa para conocer gente) y una</a:t>
-            </a:r>
-          </a:p>
+              <a:rPr sz="1300" b="0">
+                <a:solidFill>
+                  <a:srgbClr val="463A32"/>
+                </a:solidFill>
+              </a:rPr>
+              <a:t>Lo que cambia según dónde se recoja: local (entrega, cuadra con la llegada) vs mostrador (más barato, horario rígido).</a:t>
+            </a:r>
+          </a:p>
+        </p:txBody>
+      </p:sp>
+      <p:graphicFrame>
+        <p:nvGraphicFramePr>
+          <p:cNvPr id="5" name="Table 4"/>
+          <p:cNvGraphicFramePr>
+            <a:graphicFrameLocks noGrp="1"/>
+          </p:cNvGraphicFramePr>
+          <p:nvPr/>
+        </p:nvGraphicFramePr>
+        <p:xfrm>
+          <a:off x="365760" y="1691640"/>
+          <a:ext cx="11430000" cy="3657600"/>
+        </p:xfrm>
+        <a:graphic>
+          <a:graphicData uri="http://schemas.openxmlformats.org/drawingml/2006/table">
+            <a:tbl>
+              <a:tblPr firstRow="1" bandRow="1">
+                <a:tableStyleId>{5C22544A-7EE6-4342-B048-85BDC9FD1C3A}</a:tableStyleId>
+              </a:tblPr>
+              <a:tblGrid>
+                <a:gridCol w="2468880"/>
+                <a:gridCol w="1965960"/>
+                <a:gridCol w="1828800"/>
+                <a:gridCol w="1600200"/>
+                <a:gridCol w="2834640"/>
+                <a:gridCol w="731520"/>
+              </a:tblGrid>
+              <a:tr h="522514">
+                <a:tc>
+                  <a:txBody>
+                    <a:bodyPr/>
+                    <a:lstStyle/>
+                    <a:p>
+                      <a:r>
+                        <a:rPr b="1" sz="1100">
+                          <a:solidFill>
+                            <a:srgbClr val="FFFFFF"/>
+                          </a:solidFill>
+                        </a:rPr>
+                        <a:t>Vehículo (7 puestos)</a:t>
+                      </a:r>
+                    </a:p>
+                  </a:txBody>
+                  <a:tcPr>
+                    <a:solidFill>
+                      <a:srgbClr val="B5765C"/>
+                    </a:solidFill>
+                  </a:tcPr>
+                </a:tc>
+                <a:tc>
+                  <a:txBody>
+                    <a:bodyPr/>
+                    <a:lstStyle/>
+                    <a:p>
+                      <a:r>
+                        <a:rPr b="1" sz="1100">
+                          <a:solidFill>
+                            <a:srgbClr val="FFFFFF"/>
+                          </a:solidFill>
+                        </a:rPr>
+                        <a:t>Agencia</a:t>
+                      </a:r>
+                    </a:p>
+                  </a:txBody>
+                  <a:tcPr>
+                    <a:solidFill>
+                      <a:srgbClr val="B5765C"/>
+                    </a:solidFill>
+                  </a:tcPr>
+                </a:tc>
+                <a:tc>
+                  <a:txBody>
+                    <a:bodyPr/>
+                    <a:lstStyle/>
+                    <a:p>
+                      <a:r>
+                        <a:rPr b="1" sz="1100">
+                          <a:solidFill>
+                            <a:srgbClr val="FFFFFF"/>
+                          </a:solidFill>
+                        </a:rPr>
+                        <a:t>Tarifa (3 días)</a:t>
+                      </a:r>
+                    </a:p>
+                  </a:txBody>
+                  <a:tcPr>
+                    <a:solidFill>
+                      <a:srgbClr val="B5765C"/>
+                    </a:solidFill>
+                  </a:tcPr>
+                </a:tc>
+                <a:tc>
+                  <a:txBody>
+                    <a:bodyPr/>
+                    <a:lstStyle/>
+                    <a:p>
+                      <a:r>
+                        <a:rPr b="1" sz="1100">
+                          <a:solidFill>
+                            <a:srgbClr val="FFFFFF"/>
+                          </a:solidFill>
+                        </a:rPr>
+                        <a:t>Por persona</a:t>
+                      </a:r>
+                    </a:p>
+                  </a:txBody>
+                  <a:tcPr>
+                    <a:solidFill>
+                      <a:srgbClr val="B5765C"/>
+                    </a:solidFill>
+                  </a:tcPr>
+                </a:tc>
+                <a:tc>
+                  <a:txBody>
+                    <a:bodyPr/>
+                    <a:lstStyle/>
+                    <a:p>
+                      <a:r>
+                        <a:rPr b="1" sz="1100">
+                          <a:solidFill>
+                            <a:srgbClr val="FFFFFF"/>
+                          </a:solidFill>
+                        </a:rPr>
+                        <a:t>¿Cuadra con la llegada?</a:t>
+                      </a:r>
+                    </a:p>
+                  </a:txBody>
+                  <a:tcPr>
+                    <a:solidFill>
+                      <a:srgbClr val="B5765C"/>
+                    </a:solidFill>
+                  </a:tcPr>
+                </a:tc>
+                <a:tc>
+                  <a:txBody>
+                    <a:bodyPr/>
+                    <a:lstStyle/>
+                    <a:p>
+                      <a:r>
+                        <a:rPr b="1" sz="1100">
+                          <a:solidFill>
+                            <a:srgbClr val="FFFFFF"/>
+                          </a:solidFill>
+                        </a:rPr>
+                        <a:t>Ver</a:t>
+                      </a:r>
+                    </a:p>
+                  </a:txBody>
+                  <a:tcPr>
+                    <a:solidFill>
+                      <a:srgbClr val="B5765C"/>
+                    </a:solidFill>
+                  </a:tcPr>
+                </a:tc>
+              </a:tr>
+              <a:tr h="522514">
+                <a:tc>
+                  <a:txBody>
+                    <a:bodyPr/>
+                    <a:lstStyle/>
+                    <a:p>
+                      <a:r>
+                        <a:rPr sz="1050">
+                          <a:solidFill>
+                            <a:srgbClr val="463A32"/>
+                          </a:solidFill>
+                        </a:rPr>
+                        <a:t>Chevrolet Captiva Turbo</a:t>
+                      </a:r>
+                    </a:p>
+                  </a:txBody>
+                  <a:tcPr>
+                    <a:solidFill>
+                      <a:srgbClr val="F0E0C6"/>
+                    </a:solidFill>
+                  </a:tcPr>
+                </a:tc>
+                <a:tc>
+                  <a:txBody>
+                    <a:bodyPr/>
+                    <a:lstStyle/>
+                    <a:p>
+                      <a:r>
+                        <a:rPr sz="1050">
+                          <a:solidFill>
+                            <a:srgbClr val="463A32"/>
+                          </a:solidFill>
+                        </a:rPr>
+                        <a:t>Farallones (local)</a:t>
+                      </a:r>
+                    </a:p>
+                  </a:txBody>
+                  <a:tcPr>
+                    <a:solidFill>
+                      <a:srgbClr val="F0E0C6"/>
+                    </a:solidFill>
+                  </a:tcPr>
+                </a:tc>
+                <a:tc>
+                  <a:txBody>
+                    <a:bodyPr/>
+                    <a:lstStyle/>
+                    <a:p>
+                      <a:r>
+                        <a:rPr sz="1050">
+                          <a:solidFill>
+                            <a:srgbClr val="463A32"/>
+                          </a:solidFill>
+                        </a:rPr>
+                        <a:t>~$1.200.000</a:t>
+                      </a:r>
+                    </a:p>
+                  </a:txBody>
+                  <a:tcPr>
+                    <a:solidFill>
+                      <a:srgbClr val="F0E0C6"/>
+                    </a:solidFill>
+                  </a:tcPr>
+                </a:tc>
+                <a:tc>
+                  <a:txBody>
+                    <a:bodyPr/>
+                    <a:lstStyle/>
+                    <a:p>
+                      <a:pPr algn="ctr"/>
+                      <a:r>
+                        <a:rPr sz="1050">
+                          <a:solidFill>
+                            <a:srgbClr val="463A32"/>
+                          </a:solidFill>
+                        </a:rPr>
+                        <a:t>$171.429</a:t>
+                      </a:r>
+                    </a:p>
+                  </a:txBody>
+                  <a:tcPr>
+                    <a:solidFill>
+                      <a:srgbClr val="F0E0C6"/>
+                    </a:solidFill>
+                  </a:tcPr>
+                </a:tc>
+                <a:tc>
+                  <a:txBody>
+                    <a:bodyPr/>
+                    <a:lstStyle/>
+                    <a:p>
+                      <a:r>
+                        <a:rPr sz="1050">
+                          <a:solidFill>
+                            <a:srgbClr val="463A32"/>
+                          </a:solidFill>
+                        </a:rPr>
+                        <a:t>Sí — oficina en el aeropuerto y domicilio</a:t>
+                      </a:r>
+                    </a:p>
+                  </a:txBody>
+                  <a:tcPr>
+                    <a:solidFill>
+                      <a:srgbClr val="F0E0C6"/>
+                    </a:solidFill>
+                  </a:tcPr>
+                </a:tc>
+                <a:tc>
+                  <a:txBody>
+                    <a:bodyPr/>
+                    <a:lstStyle/>
+                    <a:p>
+                      <a:pPr algn="ctr"/>
+                      <a:r>
+                        <a:rPr sz="1050" u="sng">
+                          <a:solidFill>
+                            <a:srgbClr val="8F5A44"/>
+                          </a:solidFill>
+                          <a:hlinkClick r:id="rId2"/>
+                        </a:rPr>
+                        <a:t>ver</a:t>
+                      </a:r>
+                    </a:p>
+                  </a:txBody>
+                  <a:tcPr>
+                    <a:solidFill>
+                      <a:srgbClr val="F0E0C6"/>
+                    </a:solidFill>
+                  </a:tcPr>
+                </a:tc>
+              </a:tr>
+              <a:tr h="522514">
+                <a:tc>
+                  <a:txBody>
+                    <a:bodyPr/>
+                    <a:lstStyle/>
+                    <a:p>
+                      <a:r>
+                        <a:rPr sz="1050">
+                          <a:solidFill>
+                            <a:srgbClr val="463A32"/>
+                          </a:solidFill>
+                        </a:rPr>
+                        <a:t>Toyota Fortuner</a:t>
+                      </a:r>
+                    </a:p>
+                  </a:txBody>
+                  <a:tcPr>
+                    <a:solidFill>
+                      <a:srgbClr val="F0E0C6"/>
+                    </a:solidFill>
+                  </a:tcPr>
+                </a:tc>
+                <a:tc>
+                  <a:txBody>
+                    <a:bodyPr/>
+                    <a:lstStyle/>
+                    <a:p>
+                      <a:r>
+                        <a:rPr sz="1050">
+                          <a:solidFill>
+                            <a:srgbClr val="463A32"/>
+                          </a:solidFill>
+                        </a:rPr>
+                        <a:t>Farallones (local)</a:t>
+                      </a:r>
+                    </a:p>
+                  </a:txBody>
+                  <a:tcPr>
+                    <a:solidFill>
+                      <a:srgbClr val="F0E0C6"/>
+                    </a:solidFill>
+                  </a:tcPr>
+                </a:tc>
+                <a:tc>
+                  <a:txBody>
+                    <a:bodyPr/>
+                    <a:lstStyle/>
+                    <a:p>
+                      <a:r>
+                        <a:rPr sz="1050">
+                          <a:solidFill>
+                            <a:srgbClr val="463A32"/>
+                          </a:solidFill>
+                        </a:rPr>
+                        <a:t>desde $1.140.000</a:t>
+                      </a:r>
+                    </a:p>
+                  </a:txBody>
+                  <a:tcPr>
+                    <a:solidFill>
+                      <a:srgbClr val="F0E0C6"/>
+                    </a:solidFill>
+                  </a:tcPr>
+                </a:tc>
+                <a:tc>
+                  <a:txBody>
+                    <a:bodyPr/>
+                    <a:lstStyle/>
+                    <a:p>
+                      <a:pPr algn="ctr"/>
+                      <a:r>
+                        <a:rPr sz="1050">
+                          <a:solidFill>
+                            <a:srgbClr val="463A32"/>
+                          </a:solidFill>
+                        </a:rPr>
+                        <a:t>$162.857</a:t>
+                      </a:r>
+                    </a:p>
+                  </a:txBody>
+                  <a:tcPr>
+                    <a:solidFill>
+                      <a:srgbClr val="F0E0C6"/>
+                    </a:solidFill>
+                  </a:tcPr>
+                </a:tc>
+                <a:tc>
+                  <a:txBody>
+                    <a:bodyPr/>
+                    <a:lstStyle/>
+                    <a:p>
+                      <a:r>
+                        <a:rPr sz="1050">
+                          <a:solidFill>
+                            <a:srgbClr val="463A32"/>
+                          </a:solidFill>
+                        </a:rPr>
+                        <a:t>Sí — entrega coordinando el vuelo</a:t>
+                      </a:r>
+                    </a:p>
+                  </a:txBody>
+                  <a:tcPr>
+                    <a:solidFill>
+                      <a:srgbClr val="F0E0C6"/>
+                    </a:solidFill>
+                  </a:tcPr>
+                </a:tc>
+                <a:tc>
+                  <a:txBody>
+                    <a:bodyPr/>
+                    <a:lstStyle/>
+                    <a:p>
+                      <a:pPr algn="ctr"/>
+                      <a:r>
+                        <a:rPr sz="1050" u="sng">
+                          <a:solidFill>
+                            <a:srgbClr val="8F5A44"/>
+                          </a:solidFill>
+                          <a:hlinkClick r:id="rId3"/>
+                        </a:rPr>
+                        <a:t>ver</a:t>
+                      </a:r>
+                    </a:p>
+                  </a:txBody>
+                  <a:tcPr>
+                    <a:solidFill>
+                      <a:srgbClr val="F0E0C6"/>
+                    </a:solidFill>
+                  </a:tcPr>
+                </a:tc>
+              </a:tr>
+              <a:tr h="522514">
+                <a:tc>
+                  <a:txBody>
+                    <a:bodyPr/>
+                    <a:lstStyle/>
+                    <a:p>
+                      <a:r>
+                        <a:rPr sz="1050">
+                          <a:solidFill>
+                            <a:srgbClr val="463A32"/>
+                          </a:solidFill>
+                        </a:rPr>
+                        <a:t>Mitsubishi Montero Sport</a:t>
+                      </a:r>
+                    </a:p>
+                  </a:txBody>
+                  <a:tcPr>
+                    <a:solidFill>
+                      <a:srgbClr val="F0E0C6"/>
+                    </a:solidFill>
+                  </a:tcPr>
+                </a:tc>
+                <a:tc>
+                  <a:txBody>
+                    <a:bodyPr/>
+                    <a:lstStyle/>
+                    <a:p>
+                      <a:r>
+                        <a:rPr sz="1050">
+                          <a:solidFill>
+                            <a:srgbClr val="463A32"/>
+                          </a:solidFill>
+                        </a:rPr>
+                        <a:t>Farallones (local)</a:t>
+                      </a:r>
+                    </a:p>
+                  </a:txBody>
+                  <a:tcPr>
+                    <a:solidFill>
+                      <a:srgbClr val="F0E0C6"/>
+                    </a:solidFill>
+                  </a:tcPr>
+                </a:tc>
+                <a:tc>
+                  <a:txBody>
+                    <a:bodyPr/>
+                    <a:lstStyle/>
+                    <a:p>
+                      <a:r>
+                        <a:rPr sz="1050">
+                          <a:solidFill>
+                            <a:srgbClr val="463A32"/>
+                          </a:solidFill>
+                        </a:rPr>
+                        <a:t>desde $705.000</a:t>
+                      </a:r>
+                    </a:p>
+                  </a:txBody>
+                  <a:tcPr>
+                    <a:solidFill>
+                      <a:srgbClr val="F0E0C6"/>
+                    </a:solidFill>
+                  </a:tcPr>
+                </a:tc>
+                <a:tc>
+                  <a:txBody>
+                    <a:bodyPr/>
+                    <a:lstStyle/>
+                    <a:p>
+                      <a:pPr algn="ctr"/>
+                      <a:r>
+                        <a:rPr sz="1050">
+                          <a:solidFill>
+                            <a:srgbClr val="463A32"/>
+                          </a:solidFill>
+                        </a:rPr>
+                        <a:t>$100.714</a:t>
+                      </a:r>
+                    </a:p>
+                  </a:txBody>
+                  <a:tcPr>
+                    <a:solidFill>
+                      <a:srgbClr val="F0E0C6"/>
+                    </a:solidFill>
+                  </a:tcPr>
+                </a:tc>
+                <a:tc>
+                  <a:txBody>
+                    <a:bodyPr/>
+                    <a:lstStyle/>
+                    <a:p>
+                      <a:r>
+                        <a:rPr sz="1050">
+                          <a:solidFill>
+                            <a:srgbClr val="463A32"/>
+                          </a:solidFill>
+                        </a:rPr>
+                        <a:t>Sí — entrega coordinando el vuelo</a:t>
+                      </a:r>
+                    </a:p>
+                  </a:txBody>
+                  <a:tcPr>
+                    <a:solidFill>
+                      <a:srgbClr val="F0E0C6"/>
+                    </a:solidFill>
+                  </a:tcPr>
+                </a:tc>
+                <a:tc>
+                  <a:txBody>
+                    <a:bodyPr/>
+                    <a:lstStyle/>
+                    <a:p>
+                      <a:pPr algn="ctr"/>
+                      <a:r>
+                        <a:rPr sz="1050" u="sng">
+                          <a:solidFill>
+                            <a:srgbClr val="8F5A44"/>
+                          </a:solidFill>
+                          <a:hlinkClick r:id="rId3"/>
+                        </a:rPr>
+                        <a:t>ver</a:t>
+                      </a:r>
+                    </a:p>
+                  </a:txBody>
+                  <a:tcPr>
+                    <a:solidFill>
+                      <a:srgbClr val="F0E0C6"/>
+                    </a:solidFill>
+                  </a:tcPr>
+                </a:tc>
+              </a:tr>
+              <a:tr h="522514">
+                <a:tc>
+                  <a:txBody>
+                    <a:bodyPr/>
+                    <a:lstStyle/>
+                    <a:p>
+                      <a:r>
+                        <a:rPr sz="1050">
+                          <a:solidFill>
+                            <a:srgbClr val="463A32"/>
+                          </a:solidFill>
+                        </a:rPr>
+                        <a:t>7 puestos (varios modelos)</a:t>
+                      </a:r>
+                    </a:p>
+                  </a:txBody>
+                  <a:tcPr>
+                    <a:solidFill>
+                      <a:srgbClr val="F0E0C6"/>
+                    </a:solidFill>
+                  </a:tcPr>
+                </a:tc>
+                <a:tc>
+                  <a:txBody>
+                    <a:bodyPr/>
+                    <a:lstStyle/>
+                    <a:p>
+                      <a:r>
+                        <a:rPr sz="1050">
+                          <a:solidFill>
+                            <a:srgbClr val="463A32"/>
+                          </a:solidFill>
+                        </a:rPr>
+                        <a:t>WayCarCali (local)</a:t>
+                      </a:r>
+                    </a:p>
+                  </a:txBody>
+                  <a:tcPr>
+                    <a:solidFill>
+                      <a:srgbClr val="F0E0C6"/>
+                    </a:solidFill>
+                  </a:tcPr>
+                </a:tc>
+                <a:tc>
+                  <a:txBody>
+                    <a:bodyPr/>
+                    <a:lstStyle/>
+                    <a:p>
+                      <a:r>
+                        <a:rPr sz="1050">
+                          <a:solidFill>
+                            <a:srgbClr val="463A32"/>
+                          </a:solidFill>
+                        </a:rPr>
+                        <a:t>desde $360.000</a:t>
+                      </a:r>
+                    </a:p>
+                  </a:txBody>
+                  <a:tcPr>
+                    <a:solidFill>
+                      <a:srgbClr val="F0E0C6"/>
+                    </a:solidFill>
+                  </a:tcPr>
+                </a:tc>
+                <a:tc>
+                  <a:txBody>
+                    <a:bodyPr/>
+                    <a:lstStyle/>
+                    <a:p>
+                      <a:pPr algn="ctr"/>
+                      <a:r>
+                        <a:rPr sz="1050">
+                          <a:solidFill>
+                            <a:srgbClr val="463A32"/>
+                          </a:solidFill>
+                        </a:rPr>
+                        <a:t>$51.429</a:t>
+                      </a:r>
+                    </a:p>
+                  </a:txBody>
+                  <a:tcPr>
+                    <a:solidFill>
+                      <a:srgbClr val="F0E0C6"/>
+                    </a:solidFill>
+                  </a:tcPr>
+                </a:tc>
+                <a:tc>
+                  <a:txBody>
+                    <a:bodyPr/>
+                    <a:lstStyle/>
+                    <a:p>
+                      <a:r>
+                        <a:rPr sz="1050">
+                          <a:solidFill>
+                            <a:srgbClr val="463A32"/>
+                          </a:solidFill>
+                        </a:rPr>
+                        <a:t>Sí — domicilio gratis al aeropuerto (3+ días)</a:t>
+                      </a:r>
+                    </a:p>
+                  </a:txBody>
+                  <a:tcPr>
+                    <a:solidFill>
+                      <a:srgbClr val="F0E0C6"/>
+                    </a:solidFill>
+                  </a:tcPr>
+                </a:tc>
+                <a:tc>
+                  <a:txBody>
+                    <a:bodyPr/>
+                    <a:lstStyle/>
+                    <a:p>
+                      <a:pPr algn="ctr"/>
+                      <a:r>
+                        <a:rPr sz="1050" u="sng">
+                          <a:solidFill>
+                            <a:srgbClr val="8F5A44"/>
+                          </a:solidFill>
+                          <a:hlinkClick r:id="rId4"/>
+                        </a:rPr>
+                        <a:t>ver</a:t>
+                      </a:r>
+                    </a:p>
+                  </a:txBody>
+                  <a:tcPr>
+                    <a:solidFill>
+                      <a:srgbClr val="F0E0C6"/>
+                    </a:solidFill>
+                  </a:tcPr>
+                </a:tc>
+              </a:tr>
+              <a:tr h="522514">
+                <a:tc>
+                  <a:txBody>
+                    <a:bodyPr/>
+                    <a:lstStyle/>
+                    <a:p>
+                      <a:r>
+                        <a:rPr sz="1050">
+                          <a:solidFill>
+                            <a:srgbClr val="463A32"/>
+                          </a:solidFill>
+                        </a:rPr>
+                        <a:t>Nissan X-Trail</a:t>
+                      </a:r>
+                    </a:p>
+                  </a:txBody>
+                  <a:tcPr>
+                    <a:solidFill>
+                      <a:srgbClr val="EFE6DA"/>
+                    </a:solidFill>
+                  </a:tcPr>
+                </a:tc>
+                <a:tc>
+                  <a:txBody>
+                    <a:bodyPr/>
+                    <a:lstStyle/>
+                    <a:p>
+                      <a:r>
+                        <a:rPr sz="1050">
+                          <a:solidFill>
+                            <a:srgbClr val="463A32"/>
+                          </a:solidFill>
+                        </a:rPr>
+                        <a:t>Kayak · EconomyBookings</a:t>
+                      </a:r>
+                    </a:p>
+                  </a:txBody>
+                  <a:tcPr>
+                    <a:solidFill>
+                      <a:srgbClr val="EFE6DA"/>
+                    </a:solidFill>
+                  </a:tcPr>
+                </a:tc>
+                <a:tc>
+                  <a:txBody>
+                    <a:bodyPr/>
+                    <a:lstStyle/>
+                    <a:p>
+                      <a:r>
+                        <a:rPr sz="1050">
+                          <a:solidFill>
+                            <a:srgbClr val="463A32"/>
+                          </a:solidFill>
+                        </a:rPr>
+                        <a:t>$1.033.028</a:t>
+                      </a:r>
+                    </a:p>
+                  </a:txBody>
+                  <a:tcPr>
+                    <a:solidFill>
+                      <a:srgbClr val="EFE6DA"/>
+                    </a:solidFill>
+                  </a:tcPr>
+                </a:tc>
+                <a:tc>
+                  <a:txBody>
+                    <a:bodyPr/>
+                    <a:lstStyle/>
+                    <a:p>
+                      <a:pPr algn="ctr"/>
+                      <a:r>
+                        <a:rPr sz="1050">
+                          <a:solidFill>
+                            <a:srgbClr val="463A32"/>
+                          </a:solidFill>
+                        </a:rPr>
+                        <a:t>$147.575</a:t>
+                      </a:r>
+                    </a:p>
+                  </a:txBody>
+                  <a:tcPr>
+                    <a:solidFill>
+                      <a:srgbClr val="EFE6DA"/>
+                    </a:solidFill>
+                  </a:tcPr>
+                </a:tc>
+                <a:tc>
+                  <a:txBody>
+                    <a:bodyPr/>
+                    <a:lstStyle/>
+                    <a:p>
+                      <a:r>
+                        <a:rPr sz="1050">
+                          <a:solidFill>
+                            <a:srgbClr val="463A32"/>
+                          </a:solidFill>
+                        </a:rPr>
+                        <a:t>Mostrador: cierra ~10 pm</a:t>
+                      </a:r>
+                    </a:p>
+                  </a:txBody>
+                  <a:tcPr>
+                    <a:solidFill>
+                      <a:srgbClr val="EFE6DA"/>
+                    </a:solidFill>
+                  </a:tcPr>
+                </a:tc>
+                <a:tc>
+                  <a:txBody>
+                    <a:bodyPr/>
+                    <a:lstStyle/>
+                    <a:p>
+                      <a:pPr algn="ctr"/>
+                      <a:r>
+                        <a:rPr sz="1050" u="sng">
+                          <a:solidFill>
+                            <a:srgbClr val="8F5A44"/>
+                          </a:solidFill>
+                          <a:hlinkClick r:id="rId5"/>
+                        </a:rPr>
+                        <a:t>ver</a:t>
+                      </a:r>
+                    </a:p>
+                  </a:txBody>
+                  <a:tcPr>
+                    <a:solidFill>
+                      <a:srgbClr val="EFE6DA"/>
+                    </a:solidFill>
+                  </a:tcPr>
+                </a:tc>
+              </a:tr>
+              <a:tr h="522516">
+                <a:tc>
+                  <a:txBody>
+                    <a:bodyPr/>
+                    <a:lstStyle/>
+                    <a:p>
+                      <a:r>
+                        <a:rPr sz="1050">
+                          <a:solidFill>
+                            <a:srgbClr val="463A32"/>
+                          </a:solidFill>
+                        </a:rPr>
+                        <a:t>SUV mediano híbrido</a:t>
+                      </a:r>
+                    </a:p>
+                  </a:txBody>
+                  <a:tcPr>
+                    <a:solidFill>
+                      <a:srgbClr val="EFE6DA"/>
+                    </a:solidFill>
+                  </a:tcPr>
+                </a:tc>
+                <a:tc>
+                  <a:txBody>
+                    <a:bodyPr/>
+                    <a:lstStyle/>
+                    <a:p>
+                      <a:r>
+                        <a:rPr sz="1050">
+                          <a:solidFill>
+                            <a:srgbClr val="463A32"/>
+                          </a:solidFill>
+                        </a:rPr>
+                        <a:t>Kayak · Alkilautos</a:t>
+                      </a:r>
+                    </a:p>
+                  </a:txBody>
+                  <a:tcPr>
+                    <a:solidFill>
+                      <a:srgbClr val="EFE6DA"/>
+                    </a:solidFill>
+                  </a:tcPr>
+                </a:tc>
+                <a:tc>
+                  <a:txBody>
+                    <a:bodyPr/>
+                    <a:lstStyle/>
+                    <a:p>
+                      <a:r>
+                        <a:rPr sz="1050">
+                          <a:solidFill>
+                            <a:srgbClr val="463A32"/>
+                          </a:solidFill>
+                        </a:rPr>
+                        <a:t>$1.847.639</a:t>
+                      </a:r>
+                    </a:p>
+                  </a:txBody>
+                  <a:tcPr>
+                    <a:solidFill>
+                      <a:srgbClr val="EFE6DA"/>
+                    </a:solidFill>
+                  </a:tcPr>
+                </a:tc>
+                <a:tc>
+                  <a:txBody>
+                    <a:bodyPr/>
+                    <a:lstStyle/>
+                    <a:p>
+                      <a:pPr algn="ctr"/>
+                      <a:r>
+                        <a:rPr sz="1050">
+                          <a:solidFill>
+                            <a:srgbClr val="463A32"/>
+                          </a:solidFill>
+                        </a:rPr>
+                        <a:t>$263.948</a:t>
+                      </a:r>
+                    </a:p>
+                  </a:txBody>
+                  <a:tcPr>
+                    <a:solidFill>
+                      <a:srgbClr val="EFE6DA"/>
+                    </a:solidFill>
+                  </a:tcPr>
+                </a:tc>
+                <a:tc>
+                  <a:txBody>
+                    <a:bodyPr/>
+                    <a:lstStyle/>
+                    <a:p>
+                      <a:r>
+                        <a:rPr sz="1050">
+                          <a:solidFill>
+                            <a:srgbClr val="463A32"/>
+                          </a:solidFill>
+                        </a:rPr>
+                        <a:t>Mostrador: cierra ~10 pm</a:t>
+                      </a:r>
+                    </a:p>
+                  </a:txBody>
+                  <a:tcPr>
+                    <a:solidFill>
+                      <a:srgbClr val="EFE6DA"/>
+                    </a:solidFill>
+                  </a:tcPr>
+                </a:tc>
+                <a:tc>
+                  <a:txBody>
+                    <a:bodyPr/>
+                    <a:lstStyle/>
+                    <a:p>
+                      <a:pPr algn="ctr"/>
+                      <a:r>
+                        <a:rPr sz="1050" u="sng">
+                          <a:solidFill>
+                            <a:srgbClr val="8F5A44"/>
+                          </a:solidFill>
+                          <a:hlinkClick r:id="rId5"/>
+                        </a:rPr>
+                        <a:t>ver</a:t>
+                      </a:r>
+                    </a:p>
+                  </a:txBody>
+                  <a:tcPr>
+                    <a:solidFill>
+                      <a:srgbClr val="EFE6DA"/>
+                    </a:solidFill>
+                  </a:tcPr>
+                </a:tc>
+              </a:tr>
+            </a:tbl>
+          </a:graphicData>
+        </a:graphic>
+      </p:graphicFrame>
+      <p:sp>
+        <p:nvSpPr>
+          <p:cNvPr id="6" name="TextBox 5"/>
+          <p:cNvSpPr txBox="1"/>
+          <p:nvPr/>
+        </p:nvSpPr>
+        <p:spPr>
+          <a:xfrm>
+            <a:off x="457200" y="5577840"/>
+            <a:ext cx="11338560" cy="1097280"/>
+          </a:xfrm>
+          <a:prstGeom prst="rect">
+            <a:avLst/>
+          </a:prstGeom>
+          <a:noFill/>
+        </p:spPr>
+        <p:txBody>
+          <a:bodyPr wrap="square" anchor="t">
+            <a:spAutoFit/>
+          </a:bodyPr>
+          <a:lstStyle/>
           <a:p>
             <a:pPr algn="l"/>
             <a:r>
-              <a:rPr sz="1800" b="0">
-                <a:solidFill>
-                  <a:srgbClr val="FFFFFF"/>
-                </a:solidFill>
-              </a:rPr>
-              <a:t>movilidad sin vueltas a la ciudad ni hueco final con maletas.</a:t>
-            </a:r>
-          </a:p>
-          <a:p>
-            <a:pPr algn="l"/>
-            <a:r>
-              <a:rPr sz="1800" b="0">
-                <a:solidFill>
-                  <a:srgbClr val="FFFFFF"/>
-                </a:solidFill>
-              </a:rPr>
-              <a:t/>
-            </a:r>
-          </a:p>
-          <a:p>
-            <a:pPr algn="l"/>
-            <a:r>
-              <a:rPr sz="1800" b="0">
-                <a:solidFill>
-                  <a:srgbClr val="FFFFFF"/>
-                </a:solidFill>
-              </a:rPr>
-              <a:t>• Ahorro: moverse sin carro propio = $377.282 — entra en meta.</a:t>
-            </a:r>
-          </a:p>
-          <a:p>
-            <a:pPr algn="l"/>
-            <a:r>
-              <a:rPr sz="1800" b="0">
-                <a:solidFill>
-                  <a:srgbClr val="FFFFFF"/>
-                </a:solidFill>
-              </a:rPr>
-              <a:t>• No pasar de 400 mil en estadía: Patio del Río = $339.750 (piscina + aire).</a:t>
+              <a:rPr sz="1150" b="0">
+                <a:solidFill>
+                  <a:srgbClr val="8F5A44"/>
+                </a:solidFill>
+              </a:rPr>
+              <a:t>Todos los precios son por los 3 días, solo el alquiler (sin gasolina ni parqueo). Las tarifas locales 'desde' se calculan sobre la tarifa base/día × 3; en alquiler corto el total real suele ser mayor (la Captiva, confirmada, cuesta ~$1.200.000) — pidan el exacto por WhatsApp. Lo clave sigue siendo el horario: las locales entregan coordinando el vuelo; los mostradores cierran ~10 pm.</a:t>
             </a:r>
           </a:p>
         </p:txBody>

--- a/output/Mini-Boom-en-Cali_Presentacion.pptx
+++ b/output/Mini-Boom-en-Cali_Presentacion.pptx
@@ -16,6 +16,7 @@
     <p:sldId id="264" r:id="rId15"/>
     <p:sldId id="265" r:id="rId16"/>
     <p:sldId id="266" r:id="rId17"/>
+    <p:sldId id="267" r:id="rId18"/>
   </p:sldIdLst>
   <p:sldSz cx="12191695" cy="6858000" type="screen4x3"/>
   <p:notesSz cx="6858000" cy="9144000"/>
@@ -3726,6 +3727,1130 @@
       <p:grpSpPr/>
       <p:sp>
         <p:nvSpPr>
+          <p:cNvPr id="2" name="Rounded Rectangle 1"/>
+          <p:cNvSpPr/>
+          <p:nvPr/>
+        </p:nvSpPr>
+        <p:spPr>
+          <a:xfrm>
+            <a:off x="365760" y="274320"/>
+            <a:ext cx="11457432" cy="749808"/>
+          </a:xfrm>
+          <a:prstGeom prst="roundRect">
+            <a:avLst>
+              <a:gd name="adj" fmla="val 50000"/>
+            </a:avLst>
+          </a:prstGeom>
+          <a:solidFill>
+            <a:srgbClr val="B5765C"/>
+          </a:solidFill>
+          <a:ln>
+            <a:noFill/>
+          </a:ln>
+          <a:effectLst>
+            <a:outerShdw blurRad="95000" dist="40000" dir="5400000" rotWithShape="0">
+              <a:srgbClr val="6E5B4E">
+                <a:alpha val="32000"/>
+              </a:srgbClr>
+            </a:outerShdw>
+          </a:effectLst>
+        </p:spPr>
+        <p:style>
+          <a:lnRef idx="1">
+            <a:schemeClr val="accent1"/>
+          </a:lnRef>
+          <a:fillRef idx="3">
+            <a:schemeClr val="accent1"/>
+          </a:fillRef>
+          <a:effectRef idx="2">
+            <a:schemeClr val="accent1"/>
+          </a:effectRef>
+          <a:fontRef idx="minor">
+            <a:schemeClr val="lt1"/>
+          </a:fontRef>
+        </p:style>
+        <p:txBody>
+          <a:bodyPr rtlCol="0" anchor="ctr"/>
+          <a:lstStyle/>
+          <a:p>
+            <a:pPr algn="ctr"/>
+          </a:p>
+        </p:txBody>
+      </p:sp>
+      <p:sp>
+        <p:nvSpPr>
+          <p:cNvPr id="3" name="TextBox 2"/>
+          <p:cNvSpPr txBox="1"/>
+          <p:nvPr/>
+        </p:nvSpPr>
+        <p:spPr>
+          <a:xfrm>
+            <a:off x="777240" y="274320"/>
+            <a:ext cx="10789920" cy="749808"/>
+          </a:xfrm>
+          <a:prstGeom prst="rect">
+            <a:avLst/>
+          </a:prstGeom>
+          <a:noFill/>
+        </p:spPr>
+        <p:txBody>
+          <a:bodyPr wrap="square" anchor="ctr">
+            <a:spAutoFit/>
+          </a:bodyPr>
+          <a:lstStyle/>
+          <a:p>
+            <a:pPr algn="l"/>
+            <a:r>
+              <a:rPr sz="2400" b="1">
+                <a:solidFill>
+                  <a:srgbClr val="FFFFFF"/>
+                </a:solidFill>
+              </a:rPr>
+              <a:t>🚙   Opciones de vehículo (7 puestos)</a:t>
+            </a:r>
+          </a:p>
+        </p:txBody>
+      </p:sp>
+      <p:sp>
+        <p:nvSpPr>
+          <p:cNvPr id="4" name="TextBox 3"/>
+          <p:cNvSpPr txBox="1"/>
+          <p:nvPr/>
+        </p:nvSpPr>
+        <p:spPr>
+          <a:xfrm>
+            <a:off x="548640" y="1097280"/>
+            <a:ext cx="11064240" cy="502920"/>
+          </a:xfrm>
+          <a:prstGeom prst="rect">
+            <a:avLst/>
+          </a:prstGeom>
+          <a:noFill/>
+        </p:spPr>
+        <p:txBody>
+          <a:bodyPr wrap="square" anchor="t">
+            <a:spAutoFit/>
+          </a:bodyPr>
+          <a:lstStyle/>
+          <a:p>
+            <a:pPr algn="l"/>
+            <a:r>
+              <a:rPr sz="1300" b="0">
+                <a:solidFill>
+                  <a:srgbClr val="463A32"/>
+                </a:solidFill>
+              </a:rPr>
+              <a:t>Lo que cambia según dónde se recoja: local (entrega, cuadra con la llegada) vs mostrador (más barato, horario rígido).</a:t>
+            </a:r>
+          </a:p>
+        </p:txBody>
+      </p:sp>
+      <p:graphicFrame>
+        <p:nvGraphicFramePr>
+          <p:cNvPr id="5" name="Table 4"/>
+          <p:cNvGraphicFramePr>
+            <a:graphicFrameLocks noGrp="1"/>
+          </p:cNvGraphicFramePr>
+          <p:nvPr/>
+        </p:nvGraphicFramePr>
+        <p:xfrm>
+          <a:off x="365760" y="1691640"/>
+          <a:ext cx="11430000" cy="3657600"/>
+        </p:xfrm>
+        <a:graphic>
+          <a:graphicData uri="http://schemas.openxmlformats.org/drawingml/2006/table">
+            <a:tbl>
+              <a:tblPr firstRow="1" bandRow="1">
+                <a:tableStyleId>{5C22544A-7EE6-4342-B048-85BDC9FD1C3A}</a:tableStyleId>
+              </a:tblPr>
+              <a:tblGrid>
+                <a:gridCol w="2468880"/>
+                <a:gridCol w="1965960"/>
+                <a:gridCol w="1828800"/>
+                <a:gridCol w="1600200"/>
+                <a:gridCol w="2834640"/>
+                <a:gridCol w="731520"/>
+              </a:tblGrid>
+              <a:tr h="522514">
+                <a:tc>
+                  <a:txBody>
+                    <a:bodyPr/>
+                    <a:lstStyle/>
+                    <a:p>
+                      <a:r>
+                        <a:rPr b="1" sz="1100">
+                          <a:solidFill>
+                            <a:srgbClr val="FFFFFF"/>
+                          </a:solidFill>
+                        </a:rPr>
+                        <a:t>Vehículo (7 puestos)</a:t>
+                      </a:r>
+                    </a:p>
+                  </a:txBody>
+                  <a:tcPr>
+                    <a:solidFill>
+                      <a:srgbClr val="B5765C"/>
+                    </a:solidFill>
+                  </a:tcPr>
+                </a:tc>
+                <a:tc>
+                  <a:txBody>
+                    <a:bodyPr/>
+                    <a:lstStyle/>
+                    <a:p>
+                      <a:r>
+                        <a:rPr b="1" sz="1100">
+                          <a:solidFill>
+                            <a:srgbClr val="FFFFFF"/>
+                          </a:solidFill>
+                        </a:rPr>
+                        <a:t>Agencia</a:t>
+                      </a:r>
+                    </a:p>
+                  </a:txBody>
+                  <a:tcPr>
+                    <a:solidFill>
+                      <a:srgbClr val="B5765C"/>
+                    </a:solidFill>
+                  </a:tcPr>
+                </a:tc>
+                <a:tc>
+                  <a:txBody>
+                    <a:bodyPr/>
+                    <a:lstStyle/>
+                    <a:p>
+                      <a:r>
+                        <a:rPr b="1" sz="1100">
+                          <a:solidFill>
+                            <a:srgbClr val="FFFFFF"/>
+                          </a:solidFill>
+                        </a:rPr>
+                        <a:t>Tarifa (3 días)</a:t>
+                      </a:r>
+                    </a:p>
+                  </a:txBody>
+                  <a:tcPr>
+                    <a:solidFill>
+                      <a:srgbClr val="B5765C"/>
+                    </a:solidFill>
+                  </a:tcPr>
+                </a:tc>
+                <a:tc>
+                  <a:txBody>
+                    <a:bodyPr/>
+                    <a:lstStyle/>
+                    <a:p>
+                      <a:r>
+                        <a:rPr b="1" sz="1100">
+                          <a:solidFill>
+                            <a:srgbClr val="FFFFFF"/>
+                          </a:solidFill>
+                        </a:rPr>
+                        <a:t>Por persona</a:t>
+                      </a:r>
+                    </a:p>
+                  </a:txBody>
+                  <a:tcPr>
+                    <a:solidFill>
+                      <a:srgbClr val="B5765C"/>
+                    </a:solidFill>
+                  </a:tcPr>
+                </a:tc>
+                <a:tc>
+                  <a:txBody>
+                    <a:bodyPr/>
+                    <a:lstStyle/>
+                    <a:p>
+                      <a:r>
+                        <a:rPr b="1" sz="1100">
+                          <a:solidFill>
+                            <a:srgbClr val="FFFFFF"/>
+                          </a:solidFill>
+                        </a:rPr>
+                        <a:t>¿Cuadra con la llegada?</a:t>
+                      </a:r>
+                    </a:p>
+                  </a:txBody>
+                  <a:tcPr>
+                    <a:solidFill>
+                      <a:srgbClr val="B5765C"/>
+                    </a:solidFill>
+                  </a:tcPr>
+                </a:tc>
+                <a:tc>
+                  <a:txBody>
+                    <a:bodyPr/>
+                    <a:lstStyle/>
+                    <a:p>
+                      <a:r>
+                        <a:rPr b="1" sz="1100">
+                          <a:solidFill>
+                            <a:srgbClr val="FFFFFF"/>
+                          </a:solidFill>
+                        </a:rPr>
+                        <a:t>Ver</a:t>
+                      </a:r>
+                    </a:p>
+                  </a:txBody>
+                  <a:tcPr>
+                    <a:solidFill>
+                      <a:srgbClr val="B5765C"/>
+                    </a:solidFill>
+                  </a:tcPr>
+                </a:tc>
+              </a:tr>
+              <a:tr h="522514">
+                <a:tc>
+                  <a:txBody>
+                    <a:bodyPr/>
+                    <a:lstStyle/>
+                    <a:p>
+                      <a:r>
+                        <a:rPr sz="1050">
+                          <a:solidFill>
+                            <a:srgbClr val="463A32"/>
+                          </a:solidFill>
+                        </a:rPr>
+                        <a:t>Chevrolet Captiva Turbo</a:t>
+                      </a:r>
+                    </a:p>
+                  </a:txBody>
+                  <a:tcPr>
+                    <a:solidFill>
+                      <a:srgbClr val="F0E0C6"/>
+                    </a:solidFill>
+                  </a:tcPr>
+                </a:tc>
+                <a:tc>
+                  <a:txBody>
+                    <a:bodyPr/>
+                    <a:lstStyle/>
+                    <a:p>
+                      <a:r>
+                        <a:rPr sz="1050">
+                          <a:solidFill>
+                            <a:srgbClr val="463A32"/>
+                          </a:solidFill>
+                        </a:rPr>
+                        <a:t>Farallones (local)</a:t>
+                      </a:r>
+                    </a:p>
+                  </a:txBody>
+                  <a:tcPr>
+                    <a:solidFill>
+                      <a:srgbClr val="F0E0C6"/>
+                    </a:solidFill>
+                  </a:tcPr>
+                </a:tc>
+                <a:tc>
+                  <a:txBody>
+                    <a:bodyPr/>
+                    <a:lstStyle/>
+                    <a:p>
+                      <a:r>
+                        <a:rPr sz="1050">
+                          <a:solidFill>
+                            <a:srgbClr val="463A32"/>
+                          </a:solidFill>
+                        </a:rPr>
+                        <a:t>~$1.200.000</a:t>
+                      </a:r>
+                    </a:p>
+                  </a:txBody>
+                  <a:tcPr>
+                    <a:solidFill>
+                      <a:srgbClr val="F0E0C6"/>
+                    </a:solidFill>
+                  </a:tcPr>
+                </a:tc>
+                <a:tc>
+                  <a:txBody>
+                    <a:bodyPr/>
+                    <a:lstStyle/>
+                    <a:p>
+                      <a:pPr algn="ctr"/>
+                      <a:r>
+                        <a:rPr sz="1050">
+                          <a:solidFill>
+                            <a:srgbClr val="463A32"/>
+                          </a:solidFill>
+                        </a:rPr>
+                        <a:t>$171.429</a:t>
+                      </a:r>
+                    </a:p>
+                  </a:txBody>
+                  <a:tcPr>
+                    <a:solidFill>
+                      <a:srgbClr val="F0E0C6"/>
+                    </a:solidFill>
+                  </a:tcPr>
+                </a:tc>
+                <a:tc>
+                  <a:txBody>
+                    <a:bodyPr/>
+                    <a:lstStyle/>
+                    <a:p>
+                      <a:r>
+                        <a:rPr sz="1050">
+                          <a:solidFill>
+                            <a:srgbClr val="463A32"/>
+                          </a:solidFill>
+                        </a:rPr>
+                        <a:t>Sí — oficina en el aeropuerto y domicilio</a:t>
+                      </a:r>
+                    </a:p>
+                  </a:txBody>
+                  <a:tcPr>
+                    <a:solidFill>
+                      <a:srgbClr val="F0E0C6"/>
+                    </a:solidFill>
+                  </a:tcPr>
+                </a:tc>
+                <a:tc>
+                  <a:txBody>
+                    <a:bodyPr/>
+                    <a:lstStyle/>
+                    <a:p>
+                      <a:pPr algn="ctr"/>
+                      <a:r>
+                        <a:rPr sz="1050" u="sng">
+                          <a:solidFill>
+                            <a:srgbClr val="8F5A44"/>
+                          </a:solidFill>
+                          <a:hlinkClick r:id="rId2"/>
+                        </a:rPr>
+                        <a:t>ver</a:t>
+                      </a:r>
+                    </a:p>
+                  </a:txBody>
+                  <a:tcPr>
+                    <a:solidFill>
+                      <a:srgbClr val="F0E0C6"/>
+                    </a:solidFill>
+                  </a:tcPr>
+                </a:tc>
+              </a:tr>
+              <a:tr h="522514">
+                <a:tc>
+                  <a:txBody>
+                    <a:bodyPr/>
+                    <a:lstStyle/>
+                    <a:p>
+                      <a:r>
+                        <a:rPr sz="1050">
+                          <a:solidFill>
+                            <a:srgbClr val="463A32"/>
+                          </a:solidFill>
+                        </a:rPr>
+                        <a:t>Toyota Fortuner</a:t>
+                      </a:r>
+                    </a:p>
+                  </a:txBody>
+                  <a:tcPr>
+                    <a:solidFill>
+                      <a:srgbClr val="F0E0C6"/>
+                    </a:solidFill>
+                  </a:tcPr>
+                </a:tc>
+                <a:tc>
+                  <a:txBody>
+                    <a:bodyPr/>
+                    <a:lstStyle/>
+                    <a:p>
+                      <a:r>
+                        <a:rPr sz="1050">
+                          <a:solidFill>
+                            <a:srgbClr val="463A32"/>
+                          </a:solidFill>
+                        </a:rPr>
+                        <a:t>Farallones (local)</a:t>
+                      </a:r>
+                    </a:p>
+                  </a:txBody>
+                  <a:tcPr>
+                    <a:solidFill>
+                      <a:srgbClr val="F0E0C6"/>
+                    </a:solidFill>
+                  </a:tcPr>
+                </a:tc>
+                <a:tc>
+                  <a:txBody>
+                    <a:bodyPr/>
+                    <a:lstStyle/>
+                    <a:p>
+                      <a:r>
+                        <a:rPr sz="1050">
+                          <a:solidFill>
+                            <a:srgbClr val="463A32"/>
+                          </a:solidFill>
+                        </a:rPr>
+                        <a:t>desde $1.140.000</a:t>
+                      </a:r>
+                    </a:p>
+                  </a:txBody>
+                  <a:tcPr>
+                    <a:solidFill>
+                      <a:srgbClr val="F0E0C6"/>
+                    </a:solidFill>
+                  </a:tcPr>
+                </a:tc>
+                <a:tc>
+                  <a:txBody>
+                    <a:bodyPr/>
+                    <a:lstStyle/>
+                    <a:p>
+                      <a:pPr algn="ctr"/>
+                      <a:r>
+                        <a:rPr sz="1050">
+                          <a:solidFill>
+                            <a:srgbClr val="463A32"/>
+                          </a:solidFill>
+                        </a:rPr>
+                        <a:t>$162.857</a:t>
+                      </a:r>
+                    </a:p>
+                  </a:txBody>
+                  <a:tcPr>
+                    <a:solidFill>
+                      <a:srgbClr val="F0E0C6"/>
+                    </a:solidFill>
+                  </a:tcPr>
+                </a:tc>
+                <a:tc>
+                  <a:txBody>
+                    <a:bodyPr/>
+                    <a:lstStyle/>
+                    <a:p>
+                      <a:r>
+                        <a:rPr sz="1050">
+                          <a:solidFill>
+                            <a:srgbClr val="463A32"/>
+                          </a:solidFill>
+                        </a:rPr>
+                        <a:t>Sí — entrega coordinando el vuelo</a:t>
+                      </a:r>
+                    </a:p>
+                  </a:txBody>
+                  <a:tcPr>
+                    <a:solidFill>
+                      <a:srgbClr val="F0E0C6"/>
+                    </a:solidFill>
+                  </a:tcPr>
+                </a:tc>
+                <a:tc>
+                  <a:txBody>
+                    <a:bodyPr/>
+                    <a:lstStyle/>
+                    <a:p>
+                      <a:pPr algn="ctr"/>
+                      <a:r>
+                        <a:rPr sz="1050" u="sng">
+                          <a:solidFill>
+                            <a:srgbClr val="8F5A44"/>
+                          </a:solidFill>
+                          <a:hlinkClick r:id="rId3"/>
+                        </a:rPr>
+                        <a:t>ver</a:t>
+                      </a:r>
+                    </a:p>
+                  </a:txBody>
+                  <a:tcPr>
+                    <a:solidFill>
+                      <a:srgbClr val="F0E0C6"/>
+                    </a:solidFill>
+                  </a:tcPr>
+                </a:tc>
+              </a:tr>
+              <a:tr h="522514">
+                <a:tc>
+                  <a:txBody>
+                    <a:bodyPr/>
+                    <a:lstStyle/>
+                    <a:p>
+                      <a:r>
+                        <a:rPr sz="1050">
+                          <a:solidFill>
+                            <a:srgbClr val="463A32"/>
+                          </a:solidFill>
+                        </a:rPr>
+                        <a:t>Mitsubishi Montero Sport</a:t>
+                      </a:r>
+                    </a:p>
+                  </a:txBody>
+                  <a:tcPr>
+                    <a:solidFill>
+                      <a:srgbClr val="F0E0C6"/>
+                    </a:solidFill>
+                  </a:tcPr>
+                </a:tc>
+                <a:tc>
+                  <a:txBody>
+                    <a:bodyPr/>
+                    <a:lstStyle/>
+                    <a:p>
+                      <a:r>
+                        <a:rPr sz="1050">
+                          <a:solidFill>
+                            <a:srgbClr val="463A32"/>
+                          </a:solidFill>
+                        </a:rPr>
+                        <a:t>Farallones (local)</a:t>
+                      </a:r>
+                    </a:p>
+                  </a:txBody>
+                  <a:tcPr>
+                    <a:solidFill>
+                      <a:srgbClr val="F0E0C6"/>
+                    </a:solidFill>
+                  </a:tcPr>
+                </a:tc>
+                <a:tc>
+                  <a:txBody>
+                    <a:bodyPr/>
+                    <a:lstStyle/>
+                    <a:p>
+                      <a:r>
+                        <a:rPr sz="1050">
+                          <a:solidFill>
+                            <a:srgbClr val="463A32"/>
+                          </a:solidFill>
+                        </a:rPr>
+                        <a:t>desde $705.000</a:t>
+                      </a:r>
+                    </a:p>
+                  </a:txBody>
+                  <a:tcPr>
+                    <a:solidFill>
+                      <a:srgbClr val="F0E0C6"/>
+                    </a:solidFill>
+                  </a:tcPr>
+                </a:tc>
+                <a:tc>
+                  <a:txBody>
+                    <a:bodyPr/>
+                    <a:lstStyle/>
+                    <a:p>
+                      <a:pPr algn="ctr"/>
+                      <a:r>
+                        <a:rPr sz="1050">
+                          <a:solidFill>
+                            <a:srgbClr val="463A32"/>
+                          </a:solidFill>
+                        </a:rPr>
+                        <a:t>$100.714</a:t>
+                      </a:r>
+                    </a:p>
+                  </a:txBody>
+                  <a:tcPr>
+                    <a:solidFill>
+                      <a:srgbClr val="F0E0C6"/>
+                    </a:solidFill>
+                  </a:tcPr>
+                </a:tc>
+                <a:tc>
+                  <a:txBody>
+                    <a:bodyPr/>
+                    <a:lstStyle/>
+                    <a:p>
+                      <a:r>
+                        <a:rPr sz="1050">
+                          <a:solidFill>
+                            <a:srgbClr val="463A32"/>
+                          </a:solidFill>
+                        </a:rPr>
+                        <a:t>Sí — entrega coordinando el vuelo</a:t>
+                      </a:r>
+                    </a:p>
+                  </a:txBody>
+                  <a:tcPr>
+                    <a:solidFill>
+                      <a:srgbClr val="F0E0C6"/>
+                    </a:solidFill>
+                  </a:tcPr>
+                </a:tc>
+                <a:tc>
+                  <a:txBody>
+                    <a:bodyPr/>
+                    <a:lstStyle/>
+                    <a:p>
+                      <a:pPr algn="ctr"/>
+                      <a:r>
+                        <a:rPr sz="1050" u="sng">
+                          <a:solidFill>
+                            <a:srgbClr val="8F5A44"/>
+                          </a:solidFill>
+                          <a:hlinkClick r:id="rId3"/>
+                        </a:rPr>
+                        <a:t>ver</a:t>
+                      </a:r>
+                    </a:p>
+                  </a:txBody>
+                  <a:tcPr>
+                    <a:solidFill>
+                      <a:srgbClr val="F0E0C6"/>
+                    </a:solidFill>
+                  </a:tcPr>
+                </a:tc>
+              </a:tr>
+              <a:tr h="522514">
+                <a:tc>
+                  <a:txBody>
+                    <a:bodyPr/>
+                    <a:lstStyle/>
+                    <a:p>
+                      <a:r>
+                        <a:rPr sz="1050">
+                          <a:solidFill>
+                            <a:srgbClr val="463A32"/>
+                          </a:solidFill>
+                        </a:rPr>
+                        <a:t>7 puestos (varios modelos)</a:t>
+                      </a:r>
+                    </a:p>
+                  </a:txBody>
+                  <a:tcPr>
+                    <a:solidFill>
+                      <a:srgbClr val="F0E0C6"/>
+                    </a:solidFill>
+                  </a:tcPr>
+                </a:tc>
+                <a:tc>
+                  <a:txBody>
+                    <a:bodyPr/>
+                    <a:lstStyle/>
+                    <a:p>
+                      <a:r>
+                        <a:rPr sz="1050">
+                          <a:solidFill>
+                            <a:srgbClr val="463A32"/>
+                          </a:solidFill>
+                        </a:rPr>
+                        <a:t>WayCarCali (local)</a:t>
+                      </a:r>
+                    </a:p>
+                  </a:txBody>
+                  <a:tcPr>
+                    <a:solidFill>
+                      <a:srgbClr val="F0E0C6"/>
+                    </a:solidFill>
+                  </a:tcPr>
+                </a:tc>
+                <a:tc>
+                  <a:txBody>
+                    <a:bodyPr/>
+                    <a:lstStyle/>
+                    <a:p>
+                      <a:r>
+                        <a:rPr sz="1050">
+                          <a:solidFill>
+                            <a:srgbClr val="463A32"/>
+                          </a:solidFill>
+                        </a:rPr>
+                        <a:t>desde $360.000</a:t>
+                      </a:r>
+                    </a:p>
+                  </a:txBody>
+                  <a:tcPr>
+                    <a:solidFill>
+                      <a:srgbClr val="F0E0C6"/>
+                    </a:solidFill>
+                  </a:tcPr>
+                </a:tc>
+                <a:tc>
+                  <a:txBody>
+                    <a:bodyPr/>
+                    <a:lstStyle/>
+                    <a:p>
+                      <a:pPr algn="ctr"/>
+                      <a:r>
+                        <a:rPr sz="1050">
+                          <a:solidFill>
+                            <a:srgbClr val="463A32"/>
+                          </a:solidFill>
+                        </a:rPr>
+                        <a:t>$51.429</a:t>
+                      </a:r>
+                    </a:p>
+                  </a:txBody>
+                  <a:tcPr>
+                    <a:solidFill>
+                      <a:srgbClr val="F0E0C6"/>
+                    </a:solidFill>
+                  </a:tcPr>
+                </a:tc>
+                <a:tc>
+                  <a:txBody>
+                    <a:bodyPr/>
+                    <a:lstStyle/>
+                    <a:p>
+                      <a:r>
+                        <a:rPr sz="1050">
+                          <a:solidFill>
+                            <a:srgbClr val="463A32"/>
+                          </a:solidFill>
+                        </a:rPr>
+                        <a:t>Sí — domicilio gratis al aeropuerto (3+ días)</a:t>
+                      </a:r>
+                    </a:p>
+                  </a:txBody>
+                  <a:tcPr>
+                    <a:solidFill>
+                      <a:srgbClr val="F0E0C6"/>
+                    </a:solidFill>
+                  </a:tcPr>
+                </a:tc>
+                <a:tc>
+                  <a:txBody>
+                    <a:bodyPr/>
+                    <a:lstStyle/>
+                    <a:p>
+                      <a:pPr algn="ctr"/>
+                      <a:r>
+                        <a:rPr sz="1050" u="sng">
+                          <a:solidFill>
+                            <a:srgbClr val="8F5A44"/>
+                          </a:solidFill>
+                          <a:hlinkClick r:id="rId4"/>
+                        </a:rPr>
+                        <a:t>ver</a:t>
+                      </a:r>
+                    </a:p>
+                  </a:txBody>
+                  <a:tcPr>
+                    <a:solidFill>
+                      <a:srgbClr val="F0E0C6"/>
+                    </a:solidFill>
+                  </a:tcPr>
+                </a:tc>
+              </a:tr>
+              <a:tr h="522514">
+                <a:tc>
+                  <a:txBody>
+                    <a:bodyPr/>
+                    <a:lstStyle/>
+                    <a:p>
+                      <a:r>
+                        <a:rPr sz="1050">
+                          <a:solidFill>
+                            <a:srgbClr val="463A32"/>
+                          </a:solidFill>
+                        </a:rPr>
+                        <a:t>Nissan X-Trail</a:t>
+                      </a:r>
+                    </a:p>
+                  </a:txBody>
+                  <a:tcPr>
+                    <a:solidFill>
+                      <a:srgbClr val="EFE6DA"/>
+                    </a:solidFill>
+                  </a:tcPr>
+                </a:tc>
+                <a:tc>
+                  <a:txBody>
+                    <a:bodyPr/>
+                    <a:lstStyle/>
+                    <a:p>
+                      <a:r>
+                        <a:rPr sz="1050">
+                          <a:solidFill>
+                            <a:srgbClr val="463A32"/>
+                          </a:solidFill>
+                        </a:rPr>
+                        <a:t>Kayak · EconomyBookings</a:t>
+                      </a:r>
+                    </a:p>
+                  </a:txBody>
+                  <a:tcPr>
+                    <a:solidFill>
+                      <a:srgbClr val="EFE6DA"/>
+                    </a:solidFill>
+                  </a:tcPr>
+                </a:tc>
+                <a:tc>
+                  <a:txBody>
+                    <a:bodyPr/>
+                    <a:lstStyle/>
+                    <a:p>
+                      <a:r>
+                        <a:rPr sz="1050">
+                          <a:solidFill>
+                            <a:srgbClr val="463A32"/>
+                          </a:solidFill>
+                        </a:rPr>
+                        <a:t>$1.033.028</a:t>
+                      </a:r>
+                    </a:p>
+                  </a:txBody>
+                  <a:tcPr>
+                    <a:solidFill>
+                      <a:srgbClr val="EFE6DA"/>
+                    </a:solidFill>
+                  </a:tcPr>
+                </a:tc>
+                <a:tc>
+                  <a:txBody>
+                    <a:bodyPr/>
+                    <a:lstStyle/>
+                    <a:p>
+                      <a:pPr algn="ctr"/>
+                      <a:r>
+                        <a:rPr sz="1050">
+                          <a:solidFill>
+                            <a:srgbClr val="463A32"/>
+                          </a:solidFill>
+                        </a:rPr>
+                        <a:t>$147.575</a:t>
+                      </a:r>
+                    </a:p>
+                  </a:txBody>
+                  <a:tcPr>
+                    <a:solidFill>
+                      <a:srgbClr val="EFE6DA"/>
+                    </a:solidFill>
+                  </a:tcPr>
+                </a:tc>
+                <a:tc>
+                  <a:txBody>
+                    <a:bodyPr/>
+                    <a:lstStyle/>
+                    <a:p>
+                      <a:r>
+                        <a:rPr sz="1050">
+                          <a:solidFill>
+                            <a:srgbClr val="463A32"/>
+                          </a:solidFill>
+                        </a:rPr>
+                        <a:t>Mostrador: cierra ~10 pm</a:t>
+                      </a:r>
+                    </a:p>
+                  </a:txBody>
+                  <a:tcPr>
+                    <a:solidFill>
+                      <a:srgbClr val="EFE6DA"/>
+                    </a:solidFill>
+                  </a:tcPr>
+                </a:tc>
+                <a:tc>
+                  <a:txBody>
+                    <a:bodyPr/>
+                    <a:lstStyle/>
+                    <a:p>
+                      <a:pPr algn="ctr"/>
+                      <a:r>
+                        <a:rPr sz="1050" u="sng">
+                          <a:solidFill>
+                            <a:srgbClr val="8F5A44"/>
+                          </a:solidFill>
+                          <a:hlinkClick r:id="rId5"/>
+                        </a:rPr>
+                        <a:t>ver</a:t>
+                      </a:r>
+                    </a:p>
+                  </a:txBody>
+                  <a:tcPr>
+                    <a:solidFill>
+                      <a:srgbClr val="EFE6DA"/>
+                    </a:solidFill>
+                  </a:tcPr>
+                </a:tc>
+              </a:tr>
+              <a:tr h="522516">
+                <a:tc>
+                  <a:txBody>
+                    <a:bodyPr/>
+                    <a:lstStyle/>
+                    <a:p>
+                      <a:r>
+                        <a:rPr sz="1050">
+                          <a:solidFill>
+                            <a:srgbClr val="463A32"/>
+                          </a:solidFill>
+                        </a:rPr>
+                        <a:t>SUV mediano híbrido</a:t>
+                      </a:r>
+                    </a:p>
+                  </a:txBody>
+                  <a:tcPr>
+                    <a:solidFill>
+                      <a:srgbClr val="EFE6DA"/>
+                    </a:solidFill>
+                  </a:tcPr>
+                </a:tc>
+                <a:tc>
+                  <a:txBody>
+                    <a:bodyPr/>
+                    <a:lstStyle/>
+                    <a:p>
+                      <a:r>
+                        <a:rPr sz="1050">
+                          <a:solidFill>
+                            <a:srgbClr val="463A32"/>
+                          </a:solidFill>
+                        </a:rPr>
+                        <a:t>Kayak · Alkilautos</a:t>
+                      </a:r>
+                    </a:p>
+                  </a:txBody>
+                  <a:tcPr>
+                    <a:solidFill>
+                      <a:srgbClr val="EFE6DA"/>
+                    </a:solidFill>
+                  </a:tcPr>
+                </a:tc>
+                <a:tc>
+                  <a:txBody>
+                    <a:bodyPr/>
+                    <a:lstStyle/>
+                    <a:p>
+                      <a:r>
+                        <a:rPr sz="1050">
+                          <a:solidFill>
+                            <a:srgbClr val="463A32"/>
+                          </a:solidFill>
+                        </a:rPr>
+                        <a:t>$1.847.639</a:t>
+                      </a:r>
+                    </a:p>
+                  </a:txBody>
+                  <a:tcPr>
+                    <a:solidFill>
+                      <a:srgbClr val="EFE6DA"/>
+                    </a:solidFill>
+                  </a:tcPr>
+                </a:tc>
+                <a:tc>
+                  <a:txBody>
+                    <a:bodyPr/>
+                    <a:lstStyle/>
+                    <a:p>
+                      <a:pPr algn="ctr"/>
+                      <a:r>
+                        <a:rPr sz="1050">
+                          <a:solidFill>
+                            <a:srgbClr val="463A32"/>
+                          </a:solidFill>
+                        </a:rPr>
+                        <a:t>$263.948</a:t>
+                      </a:r>
+                    </a:p>
+                  </a:txBody>
+                  <a:tcPr>
+                    <a:solidFill>
+                      <a:srgbClr val="EFE6DA"/>
+                    </a:solidFill>
+                  </a:tcPr>
+                </a:tc>
+                <a:tc>
+                  <a:txBody>
+                    <a:bodyPr/>
+                    <a:lstStyle/>
+                    <a:p>
+                      <a:r>
+                        <a:rPr sz="1050">
+                          <a:solidFill>
+                            <a:srgbClr val="463A32"/>
+                          </a:solidFill>
+                        </a:rPr>
+                        <a:t>Mostrador: cierra ~10 pm</a:t>
+                      </a:r>
+                    </a:p>
+                  </a:txBody>
+                  <a:tcPr>
+                    <a:solidFill>
+                      <a:srgbClr val="EFE6DA"/>
+                    </a:solidFill>
+                  </a:tcPr>
+                </a:tc>
+                <a:tc>
+                  <a:txBody>
+                    <a:bodyPr/>
+                    <a:lstStyle/>
+                    <a:p>
+                      <a:pPr algn="ctr"/>
+                      <a:r>
+                        <a:rPr sz="1050" u="sng">
+                          <a:solidFill>
+                            <a:srgbClr val="8F5A44"/>
+                          </a:solidFill>
+                          <a:hlinkClick r:id="rId5"/>
+                        </a:rPr>
+                        <a:t>ver</a:t>
+                      </a:r>
+                    </a:p>
+                  </a:txBody>
+                  <a:tcPr>
+                    <a:solidFill>
+                      <a:srgbClr val="EFE6DA"/>
+                    </a:solidFill>
+                  </a:tcPr>
+                </a:tc>
+              </a:tr>
+            </a:tbl>
+          </a:graphicData>
+        </a:graphic>
+      </p:graphicFrame>
+      <p:sp>
+        <p:nvSpPr>
+          <p:cNvPr id="6" name="TextBox 5"/>
+          <p:cNvSpPr txBox="1"/>
+          <p:nvPr/>
+        </p:nvSpPr>
+        <p:spPr>
+          <a:xfrm>
+            <a:off x="457200" y="5577840"/>
+            <a:ext cx="11338560" cy="1097280"/>
+          </a:xfrm>
+          <a:prstGeom prst="rect">
+            <a:avLst/>
+          </a:prstGeom>
+          <a:noFill/>
+        </p:spPr>
+        <p:txBody>
+          <a:bodyPr wrap="square" anchor="t">
+            <a:spAutoFit/>
+          </a:bodyPr>
+          <a:lstStyle/>
+          <a:p>
+            <a:pPr algn="l"/>
+            <a:r>
+              <a:rPr sz="1150" b="0">
+                <a:solidFill>
+                  <a:srgbClr val="8F5A44"/>
+                </a:solidFill>
+              </a:rPr>
+              <a:t>Todos los precios son por los 3 días, solo el alquiler (sin gasolina ni parqueo). Las tarifas locales 'desde' se calculan sobre la tarifa base/día × 3; en alquiler corto el total real suele ser mayor (la Captiva, confirmada, cuesta ~$1.200.000) — pidan el exacto por WhatsApp. Lo clave sigue siendo el horario: las locales entregan coordinando el vuelo; los mostradores cierran ~10 pm.</a:t>
+            </a:r>
+          </a:p>
+        </p:txBody>
+      </p:sp>
+    </p:spTree>
+  </p:cSld>
+  <p:clrMapOvr>
+    <a:masterClrMapping/>
+  </p:clrMapOvr>
+</p:sld>
+</file>
+
+<file path=ppt/slides/slide11.xml><?xml version="1.0" encoding="utf-8"?>
+<p:sld xmlns:a="http://schemas.openxmlformats.org/drawingml/2006/main" xmlns:p="http://schemas.openxmlformats.org/presentationml/2006/main" xmlns:r="http://schemas.openxmlformats.org/officeDocument/2006/relationships">
+  <p:cSld>
+    <p:bg>
+      <p:bgPr>
+        <a:solidFill>
+          <a:srgbClr val="FCF5EC"/>
+        </a:solidFill>
+        <a:effectLst/>
+      </p:bgPr>
+    </p:bg>
+    <p:spTree>
+      <p:nvGrpSpPr>
+        <p:cNvPr id="1" name=""/>
+        <p:cNvGrpSpPr/>
+        <p:nvPr/>
+      </p:nvGrpSpPr>
+      <p:grpSpPr/>
+      <p:sp>
+        <p:nvSpPr>
           <p:cNvPr id="2" name="TextBox 1"/>
           <p:cNvSpPr txBox="1"/>
           <p:nvPr/>
@@ -4168,7 +5293,7 @@
 </p:sld>
 </file>
 
-<file path=ppt/slides/slide11.xml><?xml version="1.0" encoding="utf-8"?>
+<file path=ppt/slides/slide12.xml><?xml version="1.0" encoding="utf-8"?>
 <p:sld xmlns:a="http://schemas.openxmlformats.org/drawingml/2006/main" xmlns:p="http://schemas.openxmlformats.org/presentationml/2006/main" xmlns:r="http://schemas.openxmlformats.org/officeDocument/2006/relationships">
   <p:cSld>
     <p:bg>
@@ -8999,124 +10124,21 @@
                   <a:srgbClr val="FFFFFF"/>
                 </a:solidFill>
               </a:rPr>
-              <a:t>🌙   La llegada es de noche</a:t>
-            </a:r>
-          </a:p>
-        </p:txBody>
-      </p:sp>
-      <p:sp>
-        <p:nvSpPr>
-          <p:cNvPr id="4" name="Rounded Rectangle 3"/>
-          <p:cNvSpPr/>
-          <p:nvPr/>
-        </p:nvSpPr>
-        <p:spPr>
-          <a:xfrm>
-            <a:off x="502920" y="1508760"/>
-            <a:ext cx="3566160" cy="3566160"/>
-          </a:xfrm>
-          <a:prstGeom prst="roundRect">
-            <a:avLst>
-              <a:gd name="adj" fmla="val 12000"/>
-            </a:avLst>
-          </a:prstGeom>
-          <a:solidFill>
-            <a:srgbClr val="FFFFFF"/>
-          </a:solidFill>
-          <a:ln>
-            <a:noFill/>
-          </a:ln>
-          <a:effectLst>
-            <a:outerShdw blurRad="95000" dist="40000" dir="5400000" rotWithShape="0">
-              <a:srgbClr val="6E5B4E">
-                <a:alpha val="32000"/>
-              </a:srgbClr>
-            </a:outerShdw>
-          </a:effectLst>
-        </p:spPr>
-        <p:style>
-          <a:lnRef idx="1">
-            <a:schemeClr val="accent1"/>
-          </a:lnRef>
-          <a:fillRef idx="3">
-            <a:schemeClr val="accent1"/>
-          </a:fillRef>
-          <a:effectRef idx="2">
-            <a:schemeClr val="accent1"/>
-          </a:effectRef>
-          <a:fontRef idx="minor">
-            <a:schemeClr val="lt1"/>
-          </a:fontRef>
-        </p:style>
-        <p:txBody>
-          <a:bodyPr rtlCol="0" anchor="ctr"/>
-          <a:lstStyle/>
-          <a:p>
-            <a:pPr algn="ctr"/>
-          </a:p>
-        </p:txBody>
-      </p:sp>
-      <p:sp>
-        <p:nvSpPr>
-          <p:cNvPr id="5" name="Oval 4"/>
-          <p:cNvSpPr/>
-          <p:nvPr/>
-        </p:nvSpPr>
-        <p:spPr>
-          <a:xfrm>
-            <a:off x="1828800" y="1828800"/>
-            <a:ext cx="914400" cy="914400"/>
-          </a:xfrm>
-          <a:prstGeom prst="ellipse">
-            <a:avLst/>
-          </a:prstGeom>
-          <a:solidFill>
-            <a:srgbClr val="F0E0C6"/>
-          </a:solidFill>
-          <a:ln>
-            <a:noFill/>
-          </a:ln>
-        </p:spPr>
-        <p:style>
-          <a:lnRef idx="1">
-            <a:schemeClr val="accent1"/>
-          </a:lnRef>
-          <a:fillRef idx="3">
-            <a:schemeClr val="accent1"/>
-          </a:fillRef>
-          <a:effectRef idx="2">
-            <a:schemeClr val="accent1"/>
-          </a:effectRef>
-          <a:fontRef idx="minor">
-            <a:schemeClr val="lt1"/>
-          </a:fontRef>
-        </p:style>
-        <p:txBody>
-          <a:bodyPr rtlCol="0" anchor="ctr"/>
-          <a:lstStyle/>
-          <a:p>
-            <a:pPr algn="ctr"/>
-            <a:r>
-              <a:rPr sz="3000">
-                <a:solidFill>
-                  <a:srgbClr val="463A32"/>
-                </a:solidFill>
-              </a:rPr>
-              <a:t>🕘</a:t>
-            </a:r>
-          </a:p>
-        </p:txBody>
-      </p:sp>
-      <p:sp>
-        <p:nvSpPr>
-          <p:cNvPr id="6" name="TextBox 5"/>
+              <a:t>🛏️   Airbnb — casas enteras (baños del grupo)</a:t>
+            </a:r>
+          </a:p>
+        </p:txBody>
+      </p:sp>
+      <p:sp>
+        <p:nvSpPr>
+          <p:cNvPr id="4" name="TextBox 3"/>
           <p:cNvSpPr txBox="1"/>
           <p:nvPr/>
         </p:nvSpPr>
         <p:spPr>
           <a:xfrm>
-            <a:off x="777240" y="2880360"/>
-            <a:ext cx="3017520" cy="2103120"/>
+            <a:off x="548640" y="1097280"/>
+            <a:ext cx="11064240" cy="548640"/>
           </a:xfrm>
           <a:prstGeom prst="rect">
             <a:avLst/>
@@ -9129,155 +10151,718 @@
           </a:bodyPr>
           <a:lstStyle/>
           <a:p>
-            <a:pPr algn="ctr"/>
-            <a:r>
-              <a:rPr sz="1800" b="1">
-                <a:solidFill>
-                  <a:srgbClr val="8F5A44"/>
-                </a:solidFill>
-              </a:rPr>
-              <a:t>3 días limpios</a:t>
-            </a:r>
-          </a:p>
-          <a:p>
-            <a:pPr algn="ctr"/>
-            <a:r>
-              <a:rPr sz="600" b="0">
+            <a:pPr algn="l"/>
+            <a:r>
+              <a:rPr sz="1400" b="0">
                 <a:solidFill>
                   <a:srgbClr val="463A32"/>
                 </a:solidFill>
               </a:rPr>
-              <a:t/>
-            </a:r>
-          </a:p>
-          <a:p>
-            <a:pPr algn="ctr"/>
-            <a:r>
-              <a:rPr sz="1350" b="0">
-                <a:solidFill>
-                  <a:srgbClr val="463A32"/>
-                </a:solidFill>
-              </a:rPr>
-              <a:t>Recoger esa noche y devolver ~7 pm del 2: por debajo de las 72 h.</a:t>
-            </a:r>
-          </a:p>
-        </p:txBody>
-      </p:sp>
-      <p:sp>
-        <p:nvSpPr>
-          <p:cNvPr id="7" name="Rounded Rectangle 6"/>
-          <p:cNvSpPr/>
-          <p:nvPr/>
-        </p:nvSpPr>
-        <p:spPr>
-          <a:xfrm>
-            <a:off x="4233672" y="1508760"/>
-            <a:ext cx="3566160" cy="3566160"/>
-          </a:xfrm>
-          <a:prstGeom prst="roundRect">
-            <a:avLst>
-              <a:gd name="adj" fmla="val 12000"/>
-            </a:avLst>
-          </a:prstGeom>
-          <a:solidFill>
-            <a:srgbClr val="FFFFFF"/>
-          </a:solidFill>
-          <a:ln w="25400">
-            <a:solidFill>
-              <a:srgbClr val="D9A75E"/>
-            </a:solidFill>
-          </a:ln>
-          <a:effectLst>
-            <a:outerShdw blurRad="95000" dist="40000" dir="5400000" rotWithShape="0">
-              <a:srgbClr val="6E5B4E">
-                <a:alpha val="32000"/>
-              </a:srgbClr>
-            </a:outerShdw>
-          </a:effectLst>
-        </p:spPr>
-        <p:style>
-          <a:lnRef idx="1">
-            <a:schemeClr val="accent1"/>
-          </a:lnRef>
-          <a:fillRef idx="3">
-            <a:schemeClr val="accent1"/>
-          </a:fillRef>
-          <a:effectRef idx="2">
-            <a:schemeClr val="accent1"/>
-          </a:effectRef>
-          <a:fontRef idx="minor">
-            <a:schemeClr val="lt1"/>
-          </a:fontRef>
-        </p:style>
-        <p:txBody>
-          <a:bodyPr rtlCol="0" anchor="ctr"/>
-          <a:lstStyle/>
-          <a:p>
-            <a:pPr algn="ctr"/>
-          </a:p>
-        </p:txBody>
-      </p:sp>
-      <p:sp>
-        <p:nvSpPr>
-          <p:cNvPr id="8" name="Oval 7"/>
-          <p:cNvSpPr/>
-          <p:nvPr/>
-        </p:nvSpPr>
-        <p:spPr>
-          <a:xfrm>
-            <a:off x="5559552" y="1828800"/>
-            <a:ext cx="914400" cy="914400"/>
-          </a:xfrm>
-          <a:prstGeom prst="ellipse">
-            <a:avLst/>
-          </a:prstGeom>
-          <a:solidFill>
-            <a:srgbClr val="F0E0C6"/>
-          </a:solidFill>
-          <a:ln>
-            <a:noFill/>
-          </a:ln>
-        </p:spPr>
-        <p:style>
-          <a:lnRef idx="1">
-            <a:schemeClr val="accent1"/>
-          </a:lnRef>
-          <a:fillRef idx="3">
-            <a:schemeClr val="accent1"/>
-          </a:fillRef>
-          <a:effectRef idx="2">
-            <a:schemeClr val="accent1"/>
-          </a:effectRef>
-          <a:fontRef idx="minor">
-            <a:schemeClr val="lt1"/>
-          </a:fontRef>
-        </p:style>
-        <p:txBody>
-          <a:bodyPr rtlCol="0" anchor="ctr"/>
-          <a:lstStyle/>
-          <a:p>
-            <a:pPr algn="ctr"/>
-            <a:r>
-              <a:rPr sz="3000">
-                <a:solidFill>
-                  <a:srgbClr val="463A32"/>
-                </a:solidFill>
-              </a:rPr>
-              <a:t>✅</a:t>
-            </a:r>
-          </a:p>
-        </p:txBody>
-      </p:sp>
-      <p:sp>
-        <p:nvSpPr>
-          <p:cNvPr id="9" name="TextBox 8"/>
+              <a:t>Alojamiento entero: ningún baño se comparte con extraños. Casa entera recomendada + carro local ≈ $278.571 por persona (en meta). Barrido real, 7 personas.</a:t>
+            </a:r>
+          </a:p>
+        </p:txBody>
+      </p:sp>
+      <p:graphicFrame>
+        <p:nvGraphicFramePr>
+          <p:cNvPr id="5" name="Table 4"/>
+          <p:cNvGraphicFramePr>
+            <a:graphicFrameLocks noGrp="1"/>
+          </p:cNvGraphicFramePr>
+          <p:nvPr/>
+        </p:nvGraphicFramePr>
+        <p:xfrm>
+          <a:off x="457200" y="1783080"/>
+          <a:ext cx="11274552" cy="3291840"/>
+        </p:xfrm>
+        <a:graphic>
+          <a:graphicData uri="http://schemas.openxmlformats.org/drawingml/2006/table">
+            <a:tbl>
+              <a:tblPr firstRow="1" bandRow="1">
+                <a:tableStyleId>{5C22544A-7EE6-4342-B048-85BDC9FD1C3A}</a:tableStyleId>
+              </a:tblPr>
+              <a:tblGrid>
+                <a:gridCol w="4206240"/>
+                <a:gridCol w="1828800"/>
+                <a:gridCol w="1097280"/>
+                <a:gridCol w="1280160"/>
+                <a:gridCol w="2130552"/>
+                <a:gridCol w="731520"/>
+              </a:tblGrid>
+              <a:tr h="658368">
+                <a:tc>
+                  <a:txBody>
+                    <a:bodyPr/>
+                    <a:lstStyle/>
+                    <a:p>
+                      <a:r>
+                        <a:rPr b="1" sz="1200">
+                          <a:solidFill>
+                            <a:srgbClr val="FFFFFF"/>
+                          </a:solidFill>
+                        </a:rPr>
+                        <a:t>Casa / apto entero</a:t>
+                      </a:r>
+                    </a:p>
+                  </a:txBody>
+                  <a:tcPr>
+                    <a:solidFill>
+                      <a:srgbClr val="B5765C"/>
+                    </a:solidFill>
+                  </a:tcPr>
+                </a:tc>
+                <a:tc>
+                  <a:txBody>
+                    <a:bodyPr/>
+                    <a:lstStyle/>
+                    <a:p>
+                      <a:r>
+                        <a:rPr b="1" sz="1200">
+                          <a:solidFill>
+                            <a:srgbClr val="FFFFFF"/>
+                          </a:solidFill>
+                        </a:rPr>
+                        <a:t>Zona</a:t>
+                      </a:r>
+                    </a:p>
+                  </a:txBody>
+                  <a:tcPr>
+                    <a:solidFill>
+                      <a:srgbClr val="B5765C"/>
+                    </a:solidFill>
+                  </a:tcPr>
+                </a:tc>
+                <a:tc>
+                  <a:txBody>
+                    <a:bodyPr/>
+                    <a:lstStyle/>
+                    <a:p>
+                      <a:r>
+                        <a:rPr b="1" sz="1200">
+                          <a:solidFill>
+                            <a:srgbClr val="FFFFFF"/>
+                          </a:solidFill>
+                        </a:rPr>
+                        <a:t>Cabe</a:t>
+                      </a:r>
+                    </a:p>
+                  </a:txBody>
+                  <a:tcPr>
+                    <a:solidFill>
+                      <a:srgbClr val="B5765C"/>
+                    </a:solidFill>
+                  </a:tcPr>
+                </a:tc>
+                <a:tc>
+                  <a:txBody>
+                    <a:bodyPr/>
+                    <a:lstStyle/>
+                    <a:p>
+                      <a:r>
+                        <a:rPr b="1" sz="1200">
+                          <a:solidFill>
+                            <a:srgbClr val="FFFFFF"/>
+                          </a:solidFill>
+                        </a:rPr>
+                        <a:t>Baños</a:t>
+                      </a:r>
+                    </a:p>
+                  </a:txBody>
+                  <a:tcPr>
+                    <a:solidFill>
+                      <a:srgbClr val="B5765C"/>
+                    </a:solidFill>
+                  </a:tcPr>
+                </a:tc>
+                <a:tc>
+                  <a:txBody>
+                    <a:bodyPr/>
+                    <a:lstStyle/>
+                    <a:p>
+                      <a:r>
+                        <a:rPr b="1" sz="1200">
+                          <a:solidFill>
+                            <a:srgbClr val="FFFFFF"/>
+                          </a:solidFill>
+                        </a:rPr>
+                        <a:t>Por persona (3n)</a:t>
+                      </a:r>
+                    </a:p>
+                  </a:txBody>
+                  <a:tcPr>
+                    <a:solidFill>
+                      <a:srgbClr val="B5765C"/>
+                    </a:solidFill>
+                  </a:tcPr>
+                </a:tc>
+                <a:tc>
+                  <a:txBody>
+                    <a:bodyPr/>
+                    <a:lstStyle/>
+                    <a:p>
+                      <a:r>
+                        <a:rPr b="1" sz="1200">
+                          <a:solidFill>
+                            <a:srgbClr val="FFFFFF"/>
+                          </a:solidFill>
+                        </a:rPr>
+                        <a:t>Ver</a:t>
+                      </a:r>
+                    </a:p>
+                  </a:txBody>
+                  <a:tcPr>
+                    <a:solidFill>
+                      <a:srgbClr val="B5765C"/>
+                    </a:solidFill>
+                  </a:tcPr>
+                </a:tc>
+              </a:tr>
+              <a:tr h="658368">
+                <a:tc>
+                  <a:txBody>
+                    <a:bodyPr/>
+                    <a:lstStyle/>
+                    <a:p>
+                      <a:r>
+                        <a:rPr sz="1100">
+                          <a:solidFill>
+                            <a:srgbClr val="463A32"/>
+                          </a:solidFill>
+                        </a:rPr>
+                        <a:t>Casa de 4 Habitaciones – Terraza y Aire/C ★</a:t>
+                      </a:r>
+                    </a:p>
+                  </a:txBody>
+                  <a:tcPr>
+                    <a:solidFill>
+                      <a:srgbClr val="F0E0C6"/>
+                    </a:solidFill>
+                  </a:tcPr>
+                </a:tc>
+                <a:tc>
+                  <a:txBody>
+                    <a:bodyPr/>
+                    <a:lstStyle/>
+                    <a:p>
+                      <a:r>
+                        <a:rPr sz="1100">
+                          <a:solidFill>
+                            <a:srgbClr val="463A32"/>
+                          </a:solidFill>
+                        </a:rPr>
+                        <a:t>San Antonio</a:t>
+                      </a:r>
+                    </a:p>
+                  </a:txBody>
+                  <a:tcPr>
+                    <a:solidFill>
+                      <a:srgbClr val="F0E0C6"/>
+                    </a:solidFill>
+                  </a:tcPr>
+                </a:tc>
+                <a:tc>
+                  <a:txBody>
+                    <a:bodyPr/>
+                    <a:lstStyle/>
+                    <a:p>
+                      <a:pPr algn="ctr"/>
+                      <a:r>
+                        <a:rPr sz="1100">
+                          <a:solidFill>
+                            <a:srgbClr val="463A32"/>
+                          </a:solidFill>
+                        </a:rPr>
+                        <a:t>9</a:t>
+                      </a:r>
+                    </a:p>
+                  </a:txBody>
+                  <a:tcPr>
+                    <a:solidFill>
+                      <a:srgbClr val="F0E0C6"/>
+                    </a:solidFill>
+                  </a:tcPr>
+                </a:tc>
+                <a:tc>
+                  <a:txBody>
+                    <a:bodyPr/>
+                    <a:lstStyle/>
+                    <a:p>
+                      <a:pPr algn="ctr"/>
+                      <a:r>
+                        <a:rPr sz="1100">
+                          <a:solidFill>
+                            <a:srgbClr val="463A32"/>
+                          </a:solidFill>
+                        </a:rPr>
+                        <a:t>1,5</a:t>
+                      </a:r>
+                    </a:p>
+                  </a:txBody>
+                  <a:tcPr>
+                    <a:solidFill>
+                      <a:srgbClr val="F0E0C6"/>
+                    </a:solidFill>
+                  </a:tcPr>
+                </a:tc>
+                <a:tc>
+                  <a:txBody>
+                    <a:bodyPr/>
+                    <a:lstStyle/>
+                    <a:p>
+                      <a:pPr algn="ctr"/>
+                      <a:r>
+                        <a:rPr sz="1100">
+                          <a:solidFill>
+                            <a:srgbClr val="463A32"/>
+                          </a:solidFill>
+                        </a:rPr>
+                        <a:t>$78.571</a:t>
+                      </a:r>
+                    </a:p>
+                  </a:txBody>
+                  <a:tcPr>
+                    <a:solidFill>
+                      <a:srgbClr val="F0E0C6"/>
+                    </a:solidFill>
+                  </a:tcPr>
+                </a:tc>
+                <a:tc>
+                  <a:txBody>
+                    <a:bodyPr/>
+                    <a:lstStyle/>
+                    <a:p>
+                      <a:pPr algn="ctr"/>
+                      <a:r>
+                        <a:rPr sz="1100" u="sng">
+                          <a:solidFill>
+                            <a:srgbClr val="8F5A44"/>
+                          </a:solidFill>
+                          <a:hlinkClick r:id="rId2"/>
+                        </a:rPr>
+                        <a:t>ver</a:t>
+                      </a:r>
+                    </a:p>
+                  </a:txBody>
+                  <a:tcPr>
+                    <a:solidFill>
+                      <a:srgbClr val="F0E0C6"/>
+                    </a:solidFill>
+                  </a:tcPr>
+                </a:tc>
+              </a:tr>
+              <a:tr h="658368">
+                <a:tc>
+                  <a:txBody>
+                    <a:bodyPr/>
+                    <a:lstStyle/>
+                    <a:p>
+                      <a:r>
+                        <a:rPr sz="1100">
+                          <a:solidFill>
+                            <a:srgbClr val="463A32"/>
+                          </a:solidFill>
+                        </a:rPr>
+                        <a:t>Casa amoblada para 7 personas con garaje</a:t>
+                      </a:r>
+                    </a:p>
+                  </a:txBody>
+                  <a:tcPr>
+                    <a:solidFill>
+                      <a:srgbClr val="F4E8DA"/>
+                    </a:solidFill>
+                  </a:tcPr>
+                </a:tc>
+                <a:tc>
+                  <a:txBody>
+                    <a:bodyPr/>
+                    <a:lstStyle/>
+                    <a:p>
+                      <a:r>
+                        <a:rPr sz="1100">
+                          <a:solidFill>
+                            <a:srgbClr val="463A32"/>
+                          </a:solidFill>
+                        </a:rPr>
+                        <a:t>San Antonio</a:t>
+                      </a:r>
+                    </a:p>
+                  </a:txBody>
+                  <a:tcPr>
+                    <a:solidFill>
+                      <a:srgbClr val="F4E8DA"/>
+                    </a:solidFill>
+                  </a:tcPr>
+                </a:tc>
+                <a:tc>
+                  <a:txBody>
+                    <a:bodyPr/>
+                    <a:lstStyle/>
+                    <a:p>
+                      <a:pPr algn="ctr"/>
+                      <a:r>
+                        <a:rPr sz="1100">
+                          <a:solidFill>
+                            <a:srgbClr val="463A32"/>
+                          </a:solidFill>
+                        </a:rPr>
+                        <a:t>7</a:t>
+                      </a:r>
+                    </a:p>
+                  </a:txBody>
+                  <a:tcPr>
+                    <a:solidFill>
+                      <a:srgbClr val="F4E8DA"/>
+                    </a:solidFill>
+                  </a:tcPr>
+                </a:tc>
+                <a:tc>
+                  <a:txBody>
+                    <a:bodyPr/>
+                    <a:lstStyle/>
+                    <a:p>
+                      <a:pPr algn="ctr"/>
+                      <a:r>
+                        <a:rPr sz="1100">
+                          <a:solidFill>
+                            <a:srgbClr val="463A32"/>
+                          </a:solidFill>
+                        </a:rPr>
+                        <a:t>2,5</a:t>
+                      </a:r>
+                    </a:p>
+                  </a:txBody>
+                  <a:tcPr>
+                    <a:solidFill>
+                      <a:srgbClr val="F4E8DA"/>
+                    </a:solidFill>
+                  </a:tcPr>
+                </a:tc>
+                <a:tc>
+                  <a:txBody>
+                    <a:bodyPr/>
+                    <a:lstStyle/>
+                    <a:p>
+                      <a:pPr algn="ctr"/>
+                      <a:r>
+                        <a:rPr sz="1100">
+                          <a:solidFill>
+                            <a:srgbClr val="463A32"/>
+                          </a:solidFill>
+                        </a:rPr>
+                        <a:t>$90.714</a:t>
+                      </a:r>
+                    </a:p>
+                  </a:txBody>
+                  <a:tcPr>
+                    <a:solidFill>
+                      <a:srgbClr val="F4E8DA"/>
+                    </a:solidFill>
+                  </a:tcPr>
+                </a:tc>
+                <a:tc>
+                  <a:txBody>
+                    <a:bodyPr/>
+                    <a:lstStyle/>
+                    <a:p>
+                      <a:pPr algn="ctr"/>
+                      <a:r>
+                        <a:rPr sz="1100" u="sng">
+                          <a:solidFill>
+                            <a:srgbClr val="8F5A44"/>
+                          </a:solidFill>
+                          <a:hlinkClick r:id="rId3"/>
+                        </a:rPr>
+                        <a:t>ver</a:t>
+                      </a:r>
+                    </a:p>
+                  </a:txBody>
+                  <a:tcPr>
+                    <a:solidFill>
+                      <a:srgbClr val="F4E8DA"/>
+                    </a:solidFill>
+                  </a:tcPr>
+                </a:tc>
+              </a:tr>
+              <a:tr h="658368">
+                <a:tc>
+                  <a:txBody>
+                    <a:bodyPr/>
+                    <a:lstStyle/>
+                    <a:p>
+                      <a:r>
+                        <a:rPr sz="1100">
+                          <a:solidFill>
+                            <a:srgbClr val="463A32"/>
+                          </a:solidFill>
+                        </a:rPr>
+                        <a:t>Casa para 8 personas</a:t>
+                      </a:r>
+                    </a:p>
+                  </a:txBody>
+                  <a:tcPr>
+                    <a:solidFill>
+                      <a:srgbClr val="FFFFFF"/>
+                    </a:solidFill>
+                  </a:tcPr>
+                </a:tc>
+                <a:tc>
+                  <a:txBody>
+                    <a:bodyPr/>
+                    <a:lstStyle/>
+                    <a:p>
+                      <a:r>
+                        <a:rPr sz="1100">
+                          <a:solidFill>
+                            <a:srgbClr val="463A32"/>
+                          </a:solidFill>
+                        </a:rPr>
+                        <a:t>Granada</a:t>
+                      </a:r>
+                    </a:p>
+                  </a:txBody>
+                  <a:tcPr>
+                    <a:solidFill>
+                      <a:srgbClr val="FFFFFF"/>
+                    </a:solidFill>
+                  </a:tcPr>
+                </a:tc>
+                <a:tc>
+                  <a:txBody>
+                    <a:bodyPr/>
+                    <a:lstStyle/>
+                    <a:p>
+                      <a:pPr algn="ctr"/>
+                      <a:r>
+                        <a:rPr sz="1100">
+                          <a:solidFill>
+                            <a:srgbClr val="463A32"/>
+                          </a:solidFill>
+                        </a:rPr>
+                        <a:t>9</a:t>
+                      </a:r>
+                    </a:p>
+                  </a:txBody>
+                  <a:tcPr>
+                    <a:solidFill>
+                      <a:srgbClr val="FFFFFF"/>
+                    </a:solidFill>
+                  </a:tcPr>
+                </a:tc>
+                <a:tc>
+                  <a:txBody>
+                    <a:bodyPr/>
+                    <a:lstStyle/>
+                    <a:p>
+                      <a:pPr algn="ctr"/>
+                      <a:r>
+                        <a:rPr sz="1100">
+                          <a:solidFill>
+                            <a:srgbClr val="463A32"/>
+                          </a:solidFill>
+                        </a:rPr>
+                        <a:t>2</a:t>
+                      </a:r>
+                    </a:p>
+                  </a:txBody>
+                  <a:tcPr>
+                    <a:solidFill>
+                      <a:srgbClr val="FFFFFF"/>
+                    </a:solidFill>
+                  </a:tcPr>
+                </a:tc>
+                <a:tc>
+                  <a:txBody>
+                    <a:bodyPr/>
+                    <a:lstStyle/>
+                    <a:p>
+                      <a:pPr algn="ctr"/>
+                      <a:r>
+                        <a:rPr sz="1100">
+                          <a:solidFill>
+                            <a:srgbClr val="463A32"/>
+                          </a:solidFill>
+                        </a:rPr>
+                        <a:t>$124.151</a:t>
+                      </a:r>
+                    </a:p>
+                  </a:txBody>
+                  <a:tcPr>
+                    <a:solidFill>
+                      <a:srgbClr val="FFFFFF"/>
+                    </a:solidFill>
+                  </a:tcPr>
+                </a:tc>
+                <a:tc>
+                  <a:txBody>
+                    <a:bodyPr/>
+                    <a:lstStyle/>
+                    <a:p>
+                      <a:pPr algn="ctr"/>
+                      <a:r>
+                        <a:rPr sz="1100" u="sng">
+                          <a:solidFill>
+                            <a:srgbClr val="8F5A44"/>
+                          </a:solidFill>
+                          <a:hlinkClick r:id="rId4"/>
+                        </a:rPr>
+                        <a:t>ver</a:t>
+                      </a:r>
+                    </a:p>
+                  </a:txBody>
+                  <a:tcPr>
+                    <a:solidFill>
+                      <a:srgbClr val="FFFFFF"/>
+                    </a:solidFill>
+                  </a:tcPr>
+                </a:tc>
+              </a:tr>
+              <a:tr h="658368">
+                <a:tc>
+                  <a:txBody>
+                    <a:bodyPr/>
+                    <a:lstStyle/>
+                    <a:p>
+                      <a:r>
+                        <a:rPr sz="1100">
+                          <a:solidFill>
+                            <a:srgbClr val="463A32"/>
+                          </a:solidFill>
+                        </a:rPr>
+                        <a:t>Casa con piscina privada</a:t>
+                      </a:r>
+                    </a:p>
+                  </a:txBody>
+                  <a:tcPr>
+                    <a:solidFill>
+                      <a:srgbClr val="F4E8DA"/>
+                    </a:solidFill>
+                  </a:tcPr>
+                </a:tc>
+                <a:tc>
+                  <a:txBody>
+                    <a:bodyPr/>
+                    <a:lstStyle/>
+                    <a:p>
+                      <a:r>
+                        <a:rPr sz="1100">
+                          <a:solidFill>
+                            <a:srgbClr val="463A32"/>
+                          </a:solidFill>
+                        </a:rPr>
+                        <a:t>San Antonio</a:t>
+                      </a:r>
+                    </a:p>
+                  </a:txBody>
+                  <a:tcPr>
+                    <a:solidFill>
+                      <a:srgbClr val="F4E8DA"/>
+                    </a:solidFill>
+                  </a:tcPr>
+                </a:tc>
+                <a:tc>
+                  <a:txBody>
+                    <a:bodyPr/>
+                    <a:lstStyle/>
+                    <a:p>
+                      <a:pPr algn="ctr"/>
+                      <a:r>
+                        <a:rPr sz="1100">
+                          <a:solidFill>
+                            <a:srgbClr val="463A32"/>
+                          </a:solidFill>
+                        </a:rPr>
+                        <a:t>8</a:t>
+                      </a:r>
+                    </a:p>
+                  </a:txBody>
+                  <a:tcPr>
+                    <a:solidFill>
+                      <a:srgbClr val="F4E8DA"/>
+                    </a:solidFill>
+                  </a:tcPr>
+                </a:tc>
+                <a:tc>
+                  <a:txBody>
+                    <a:bodyPr/>
+                    <a:lstStyle/>
+                    <a:p>
+                      <a:pPr algn="ctr"/>
+                      <a:r>
+                        <a:rPr sz="1100">
+                          <a:solidFill>
+                            <a:srgbClr val="463A32"/>
+                          </a:solidFill>
+                        </a:rPr>
+                        <a:t>2,5</a:t>
+                      </a:r>
+                    </a:p>
+                  </a:txBody>
+                  <a:tcPr>
+                    <a:solidFill>
+                      <a:srgbClr val="F4E8DA"/>
+                    </a:solidFill>
+                  </a:tcPr>
+                </a:tc>
+                <a:tc>
+                  <a:txBody>
+                    <a:bodyPr/>
+                    <a:lstStyle/>
+                    <a:p>
+                      <a:pPr algn="ctr"/>
+                      <a:r>
+                        <a:rPr sz="1100">
+                          <a:solidFill>
+                            <a:srgbClr val="463A32"/>
+                          </a:solidFill>
+                        </a:rPr>
+                        <a:t>$430.608</a:t>
+                      </a:r>
+                    </a:p>
+                  </a:txBody>
+                  <a:tcPr>
+                    <a:solidFill>
+                      <a:srgbClr val="F4E8DA"/>
+                    </a:solidFill>
+                  </a:tcPr>
+                </a:tc>
+                <a:tc>
+                  <a:txBody>
+                    <a:bodyPr/>
+                    <a:lstStyle/>
+                    <a:p>
+                      <a:pPr algn="ctr"/>
+                      <a:r>
+                        <a:rPr sz="1100" u="sng">
+                          <a:solidFill>
+                            <a:srgbClr val="8F5A44"/>
+                          </a:solidFill>
+                          <a:hlinkClick r:id="rId5"/>
+                        </a:rPr>
+                        <a:t>ver</a:t>
+                      </a:r>
+                    </a:p>
+                  </a:txBody>
+                  <a:tcPr>
+                    <a:solidFill>
+                      <a:srgbClr val="F4E8DA"/>
+                    </a:solidFill>
+                  </a:tcPr>
+                </a:tc>
+              </a:tr>
+            </a:tbl>
+          </a:graphicData>
+        </a:graphic>
+      </p:graphicFrame>
+      <p:sp>
+        <p:nvSpPr>
+          <p:cNvPr id="6" name="TextBox 5"/>
           <p:cNvSpPr txBox="1"/>
           <p:nvPr/>
         </p:nvSpPr>
         <p:spPr>
           <a:xfrm>
-            <a:off x="4507992" y="2880360"/>
-            <a:ext cx="3017520" cy="2103120"/>
+            <a:off x="548640" y="5440680"/>
+            <a:ext cx="11064240" cy="548640"/>
           </a:xfrm>
           <a:prstGeom prst="rect">
             <a:avLst/>
@@ -9292,227 +10877,12 @@
           <a:p>
             <a:pPr algn="ctr"/>
             <a:r>
-              <a:rPr sz="1800" b="1">
-                <a:solidFill>
-                  <a:srgbClr val="8F5A44"/>
-                </a:solidFill>
-              </a:rPr>
-              <a:t>Local = cuadra</a:t>
-            </a:r>
-          </a:p>
-          <a:p>
-            <a:pPr algn="ctr"/>
-            <a:r>
-              <a:rPr sz="600" b="0">
-                <a:solidFill>
-                  <a:srgbClr val="463A32"/>
-                </a:solidFill>
-              </a:rPr>
-              <a:t/>
-            </a:r>
-          </a:p>
-          <a:p>
-            <a:pPr algn="ctr"/>
-            <a:r>
-              <a:rPr sz="1350" b="0">
-                <a:solidFill>
-                  <a:srgbClr val="463A32"/>
-                </a:solidFill>
-              </a:rPr>
-              <a:t>Farallones / WayCarCali entregan el carro coordinando el vuelo de las 8 pm.</a:t>
-            </a:r>
-          </a:p>
-        </p:txBody>
-      </p:sp>
-      <p:sp>
-        <p:nvSpPr>
-          <p:cNvPr id="10" name="Rounded Rectangle 9"/>
-          <p:cNvSpPr/>
-          <p:nvPr/>
-        </p:nvSpPr>
-        <p:spPr>
-          <a:xfrm>
-            <a:off x="7964424" y="1508760"/>
-            <a:ext cx="3566160" cy="3566160"/>
-          </a:xfrm>
-          <a:prstGeom prst="roundRect">
-            <a:avLst>
-              <a:gd name="adj" fmla="val 12000"/>
-            </a:avLst>
-          </a:prstGeom>
-          <a:solidFill>
-            <a:srgbClr val="FFFFFF"/>
-          </a:solidFill>
-          <a:ln>
-            <a:noFill/>
-          </a:ln>
-          <a:effectLst>
-            <a:outerShdw blurRad="95000" dist="40000" dir="5400000" rotWithShape="0">
-              <a:srgbClr val="6E5B4E">
-                <a:alpha val="32000"/>
-              </a:srgbClr>
-            </a:outerShdw>
-          </a:effectLst>
-        </p:spPr>
-        <p:style>
-          <a:lnRef idx="1">
-            <a:schemeClr val="accent1"/>
-          </a:lnRef>
-          <a:fillRef idx="3">
-            <a:schemeClr val="accent1"/>
-          </a:fillRef>
-          <a:effectRef idx="2">
-            <a:schemeClr val="accent1"/>
-          </a:effectRef>
-          <a:fontRef idx="minor">
-            <a:schemeClr val="lt1"/>
-          </a:fontRef>
-        </p:style>
-        <p:txBody>
-          <a:bodyPr rtlCol="0" anchor="ctr"/>
-          <a:lstStyle/>
-          <a:p>
-            <a:pPr algn="ctr"/>
-          </a:p>
-        </p:txBody>
-      </p:sp>
-      <p:sp>
-        <p:nvSpPr>
-          <p:cNvPr id="11" name="Oval 10"/>
-          <p:cNvSpPr/>
-          <p:nvPr/>
-        </p:nvSpPr>
-        <p:spPr>
-          <a:xfrm>
-            <a:off x="9290304" y="1828800"/>
-            <a:ext cx="914400" cy="914400"/>
-          </a:xfrm>
-          <a:prstGeom prst="ellipse">
-            <a:avLst/>
-          </a:prstGeom>
-          <a:solidFill>
-            <a:srgbClr val="F0E0C6"/>
-          </a:solidFill>
-          <a:ln>
-            <a:noFill/>
-          </a:ln>
-        </p:spPr>
-        <p:style>
-          <a:lnRef idx="1">
-            <a:schemeClr val="accent1"/>
-          </a:lnRef>
-          <a:fillRef idx="3">
-            <a:schemeClr val="accent1"/>
-          </a:fillRef>
-          <a:effectRef idx="2">
-            <a:schemeClr val="accent1"/>
-          </a:effectRef>
-          <a:fontRef idx="minor">
-            <a:schemeClr val="lt1"/>
-          </a:fontRef>
-        </p:style>
-        <p:txBody>
-          <a:bodyPr rtlCol="0" anchor="ctr"/>
-          <a:lstStyle/>
-          <a:p>
-            <a:pPr algn="ctr"/>
-            <a:r>
-              <a:rPr sz="3000">
-                <a:solidFill>
-                  <a:srgbClr val="463A32"/>
-                </a:solidFill>
-              </a:rPr>
-              <a:t>⚠️</a:t>
-            </a:r>
-          </a:p>
-        </p:txBody>
-      </p:sp>
-      <p:sp>
-        <p:nvSpPr>
-          <p:cNvPr id="12" name="TextBox 11"/>
-          <p:cNvSpPr txBox="1"/>
-          <p:nvPr/>
-        </p:nvSpPr>
-        <p:spPr>
-          <a:xfrm>
-            <a:off x="8238744" y="2880360"/>
-            <a:ext cx="3017520" cy="2103120"/>
-          </a:xfrm>
-          <a:prstGeom prst="rect">
-            <a:avLst/>
-          </a:prstGeom>
-          <a:noFill/>
-        </p:spPr>
-        <p:txBody>
-          <a:bodyPr wrap="square" anchor="t">
-            <a:spAutoFit/>
-          </a:bodyPr>
-          <a:lstStyle/>
-          <a:p>
-            <a:pPr algn="ctr"/>
-            <a:r>
-              <a:rPr sz="1800" b="1">
-                <a:solidFill>
-                  <a:srgbClr val="8F5A44"/>
-                </a:solidFill>
-              </a:rPr>
-              <a:t>Mostrador = ojo</a:t>
-            </a:r>
-          </a:p>
-          <a:p>
-            <a:pPr algn="ctr"/>
-            <a:r>
-              <a:rPr sz="600" b="0">
-                <a:solidFill>
-                  <a:srgbClr val="463A32"/>
-                </a:solidFill>
-              </a:rPr>
-              <a:t/>
-            </a:r>
-          </a:p>
-          <a:p>
-            <a:pPr algn="ctr"/>
-            <a:r>
-              <a:rPr sz="1350" b="0">
-                <a:solidFill>
-                  <a:srgbClr val="463A32"/>
-                </a:solidFill>
-              </a:rPr>
-              <a:t>Alamo / Localiza: más baratos, pero cierran ~10 pm. Reservar fuera de horario (24 h).</a:t>
-            </a:r>
-          </a:p>
-        </p:txBody>
-      </p:sp>
-      <p:sp>
-        <p:nvSpPr>
-          <p:cNvPr id="13" name="TextBox 12"/>
-          <p:cNvSpPr txBox="1"/>
-          <p:nvPr/>
-        </p:nvSpPr>
-        <p:spPr>
-          <a:xfrm>
-            <a:off x="548640" y="5303520"/>
-            <a:ext cx="11064240" cy="548640"/>
-          </a:xfrm>
-          <a:prstGeom prst="rect">
-            <a:avLst/>
-          </a:prstGeom>
-          <a:noFill/>
-        </p:spPr>
-        <p:txBody>
-          <a:bodyPr wrap="square" anchor="t">
-            <a:spAutoFit/>
-          </a:bodyPr>
-          <a:lstStyle/>
-          <a:p>
-            <a:pPr algn="ctr"/>
-            <a:r>
-              <a:rPr sz="1300" b="0">
+              <a:rPr sz="1200" b="0">
                 <a:solidFill>
                   <a:srgbClr val="8A7A6E"/>
                 </a:solidFill>
               </a:rPr>
-              <a:t>Red de seguridad: los taxis oficiales del aeropuerto operan 24/7 (distintivo amarillo, tarifados).</a:t>
+              <a:t>No cumplen: «Casa Familiar 5 Hab» (1 baño para 11) y «Apto El Ingenio» (3 camas, lejos de la rumba). Por eso se miran baños y camas, no solo el precio.</a:t>
             </a:r>
           </a:p>
         </p:txBody>
@@ -9624,7 +10994,7 @@
                   <a:srgbClr val="FFFFFF"/>
                 </a:solidFill>
               </a:rPr>
-              <a:t>🚗   Cómo moverse — tres opciones</a:t>
+              <a:t>🌙   La llegada es de noche</a:t>
             </a:r>
           </a:p>
         </p:txBody>
@@ -9637,8 +11007,8 @@
         </p:nvSpPr>
         <p:spPr>
           <a:xfrm>
-            <a:off x="502920" y="1554480"/>
-            <a:ext cx="3566160" cy="4114800"/>
+            <a:off x="502920" y="1508760"/>
+            <a:ext cx="3566160" cy="3566160"/>
           </a:xfrm>
           <a:prstGeom prst="roundRect">
             <a:avLst>
@@ -9646,7 +11016,166 @@
             </a:avLst>
           </a:prstGeom>
           <a:solidFill>
+            <a:srgbClr val="FFFFFF"/>
+          </a:solidFill>
+          <a:ln>
+            <a:noFill/>
+          </a:ln>
+          <a:effectLst>
+            <a:outerShdw blurRad="95000" dist="40000" dir="5400000" rotWithShape="0">
+              <a:srgbClr val="6E5B4E">
+                <a:alpha val="32000"/>
+              </a:srgbClr>
+            </a:outerShdw>
+          </a:effectLst>
+        </p:spPr>
+        <p:style>
+          <a:lnRef idx="1">
+            <a:schemeClr val="accent1"/>
+          </a:lnRef>
+          <a:fillRef idx="3">
+            <a:schemeClr val="accent1"/>
+          </a:fillRef>
+          <a:effectRef idx="2">
+            <a:schemeClr val="accent1"/>
+          </a:effectRef>
+          <a:fontRef idx="minor">
+            <a:schemeClr val="lt1"/>
+          </a:fontRef>
+        </p:style>
+        <p:txBody>
+          <a:bodyPr rtlCol="0" anchor="ctr"/>
+          <a:lstStyle/>
+          <a:p>
+            <a:pPr algn="ctr"/>
+          </a:p>
+        </p:txBody>
+      </p:sp>
+      <p:sp>
+        <p:nvSpPr>
+          <p:cNvPr id="5" name="Oval 4"/>
+          <p:cNvSpPr/>
+          <p:nvPr/>
+        </p:nvSpPr>
+        <p:spPr>
+          <a:xfrm>
+            <a:off x="1828800" y="1828800"/>
+            <a:ext cx="914400" cy="914400"/>
+          </a:xfrm>
+          <a:prstGeom prst="ellipse">
+            <a:avLst/>
+          </a:prstGeom>
+          <a:solidFill>
             <a:srgbClr val="F0E0C6"/>
+          </a:solidFill>
+          <a:ln>
+            <a:noFill/>
+          </a:ln>
+        </p:spPr>
+        <p:style>
+          <a:lnRef idx="1">
+            <a:schemeClr val="accent1"/>
+          </a:lnRef>
+          <a:fillRef idx="3">
+            <a:schemeClr val="accent1"/>
+          </a:fillRef>
+          <a:effectRef idx="2">
+            <a:schemeClr val="accent1"/>
+          </a:effectRef>
+          <a:fontRef idx="minor">
+            <a:schemeClr val="lt1"/>
+          </a:fontRef>
+        </p:style>
+        <p:txBody>
+          <a:bodyPr rtlCol="0" anchor="ctr"/>
+          <a:lstStyle/>
+          <a:p>
+            <a:pPr algn="ctr"/>
+            <a:r>
+              <a:rPr sz="3000">
+                <a:solidFill>
+                  <a:srgbClr val="463A32"/>
+                </a:solidFill>
+              </a:rPr>
+              <a:t>🕘</a:t>
+            </a:r>
+          </a:p>
+        </p:txBody>
+      </p:sp>
+      <p:sp>
+        <p:nvSpPr>
+          <p:cNvPr id="6" name="TextBox 5"/>
+          <p:cNvSpPr txBox="1"/>
+          <p:nvPr/>
+        </p:nvSpPr>
+        <p:spPr>
+          <a:xfrm>
+            <a:off x="777240" y="2880360"/>
+            <a:ext cx="3017520" cy="2103120"/>
+          </a:xfrm>
+          <a:prstGeom prst="rect">
+            <a:avLst/>
+          </a:prstGeom>
+          <a:noFill/>
+        </p:spPr>
+        <p:txBody>
+          <a:bodyPr wrap="square" anchor="t">
+            <a:spAutoFit/>
+          </a:bodyPr>
+          <a:lstStyle/>
+          <a:p>
+            <a:pPr algn="ctr"/>
+            <a:r>
+              <a:rPr sz="1800" b="1">
+                <a:solidFill>
+                  <a:srgbClr val="8F5A44"/>
+                </a:solidFill>
+              </a:rPr>
+              <a:t>3 días limpios</a:t>
+            </a:r>
+          </a:p>
+          <a:p>
+            <a:pPr algn="ctr"/>
+            <a:r>
+              <a:rPr sz="600" b="0">
+                <a:solidFill>
+                  <a:srgbClr val="463A32"/>
+                </a:solidFill>
+              </a:rPr>
+              <a:t/>
+            </a:r>
+          </a:p>
+          <a:p>
+            <a:pPr algn="ctr"/>
+            <a:r>
+              <a:rPr sz="1350" b="0">
+                <a:solidFill>
+                  <a:srgbClr val="463A32"/>
+                </a:solidFill>
+              </a:rPr>
+              <a:t>Recoger esa noche y devolver ~7 pm del 2: por debajo de las 72 h.</a:t>
+            </a:r>
+          </a:p>
+        </p:txBody>
+      </p:sp>
+      <p:sp>
+        <p:nvSpPr>
+          <p:cNvPr id="7" name="Rounded Rectangle 6"/>
+          <p:cNvSpPr/>
+          <p:nvPr/>
+        </p:nvSpPr>
+        <p:spPr>
+          <a:xfrm>
+            <a:off x="4233672" y="1508760"/>
+            <a:ext cx="3566160" cy="3566160"/>
+          </a:xfrm>
+          <a:prstGeom prst="roundRect">
+            <a:avLst>
+              <a:gd name="adj" fmla="val 12000"/>
+            </a:avLst>
+          </a:prstGeom>
+          <a:solidFill>
+            <a:srgbClr val="FFFFFF"/>
           </a:solidFill>
           <a:ln w="25400">
             <a:solidFill>
@@ -9685,22 +11214,20 @@
       </p:sp>
       <p:sp>
         <p:nvSpPr>
-          <p:cNvPr id="5" name="Rounded Rectangle 4"/>
+          <p:cNvPr id="8" name="Oval 7"/>
           <p:cNvSpPr/>
           <p:nvPr/>
         </p:nvSpPr>
         <p:spPr>
           <a:xfrm>
-            <a:off x="1508760" y="1325880"/>
-            <a:ext cx="1554480" cy="457200"/>
-          </a:xfrm>
-          <a:prstGeom prst="roundRect">
-            <a:avLst>
-              <a:gd name="adj" fmla="val 50000"/>
-            </a:avLst>
+            <a:off x="5559552" y="1828800"/>
+            <a:ext cx="914400" cy="914400"/>
+          </a:xfrm>
+          <a:prstGeom prst="ellipse">
+            <a:avLst/>
           </a:prstGeom>
           <a:solidFill>
-            <a:srgbClr val="D9A75E"/>
+            <a:srgbClr val="F0E0C6"/>
           </a:solidFill>
           <a:ln>
             <a:noFill/>
@@ -9725,53 +11252,27 @@
           <a:lstStyle/>
           <a:p>
             <a:pPr algn="ctr"/>
-          </a:p>
-        </p:txBody>
-      </p:sp>
-      <p:sp>
-        <p:nvSpPr>
-          <p:cNvPr id="6" name="TextBox 5"/>
+            <a:r>
+              <a:rPr sz="3000">
+                <a:solidFill>
+                  <a:srgbClr val="463A32"/>
+                </a:solidFill>
+              </a:rPr>
+              <a:t>✅</a:t>
+            </a:r>
+          </a:p>
+        </p:txBody>
+      </p:sp>
+      <p:sp>
+        <p:nvSpPr>
+          <p:cNvPr id="9" name="TextBox 8"/>
           <p:cNvSpPr txBox="1"/>
           <p:nvPr/>
         </p:nvSpPr>
         <p:spPr>
           <a:xfrm>
-            <a:off x="1508760" y="1325880"/>
-            <a:ext cx="1554480" cy="457200"/>
-          </a:xfrm>
-          <a:prstGeom prst="rect">
-            <a:avLst/>
-          </a:prstGeom>
-          <a:noFill/>
-        </p:spPr>
-        <p:txBody>
-          <a:bodyPr wrap="square" anchor="ctr">
-            <a:spAutoFit/>
-          </a:bodyPr>
-          <a:lstStyle/>
-          <a:p>
-            <a:pPr algn="ctr"/>
-            <a:r>
-              <a:rPr sz="1200" b="1">
-                <a:solidFill>
-                  <a:srgbClr val="463A32"/>
-                </a:solidFill>
-              </a:rPr>
-              <a:t>★ Recomendado</a:t>
-            </a:r>
-          </a:p>
-        </p:txBody>
-      </p:sp>
-      <p:sp>
-        <p:nvSpPr>
-          <p:cNvPr id="7" name="TextBox 6"/>
-          <p:cNvSpPr txBox="1"/>
-          <p:nvPr/>
-        </p:nvSpPr>
-        <p:spPr>
-          <a:xfrm>
-            <a:off x="777240" y="1920240"/>
-            <a:ext cx="3017520" cy="731520"/>
+            <a:off x="4507992" y="2880360"/>
+            <a:ext cx="3017520" cy="2103120"/>
           </a:xfrm>
           <a:prstGeom prst="rect">
             <a:avLst/>
@@ -9791,86 +11292,29 @@
                   <a:srgbClr val="8F5A44"/>
                 </a:solidFill>
               </a:rPr>
-              <a:t>Carro local (entrega)</a:t>
-            </a:r>
-          </a:p>
-        </p:txBody>
-      </p:sp>
-      <p:sp>
-        <p:nvSpPr>
-          <p:cNvPr id="8" name="TextBox 7"/>
-          <p:cNvSpPr txBox="1"/>
-          <p:nvPr/>
-        </p:nvSpPr>
-        <p:spPr>
-          <a:xfrm>
-            <a:off x="777240" y="2743200"/>
-            <a:ext cx="3017520" cy="1005840"/>
-          </a:xfrm>
-          <a:prstGeom prst="rect">
-            <a:avLst/>
-          </a:prstGeom>
-          <a:noFill/>
-        </p:spPr>
-        <p:txBody>
-          <a:bodyPr wrap="square" anchor="t">
-            <a:spAutoFit/>
-          </a:bodyPr>
-          <a:lstStyle/>
+              <a:t>Local = cuadra</a:t>
+            </a:r>
+          </a:p>
           <a:p>
             <a:pPr algn="ctr"/>
             <a:r>
-              <a:rPr sz="3400" b="1">
-                <a:solidFill>
-                  <a:srgbClr val="D9A75E"/>
-                </a:solidFill>
-              </a:rPr>
-              <a:t>$200.000</a:t>
+              <a:rPr sz="600" b="0">
+                <a:solidFill>
+                  <a:srgbClr val="463A32"/>
+                </a:solidFill>
+              </a:rPr>
+              <a:t/>
             </a:r>
           </a:p>
           <a:p>
             <a:pPr algn="ctr"/>
             <a:r>
-              <a:rPr sz="1300" b="0">
-                <a:solidFill>
-                  <a:srgbClr val="8A7A6E"/>
-                </a:solidFill>
-              </a:rPr>
-              <a:t>por persona</a:t>
-            </a:r>
-          </a:p>
-        </p:txBody>
-      </p:sp>
-      <p:sp>
-        <p:nvSpPr>
-          <p:cNvPr id="9" name="TextBox 8"/>
-          <p:cNvSpPr txBox="1"/>
-          <p:nvPr/>
-        </p:nvSpPr>
-        <p:spPr>
-          <a:xfrm>
-            <a:off x="822960" y="4069080"/>
-            <a:ext cx="2926080" cy="1463040"/>
-          </a:xfrm>
-          <a:prstGeom prst="rect">
-            <a:avLst/>
-          </a:prstGeom>
-          <a:noFill/>
-        </p:spPr>
-        <p:txBody>
-          <a:bodyPr wrap="square" anchor="t">
-            <a:spAutoFit/>
-          </a:bodyPr>
-          <a:lstStyle/>
-          <a:p>
-            <a:pPr algn="ctr"/>
-            <a:r>
               <a:rPr sz="1350" b="0">
                 <a:solidFill>
                   <a:srgbClr val="463A32"/>
                 </a:solidFill>
               </a:rPr>
-              <a:t>Cuadra con la llegada de noche; libertad para salir de Cali.</a:t>
+              <a:t>Farallones / WayCarCali entregan el carro coordinando el vuelo de las 8 pm.</a:t>
             </a:r>
           </a:p>
         </p:txBody>
@@ -9883,8 +11327,8 @@
         </p:nvSpPr>
         <p:spPr>
           <a:xfrm>
-            <a:off x="4233672" y="1554480"/>
-            <a:ext cx="3566160" cy="4114800"/>
+            <a:off x="7964424" y="1508760"/>
+            <a:ext cx="3566160" cy="3566160"/>
           </a:xfrm>
           <a:prstGeom prst="roundRect">
             <a:avLst>
@@ -9929,146 +11373,24 @@
       </p:sp>
       <p:sp>
         <p:nvSpPr>
-          <p:cNvPr id="11" name="TextBox 10"/>
-          <p:cNvSpPr txBox="1"/>
-          <p:nvPr/>
-        </p:nvSpPr>
-        <p:spPr>
-          <a:xfrm>
-            <a:off x="4507992" y="1920240"/>
-            <a:ext cx="3017520" cy="731520"/>
-          </a:xfrm>
-          <a:prstGeom prst="rect">
+          <p:cNvPr id="11" name="Oval 10"/>
+          <p:cNvSpPr/>
+          <p:nvPr/>
+        </p:nvSpPr>
+        <p:spPr>
+          <a:xfrm>
+            <a:off x="9290304" y="1828800"/>
+            <a:ext cx="914400" cy="914400"/>
+          </a:xfrm>
+          <a:prstGeom prst="ellipse">
             <a:avLst/>
           </a:prstGeom>
-          <a:noFill/>
-        </p:spPr>
-        <p:txBody>
-          <a:bodyPr wrap="square" anchor="t">
-            <a:spAutoFit/>
-          </a:bodyPr>
-          <a:lstStyle/>
-          <a:p>
-            <a:pPr algn="ctr"/>
-            <a:r>
-              <a:rPr sz="1800" b="1">
-                <a:solidFill>
-                  <a:srgbClr val="8F5A44"/>
-                </a:solidFill>
-              </a:rPr>
-              <a:t>Mostrador (Kayak)</a:t>
-            </a:r>
-          </a:p>
-        </p:txBody>
-      </p:sp>
-      <p:sp>
-        <p:nvSpPr>
-          <p:cNvPr id="12" name="TextBox 11"/>
-          <p:cNvSpPr txBox="1"/>
-          <p:nvPr/>
-        </p:nvSpPr>
-        <p:spPr>
-          <a:xfrm>
-            <a:off x="4507992" y="2743200"/>
-            <a:ext cx="3017520" cy="1005840"/>
-          </a:xfrm>
-          <a:prstGeom prst="rect">
-            <a:avLst/>
-          </a:prstGeom>
-          <a:noFill/>
-        </p:spPr>
-        <p:txBody>
-          <a:bodyPr wrap="square" anchor="t">
-            <a:spAutoFit/>
-          </a:bodyPr>
-          <a:lstStyle/>
-          <a:p>
-            <a:pPr algn="ctr"/>
-            <a:r>
-              <a:rPr sz="3400" b="1">
-                <a:solidFill>
-                  <a:srgbClr val="D9A75E"/>
-                </a:solidFill>
-              </a:rPr>
-              <a:t>$180.000</a:t>
-            </a:r>
-          </a:p>
-          <a:p>
-            <a:pPr algn="ctr"/>
-            <a:r>
-              <a:rPr sz="1300" b="0">
-                <a:solidFill>
-                  <a:srgbClr val="8A7A6E"/>
-                </a:solidFill>
-              </a:rPr>
-              <a:t>por persona</a:t>
-            </a:r>
-          </a:p>
-        </p:txBody>
-      </p:sp>
-      <p:sp>
-        <p:nvSpPr>
-          <p:cNvPr id="13" name="TextBox 12"/>
-          <p:cNvSpPr txBox="1"/>
-          <p:nvPr/>
-        </p:nvSpPr>
-        <p:spPr>
-          <a:xfrm>
-            <a:off x="4553712" y="4069080"/>
-            <a:ext cx="2926080" cy="1463040"/>
-          </a:xfrm>
-          <a:prstGeom prst="rect">
-            <a:avLst/>
-          </a:prstGeom>
-          <a:noFill/>
-        </p:spPr>
-        <p:txBody>
-          <a:bodyPr wrap="square" anchor="t">
-            <a:spAutoFit/>
-          </a:bodyPr>
-          <a:lstStyle/>
-          <a:p>
-            <a:pPr algn="ctr"/>
-            <a:r>
-              <a:rPr sz="1350" b="0">
-                <a:solidFill>
-                  <a:srgbClr val="463A32"/>
-                </a:solidFill>
-              </a:rPr>
-              <a:t>Más barato, pero el mostrador cierra ~10 pm.</a:t>
-            </a:r>
-          </a:p>
-        </p:txBody>
-      </p:sp>
-      <p:sp>
-        <p:nvSpPr>
-          <p:cNvPr id="14" name="Rounded Rectangle 13"/>
-          <p:cNvSpPr/>
-          <p:nvPr/>
-        </p:nvSpPr>
-        <p:spPr>
-          <a:xfrm>
-            <a:off x="7964424" y="1554480"/>
-            <a:ext cx="3566160" cy="4114800"/>
-          </a:xfrm>
-          <a:prstGeom prst="roundRect">
-            <a:avLst>
-              <a:gd name="adj" fmla="val 12000"/>
-            </a:avLst>
-          </a:prstGeom>
           <a:solidFill>
-            <a:srgbClr val="FFFFFF"/>
+            <a:srgbClr val="F0E0C6"/>
           </a:solidFill>
           <a:ln>
             <a:noFill/>
           </a:ln>
-          <a:effectLst>
-            <a:outerShdw blurRad="95000" dist="40000" dir="5400000" rotWithShape="0">
-              <a:srgbClr val="6E5B4E">
-                <a:alpha val="32000"/>
-              </a:srgbClr>
-            </a:outerShdw>
-          </a:effectLst>
         </p:spPr>
         <p:style>
           <a:lnRef idx="1">
@@ -10089,19 +11411,27 @@
           <a:lstStyle/>
           <a:p>
             <a:pPr algn="ctr"/>
-          </a:p>
-        </p:txBody>
-      </p:sp>
-      <p:sp>
-        <p:nvSpPr>
-          <p:cNvPr id="15" name="TextBox 14"/>
+            <a:r>
+              <a:rPr sz="3000">
+                <a:solidFill>
+                  <a:srgbClr val="463A32"/>
+                </a:solidFill>
+              </a:rPr>
+              <a:t>⚠️</a:t>
+            </a:r>
+          </a:p>
+        </p:txBody>
+      </p:sp>
+      <p:sp>
+        <p:nvSpPr>
+          <p:cNvPr id="12" name="TextBox 11"/>
           <p:cNvSpPr txBox="1"/>
           <p:nvPr/>
         </p:nvSpPr>
         <p:spPr>
           <a:xfrm>
-            <a:off x="8238744" y="1920240"/>
-            <a:ext cx="3017520" cy="731520"/>
+            <a:off x="8238744" y="2880360"/>
+            <a:ext cx="3017520" cy="2103120"/>
           </a:xfrm>
           <a:prstGeom prst="rect">
             <a:avLst/>
@@ -10121,21 +11451,43 @@
                   <a:srgbClr val="8F5A44"/>
                 </a:solidFill>
               </a:rPr>
-              <a:t>Sin carro propio</a:t>
-            </a:r>
-          </a:p>
-        </p:txBody>
-      </p:sp>
-      <p:sp>
-        <p:nvSpPr>
-          <p:cNvPr id="16" name="TextBox 15"/>
+              <a:t>Mostrador = ojo</a:t>
+            </a:r>
+          </a:p>
+          <a:p>
+            <a:pPr algn="ctr"/>
+            <a:r>
+              <a:rPr sz="600" b="0">
+                <a:solidFill>
+                  <a:srgbClr val="463A32"/>
+                </a:solidFill>
+              </a:rPr>
+              <a:t/>
+            </a:r>
+          </a:p>
+          <a:p>
+            <a:pPr algn="ctr"/>
+            <a:r>
+              <a:rPr sz="1350" b="0">
+                <a:solidFill>
+                  <a:srgbClr val="463A32"/>
+                </a:solidFill>
+              </a:rPr>
+              <a:t>Alamo / Localiza: más baratos, pero cierran ~10 pm. Reservar fuera de horario (24 h).</a:t>
+            </a:r>
+          </a:p>
+        </p:txBody>
+      </p:sp>
+      <p:sp>
+        <p:nvSpPr>
+          <p:cNvPr id="13" name="TextBox 12"/>
           <p:cNvSpPr txBox="1"/>
           <p:nvPr/>
         </p:nvSpPr>
         <p:spPr>
           <a:xfrm>
-            <a:off x="8238744" y="2743200"/>
-            <a:ext cx="3017520" cy="1005840"/>
+            <a:off x="548640" y="5303520"/>
+            <a:ext cx="11064240" cy="548640"/>
           </a:xfrm>
           <a:prstGeom prst="rect">
             <a:avLst/>
@@ -10150,57 +11502,12 @@
           <a:p>
             <a:pPr algn="ctr"/>
             <a:r>
-              <a:rPr sz="3400" b="1">
-                <a:solidFill>
-                  <a:srgbClr val="D9A75E"/>
-                </a:solidFill>
-              </a:rPr>
-              <a:t>$125.000</a:t>
-            </a:r>
-          </a:p>
-          <a:p>
-            <a:pPr algn="ctr"/>
-            <a:r>
               <a:rPr sz="1300" b="0">
                 <a:solidFill>
                   <a:srgbClr val="8A7A6E"/>
                 </a:solidFill>
               </a:rPr>
-              <a:t>por persona</a:t>
-            </a:r>
-          </a:p>
-        </p:txBody>
-      </p:sp>
-      <p:sp>
-        <p:nvSpPr>
-          <p:cNvPr id="17" name="TextBox 16"/>
-          <p:cNvSpPr txBox="1"/>
-          <p:nvPr/>
-        </p:nvSpPr>
-        <p:spPr>
-          <a:xfrm>
-            <a:off x="8284464" y="4069080"/>
-            <a:ext cx="2926080" cy="1463040"/>
-          </a:xfrm>
-          <a:prstGeom prst="rect">
-            <a:avLst/>
-          </a:prstGeom>
-          <a:noFill/>
-        </p:spPr>
-        <p:txBody>
-          <a:bodyPr wrap="square" anchor="t">
-            <a:spAutoFit/>
-          </a:bodyPr>
-          <a:lstStyle/>
-          <a:p>
-            <a:pPr algn="ctr"/>
-            <a:r>
-              <a:rPr sz="1350" b="0">
-                <a:solidFill>
-                  <a:srgbClr val="463A32"/>
-                </a:solidFill>
-              </a:rPr>
-              <a:t>Lo más barato: taxis + una van con conductor para el paseo.</a:t>
+              <a:t>Red de seguridad: los taxis oficiales del aeropuerto operan 24/7 (distintivo amarillo, tarifados).</a:t>
             </a:r>
           </a:p>
         </p:txBody>
@@ -10312,21 +11619,154 @@
                   <a:srgbClr val="FFFFFF"/>
                 </a:solidFill>
               </a:rPr>
-              <a:t>🚙   Opciones de vehículo (7 puestos)</a:t>
-            </a:r>
-          </a:p>
-        </p:txBody>
-      </p:sp>
-      <p:sp>
-        <p:nvSpPr>
-          <p:cNvPr id="4" name="TextBox 3"/>
+              <a:t>🚗   Cómo moverse — tres opciones</a:t>
+            </a:r>
+          </a:p>
+        </p:txBody>
+      </p:sp>
+      <p:sp>
+        <p:nvSpPr>
+          <p:cNvPr id="4" name="Rounded Rectangle 3"/>
+          <p:cNvSpPr/>
+          <p:nvPr/>
+        </p:nvSpPr>
+        <p:spPr>
+          <a:xfrm>
+            <a:off x="502920" y="1554480"/>
+            <a:ext cx="3566160" cy="4114800"/>
+          </a:xfrm>
+          <a:prstGeom prst="roundRect">
+            <a:avLst>
+              <a:gd name="adj" fmla="val 12000"/>
+            </a:avLst>
+          </a:prstGeom>
+          <a:solidFill>
+            <a:srgbClr val="F0E0C6"/>
+          </a:solidFill>
+          <a:ln w="25400">
+            <a:solidFill>
+              <a:srgbClr val="D9A75E"/>
+            </a:solidFill>
+          </a:ln>
+          <a:effectLst>
+            <a:outerShdw blurRad="95000" dist="40000" dir="5400000" rotWithShape="0">
+              <a:srgbClr val="6E5B4E">
+                <a:alpha val="32000"/>
+              </a:srgbClr>
+            </a:outerShdw>
+          </a:effectLst>
+        </p:spPr>
+        <p:style>
+          <a:lnRef idx="1">
+            <a:schemeClr val="accent1"/>
+          </a:lnRef>
+          <a:fillRef idx="3">
+            <a:schemeClr val="accent1"/>
+          </a:fillRef>
+          <a:effectRef idx="2">
+            <a:schemeClr val="accent1"/>
+          </a:effectRef>
+          <a:fontRef idx="minor">
+            <a:schemeClr val="lt1"/>
+          </a:fontRef>
+        </p:style>
+        <p:txBody>
+          <a:bodyPr rtlCol="0" anchor="ctr"/>
+          <a:lstStyle/>
+          <a:p>
+            <a:pPr algn="ctr"/>
+          </a:p>
+        </p:txBody>
+      </p:sp>
+      <p:sp>
+        <p:nvSpPr>
+          <p:cNvPr id="5" name="Rounded Rectangle 4"/>
+          <p:cNvSpPr/>
+          <p:nvPr/>
+        </p:nvSpPr>
+        <p:spPr>
+          <a:xfrm>
+            <a:off x="1508760" y="1325880"/>
+            <a:ext cx="1554480" cy="457200"/>
+          </a:xfrm>
+          <a:prstGeom prst="roundRect">
+            <a:avLst>
+              <a:gd name="adj" fmla="val 50000"/>
+            </a:avLst>
+          </a:prstGeom>
+          <a:solidFill>
+            <a:srgbClr val="D9A75E"/>
+          </a:solidFill>
+          <a:ln>
+            <a:noFill/>
+          </a:ln>
+        </p:spPr>
+        <p:style>
+          <a:lnRef idx="1">
+            <a:schemeClr val="accent1"/>
+          </a:lnRef>
+          <a:fillRef idx="3">
+            <a:schemeClr val="accent1"/>
+          </a:fillRef>
+          <a:effectRef idx="2">
+            <a:schemeClr val="accent1"/>
+          </a:effectRef>
+          <a:fontRef idx="minor">
+            <a:schemeClr val="lt1"/>
+          </a:fontRef>
+        </p:style>
+        <p:txBody>
+          <a:bodyPr rtlCol="0" anchor="ctr"/>
+          <a:lstStyle/>
+          <a:p>
+            <a:pPr algn="ctr"/>
+          </a:p>
+        </p:txBody>
+      </p:sp>
+      <p:sp>
+        <p:nvSpPr>
+          <p:cNvPr id="6" name="TextBox 5"/>
           <p:cNvSpPr txBox="1"/>
           <p:nvPr/>
         </p:nvSpPr>
         <p:spPr>
           <a:xfrm>
-            <a:off x="548640" y="1097280"/>
-            <a:ext cx="11064240" cy="502920"/>
+            <a:off x="1508760" y="1325880"/>
+            <a:ext cx="1554480" cy="457200"/>
+          </a:xfrm>
+          <a:prstGeom prst="rect">
+            <a:avLst/>
+          </a:prstGeom>
+          <a:noFill/>
+        </p:spPr>
+        <p:txBody>
+          <a:bodyPr wrap="square" anchor="ctr">
+            <a:spAutoFit/>
+          </a:bodyPr>
+          <a:lstStyle/>
+          <a:p>
+            <a:pPr algn="ctr"/>
+            <a:r>
+              <a:rPr sz="1200" b="1">
+                <a:solidFill>
+                  <a:srgbClr val="463A32"/>
+                </a:solidFill>
+              </a:rPr>
+              <a:t>★ Recomendado</a:t>
+            </a:r>
+          </a:p>
+        </p:txBody>
+      </p:sp>
+      <p:sp>
+        <p:nvSpPr>
+          <p:cNvPr id="7" name="TextBox 6"/>
+          <p:cNvSpPr txBox="1"/>
+          <p:nvPr/>
+        </p:nvSpPr>
+        <p:spPr>
+          <a:xfrm>
+            <a:off x="777240" y="1920240"/>
+            <a:ext cx="3017520" cy="731520"/>
           </a:xfrm>
           <a:prstGeom prst="rect">
             <a:avLst/>
@@ -10339,972 +11779,28 @@
           </a:bodyPr>
           <a:lstStyle/>
           <a:p>
-            <a:pPr algn="l"/>
-            <a:r>
-              <a:rPr sz="1300" b="0">
-                <a:solidFill>
-                  <a:srgbClr val="463A32"/>
-                </a:solidFill>
-              </a:rPr>
-              <a:t>Lo que cambia según dónde se recoja: local (entrega, cuadra con la llegada) vs mostrador (más barato, horario rígido).</a:t>
-            </a:r>
-          </a:p>
-        </p:txBody>
-      </p:sp>
-      <p:graphicFrame>
-        <p:nvGraphicFramePr>
-          <p:cNvPr id="5" name="Table 4"/>
-          <p:cNvGraphicFramePr>
-            <a:graphicFrameLocks noGrp="1"/>
-          </p:cNvGraphicFramePr>
-          <p:nvPr/>
-        </p:nvGraphicFramePr>
-        <p:xfrm>
-          <a:off x="365760" y="1691640"/>
-          <a:ext cx="11430000" cy="3657600"/>
-        </p:xfrm>
-        <a:graphic>
-          <a:graphicData uri="http://schemas.openxmlformats.org/drawingml/2006/table">
-            <a:tbl>
-              <a:tblPr firstRow="1" bandRow="1">
-                <a:tableStyleId>{5C22544A-7EE6-4342-B048-85BDC9FD1C3A}</a:tableStyleId>
-              </a:tblPr>
-              <a:tblGrid>
-                <a:gridCol w="2468880"/>
-                <a:gridCol w="1965960"/>
-                <a:gridCol w="1828800"/>
-                <a:gridCol w="1600200"/>
-                <a:gridCol w="2834640"/>
-                <a:gridCol w="731520"/>
-              </a:tblGrid>
-              <a:tr h="522514">
-                <a:tc>
-                  <a:txBody>
-                    <a:bodyPr/>
-                    <a:lstStyle/>
-                    <a:p>
-                      <a:r>
-                        <a:rPr b="1" sz="1100">
-                          <a:solidFill>
-                            <a:srgbClr val="FFFFFF"/>
-                          </a:solidFill>
-                        </a:rPr>
-                        <a:t>Vehículo (7 puestos)</a:t>
-                      </a:r>
-                    </a:p>
-                  </a:txBody>
-                  <a:tcPr>
-                    <a:solidFill>
-                      <a:srgbClr val="B5765C"/>
-                    </a:solidFill>
-                  </a:tcPr>
-                </a:tc>
-                <a:tc>
-                  <a:txBody>
-                    <a:bodyPr/>
-                    <a:lstStyle/>
-                    <a:p>
-                      <a:r>
-                        <a:rPr b="1" sz="1100">
-                          <a:solidFill>
-                            <a:srgbClr val="FFFFFF"/>
-                          </a:solidFill>
-                        </a:rPr>
-                        <a:t>Agencia</a:t>
-                      </a:r>
-                    </a:p>
-                  </a:txBody>
-                  <a:tcPr>
-                    <a:solidFill>
-                      <a:srgbClr val="B5765C"/>
-                    </a:solidFill>
-                  </a:tcPr>
-                </a:tc>
-                <a:tc>
-                  <a:txBody>
-                    <a:bodyPr/>
-                    <a:lstStyle/>
-                    <a:p>
-                      <a:r>
-                        <a:rPr b="1" sz="1100">
-                          <a:solidFill>
-                            <a:srgbClr val="FFFFFF"/>
-                          </a:solidFill>
-                        </a:rPr>
-                        <a:t>Tarifa (3 días)</a:t>
-                      </a:r>
-                    </a:p>
-                  </a:txBody>
-                  <a:tcPr>
-                    <a:solidFill>
-                      <a:srgbClr val="B5765C"/>
-                    </a:solidFill>
-                  </a:tcPr>
-                </a:tc>
-                <a:tc>
-                  <a:txBody>
-                    <a:bodyPr/>
-                    <a:lstStyle/>
-                    <a:p>
-                      <a:r>
-                        <a:rPr b="1" sz="1100">
-                          <a:solidFill>
-                            <a:srgbClr val="FFFFFF"/>
-                          </a:solidFill>
-                        </a:rPr>
-                        <a:t>Por persona</a:t>
-                      </a:r>
-                    </a:p>
-                  </a:txBody>
-                  <a:tcPr>
-                    <a:solidFill>
-                      <a:srgbClr val="B5765C"/>
-                    </a:solidFill>
-                  </a:tcPr>
-                </a:tc>
-                <a:tc>
-                  <a:txBody>
-                    <a:bodyPr/>
-                    <a:lstStyle/>
-                    <a:p>
-                      <a:r>
-                        <a:rPr b="1" sz="1100">
-                          <a:solidFill>
-                            <a:srgbClr val="FFFFFF"/>
-                          </a:solidFill>
-                        </a:rPr>
-                        <a:t>¿Cuadra con la llegada?</a:t>
-                      </a:r>
-                    </a:p>
-                  </a:txBody>
-                  <a:tcPr>
-                    <a:solidFill>
-                      <a:srgbClr val="B5765C"/>
-                    </a:solidFill>
-                  </a:tcPr>
-                </a:tc>
-                <a:tc>
-                  <a:txBody>
-                    <a:bodyPr/>
-                    <a:lstStyle/>
-                    <a:p>
-                      <a:r>
-                        <a:rPr b="1" sz="1100">
-                          <a:solidFill>
-                            <a:srgbClr val="FFFFFF"/>
-                          </a:solidFill>
-                        </a:rPr>
-                        <a:t>Ver</a:t>
-                      </a:r>
-                    </a:p>
-                  </a:txBody>
-                  <a:tcPr>
-                    <a:solidFill>
-                      <a:srgbClr val="B5765C"/>
-                    </a:solidFill>
-                  </a:tcPr>
-                </a:tc>
-              </a:tr>
-              <a:tr h="522514">
-                <a:tc>
-                  <a:txBody>
-                    <a:bodyPr/>
-                    <a:lstStyle/>
-                    <a:p>
-                      <a:r>
-                        <a:rPr sz="1050">
-                          <a:solidFill>
-                            <a:srgbClr val="463A32"/>
-                          </a:solidFill>
-                        </a:rPr>
-                        <a:t>Chevrolet Captiva Turbo</a:t>
-                      </a:r>
-                    </a:p>
-                  </a:txBody>
-                  <a:tcPr>
-                    <a:solidFill>
-                      <a:srgbClr val="F0E0C6"/>
-                    </a:solidFill>
-                  </a:tcPr>
-                </a:tc>
-                <a:tc>
-                  <a:txBody>
-                    <a:bodyPr/>
-                    <a:lstStyle/>
-                    <a:p>
-                      <a:r>
-                        <a:rPr sz="1050">
-                          <a:solidFill>
-                            <a:srgbClr val="463A32"/>
-                          </a:solidFill>
-                        </a:rPr>
-                        <a:t>Farallones (local)</a:t>
-                      </a:r>
-                    </a:p>
-                  </a:txBody>
-                  <a:tcPr>
-                    <a:solidFill>
-                      <a:srgbClr val="F0E0C6"/>
-                    </a:solidFill>
-                  </a:tcPr>
-                </a:tc>
-                <a:tc>
-                  <a:txBody>
-                    <a:bodyPr/>
-                    <a:lstStyle/>
-                    <a:p>
-                      <a:r>
-                        <a:rPr sz="1050">
-                          <a:solidFill>
-                            <a:srgbClr val="463A32"/>
-                          </a:solidFill>
-                        </a:rPr>
-                        <a:t>~$1.200.000</a:t>
-                      </a:r>
-                    </a:p>
-                  </a:txBody>
-                  <a:tcPr>
-                    <a:solidFill>
-                      <a:srgbClr val="F0E0C6"/>
-                    </a:solidFill>
-                  </a:tcPr>
-                </a:tc>
-                <a:tc>
-                  <a:txBody>
-                    <a:bodyPr/>
-                    <a:lstStyle/>
-                    <a:p>
-                      <a:pPr algn="ctr"/>
-                      <a:r>
-                        <a:rPr sz="1050">
-                          <a:solidFill>
-                            <a:srgbClr val="463A32"/>
-                          </a:solidFill>
-                        </a:rPr>
-                        <a:t>$171.429</a:t>
-                      </a:r>
-                    </a:p>
-                  </a:txBody>
-                  <a:tcPr>
-                    <a:solidFill>
-                      <a:srgbClr val="F0E0C6"/>
-                    </a:solidFill>
-                  </a:tcPr>
-                </a:tc>
-                <a:tc>
-                  <a:txBody>
-                    <a:bodyPr/>
-                    <a:lstStyle/>
-                    <a:p>
-                      <a:r>
-                        <a:rPr sz="1050">
-                          <a:solidFill>
-                            <a:srgbClr val="463A32"/>
-                          </a:solidFill>
-                        </a:rPr>
-                        <a:t>Sí — oficina en el aeropuerto y domicilio</a:t>
-                      </a:r>
-                    </a:p>
-                  </a:txBody>
-                  <a:tcPr>
-                    <a:solidFill>
-                      <a:srgbClr val="F0E0C6"/>
-                    </a:solidFill>
-                  </a:tcPr>
-                </a:tc>
-                <a:tc>
-                  <a:txBody>
-                    <a:bodyPr/>
-                    <a:lstStyle/>
-                    <a:p>
-                      <a:pPr algn="ctr"/>
-                      <a:r>
-                        <a:rPr sz="1050" u="sng">
-                          <a:solidFill>
-                            <a:srgbClr val="8F5A44"/>
-                          </a:solidFill>
-                          <a:hlinkClick r:id="rId2"/>
-                        </a:rPr>
-                        <a:t>ver</a:t>
-                      </a:r>
-                    </a:p>
-                  </a:txBody>
-                  <a:tcPr>
-                    <a:solidFill>
-                      <a:srgbClr val="F0E0C6"/>
-                    </a:solidFill>
-                  </a:tcPr>
-                </a:tc>
-              </a:tr>
-              <a:tr h="522514">
-                <a:tc>
-                  <a:txBody>
-                    <a:bodyPr/>
-                    <a:lstStyle/>
-                    <a:p>
-                      <a:r>
-                        <a:rPr sz="1050">
-                          <a:solidFill>
-                            <a:srgbClr val="463A32"/>
-                          </a:solidFill>
-                        </a:rPr>
-                        <a:t>Toyota Fortuner</a:t>
-                      </a:r>
-                    </a:p>
-                  </a:txBody>
-                  <a:tcPr>
-                    <a:solidFill>
-                      <a:srgbClr val="F0E0C6"/>
-                    </a:solidFill>
-                  </a:tcPr>
-                </a:tc>
-                <a:tc>
-                  <a:txBody>
-                    <a:bodyPr/>
-                    <a:lstStyle/>
-                    <a:p>
-                      <a:r>
-                        <a:rPr sz="1050">
-                          <a:solidFill>
-                            <a:srgbClr val="463A32"/>
-                          </a:solidFill>
-                        </a:rPr>
-                        <a:t>Farallones (local)</a:t>
-                      </a:r>
-                    </a:p>
-                  </a:txBody>
-                  <a:tcPr>
-                    <a:solidFill>
-                      <a:srgbClr val="F0E0C6"/>
-                    </a:solidFill>
-                  </a:tcPr>
-                </a:tc>
-                <a:tc>
-                  <a:txBody>
-                    <a:bodyPr/>
-                    <a:lstStyle/>
-                    <a:p>
-                      <a:r>
-                        <a:rPr sz="1050">
-                          <a:solidFill>
-                            <a:srgbClr val="463A32"/>
-                          </a:solidFill>
-                        </a:rPr>
-                        <a:t>desde $1.140.000</a:t>
-                      </a:r>
-                    </a:p>
-                  </a:txBody>
-                  <a:tcPr>
-                    <a:solidFill>
-                      <a:srgbClr val="F0E0C6"/>
-                    </a:solidFill>
-                  </a:tcPr>
-                </a:tc>
-                <a:tc>
-                  <a:txBody>
-                    <a:bodyPr/>
-                    <a:lstStyle/>
-                    <a:p>
-                      <a:pPr algn="ctr"/>
-                      <a:r>
-                        <a:rPr sz="1050">
-                          <a:solidFill>
-                            <a:srgbClr val="463A32"/>
-                          </a:solidFill>
-                        </a:rPr>
-                        <a:t>$162.857</a:t>
-                      </a:r>
-                    </a:p>
-                  </a:txBody>
-                  <a:tcPr>
-                    <a:solidFill>
-                      <a:srgbClr val="F0E0C6"/>
-                    </a:solidFill>
-                  </a:tcPr>
-                </a:tc>
-                <a:tc>
-                  <a:txBody>
-                    <a:bodyPr/>
-                    <a:lstStyle/>
-                    <a:p>
-                      <a:r>
-                        <a:rPr sz="1050">
-                          <a:solidFill>
-                            <a:srgbClr val="463A32"/>
-                          </a:solidFill>
-                        </a:rPr>
-                        <a:t>Sí — entrega coordinando el vuelo</a:t>
-                      </a:r>
-                    </a:p>
-                  </a:txBody>
-                  <a:tcPr>
-                    <a:solidFill>
-                      <a:srgbClr val="F0E0C6"/>
-                    </a:solidFill>
-                  </a:tcPr>
-                </a:tc>
-                <a:tc>
-                  <a:txBody>
-                    <a:bodyPr/>
-                    <a:lstStyle/>
-                    <a:p>
-                      <a:pPr algn="ctr"/>
-                      <a:r>
-                        <a:rPr sz="1050" u="sng">
-                          <a:solidFill>
-                            <a:srgbClr val="8F5A44"/>
-                          </a:solidFill>
-                          <a:hlinkClick r:id="rId3"/>
-                        </a:rPr>
-                        <a:t>ver</a:t>
-                      </a:r>
-                    </a:p>
-                  </a:txBody>
-                  <a:tcPr>
-                    <a:solidFill>
-                      <a:srgbClr val="F0E0C6"/>
-                    </a:solidFill>
-                  </a:tcPr>
-                </a:tc>
-              </a:tr>
-              <a:tr h="522514">
-                <a:tc>
-                  <a:txBody>
-                    <a:bodyPr/>
-                    <a:lstStyle/>
-                    <a:p>
-                      <a:r>
-                        <a:rPr sz="1050">
-                          <a:solidFill>
-                            <a:srgbClr val="463A32"/>
-                          </a:solidFill>
-                        </a:rPr>
-                        <a:t>Mitsubishi Montero Sport</a:t>
-                      </a:r>
-                    </a:p>
-                  </a:txBody>
-                  <a:tcPr>
-                    <a:solidFill>
-                      <a:srgbClr val="F0E0C6"/>
-                    </a:solidFill>
-                  </a:tcPr>
-                </a:tc>
-                <a:tc>
-                  <a:txBody>
-                    <a:bodyPr/>
-                    <a:lstStyle/>
-                    <a:p>
-                      <a:r>
-                        <a:rPr sz="1050">
-                          <a:solidFill>
-                            <a:srgbClr val="463A32"/>
-                          </a:solidFill>
-                        </a:rPr>
-                        <a:t>Farallones (local)</a:t>
-                      </a:r>
-                    </a:p>
-                  </a:txBody>
-                  <a:tcPr>
-                    <a:solidFill>
-                      <a:srgbClr val="F0E0C6"/>
-                    </a:solidFill>
-                  </a:tcPr>
-                </a:tc>
-                <a:tc>
-                  <a:txBody>
-                    <a:bodyPr/>
-                    <a:lstStyle/>
-                    <a:p>
-                      <a:r>
-                        <a:rPr sz="1050">
-                          <a:solidFill>
-                            <a:srgbClr val="463A32"/>
-                          </a:solidFill>
-                        </a:rPr>
-                        <a:t>desde $705.000</a:t>
-                      </a:r>
-                    </a:p>
-                  </a:txBody>
-                  <a:tcPr>
-                    <a:solidFill>
-                      <a:srgbClr val="F0E0C6"/>
-                    </a:solidFill>
-                  </a:tcPr>
-                </a:tc>
-                <a:tc>
-                  <a:txBody>
-                    <a:bodyPr/>
-                    <a:lstStyle/>
-                    <a:p>
-                      <a:pPr algn="ctr"/>
-                      <a:r>
-                        <a:rPr sz="1050">
-                          <a:solidFill>
-                            <a:srgbClr val="463A32"/>
-                          </a:solidFill>
-                        </a:rPr>
-                        <a:t>$100.714</a:t>
-                      </a:r>
-                    </a:p>
-                  </a:txBody>
-                  <a:tcPr>
-                    <a:solidFill>
-                      <a:srgbClr val="F0E0C6"/>
-                    </a:solidFill>
-                  </a:tcPr>
-                </a:tc>
-                <a:tc>
-                  <a:txBody>
-                    <a:bodyPr/>
-                    <a:lstStyle/>
-                    <a:p>
-                      <a:r>
-                        <a:rPr sz="1050">
-                          <a:solidFill>
-                            <a:srgbClr val="463A32"/>
-                          </a:solidFill>
-                        </a:rPr>
-                        <a:t>Sí — entrega coordinando el vuelo</a:t>
-                      </a:r>
-                    </a:p>
-                  </a:txBody>
-                  <a:tcPr>
-                    <a:solidFill>
-                      <a:srgbClr val="F0E0C6"/>
-                    </a:solidFill>
-                  </a:tcPr>
-                </a:tc>
-                <a:tc>
-                  <a:txBody>
-                    <a:bodyPr/>
-                    <a:lstStyle/>
-                    <a:p>
-                      <a:pPr algn="ctr"/>
-                      <a:r>
-                        <a:rPr sz="1050" u="sng">
-                          <a:solidFill>
-                            <a:srgbClr val="8F5A44"/>
-                          </a:solidFill>
-                          <a:hlinkClick r:id="rId3"/>
-                        </a:rPr>
-                        <a:t>ver</a:t>
-                      </a:r>
-                    </a:p>
-                  </a:txBody>
-                  <a:tcPr>
-                    <a:solidFill>
-                      <a:srgbClr val="F0E0C6"/>
-                    </a:solidFill>
-                  </a:tcPr>
-                </a:tc>
-              </a:tr>
-              <a:tr h="522514">
-                <a:tc>
-                  <a:txBody>
-                    <a:bodyPr/>
-                    <a:lstStyle/>
-                    <a:p>
-                      <a:r>
-                        <a:rPr sz="1050">
-                          <a:solidFill>
-                            <a:srgbClr val="463A32"/>
-                          </a:solidFill>
-                        </a:rPr>
-                        <a:t>7 puestos (varios modelos)</a:t>
-                      </a:r>
-                    </a:p>
-                  </a:txBody>
-                  <a:tcPr>
-                    <a:solidFill>
-                      <a:srgbClr val="F0E0C6"/>
-                    </a:solidFill>
-                  </a:tcPr>
-                </a:tc>
-                <a:tc>
-                  <a:txBody>
-                    <a:bodyPr/>
-                    <a:lstStyle/>
-                    <a:p>
-                      <a:r>
-                        <a:rPr sz="1050">
-                          <a:solidFill>
-                            <a:srgbClr val="463A32"/>
-                          </a:solidFill>
-                        </a:rPr>
-                        <a:t>WayCarCali (local)</a:t>
-                      </a:r>
-                    </a:p>
-                  </a:txBody>
-                  <a:tcPr>
-                    <a:solidFill>
-                      <a:srgbClr val="F0E0C6"/>
-                    </a:solidFill>
-                  </a:tcPr>
-                </a:tc>
-                <a:tc>
-                  <a:txBody>
-                    <a:bodyPr/>
-                    <a:lstStyle/>
-                    <a:p>
-                      <a:r>
-                        <a:rPr sz="1050">
-                          <a:solidFill>
-                            <a:srgbClr val="463A32"/>
-                          </a:solidFill>
-                        </a:rPr>
-                        <a:t>desde $360.000</a:t>
-                      </a:r>
-                    </a:p>
-                  </a:txBody>
-                  <a:tcPr>
-                    <a:solidFill>
-                      <a:srgbClr val="F0E0C6"/>
-                    </a:solidFill>
-                  </a:tcPr>
-                </a:tc>
-                <a:tc>
-                  <a:txBody>
-                    <a:bodyPr/>
-                    <a:lstStyle/>
-                    <a:p>
-                      <a:pPr algn="ctr"/>
-                      <a:r>
-                        <a:rPr sz="1050">
-                          <a:solidFill>
-                            <a:srgbClr val="463A32"/>
-                          </a:solidFill>
-                        </a:rPr>
-                        <a:t>$51.429</a:t>
-                      </a:r>
-                    </a:p>
-                  </a:txBody>
-                  <a:tcPr>
-                    <a:solidFill>
-                      <a:srgbClr val="F0E0C6"/>
-                    </a:solidFill>
-                  </a:tcPr>
-                </a:tc>
-                <a:tc>
-                  <a:txBody>
-                    <a:bodyPr/>
-                    <a:lstStyle/>
-                    <a:p>
-                      <a:r>
-                        <a:rPr sz="1050">
-                          <a:solidFill>
-                            <a:srgbClr val="463A32"/>
-                          </a:solidFill>
-                        </a:rPr>
-                        <a:t>Sí — domicilio gratis al aeropuerto (3+ días)</a:t>
-                      </a:r>
-                    </a:p>
-                  </a:txBody>
-                  <a:tcPr>
-                    <a:solidFill>
-                      <a:srgbClr val="F0E0C6"/>
-                    </a:solidFill>
-                  </a:tcPr>
-                </a:tc>
-                <a:tc>
-                  <a:txBody>
-                    <a:bodyPr/>
-                    <a:lstStyle/>
-                    <a:p>
-                      <a:pPr algn="ctr"/>
-                      <a:r>
-                        <a:rPr sz="1050" u="sng">
-                          <a:solidFill>
-                            <a:srgbClr val="8F5A44"/>
-                          </a:solidFill>
-                          <a:hlinkClick r:id="rId4"/>
-                        </a:rPr>
-                        <a:t>ver</a:t>
-                      </a:r>
-                    </a:p>
-                  </a:txBody>
-                  <a:tcPr>
-                    <a:solidFill>
-                      <a:srgbClr val="F0E0C6"/>
-                    </a:solidFill>
-                  </a:tcPr>
-                </a:tc>
-              </a:tr>
-              <a:tr h="522514">
-                <a:tc>
-                  <a:txBody>
-                    <a:bodyPr/>
-                    <a:lstStyle/>
-                    <a:p>
-                      <a:r>
-                        <a:rPr sz="1050">
-                          <a:solidFill>
-                            <a:srgbClr val="463A32"/>
-                          </a:solidFill>
-                        </a:rPr>
-                        <a:t>Nissan X-Trail</a:t>
-                      </a:r>
-                    </a:p>
-                  </a:txBody>
-                  <a:tcPr>
-                    <a:solidFill>
-                      <a:srgbClr val="EFE6DA"/>
-                    </a:solidFill>
-                  </a:tcPr>
-                </a:tc>
-                <a:tc>
-                  <a:txBody>
-                    <a:bodyPr/>
-                    <a:lstStyle/>
-                    <a:p>
-                      <a:r>
-                        <a:rPr sz="1050">
-                          <a:solidFill>
-                            <a:srgbClr val="463A32"/>
-                          </a:solidFill>
-                        </a:rPr>
-                        <a:t>Kayak · EconomyBookings</a:t>
-                      </a:r>
-                    </a:p>
-                  </a:txBody>
-                  <a:tcPr>
-                    <a:solidFill>
-                      <a:srgbClr val="EFE6DA"/>
-                    </a:solidFill>
-                  </a:tcPr>
-                </a:tc>
-                <a:tc>
-                  <a:txBody>
-                    <a:bodyPr/>
-                    <a:lstStyle/>
-                    <a:p>
-                      <a:r>
-                        <a:rPr sz="1050">
-                          <a:solidFill>
-                            <a:srgbClr val="463A32"/>
-                          </a:solidFill>
-                        </a:rPr>
-                        <a:t>$1.033.028</a:t>
-                      </a:r>
-                    </a:p>
-                  </a:txBody>
-                  <a:tcPr>
-                    <a:solidFill>
-                      <a:srgbClr val="EFE6DA"/>
-                    </a:solidFill>
-                  </a:tcPr>
-                </a:tc>
-                <a:tc>
-                  <a:txBody>
-                    <a:bodyPr/>
-                    <a:lstStyle/>
-                    <a:p>
-                      <a:pPr algn="ctr"/>
-                      <a:r>
-                        <a:rPr sz="1050">
-                          <a:solidFill>
-                            <a:srgbClr val="463A32"/>
-                          </a:solidFill>
-                        </a:rPr>
-                        <a:t>$147.575</a:t>
-                      </a:r>
-                    </a:p>
-                  </a:txBody>
-                  <a:tcPr>
-                    <a:solidFill>
-                      <a:srgbClr val="EFE6DA"/>
-                    </a:solidFill>
-                  </a:tcPr>
-                </a:tc>
-                <a:tc>
-                  <a:txBody>
-                    <a:bodyPr/>
-                    <a:lstStyle/>
-                    <a:p>
-                      <a:r>
-                        <a:rPr sz="1050">
-                          <a:solidFill>
-                            <a:srgbClr val="463A32"/>
-                          </a:solidFill>
-                        </a:rPr>
-                        <a:t>Mostrador: cierra ~10 pm</a:t>
-                      </a:r>
-                    </a:p>
-                  </a:txBody>
-                  <a:tcPr>
-                    <a:solidFill>
-                      <a:srgbClr val="EFE6DA"/>
-                    </a:solidFill>
-                  </a:tcPr>
-                </a:tc>
-                <a:tc>
-                  <a:txBody>
-                    <a:bodyPr/>
-                    <a:lstStyle/>
-                    <a:p>
-                      <a:pPr algn="ctr"/>
-                      <a:r>
-                        <a:rPr sz="1050" u="sng">
-                          <a:solidFill>
-                            <a:srgbClr val="8F5A44"/>
-                          </a:solidFill>
-                          <a:hlinkClick r:id="rId5"/>
-                        </a:rPr>
-                        <a:t>ver</a:t>
-                      </a:r>
-                    </a:p>
-                  </a:txBody>
-                  <a:tcPr>
-                    <a:solidFill>
-                      <a:srgbClr val="EFE6DA"/>
-                    </a:solidFill>
-                  </a:tcPr>
-                </a:tc>
-              </a:tr>
-              <a:tr h="522516">
-                <a:tc>
-                  <a:txBody>
-                    <a:bodyPr/>
-                    <a:lstStyle/>
-                    <a:p>
-                      <a:r>
-                        <a:rPr sz="1050">
-                          <a:solidFill>
-                            <a:srgbClr val="463A32"/>
-                          </a:solidFill>
-                        </a:rPr>
-                        <a:t>SUV mediano híbrido</a:t>
-                      </a:r>
-                    </a:p>
-                  </a:txBody>
-                  <a:tcPr>
-                    <a:solidFill>
-                      <a:srgbClr val="EFE6DA"/>
-                    </a:solidFill>
-                  </a:tcPr>
-                </a:tc>
-                <a:tc>
-                  <a:txBody>
-                    <a:bodyPr/>
-                    <a:lstStyle/>
-                    <a:p>
-                      <a:r>
-                        <a:rPr sz="1050">
-                          <a:solidFill>
-                            <a:srgbClr val="463A32"/>
-                          </a:solidFill>
-                        </a:rPr>
-                        <a:t>Kayak · Alkilautos</a:t>
-                      </a:r>
-                    </a:p>
-                  </a:txBody>
-                  <a:tcPr>
-                    <a:solidFill>
-                      <a:srgbClr val="EFE6DA"/>
-                    </a:solidFill>
-                  </a:tcPr>
-                </a:tc>
-                <a:tc>
-                  <a:txBody>
-                    <a:bodyPr/>
-                    <a:lstStyle/>
-                    <a:p>
-                      <a:r>
-                        <a:rPr sz="1050">
-                          <a:solidFill>
-                            <a:srgbClr val="463A32"/>
-                          </a:solidFill>
-                        </a:rPr>
-                        <a:t>$1.847.639</a:t>
-                      </a:r>
-                    </a:p>
-                  </a:txBody>
-                  <a:tcPr>
-                    <a:solidFill>
-                      <a:srgbClr val="EFE6DA"/>
-                    </a:solidFill>
-                  </a:tcPr>
-                </a:tc>
-                <a:tc>
-                  <a:txBody>
-                    <a:bodyPr/>
-                    <a:lstStyle/>
-                    <a:p>
-                      <a:pPr algn="ctr"/>
-                      <a:r>
-                        <a:rPr sz="1050">
-                          <a:solidFill>
-                            <a:srgbClr val="463A32"/>
-                          </a:solidFill>
-                        </a:rPr>
-                        <a:t>$263.948</a:t>
-                      </a:r>
-                    </a:p>
-                  </a:txBody>
-                  <a:tcPr>
-                    <a:solidFill>
-                      <a:srgbClr val="EFE6DA"/>
-                    </a:solidFill>
-                  </a:tcPr>
-                </a:tc>
-                <a:tc>
-                  <a:txBody>
-                    <a:bodyPr/>
-                    <a:lstStyle/>
-                    <a:p>
-                      <a:r>
-                        <a:rPr sz="1050">
-                          <a:solidFill>
-                            <a:srgbClr val="463A32"/>
-                          </a:solidFill>
-                        </a:rPr>
-                        <a:t>Mostrador: cierra ~10 pm</a:t>
-                      </a:r>
-                    </a:p>
-                  </a:txBody>
-                  <a:tcPr>
-                    <a:solidFill>
-                      <a:srgbClr val="EFE6DA"/>
-                    </a:solidFill>
-                  </a:tcPr>
-                </a:tc>
-                <a:tc>
-                  <a:txBody>
-                    <a:bodyPr/>
-                    <a:lstStyle/>
-                    <a:p>
-                      <a:pPr algn="ctr"/>
-                      <a:r>
-                        <a:rPr sz="1050" u="sng">
-                          <a:solidFill>
-                            <a:srgbClr val="8F5A44"/>
-                          </a:solidFill>
-                          <a:hlinkClick r:id="rId5"/>
-                        </a:rPr>
-                        <a:t>ver</a:t>
-                      </a:r>
-                    </a:p>
-                  </a:txBody>
-                  <a:tcPr>
-                    <a:solidFill>
-                      <a:srgbClr val="EFE6DA"/>
-                    </a:solidFill>
-                  </a:tcPr>
-                </a:tc>
-              </a:tr>
-            </a:tbl>
-          </a:graphicData>
-        </a:graphic>
-      </p:graphicFrame>
-      <p:sp>
-        <p:nvSpPr>
-          <p:cNvPr id="6" name="TextBox 5"/>
+            <a:pPr algn="ctr"/>
+            <a:r>
+              <a:rPr sz="1800" b="1">
+                <a:solidFill>
+                  <a:srgbClr val="8F5A44"/>
+                </a:solidFill>
+              </a:rPr>
+              <a:t>Carro local (entrega)</a:t>
+            </a:r>
+          </a:p>
+        </p:txBody>
+      </p:sp>
+      <p:sp>
+        <p:nvSpPr>
+          <p:cNvPr id="8" name="TextBox 7"/>
           <p:cNvSpPr txBox="1"/>
           <p:nvPr/>
         </p:nvSpPr>
         <p:spPr>
           <a:xfrm>
-            <a:off x="457200" y="5577840"/>
-            <a:ext cx="11338560" cy="1097280"/>
+            <a:off x="777240" y="2743200"/>
+            <a:ext cx="3017520" cy="1005840"/>
           </a:xfrm>
           <a:prstGeom prst="rect">
             <a:avLst/>
@@ -11317,14 +11813,389 @@
           </a:bodyPr>
           <a:lstStyle/>
           <a:p>
-            <a:pPr algn="l"/>
-            <a:r>
-              <a:rPr sz="1150" b="0">
+            <a:pPr algn="ctr"/>
+            <a:r>
+              <a:rPr sz="3400" b="1">
+                <a:solidFill>
+                  <a:srgbClr val="D9A75E"/>
+                </a:solidFill>
+              </a:rPr>
+              <a:t>$200.000</a:t>
+            </a:r>
+          </a:p>
+          <a:p>
+            <a:pPr algn="ctr"/>
+            <a:r>
+              <a:rPr sz="1300" b="0">
+                <a:solidFill>
+                  <a:srgbClr val="8A7A6E"/>
+                </a:solidFill>
+              </a:rPr>
+              <a:t>por persona</a:t>
+            </a:r>
+          </a:p>
+        </p:txBody>
+      </p:sp>
+      <p:sp>
+        <p:nvSpPr>
+          <p:cNvPr id="9" name="TextBox 8"/>
+          <p:cNvSpPr txBox="1"/>
+          <p:nvPr/>
+        </p:nvSpPr>
+        <p:spPr>
+          <a:xfrm>
+            <a:off x="822960" y="4069080"/>
+            <a:ext cx="2926080" cy="1463040"/>
+          </a:xfrm>
+          <a:prstGeom prst="rect">
+            <a:avLst/>
+          </a:prstGeom>
+          <a:noFill/>
+        </p:spPr>
+        <p:txBody>
+          <a:bodyPr wrap="square" anchor="t">
+            <a:spAutoFit/>
+          </a:bodyPr>
+          <a:lstStyle/>
+          <a:p>
+            <a:pPr algn="ctr"/>
+            <a:r>
+              <a:rPr sz="1350" b="0">
+                <a:solidFill>
+                  <a:srgbClr val="463A32"/>
+                </a:solidFill>
+              </a:rPr>
+              <a:t>Cuadra con la llegada de noche; libertad para salir de Cali.</a:t>
+            </a:r>
+          </a:p>
+        </p:txBody>
+      </p:sp>
+      <p:sp>
+        <p:nvSpPr>
+          <p:cNvPr id="10" name="Rounded Rectangle 9"/>
+          <p:cNvSpPr/>
+          <p:nvPr/>
+        </p:nvSpPr>
+        <p:spPr>
+          <a:xfrm>
+            <a:off x="4233672" y="1554480"/>
+            <a:ext cx="3566160" cy="4114800"/>
+          </a:xfrm>
+          <a:prstGeom prst="roundRect">
+            <a:avLst>
+              <a:gd name="adj" fmla="val 12000"/>
+            </a:avLst>
+          </a:prstGeom>
+          <a:solidFill>
+            <a:srgbClr val="FFFFFF"/>
+          </a:solidFill>
+          <a:ln>
+            <a:noFill/>
+          </a:ln>
+          <a:effectLst>
+            <a:outerShdw blurRad="95000" dist="40000" dir="5400000" rotWithShape="0">
+              <a:srgbClr val="6E5B4E">
+                <a:alpha val="32000"/>
+              </a:srgbClr>
+            </a:outerShdw>
+          </a:effectLst>
+        </p:spPr>
+        <p:style>
+          <a:lnRef idx="1">
+            <a:schemeClr val="accent1"/>
+          </a:lnRef>
+          <a:fillRef idx="3">
+            <a:schemeClr val="accent1"/>
+          </a:fillRef>
+          <a:effectRef idx="2">
+            <a:schemeClr val="accent1"/>
+          </a:effectRef>
+          <a:fontRef idx="minor">
+            <a:schemeClr val="lt1"/>
+          </a:fontRef>
+        </p:style>
+        <p:txBody>
+          <a:bodyPr rtlCol="0" anchor="ctr"/>
+          <a:lstStyle/>
+          <a:p>
+            <a:pPr algn="ctr"/>
+          </a:p>
+        </p:txBody>
+      </p:sp>
+      <p:sp>
+        <p:nvSpPr>
+          <p:cNvPr id="11" name="TextBox 10"/>
+          <p:cNvSpPr txBox="1"/>
+          <p:nvPr/>
+        </p:nvSpPr>
+        <p:spPr>
+          <a:xfrm>
+            <a:off x="4507992" y="1920240"/>
+            <a:ext cx="3017520" cy="731520"/>
+          </a:xfrm>
+          <a:prstGeom prst="rect">
+            <a:avLst/>
+          </a:prstGeom>
+          <a:noFill/>
+        </p:spPr>
+        <p:txBody>
+          <a:bodyPr wrap="square" anchor="t">
+            <a:spAutoFit/>
+          </a:bodyPr>
+          <a:lstStyle/>
+          <a:p>
+            <a:pPr algn="ctr"/>
+            <a:r>
+              <a:rPr sz="1800" b="1">
                 <a:solidFill>
                   <a:srgbClr val="8F5A44"/>
                 </a:solidFill>
               </a:rPr>
-              <a:t>Todos los precios son por los 3 días, solo el alquiler (sin gasolina ni parqueo). Las tarifas locales 'desde' se calculan sobre la tarifa base/día × 3; en alquiler corto el total real suele ser mayor (la Captiva, confirmada, cuesta ~$1.200.000) — pidan el exacto por WhatsApp. Lo clave sigue siendo el horario: las locales entregan coordinando el vuelo; los mostradores cierran ~10 pm.</a:t>
+              <a:t>Mostrador (Kayak)</a:t>
+            </a:r>
+          </a:p>
+        </p:txBody>
+      </p:sp>
+      <p:sp>
+        <p:nvSpPr>
+          <p:cNvPr id="12" name="TextBox 11"/>
+          <p:cNvSpPr txBox="1"/>
+          <p:nvPr/>
+        </p:nvSpPr>
+        <p:spPr>
+          <a:xfrm>
+            <a:off x="4507992" y="2743200"/>
+            <a:ext cx="3017520" cy="1005840"/>
+          </a:xfrm>
+          <a:prstGeom prst="rect">
+            <a:avLst/>
+          </a:prstGeom>
+          <a:noFill/>
+        </p:spPr>
+        <p:txBody>
+          <a:bodyPr wrap="square" anchor="t">
+            <a:spAutoFit/>
+          </a:bodyPr>
+          <a:lstStyle/>
+          <a:p>
+            <a:pPr algn="ctr"/>
+            <a:r>
+              <a:rPr sz="3400" b="1">
+                <a:solidFill>
+                  <a:srgbClr val="D9A75E"/>
+                </a:solidFill>
+              </a:rPr>
+              <a:t>$180.000</a:t>
+            </a:r>
+          </a:p>
+          <a:p>
+            <a:pPr algn="ctr"/>
+            <a:r>
+              <a:rPr sz="1300" b="0">
+                <a:solidFill>
+                  <a:srgbClr val="8A7A6E"/>
+                </a:solidFill>
+              </a:rPr>
+              <a:t>por persona</a:t>
+            </a:r>
+          </a:p>
+        </p:txBody>
+      </p:sp>
+      <p:sp>
+        <p:nvSpPr>
+          <p:cNvPr id="13" name="TextBox 12"/>
+          <p:cNvSpPr txBox="1"/>
+          <p:nvPr/>
+        </p:nvSpPr>
+        <p:spPr>
+          <a:xfrm>
+            <a:off x="4553712" y="4069080"/>
+            <a:ext cx="2926080" cy="1463040"/>
+          </a:xfrm>
+          <a:prstGeom prst="rect">
+            <a:avLst/>
+          </a:prstGeom>
+          <a:noFill/>
+        </p:spPr>
+        <p:txBody>
+          <a:bodyPr wrap="square" anchor="t">
+            <a:spAutoFit/>
+          </a:bodyPr>
+          <a:lstStyle/>
+          <a:p>
+            <a:pPr algn="ctr"/>
+            <a:r>
+              <a:rPr sz="1350" b="0">
+                <a:solidFill>
+                  <a:srgbClr val="463A32"/>
+                </a:solidFill>
+              </a:rPr>
+              <a:t>Más barato, pero el mostrador cierra ~10 pm.</a:t>
+            </a:r>
+          </a:p>
+        </p:txBody>
+      </p:sp>
+      <p:sp>
+        <p:nvSpPr>
+          <p:cNvPr id="14" name="Rounded Rectangle 13"/>
+          <p:cNvSpPr/>
+          <p:nvPr/>
+        </p:nvSpPr>
+        <p:spPr>
+          <a:xfrm>
+            <a:off x="7964424" y="1554480"/>
+            <a:ext cx="3566160" cy="4114800"/>
+          </a:xfrm>
+          <a:prstGeom prst="roundRect">
+            <a:avLst>
+              <a:gd name="adj" fmla="val 12000"/>
+            </a:avLst>
+          </a:prstGeom>
+          <a:solidFill>
+            <a:srgbClr val="FFFFFF"/>
+          </a:solidFill>
+          <a:ln>
+            <a:noFill/>
+          </a:ln>
+          <a:effectLst>
+            <a:outerShdw blurRad="95000" dist="40000" dir="5400000" rotWithShape="0">
+              <a:srgbClr val="6E5B4E">
+                <a:alpha val="32000"/>
+              </a:srgbClr>
+            </a:outerShdw>
+          </a:effectLst>
+        </p:spPr>
+        <p:style>
+          <a:lnRef idx="1">
+            <a:schemeClr val="accent1"/>
+          </a:lnRef>
+          <a:fillRef idx="3">
+            <a:schemeClr val="accent1"/>
+          </a:fillRef>
+          <a:effectRef idx="2">
+            <a:schemeClr val="accent1"/>
+          </a:effectRef>
+          <a:fontRef idx="minor">
+            <a:schemeClr val="lt1"/>
+          </a:fontRef>
+        </p:style>
+        <p:txBody>
+          <a:bodyPr rtlCol="0" anchor="ctr"/>
+          <a:lstStyle/>
+          <a:p>
+            <a:pPr algn="ctr"/>
+          </a:p>
+        </p:txBody>
+      </p:sp>
+      <p:sp>
+        <p:nvSpPr>
+          <p:cNvPr id="15" name="TextBox 14"/>
+          <p:cNvSpPr txBox="1"/>
+          <p:nvPr/>
+        </p:nvSpPr>
+        <p:spPr>
+          <a:xfrm>
+            <a:off x="8238744" y="1920240"/>
+            <a:ext cx="3017520" cy="731520"/>
+          </a:xfrm>
+          <a:prstGeom prst="rect">
+            <a:avLst/>
+          </a:prstGeom>
+          <a:noFill/>
+        </p:spPr>
+        <p:txBody>
+          <a:bodyPr wrap="square" anchor="t">
+            <a:spAutoFit/>
+          </a:bodyPr>
+          <a:lstStyle/>
+          <a:p>
+            <a:pPr algn="ctr"/>
+            <a:r>
+              <a:rPr sz="1800" b="1">
+                <a:solidFill>
+                  <a:srgbClr val="8F5A44"/>
+                </a:solidFill>
+              </a:rPr>
+              <a:t>Sin carro propio</a:t>
+            </a:r>
+          </a:p>
+        </p:txBody>
+      </p:sp>
+      <p:sp>
+        <p:nvSpPr>
+          <p:cNvPr id="16" name="TextBox 15"/>
+          <p:cNvSpPr txBox="1"/>
+          <p:nvPr/>
+        </p:nvSpPr>
+        <p:spPr>
+          <a:xfrm>
+            <a:off x="8238744" y="2743200"/>
+            <a:ext cx="3017520" cy="1005840"/>
+          </a:xfrm>
+          <a:prstGeom prst="rect">
+            <a:avLst/>
+          </a:prstGeom>
+          <a:noFill/>
+        </p:spPr>
+        <p:txBody>
+          <a:bodyPr wrap="square" anchor="t">
+            <a:spAutoFit/>
+          </a:bodyPr>
+          <a:lstStyle/>
+          <a:p>
+            <a:pPr algn="ctr"/>
+            <a:r>
+              <a:rPr sz="3400" b="1">
+                <a:solidFill>
+                  <a:srgbClr val="D9A75E"/>
+                </a:solidFill>
+              </a:rPr>
+              <a:t>$125.000</a:t>
+            </a:r>
+          </a:p>
+          <a:p>
+            <a:pPr algn="ctr"/>
+            <a:r>
+              <a:rPr sz="1300" b="0">
+                <a:solidFill>
+                  <a:srgbClr val="8A7A6E"/>
+                </a:solidFill>
+              </a:rPr>
+              <a:t>por persona</a:t>
+            </a:r>
+          </a:p>
+        </p:txBody>
+      </p:sp>
+      <p:sp>
+        <p:nvSpPr>
+          <p:cNvPr id="17" name="TextBox 16"/>
+          <p:cNvSpPr txBox="1"/>
+          <p:nvPr/>
+        </p:nvSpPr>
+        <p:spPr>
+          <a:xfrm>
+            <a:off x="8284464" y="4069080"/>
+            <a:ext cx="2926080" cy="1463040"/>
+          </a:xfrm>
+          <a:prstGeom prst="rect">
+            <a:avLst/>
+          </a:prstGeom>
+          <a:noFill/>
+        </p:spPr>
+        <p:txBody>
+          <a:bodyPr wrap="square" anchor="t">
+            <a:spAutoFit/>
+          </a:bodyPr>
+          <a:lstStyle/>
+          <a:p>
+            <a:pPr algn="ctr"/>
+            <a:r>
+              <a:rPr sz="1350" b="0">
+                <a:solidFill>
+                  <a:srgbClr val="463A32"/>
+                </a:solidFill>
+              </a:rPr>
+              <a:t>Lo más barato: taxis + una van con conductor para el paseo.</a:t>
             </a:r>
           </a:p>
         </p:txBody>

--- a/output/Mini-Boom-en-Cali_Presentacion.pptx
+++ b/output/Mini-Boom-en-Cali_Presentacion.pptx
@@ -17,6 +17,7 @@
     <p:sldId id="265" r:id="rId16"/>
     <p:sldId id="266" r:id="rId17"/>
     <p:sldId id="267" r:id="rId18"/>
+    <p:sldId id="268" r:id="rId19"/>
   </p:sldIdLst>
   <p:sldSz cx="12191695" cy="6858000" type="screen4x3"/>
   <p:notesSz cx="6858000" cy="9144000"/>
@@ -122,7 +123,7 @@
 <c:chartSpace xmlns:c="http://schemas.openxmlformats.org/drawingml/2006/chart" xmlns:a="http://schemas.openxmlformats.org/drawingml/2006/main" xmlns:r="http://schemas.openxmlformats.org/officeDocument/2006/relationships">
   <c:date1904 val="0"/>
   <c:chart>
-    <c:autoTitleDeleted val="0"/>
+    <c:autoTitleDeleted val="1"/>
     <c:plotArea>
       <c:barChart>
         <c:barDir val="bar"/>
@@ -238,6 +239,196 @@
                 </c:pt>
                 <c:pt idx="5">
                   <c:v>71.2</c:v>
+                </c:pt>
+              </c:numCache>
+            </c:numRef>
+          </c:val>
+        </c:ser>
+        <c:axId val="-2068027336"/>
+        <c:axId val="-2113994440"/>
+      </c:barChart>
+      <c:catAx>
+        <c:axId val="-2068027336"/>
+        <c:scaling>
+          <c:orientation val="minMax"/>
+        </c:scaling>
+        <c:delete val="0"/>
+        <c:axPos val="l"/>
+        <c:majorTickMark val="out"/>
+        <c:minorTickMark val="none"/>
+        <c:tickLblPos val="nextTo"/>
+        <c:crossAx val="-2113994440"/>
+        <c:crosses val="autoZero"/>
+        <c:auto val="1"/>
+        <c:lblAlgn val="ctr"/>
+        <c:lblOffset val="100"/>
+        <c:noMultiLvlLbl val="0"/>
+      </c:catAx>
+      <c:valAx>
+        <c:axId val="-2113994440"/>
+        <c:scaling/>
+        <c:delete val="0"/>
+        <c:axPos val="b"/>
+        <c:majorGridlines/>
+        <c:majorTickMark val="out"/>
+        <c:minorTickMark val="none"/>
+        <c:tickLblPos val="nextTo"/>
+        <c:crossAx val="-2068027336"/>
+        <c:crosses val="autoZero"/>
+      </c:valAx>
+    </c:plotArea>
+    <c:dispBlanksAs val="gap"/>
+  </c:chart>
+  <c:txPr>
+    <a:bodyPr/>
+    <a:lstStyle/>
+    <a:p>
+      <a:pPr>
+        <a:defRPr sz="1800"/>
+      </a:pPr>
+      <a:endParaRPr lang="en-US"/>
+    </a:p>
+  </c:txPr>
+  <c:externalData r:id="rId1">
+    <c:autoUpdate val="0"/>
+  </c:externalData>
+</c:chartSpace>
+</file>
+
+<file path=ppt/charts/chart2.xml><?xml version="1.0" encoding="utf-8"?>
+<c:chartSpace xmlns:c="http://schemas.openxmlformats.org/drawingml/2006/chart" xmlns:a="http://schemas.openxmlformats.org/drawingml/2006/main" xmlns:r="http://schemas.openxmlformats.org/officeDocument/2006/relationships">
+  <c:date1904 val="0"/>
+  <c:chart>
+    <c:autoTitleDeleted val="1"/>
+    <c:plotArea>
+      <c:barChart>
+        <c:barDir val="bar"/>
+        <c:grouping val="clustered"/>
+        <c:ser>
+          <c:idx val="0"/>
+          <c:order val="0"/>
+          <c:tx>
+            <c:strRef>
+              <c:f>Sheet1!$B$1</c:f>
+              <c:strCache>
+                <c:ptCount val="1"/>
+                <c:pt idx="0">
+                  <c:v>v</c:v>
+                </c:pt>
+              </c:strCache>
+            </c:strRef>
+          </c:tx>
+          <c:dPt>
+            <c:idx val="0"/>
+            <c:spPr>
+              <a:solidFill>
+                <a:srgbClr val="D9A75E"/>
+              </a:solidFill>
+            </c:spPr>
+          </c:dPt>
+          <c:dPt>
+            <c:idx val="1"/>
+            <c:spPr>
+              <a:solidFill>
+                <a:srgbClr val="D8C4B2"/>
+              </a:solidFill>
+            </c:spPr>
+          </c:dPt>
+          <c:dPt>
+            <c:idx val="2"/>
+            <c:spPr>
+              <a:solidFill>
+                <a:srgbClr val="D8C4B2"/>
+              </a:solidFill>
+            </c:spPr>
+          </c:dPt>
+          <c:dPt>
+            <c:idx val="3"/>
+            <c:spPr>
+              <a:solidFill>
+                <a:srgbClr val="D8C4B2"/>
+              </a:solidFill>
+            </c:spPr>
+          </c:dPt>
+          <c:dPt>
+            <c:idx val="4"/>
+            <c:spPr>
+              <a:solidFill>
+                <a:srgbClr val="D8C4B2"/>
+              </a:solidFill>
+            </c:spPr>
+          </c:dPt>
+          <c:dPt>
+            <c:idx val="5"/>
+            <c:spPr>
+              <a:solidFill>
+                <a:srgbClr val="D8C4B2"/>
+              </a:solidFill>
+            </c:spPr>
+          </c:dPt>
+          <c:dPt>
+            <c:idx val="6"/>
+            <c:spPr>
+              <a:solidFill>
+                <a:srgbClr val="D8C4B2"/>
+              </a:solidFill>
+            </c:spPr>
+          </c:dPt>
+          <c:cat>
+            <c:strRef>
+              <c:f>Sheet1!$A$2:$A$8</c:f>
+              <c:strCache>
+                <c:ptCount val="7"/>
+                <c:pt idx="0">
+                  <c:v>Casa 7p garaje</c:v>
+                </c:pt>
+                <c:pt idx="1">
+                  <c:v>Casa Bella S.Antonio</c:v>
+                </c:pt>
+                <c:pt idx="2">
+                  <c:v>Casa 4 Hab Aire</c:v>
+                </c:pt>
+                <c:pt idx="3">
+                  <c:v>Apto moderno Granada</c:v>
+                </c:pt>
+                <c:pt idx="4">
+                  <c:v>Casa Las Flores</c:v>
+                </c:pt>
+                <c:pt idx="5">
+                  <c:v>Casa 8p Granada</c:v>
+                </c:pt>
+                <c:pt idx="6">
+                  <c:v>Casa piscina privada</c:v>
+                </c:pt>
+              </c:strCache>
+            </c:strRef>
+          </c:cat>
+          <c:val>
+            <c:numRef>
+              <c:f>Sheet1!$B$2:$B$8</c:f>
+              <c:numCache>
+                <c:formatCode>General</c:formatCode>
+                <c:ptCount val="7"/>
+                <c:pt idx="0">
+                  <c:v>94.6</c:v>
+                </c:pt>
+                <c:pt idx="1">
+                  <c:v>89.7</c:v>
+                </c:pt>
+                <c:pt idx="2">
+                  <c:v>89.2</c:v>
+                </c:pt>
+                <c:pt idx="3">
+                  <c:v>80.9</c:v>
+                </c:pt>
+                <c:pt idx="4">
+                  <c:v>76.1</c:v>
+                </c:pt>
+                <c:pt idx="5">
+                  <c:v>71.1</c:v>
+                </c:pt>
+                <c:pt idx="6">
+                  <c:v>66.8</c:v>
                 </c:pt>
               </c:numCache>
             </c:numRef>
@@ -3806,21 +3997,154 @@
                   <a:srgbClr val="FFFFFF"/>
                 </a:solidFill>
               </a:rPr>
-              <a:t>🚙   Opciones de vehículo (7 puestos)</a:t>
-            </a:r>
-          </a:p>
-        </p:txBody>
-      </p:sp>
-      <p:sp>
-        <p:nvSpPr>
-          <p:cNvPr id="4" name="TextBox 3"/>
+              <a:t>🚗   Cómo moverse — tres opciones</a:t>
+            </a:r>
+          </a:p>
+        </p:txBody>
+      </p:sp>
+      <p:sp>
+        <p:nvSpPr>
+          <p:cNvPr id="4" name="Rounded Rectangle 3"/>
+          <p:cNvSpPr/>
+          <p:nvPr/>
+        </p:nvSpPr>
+        <p:spPr>
+          <a:xfrm>
+            <a:off x="502920" y="1554480"/>
+            <a:ext cx="3566160" cy="4114800"/>
+          </a:xfrm>
+          <a:prstGeom prst="roundRect">
+            <a:avLst>
+              <a:gd name="adj" fmla="val 12000"/>
+            </a:avLst>
+          </a:prstGeom>
+          <a:solidFill>
+            <a:srgbClr val="F0E0C6"/>
+          </a:solidFill>
+          <a:ln w="25400">
+            <a:solidFill>
+              <a:srgbClr val="D9A75E"/>
+            </a:solidFill>
+          </a:ln>
+          <a:effectLst>
+            <a:outerShdw blurRad="95000" dist="40000" dir="5400000" rotWithShape="0">
+              <a:srgbClr val="6E5B4E">
+                <a:alpha val="32000"/>
+              </a:srgbClr>
+            </a:outerShdw>
+          </a:effectLst>
+        </p:spPr>
+        <p:style>
+          <a:lnRef idx="1">
+            <a:schemeClr val="accent1"/>
+          </a:lnRef>
+          <a:fillRef idx="3">
+            <a:schemeClr val="accent1"/>
+          </a:fillRef>
+          <a:effectRef idx="2">
+            <a:schemeClr val="accent1"/>
+          </a:effectRef>
+          <a:fontRef idx="minor">
+            <a:schemeClr val="lt1"/>
+          </a:fontRef>
+        </p:style>
+        <p:txBody>
+          <a:bodyPr rtlCol="0" anchor="ctr"/>
+          <a:lstStyle/>
+          <a:p>
+            <a:pPr algn="ctr"/>
+          </a:p>
+        </p:txBody>
+      </p:sp>
+      <p:sp>
+        <p:nvSpPr>
+          <p:cNvPr id="5" name="Rounded Rectangle 4"/>
+          <p:cNvSpPr/>
+          <p:nvPr/>
+        </p:nvSpPr>
+        <p:spPr>
+          <a:xfrm>
+            <a:off x="1508760" y="1325880"/>
+            <a:ext cx="1554480" cy="457200"/>
+          </a:xfrm>
+          <a:prstGeom prst="roundRect">
+            <a:avLst>
+              <a:gd name="adj" fmla="val 50000"/>
+            </a:avLst>
+          </a:prstGeom>
+          <a:solidFill>
+            <a:srgbClr val="D9A75E"/>
+          </a:solidFill>
+          <a:ln>
+            <a:noFill/>
+          </a:ln>
+        </p:spPr>
+        <p:style>
+          <a:lnRef idx="1">
+            <a:schemeClr val="accent1"/>
+          </a:lnRef>
+          <a:fillRef idx="3">
+            <a:schemeClr val="accent1"/>
+          </a:fillRef>
+          <a:effectRef idx="2">
+            <a:schemeClr val="accent1"/>
+          </a:effectRef>
+          <a:fontRef idx="minor">
+            <a:schemeClr val="lt1"/>
+          </a:fontRef>
+        </p:style>
+        <p:txBody>
+          <a:bodyPr rtlCol="0" anchor="ctr"/>
+          <a:lstStyle/>
+          <a:p>
+            <a:pPr algn="ctr"/>
+          </a:p>
+        </p:txBody>
+      </p:sp>
+      <p:sp>
+        <p:nvSpPr>
+          <p:cNvPr id="6" name="TextBox 5"/>
           <p:cNvSpPr txBox="1"/>
           <p:nvPr/>
         </p:nvSpPr>
         <p:spPr>
           <a:xfrm>
-            <a:off x="548640" y="1097280"/>
-            <a:ext cx="11064240" cy="502920"/>
+            <a:off x="1508760" y="1325880"/>
+            <a:ext cx="1554480" cy="457200"/>
+          </a:xfrm>
+          <a:prstGeom prst="rect">
+            <a:avLst/>
+          </a:prstGeom>
+          <a:noFill/>
+        </p:spPr>
+        <p:txBody>
+          <a:bodyPr wrap="square" anchor="ctr">
+            <a:spAutoFit/>
+          </a:bodyPr>
+          <a:lstStyle/>
+          <a:p>
+            <a:pPr algn="ctr"/>
+            <a:r>
+              <a:rPr sz="1200" b="1">
+                <a:solidFill>
+                  <a:srgbClr val="463A32"/>
+                </a:solidFill>
+              </a:rPr>
+              <a:t>★ Recomendado</a:t>
+            </a:r>
+          </a:p>
+        </p:txBody>
+      </p:sp>
+      <p:sp>
+        <p:nvSpPr>
+          <p:cNvPr id="7" name="TextBox 6"/>
+          <p:cNvSpPr txBox="1"/>
+          <p:nvPr/>
+        </p:nvSpPr>
+        <p:spPr>
+          <a:xfrm>
+            <a:off x="777240" y="1920240"/>
+            <a:ext cx="3017520" cy="731520"/>
           </a:xfrm>
           <a:prstGeom prst="rect">
             <a:avLst/>
@@ -3833,972 +4157,28 @@
           </a:bodyPr>
           <a:lstStyle/>
           <a:p>
-            <a:pPr algn="l"/>
-            <a:r>
-              <a:rPr sz="1300" b="0">
-                <a:solidFill>
-                  <a:srgbClr val="463A32"/>
-                </a:solidFill>
-              </a:rPr>
-              <a:t>Lo que cambia según dónde se recoja: local (entrega, cuadra con la llegada) vs mostrador (más barato, horario rígido).</a:t>
-            </a:r>
-          </a:p>
-        </p:txBody>
-      </p:sp>
-      <p:graphicFrame>
-        <p:nvGraphicFramePr>
-          <p:cNvPr id="5" name="Table 4"/>
-          <p:cNvGraphicFramePr>
-            <a:graphicFrameLocks noGrp="1"/>
-          </p:cNvGraphicFramePr>
-          <p:nvPr/>
-        </p:nvGraphicFramePr>
-        <p:xfrm>
-          <a:off x="365760" y="1691640"/>
-          <a:ext cx="11430000" cy="3657600"/>
-        </p:xfrm>
-        <a:graphic>
-          <a:graphicData uri="http://schemas.openxmlformats.org/drawingml/2006/table">
-            <a:tbl>
-              <a:tblPr firstRow="1" bandRow="1">
-                <a:tableStyleId>{5C22544A-7EE6-4342-B048-85BDC9FD1C3A}</a:tableStyleId>
-              </a:tblPr>
-              <a:tblGrid>
-                <a:gridCol w="2468880"/>
-                <a:gridCol w="1965960"/>
-                <a:gridCol w="1828800"/>
-                <a:gridCol w="1600200"/>
-                <a:gridCol w="2834640"/>
-                <a:gridCol w="731520"/>
-              </a:tblGrid>
-              <a:tr h="522514">
-                <a:tc>
-                  <a:txBody>
-                    <a:bodyPr/>
-                    <a:lstStyle/>
-                    <a:p>
-                      <a:r>
-                        <a:rPr b="1" sz="1100">
-                          <a:solidFill>
-                            <a:srgbClr val="FFFFFF"/>
-                          </a:solidFill>
-                        </a:rPr>
-                        <a:t>Vehículo (7 puestos)</a:t>
-                      </a:r>
-                    </a:p>
-                  </a:txBody>
-                  <a:tcPr>
-                    <a:solidFill>
-                      <a:srgbClr val="B5765C"/>
-                    </a:solidFill>
-                  </a:tcPr>
-                </a:tc>
-                <a:tc>
-                  <a:txBody>
-                    <a:bodyPr/>
-                    <a:lstStyle/>
-                    <a:p>
-                      <a:r>
-                        <a:rPr b="1" sz="1100">
-                          <a:solidFill>
-                            <a:srgbClr val="FFFFFF"/>
-                          </a:solidFill>
-                        </a:rPr>
-                        <a:t>Agencia</a:t>
-                      </a:r>
-                    </a:p>
-                  </a:txBody>
-                  <a:tcPr>
-                    <a:solidFill>
-                      <a:srgbClr val="B5765C"/>
-                    </a:solidFill>
-                  </a:tcPr>
-                </a:tc>
-                <a:tc>
-                  <a:txBody>
-                    <a:bodyPr/>
-                    <a:lstStyle/>
-                    <a:p>
-                      <a:r>
-                        <a:rPr b="1" sz="1100">
-                          <a:solidFill>
-                            <a:srgbClr val="FFFFFF"/>
-                          </a:solidFill>
-                        </a:rPr>
-                        <a:t>Tarifa (3 días)</a:t>
-                      </a:r>
-                    </a:p>
-                  </a:txBody>
-                  <a:tcPr>
-                    <a:solidFill>
-                      <a:srgbClr val="B5765C"/>
-                    </a:solidFill>
-                  </a:tcPr>
-                </a:tc>
-                <a:tc>
-                  <a:txBody>
-                    <a:bodyPr/>
-                    <a:lstStyle/>
-                    <a:p>
-                      <a:r>
-                        <a:rPr b="1" sz="1100">
-                          <a:solidFill>
-                            <a:srgbClr val="FFFFFF"/>
-                          </a:solidFill>
-                        </a:rPr>
-                        <a:t>Por persona</a:t>
-                      </a:r>
-                    </a:p>
-                  </a:txBody>
-                  <a:tcPr>
-                    <a:solidFill>
-                      <a:srgbClr val="B5765C"/>
-                    </a:solidFill>
-                  </a:tcPr>
-                </a:tc>
-                <a:tc>
-                  <a:txBody>
-                    <a:bodyPr/>
-                    <a:lstStyle/>
-                    <a:p>
-                      <a:r>
-                        <a:rPr b="1" sz="1100">
-                          <a:solidFill>
-                            <a:srgbClr val="FFFFFF"/>
-                          </a:solidFill>
-                        </a:rPr>
-                        <a:t>¿Cuadra con la llegada?</a:t>
-                      </a:r>
-                    </a:p>
-                  </a:txBody>
-                  <a:tcPr>
-                    <a:solidFill>
-                      <a:srgbClr val="B5765C"/>
-                    </a:solidFill>
-                  </a:tcPr>
-                </a:tc>
-                <a:tc>
-                  <a:txBody>
-                    <a:bodyPr/>
-                    <a:lstStyle/>
-                    <a:p>
-                      <a:r>
-                        <a:rPr b="1" sz="1100">
-                          <a:solidFill>
-                            <a:srgbClr val="FFFFFF"/>
-                          </a:solidFill>
-                        </a:rPr>
-                        <a:t>Ver</a:t>
-                      </a:r>
-                    </a:p>
-                  </a:txBody>
-                  <a:tcPr>
-                    <a:solidFill>
-                      <a:srgbClr val="B5765C"/>
-                    </a:solidFill>
-                  </a:tcPr>
-                </a:tc>
-              </a:tr>
-              <a:tr h="522514">
-                <a:tc>
-                  <a:txBody>
-                    <a:bodyPr/>
-                    <a:lstStyle/>
-                    <a:p>
-                      <a:r>
-                        <a:rPr sz="1050">
-                          <a:solidFill>
-                            <a:srgbClr val="463A32"/>
-                          </a:solidFill>
-                        </a:rPr>
-                        <a:t>Chevrolet Captiva Turbo</a:t>
-                      </a:r>
-                    </a:p>
-                  </a:txBody>
-                  <a:tcPr>
-                    <a:solidFill>
-                      <a:srgbClr val="F0E0C6"/>
-                    </a:solidFill>
-                  </a:tcPr>
-                </a:tc>
-                <a:tc>
-                  <a:txBody>
-                    <a:bodyPr/>
-                    <a:lstStyle/>
-                    <a:p>
-                      <a:r>
-                        <a:rPr sz="1050">
-                          <a:solidFill>
-                            <a:srgbClr val="463A32"/>
-                          </a:solidFill>
-                        </a:rPr>
-                        <a:t>Farallones (local)</a:t>
-                      </a:r>
-                    </a:p>
-                  </a:txBody>
-                  <a:tcPr>
-                    <a:solidFill>
-                      <a:srgbClr val="F0E0C6"/>
-                    </a:solidFill>
-                  </a:tcPr>
-                </a:tc>
-                <a:tc>
-                  <a:txBody>
-                    <a:bodyPr/>
-                    <a:lstStyle/>
-                    <a:p>
-                      <a:r>
-                        <a:rPr sz="1050">
-                          <a:solidFill>
-                            <a:srgbClr val="463A32"/>
-                          </a:solidFill>
-                        </a:rPr>
-                        <a:t>~$1.200.000</a:t>
-                      </a:r>
-                    </a:p>
-                  </a:txBody>
-                  <a:tcPr>
-                    <a:solidFill>
-                      <a:srgbClr val="F0E0C6"/>
-                    </a:solidFill>
-                  </a:tcPr>
-                </a:tc>
-                <a:tc>
-                  <a:txBody>
-                    <a:bodyPr/>
-                    <a:lstStyle/>
-                    <a:p>
-                      <a:pPr algn="ctr"/>
-                      <a:r>
-                        <a:rPr sz="1050">
-                          <a:solidFill>
-                            <a:srgbClr val="463A32"/>
-                          </a:solidFill>
-                        </a:rPr>
-                        <a:t>$171.429</a:t>
-                      </a:r>
-                    </a:p>
-                  </a:txBody>
-                  <a:tcPr>
-                    <a:solidFill>
-                      <a:srgbClr val="F0E0C6"/>
-                    </a:solidFill>
-                  </a:tcPr>
-                </a:tc>
-                <a:tc>
-                  <a:txBody>
-                    <a:bodyPr/>
-                    <a:lstStyle/>
-                    <a:p>
-                      <a:r>
-                        <a:rPr sz="1050">
-                          <a:solidFill>
-                            <a:srgbClr val="463A32"/>
-                          </a:solidFill>
-                        </a:rPr>
-                        <a:t>Sí — oficina en el aeropuerto y domicilio</a:t>
-                      </a:r>
-                    </a:p>
-                  </a:txBody>
-                  <a:tcPr>
-                    <a:solidFill>
-                      <a:srgbClr val="F0E0C6"/>
-                    </a:solidFill>
-                  </a:tcPr>
-                </a:tc>
-                <a:tc>
-                  <a:txBody>
-                    <a:bodyPr/>
-                    <a:lstStyle/>
-                    <a:p>
-                      <a:pPr algn="ctr"/>
-                      <a:r>
-                        <a:rPr sz="1050" u="sng">
-                          <a:solidFill>
-                            <a:srgbClr val="8F5A44"/>
-                          </a:solidFill>
-                          <a:hlinkClick r:id="rId2"/>
-                        </a:rPr>
-                        <a:t>ver</a:t>
-                      </a:r>
-                    </a:p>
-                  </a:txBody>
-                  <a:tcPr>
-                    <a:solidFill>
-                      <a:srgbClr val="F0E0C6"/>
-                    </a:solidFill>
-                  </a:tcPr>
-                </a:tc>
-              </a:tr>
-              <a:tr h="522514">
-                <a:tc>
-                  <a:txBody>
-                    <a:bodyPr/>
-                    <a:lstStyle/>
-                    <a:p>
-                      <a:r>
-                        <a:rPr sz="1050">
-                          <a:solidFill>
-                            <a:srgbClr val="463A32"/>
-                          </a:solidFill>
-                        </a:rPr>
-                        <a:t>Toyota Fortuner</a:t>
-                      </a:r>
-                    </a:p>
-                  </a:txBody>
-                  <a:tcPr>
-                    <a:solidFill>
-                      <a:srgbClr val="F0E0C6"/>
-                    </a:solidFill>
-                  </a:tcPr>
-                </a:tc>
-                <a:tc>
-                  <a:txBody>
-                    <a:bodyPr/>
-                    <a:lstStyle/>
-                    <a:p>
-                      <a:r>
-                        <a:rPr sz="1050">
-                          <a:solidFill>
-                            <a:srgbClr val="463A32"/>
-                          </a:solidFill>
-                        </a:rPr>
-                        <a:t>Farallones (local)</a:t>
-                      </a:r>
-                    </a:p>
-                  </a:txBody>
-                  <a:tcPr>
-                    <a:solidFill>
-                      <a:srgbClr val="F0E0C6"/>
-                    </a:solidFill>
-                  </a:tcPr>
-                </a:tc>
-                <a:tc>
-                  <a:txBody>
-                    <a:bodyPr/>
-                    <a:lstStyle/>
-                    <a:p>
-                      <a:r>
-                        <a:rPr sz="1050">
-                          <a:solidFill>
-                            <a:srgbClr val="463A32"/>
-                          </a:solidFill>
-                        </a:rPr>
-                        <a:t>desde $1.140.000</a:t>
-                      </a:r>
-                    </a:p>
-                  </a:txBody>
-                  <a:tcPr>
-                    <a:solidFill>
-                      <a:srgbClr val="F0E0C6"/>
-                    </a:solidFill>
-                  </a:tcPr>
-                </a:tc>
-                <a:tc>
-                  <a:txBody>
-                    <a:bodyPr/>
-                    <a:lstStyle/>
-                    <a:p>
-                      <a:pPr algn="ctr"/>
-                      <a:r>
-                        <a:rPr sz="1050">
-                          <a:solidFill>
-                            <a:srgbClr val="463A32"/>
-                          </a:solidFill>
-                        </a:rPr>
-                        <a:t>$162.857</a:t>
-                      </a:r>
-                    </a:p>
-                  </a:txBody>
-                  <a:tcPr>
-                    <a:solidFill>
-                      <a:srgbClr val="F0E0C6"/>
-                    </a:solidFill>
-                  </a:tcPr>
-                </a:tc>
-                <a:tc>
-                  <a:txBody>
-                    <a:bodyPr/>
-                    <a:lstStyle/>
-                    <a:p>
-                      <a:r>
-                        <a:rPr sz="1050">
-                          <a:solidFill>
-                            <a:srgbClr val="463A32"/>
-                          </a:solidFill>
-                        </a:rPr>
-                        <a:t>Sí — entrega coordinando el vuelo</a:t>
-                      </a:r>
-                    </a:p>
-                  </a:txBody>
-                  <a:tcPr>
-                    <a:solidFill>
-                      <a:srgbClr val="F0E0C6"/>
-                    </a:solidFill>
-                  </a:tcPr>
-                </a:tc>
-                <a:tc>
-                  <a:txBody>
-                    <a:bodyPr/>
-                    <a:lstStyle/>
-                    <a:p>
-                      <a:pPr algn="ctr"/>
-                      <a:r>
-                        <a:rPr sz="1050" u="sng">
-                          <a:solidFill>
-                            <a:srgbClr val="8F5A44"/>
-                          </a:solidFill>
-                          <a:hlinkClick r:id="rId3"/>
-                        </a:rPr>
-                        <a:t>ver</a:t>
-                      </a:r>
-                    </a:p>
-                  </a:txBody>
-                  <a:tcPr>
-                    <a:solidFill>
-                      <a:srgbClr val="F0E0C6"/>
-                    </a:solidFill>
-                  </a:tcPr>
-                </a:tc>
-              </a:tr>
-              <a:tr h="522514">
-                <a:tc>
-                  <a:txBody>
-                    <a:bodyPr/>
-                    <a:lstStyle/>
-                    <a:p>
-                      <a:r>
-                        <a:rPr sz="1050">
-                          <a:solidFill>
-                            <a:srgbClr val="463A32"/>
-                          </a:solidFill>
-                        </a:rPr>
-                        <a:t>Mitsubishi Montero Sport</a:t>
-                      </a:r>
-                    </a:p>
-                  </a:txBody>
-                  <a:tcPr>
-                    <a:solidFill>
-                      <a:srgbClr val="F0E0C6"/>
-                    </a:solidFill>
-                  </a:tcPr>
-                </a:tc>
-                <a:tc>
-                  <a:txBody>
-                    <a:bodyPr/>
-                    <a:lstStyle/>
-                    <a:p>
-                      <a:r>
-                        <a:rPr sz="1050">
-                          <a:solidFill>
-                            <a:srgbClr val="463A32"/>
-                          </a:solidFill>
-                        </a:rPr>
-                        <a:t>Farallones (local)</a:t>
-                      </a:r>
-                    </a:p>
-                  </a:txBody>
-                  <a:tcPr>
-                    <a:solidFill>
-                      <a:srgbClr val="F0E0C6"/>
-                    </a:solidFill>
-                  </a:tcPr>
-                </a:tc>
-                <a:tc>
-                  <a:txBody>
-                    <a:bodyPr/>
-                    <a:lstStyle/>
-                    <a:p>
-                      <a:r>
-                        <a:rPr sz="1050">
-                          <a:solidFill>
-                            <a:srgbClr val="463A32"/>
-                          </a:solidFill>
-                        </a:rPr>
-                        <a:t>desde $705.000</a:t>
-                      </a:r>
-                    </a:p>
-                  </a:txBody>
-                  <a:tcPr>
-                    <a:solidFill>
-                      <a:srgbClr val="F0E0C6"/>
-                    </a:solidFill>
-                  </a:tcPr>
-                </a:tc>
-                <a:tc>
-                  <a:txBody>
-                    <a:bodyPr/>
-                    <a:lstStyle/>
-                    <a:p>
-                      <a:pPr algn="ctr"/>
-                      <a:r>
-                        <a:rPr sz="1050">
-                          <a:solidFill>
-                            <a:srgbClr val="463A32"/>
-                          </a:solidFill>
-                        </a:rPr>
-                        <a:t>$100.714</a:t>
-                      </a:r>
-                    </a:p>
-                  </a:txBody>
-                  <a:tcPr>
-                    <a:solidFill>
-                      <a:srgbClr val="F0E0C6"/>
-                    </a:solidFill>
-                  </a:tcPr>
-                </a:tc>
-                <a:tc>
-                  <a:txBody>
-                    <a:bodyPr/>
-                    <a:lstStyle/>
-                    <a:p>
-                      <a:r>
-                        <a:rPr sz="1050">
-                          <a:solidFill>
-                            <a:srgbClr val="463A32"/>
-                          </a:solidFill>
-                        </a:rPr>
-                        <a:t>Sí — entrega coordinando el vuelo</a:t>
-                      </a:r>
-                    </a:p>
-                  </a:txBody>
-                  <a:tcPr>
-                    <a:solidFill>
-                      <a:srgbClr val="F0E0C6"/>
-                    </a:solidFill>
-                  </a:tcPr>
-                </a:tc>
-                <a:tc>
-                  <a:txBody>
-                    <a:bodyPr/>
-                    <a:lstStyle/>
-                    <a:p>
-                      <a:pPr algn="ctr"/>
-                      <a:r>
-                        <a:rPr sz="1050" u="sng">
-                          <a:solidFill>
-                            <a:srgbClr val="8F5A44"/>
-                          </a:solidFill>
-                          <a:hlinkClick r:id="rId3"/>
-                        </a:rPr>
-                        <a:t>ver</a:t>
-                      </a:r>
-                    </a:p>
-                  </a:txBody>
-                  <a:tcPr>
-                    <a:solidFill>
-                      <a:srgbClr val="F0E0C6"/>
-                    </a:solidFill>
-                  </a:tcPr>
-                </a:tc>
-              </a:tr>
-              <a:tr h="522514">
-                <a:tc>
-                  <a:txBody>
-                    <a:bodyPr/>
-                    <a:lstStyle/>
-                    <a:p>
-                      <a:r>
-                        <a:rPr sz="1050">
-                          <a:solidFill>
-                            <a:srgbClr val="463A32"/>
-                          </a:solidFill>
-                        </a:rPr>
-                        <a:t>7 puestos (varios modelos)</a:t>
-                      </a:r>
-                    </a:p>
-                  </a:txBody>
-                  <a:tcPr>
-                    <a:solidFill>
-                      <a:srgbClr val="F0E0C6"/>
-                    </a:solidFill>
-                  </a:tcPr>
-                </a:tc>
-                <a:tc>
-                  <a:txBody>
-                    <a:bodyPr/>
-                    <a:lstStyle/>
-                    <a:p>
-                      <a:r>
-                        <a:rPr sz="1050">
-                          <a:solidFill>
-                            <a:srgbClr val="463A32"/>
-                          </a:solidFill>
-                        </a:rPr>
-                        <a:t>WayCarCali (local)</a:t>
-                      </a:r>
-                    </a:p>
-                  </a:txBody>
-                  <a:tcPr>
-                    <a:solidFill>
-                      <a:srgbClr val="F0E0C6"/>
-                    </a:solidFill>
-                  </a:tcPr>
-                </a:tc>
-                <a:tc>
-                  <a:txBody>
-                    <a:bodyPr/>
-                    <a:lstStyle/>
-                    <a:p>
-                      <a:r>
-                        <a:rPr sz="1050">
-                          <a:solidFill>
-                            <a:srgbClr val="463A32"/>
-                          </a:solidFill>
-                        </a:rPr>
-                        <a:t>desde $360.000</a:t>
-                      </a:r>
-                    </a:p>
-                  </a:txBody>
-                  <a:tcPr>
-                    <a:solidFill>
-                      <a:srgbClr val="F0E0C6"/>
-                    </a:solidFill>
-                  </a:tcPr>
-                </a:tc>
-                <a:tc>
-                  <a:txBody>
-                    <a:bodyPr/>
-                    <a:lstStyle/>
-                    <a:p>
-                      <a:pPr algn="ctr"/>
-                      <a:r>
-                        <a:rPr sz="1050">
-                          <a:solidFill>
-                            <a:srgbClr val="463A32"/>
-                          </a:solidFill>
-                        </a:rPr>
-                        <a:t>$51.429</a:t>
-                      </a:r>
-                    </a:p>
-                  </a:txBody>
-                  <a:tcPr>
-                    <a:solidFill>
-                      <a:srgbClr val="F0E0C6"/>
-                    </a:solidFill>
-                  </a:tcPr>
-                </a:tc>
-                <a:tc>
-                  <a:txBody>
-                    <a:bodyPr/>
-                    <a:lstStyle/>
-                    <a:p>
-                      <a:r>
-                        <a:rPr sz="1050">
-                          <a:solidFill>
-                            <a:srgbClr val="463A32"/>
-                          </a:solidFill>
-                        </a:rPr>
-                        <a:t>Sí — domicilio gratis al aeropuerto (3+ días)</a:t>
-                      </a:r>
-                    </a:p>
-                  </a:txBody>
-                  <a:tcPr>
-                    <a:solidFill>
-                      <a:srgbClr val="F0E0C6"/>
-                    </a:solidFill>
-                  </a:tcPr>
-                </a:tc>
-                <a:tc>
-                  <a:txBody>
-                    <a:bodyPr/>
-                    <a:lstStyle/>
-                    <a:p>
-                      <a:pPr algn="ctr"/>
-                      <a:r>
-                        <a:rPr sz="1050" u="sng">
-                          <a:solidFill>
-                            <a:srgbClr val="8F5A44"/>
-                          </a:solidFill>
-                          <a:hlinkClick r:id="rId4"/>
-                        </a:rPr>
-                        <a:t>ver</a:t>
-                      </a:r>
-                    </a:p>
-                  </a:txBody>
-                  <a:tcPr>
-                    <a:solidFill>
-                      <a:srgbClr val="F0E0C6"/>
-                    </a:solidFill>
-                  </a:tcPr>
-                </a:tc>
-              </a:tr>
-              <a:tr h="522514">
-                <a:tc>
-                  <a:txBody>
-                    <a:bodyPr/>
-                    <a:lstStyle/>
-                    <a:p>
-                      <a:r>
-                        <a:rPr sz="1050">
-                          <a:solidFill>
-                            <a:srgbClr val="463A32"/>
-                          </a:solidFill>
-                        </a:rPr>
-                        <a:t>Nissan X-Trail</a:t>
-                      </a:r>
-                    </a:p>
-                  </a:txBody>
-                  <a:tcPr>
-                    <a:solidFill>
-                      <a:srgbClr val="EFE6DA"/>
-                    </a:solidFill>
-                  </a:tcPr>
-                </a:tc>
-                <a:tc>
-                  <a:txBody>
-                    <a:bodyPr/>
-                    <a:lstStyle/>
-                    <a:p>
-                      <a:r>
-                        <a:rPr sz="1050">
-                          <a:solidFill>
-                            <a:srgbClr val="463A32"/>
-                          </a:solidFill>
-                        </a:rPr>
-                        <a:t>Kayak · EconomyBookings</a:t>
-                      </a:r>
-                    </a:p>
-                  </a:txBody>
-                  <a:tcPr>
-                    <a:solidFill>
-                      <a:srgbClr val="EFE6DA"/>
-                    </a:solidFill>
-                  </a:tcPr>
-                </a:tc>
-                <a:tc>
-                  <a:txBody>
-                    <a:bodyPr/>
-                    <a:lstStyle/>
-                    <a:p>
-                      <a:r>
-                        <a:rPr sz="1050">
-                          <a:solidFill>
-                            <a:srgbClr val="463A32"/>
-                          </a:solidFill>
-                        </a:rPr>
-                        <a:t>$1.033.028</a:t>
-                      </a:r>
-                    </a:p>
-                  </a:txBody>
-                  <a:tcPr>
-                    <a:solidFill>
-                      <a:srgbClr val="EFE6DA"/>
-                    </a:solidFill>
-                  </a:tcPr>
-                </a:tc>
-                <a:tc>
-                  <a:txBody>
-                    <a:bodyPr/>
-                    <a:lstStyle/>
-                    <a:p>
-                      <a:pPr algn="ctr"/>
-                      <a:r>
-                        <a:rPr sz="1050">
-                          <a:solidFill>
-                            <a:srgbClr val="463A32"/>
-                          </a:solidFill>
-                        </a:rPr>
-                        <a:t>$147.575</a:t>
-                      </a:r>
-                    </a:p>
-                  </a:txBody>
-                  <a:tcPr>
-                    <a:solidFill>
-                      <a:srgbClr val="EFE6DA"/>
-                    </a:solidFill>
-                  </a:tcPr>
-                </a:tc>
-                <a:tc>
-                  <a:txBody>
-                    <a:bodyPr/>
-                    <a:lstStyle/>
-                    <a:p>
-                      <a:r>
-                        <a:rPr sz="1050">
-                          <a:solidFill>
-                            <a:srgbClr val="463A32"/>
-                          </a:solidFill>
-                        </a:rPr>
-                        <a:t>Mostrador: cierra ~10 pm</a:t>
-                      </a:r>
-                    </a:p>
-                  </a:txBody>
-                  <a:tcPr>
-                    <a:solidFill>
-                      <a:srgbClr val="EFE6DA"/>
-                    </a:solidFill>
-                  </a:tcPr>
-                </a:tc>
-                <a:tc>
-                  <a:txBody>
-                    <a:bodyPr/>
-                    <a:lstStyle/>
-                    <a:p>
-                      <a:pPr algn="ctr"/>
-                      <a:r>
-                        <a:rPr sz="1050" u="sng">
-                          <a:solidFill>
-                            <a:srgbClr val="8F5A44"/>
-                          </a:solidFill>
-                          <a:hlinkClick r:id="rId5"/>
-                        </a:rPr>
-                        <a:t>ver</a:t>
-                      </a:r>
-                    </a:p>
-                  </a:txBody>
-                  <a:tcPr>
-                    <a:solidFill>
-                      <a:srgbClr val="EFE6DA"/>
-                    </a:solidFill>
-                  </a:tcPr>
-                </a:tc>
-              </a:tr>
-              <a:tr h="522516">
-                <a:tc>
-                  <a:txBody>
-                    <a:bodyPr/>
-                    <a:lstStyle/>
-                    <a:p>
-                      <a:r>
-                        <a:rPr sz="1050">
-                          <a:solidFill>
-                            <a:srgbClr val="463A32"/>
-                          </a:solidFill>
-                        </a:rPr>
-                        <a:t>SUV mediano híbrido</a:t>
-                      </a:r>
-                    </a:p>
-                  </a:txBody>
-                  <a:tcPr>
-                    <a:solidFill>
-                      <a:srgbClr val="EFE6DA"/>
-                    </a:solidFill>
-                  </a:tcPr>
-                </a:tc>
-                <a:tc>
-                  <a:txBody>
-                    <a:bodyPr/>
-                    <a:lstStyle/>
-                    <a:p>
-                      <a:r>
-                        <a:rPr sz="1050">
-                          <a:solidFill>
-                            <a:srgbClr val="463A32"/>
-                          </a:solidFill>
-                        </a:rPr>
-                        <a:t>Kayak · Alkilautos</a:t>
-                      </a:r>
-                    </a:p>
-                  </a:txBody>
-                  <a:tcPr>
-                    <a:solidFill>
-                      <a:srgbClr val="EFE6DA"/>
-                    </a:solidFill>
-                  </a:tcPr>
-                </a:tc>
-                <a:tc>
-                  <a:txBody>
-                    <a:bodyPr/>
-                    <a:lstStyle/>
-                    <a:p>
-                      <a:r>
-                        <a:rPr sz="1050">
-                          <a:solidFill>
-                            <a:srgbClr val="463A32"/>
-                          </a:solidFill>
-                        </a:rPr>
-                        <a:t>$1.847.639</a:t>
-                      </a:r>
-                    </a:p>
-                  </a:txBody>
-                  <a:tcPr>
-                    <a:solidFill>
-                      <a:srgbClr val="EFE6DA"/>
-                    </a:solidFill>
-                  </a:tcPr>
-                </a:tc>
-                <a:tc>
-                  <a:txBody>
-                    <a:bodyPr/>
-                    <a:lstStyle/>
-                    <a:p>
-                      <a:pPr algn="ctr"/>
-                      <a:r>
-                        <a:rPr sz="1050">
-                          <a:solidFill>
-                            <a:srgbClr val="463A32"/>
-                          </a:solidFill>
-                        </a:rPr>
-                        <a:t>$263.948</a:t>
-                      </a:r>
-                    </a:p>
-                  </a:txBody>
-                  <a:tcPr>
-                    <a:solidFill>
-                      <a:srgbClr val="EFE6DA"/>
-                    </a:solidFill>
-                  </a:tcPr>
-                </a:tc>
-                <a:tc>
-                  <a:txBody>
-                    <a:bodyPr/>
-                    <a:lstStyle/>
-                    <a:p>
-                      <a:r>
-                        <a:rPr sz="1050">
-                          <a:solidFill>
-                            <a:srgbClr val="463A32"/>
-                          </a:solidFill>
-                        </a:rPr>
-                        <a:t>Mostrador: cierra ~10 pm</a:t>
-                      </a:r>
-                    </a:p>
-                  </a:txBody>
-                  <a:tcPr>
-                    <a:solidFill>
-                      <a:srgbClr val="EFE6DA"/>
-                    </a:solidFill>
-                  </a:tcPr>
-                </a:tc>
-                <a:tc>
-                  <a:txBody>
-                    <a:bodyPr/>
-                    <a:lstStyle/>
-                    <a:p>
-                      <a:pPr algn="ctr"/>
-                      <a:r>
-                        <a:rPr sz="1050" u="sng">
-                          <a:solidFill>
-                            <a:srgbClr val="8F5A44"/>
-                          </a:solidFill>
-                          <a:hlinkClick r:id="rId5"/>
-                        </a:rPr>
-                        <a:t>ver</a:t>
-                      </a:r>
-                    </a:p>
-                  </a:txBody>
-                  <a:tcPr>
-                    <a:solidFill>
-                      <a:srgbClr val="EFE6DA"/>
-                    </a:solidFill>
-                  </a:tcPr>
-                </a:tc>
-              </a:tr>
-            </a:tbl>
-          </a:graphicData>
-        </a:graphic>
-      </p:graphicFrame>
-      <p:sp>
-        <p:nvSpPr>
-          <p:cNvPr id="6" name="TextBox 5"/>
+            <a:pPr algn="ctr"/>
+            <a:r>
+              <a:rPr sz="1800" b="1">
+                <a:solidFill>
+                  <a:srgbClr val="8F5A44"/>
+                </a:solidFill>
+              </a:rPr>
+              <a:t>Carro local (entrega)</a:t>
+            </a:r>
+          </a:p>
+        </p:txBody>
+      </p:sp>
+      <p:sp>
+        <p:nvSpPr>
+          <p:cNvPr id="8" name="TextBox 7"/>
           <p:cNvSpPr txBox="1"/>
           <p:nvPr/>
         </p:nvSpPr>
         <p:spPr>
           <a:xfrm>
-            <a:off x="457200" y="5577840"/>
-            <a:ext cx="11338560" cy="1097280"/>
+            <a:off x="777240" y="2743200"/>
+            <a:ext cx="3017520" cy="1005840"/>
           </a:xfrm>
           <a:prstGeom prst="rect">
             <a:avLst/>
@@ -4811,14 +4191,389 @@
           </a:bodyPr>
           <a:lstStyle/>
           <a:p>
-            <a:pPr algn="l"/>
-            <a:r>
-              <a:rPr sz="1150" b="0">
+            <a:pPr algn="ctr"/>
+            <a:r>
+              <a:rPr sz="3400" b="1">
+                <a:solidFill>
+                  <a:srgbClr val="D9A75E"/>
+                </a:solidFill>
+              </a:rPr>
+              <a:t>$200.000</a:t>
+            </a:r>
+          </a:p>
+          <a:p>
+            <a:pPr algn="ctr"/>
+            <a:r>
+              <a:rPr sz="1300" b="0">
+                <a:solidFill>
+                  <a:srgbClr val="8A7A6E"/>
+                </a:solidFill>
+              </a:rPr>
+              <a:t>por persona</a:t>
+            </a:r>
+          </a:p>
+        </p:txBody>
+      </p:sp>
+      <p:sp>
+        <p:nvSpPr>
+          <p:cNvPr id="9" name="TextBox 8"/>
+          <p:cNvSpPr txBox="1"/>
+          <p:nvPr/>
+        </p:nvSpPr>
+        <p:spPr>
+          <a:xfrm>
+            <a:off x="822960" y="4069080"/>
+            <a:ext cx="2926080" cy="1463040"/>
+          </a:xfrm>
+          <a:prstGeom prst="rect">
+            <a:avLst/>
+          </a:prstGeom>
+          <a:noFill/>
+        </p:spPr>
+        <p:txBody>
+          <a:bodyPr wrap="square" anchor="t">
+            <a:spAutoFit/>
+          </a:bodyPr>
+          <a:lstStyle/>
+          <a:p>
+            <a:pPr algn="ctr"/>
+            <a:r>
+              <a:rPr sz="1350" b="0">
+                <a:solidFill>
+                  <a:srgbClr val="463A32"/>
+                </a:solidFill>
+              </a:rPr>
+              <a:t>Cuadra con la llegada de noche; libertad para salir de Cali.</a:t>
+            </a:r>
+          </a:p>
+        </p:txBody>
+      </p:sp>
+      <p:sp>
+        <p:nvSpPr>
+          <p:cNvPr id="10" name="Rounded Rectangle 9"/>
+          <p:cNvSpPr/>
+          <p:nvPr/>
+        </p:nvSpPr>
+        <p:spPr>
+          <a:xfrm>
+            <a:off x="4233672" y="1554480"/>
+            <a:ext cx="3566160" cy="4114800"/>
+          </a:xfrm>
+          <a:prstGeom prst="roundRect">
+            <a:avLst>
+              <a:gd name="adj" fmla="val 12000"/>
+            </a:avLst>
+          </a:prstGeom>
+          <a:solidFill>
+            <a:srgbClr val="FFFFFF"/>
+          </a:solidFill>
+          <a:ln>
+            <a:noFill/>
+          </a:ln>
+          <a:effectLst>
+            <a:outerShdw blurRad="95000" dist="40000" dir="5400000" rotWithShape="0">
+              <a:srgbClr val="6E5B4E">
+                <a:alpha val="32000"/>
+              </a:srgbClr>
+            </a:outerShdw>
+          </a:effectLst>
+        </p:spPr>
+        <p:style>
+          <a:lnRef idx="1">
+            <a:schemeClr val="accent1"/>
+          </a:lnRef>
+          <a:fillRef idx="3">
+            <a:schemeClr val="accent1"/>
+          </a:fillRef>
+          <a:effectRef idx="2">
+            <a:schemeClr val="accent1"/>
+          </a:effectRef>
+          <a:fontRef idx="minor">
+            <a:schemeClr val="lt1"/>
+          </a:fontRef>
+        </p:style>
+        <p:txBody>
+          <a:bodyPr rtlCol="0" anchor="ctr"/>
+          <a:lstStyle/>
+          <a:p>
+            <a:pPr algn="ctr"/>
+          </a:p>
+        </p:txBody>
+      </p:sp>
+      <p:sp>
+        <p:nvSpPr>
+          <p:cNvPr id="11" name="TextBox 10"/>
+          <p:cNvSpPr txBox="1"/>
+          <p:nvPr/>
+        </p:nvSpPr>
+        <p:spPr>
+          <a:xfrm>
+            <a:off x="4507992" y="1920240"/>
+            <a:ext cx="3017520" cy="731520"/>
+          </a:xfrm>
+          <a:prstGeom prst="rect">
+            <a:avLst/>
+          </a:prstGeom>
+          <a:noFill/>
+        </p:spPr>
+        <p:txBody>
+          <a:bodyPr wrap="square" anchor="t">
+            <a:spAutoFit/>
+          </a:bodyPr>
+          <a:lstStyle/>
+          <a:p>
+            <a:pPr algn="ctr"/>
+            <a:r>
+              <a:rPr sz="1800" b="1">
                 <a:solidFill>
                   <a:srgbClr val="8F5A44"/>
                 </a:solidFill>
               </a:rPr>
-              <a:t>Todos los precios son por los 3 días, solo el alquiler (sin gasolina ni parqueo). Las tarifas locales 'desde' se calculan sobre la tarifa base/día × 3; en alquiler corto el total real suele ser mayor (la Captiva, confirmada, cuesta ~$1.200.000) — pidan el exacto por WhatsApp. Lo clave sigue siendo el horario: las locales entregan coordinando el vuelo; los mostradores cierran ~10 pm.</a:t>
+              <a:t>Mostrador (Kayak)</a:t>
+            </a:r>
+          </a:p>
+        </p:txBody>
+      </p:sp>
+      <p:sp>
+        <p:nvSpPr>
+          <p:cNvPr id="12" name="TextBox 11"/>
+          <p:cNvSpPr txBox="1"/>
+          <p:nvPr/>
+        </p:nvSpPr>
+        <p:spPr>
+          <a:xfrm>
+            <a:off x="4507992" y="2743200"/>
+            <a:ext cx="3017520" cy="1005840"/>
+          </a:xfrm>
+          <a:prstGeom prst="rect">
+            <a:avLst/>
+          </a:prstGeom>
+          <a:noFill/>
+        </p:spPr>
+        <p:txBody>
+          <a:bodyPr wrap="square" anchor="t">
+            <a:spAutoFit/>
+          </a:bodyPr>
+          <a:lstStyle/>
+          <a:p>
+            <a:pPr algn="ctr"/>
+            <a:r>
+              <a:rPr sz="3400" b="1">
+                <a:solidFill>
+                  <a:srgbClr val="D9A75E"/>
+                </a:solidFill>
+              </a:rPr>
+              <a:t>$180.000</a:t>
+            </a:r>
+          </a:p>
+          <a:p>
+            <a:pPr algn="ctr"/>
+            <a:r>
+              <a:rPr sz="1300" b="0">
+                <a:solidFill>
+                  <a:srgbClr val="8A7A6E"/>
+                </a:solidFill>
+              </a:rPr>
+              <a:t>por persona</a:t>
+            </a:r>
+          </a:p>
+        </p:txBody>
+      </p:sp>
+      <p:sp>
+        <p:nvSpPr>
+          <p:cNvPr id="13" name="TextBox 12"/>
+          <p:cNvSpPr txBox="1"/>
+          <p:nvPr/>
+        </p:nvSpPr>
+        <p:spPr>
+          <a:xfrm>
+            <a:off x="4553712" y="4069080"/>
+            <a:ext cx="2926080" cy="1463040"/>
+          </a:xfrm>
+          <a:prstGeom prst="rect">
+            <a:avLst/>
+          </a:prstGeom>
+          <a:noFill/>
+        </p:spPr>
+        <p:txBody>
+          <a:bodyPr wrap="square" anchor="t">
+            <a:spAutoFit/>
+          </a:bodyPr>
+          <a:lstStyle/>
+          <a:p>
+            <a:pPr algn="ctr"/>
+            <a:r>
+              <a:rPr sz="1350" b="0">
+                <a:solidFill>
+                  <a:srgbClr val="463A32"/>
+                </a:solidFill>
+              </a:rPr>
+              <a:t>Más barato, pero el mostrador cierra ~10 pm.</a:t>
+            </a:r>
+          </a:p>
+        </p:txBody>
+      </p:sp>
+      <p:sp>
+        <p:nvSpPr>
+          <p:cNvPr id="14" name="Rounded Rectangle 13"/>
+          <p:cNvSpPr/>
+          <p:nvPr/>
+        </p:nvSpPr>
+        <p:spPr>
+          <a:xfrm>
+            <a:off x="7964424" y="1554480"/>
+            <a:ext cx="3566160" cy="4114800"/>
+          </a:xfrm>
+          <a:prstGeom prst="roundRect">
+            <a:avLst>
+              <a:gd name="adj" fmla="val 12000"/>
+            </a:avLst>
+          </a:prstGeom>
+          <a:solidFill>
+            <a:srgbClr val="FFFFFF"/>
+          </a:solidFill>
+          <a:ln>
+            <a:noFill/>
+          </a:ln>
+          <a:effectLst>
+            <a:outerShdw blurRad="95000" dist="40000" dir="5400000" rotWithShape="0">
+              <a:srgbClr val="6E5B4E">
+                <a:alpha val="32000"/>
+              </a:srgbClr>
+            </a:outerShdw>
+          </a:effectLst>
+        </p:spPr>
+        <p:style>
+          <a:lnRef idx="1">
+            <a:schemeClr val="accent1"/>
+          </a:lnRef>
+          <a:fillRef idx="3">
+            <a:schemeClr val="accent1"/>
+          </a:fillRef>
+          <a:effectRef idx="2">
+            <a:schemeClr val="accent1"/>
+          </a:effectRef>
+          <a:fontRef idx="minor">
+            <a:schemeClr val="lt1"/>
+          </a:fontRef>
+        </p:style>
+        <p:txBody>
+          <a:bodyPr rtlCol="0" anchor="ctr"/>
+          <a:lstStyle/>
+          <a:p>
+            <a:pPr algn="ctr"/>
+          </a:p>
+        </p:txBody>
+      </p:sp>
+      <p:sp>
+        <p:nvSpPr>
+          <p:cNvPr id="15" name="TextBox 14"/>
+          <p:cNvSpPr txBox="1"/>
+          <p:nvPr/>
+        </p:nvSpPr>
+        <p:spPr>
+          <a:xfrm>
+            <a:off x="8238744" y="1920240"/>
+            <a:ext cx="3017520" cy="731520"/>
+          </a:xfrm>
+          <a:prstGeom prst="rect">
+            <a:avLst/>
+          </a:prstGeom>
+          <a:noFill/>
+        </p:spPr>
+        <p:txBody>
+          <a:bodyPr wrap="square" anchor="t">
+            <a:spAutoFit/>
+          </a:bodyPr>
+          <a:lstStyle/>
+          <a:p>
+            <a:pPr algn="ctr"/>
+            <a:r>
+              <a:rPr sz="1800" b="1">
+                <a:solidFill>
+                  <a:srgbClr val="8F5A44"/>
+                </a:solidFill>
+              </a:rPr>
+              <a:t>Sin carro propio</a:t>
+            </a:r>
+          </a:p>
+        </p:txBody>
+      </p:sp>
+      <p:sp>
+        <p:nvSpPr>
+          <p:cNvPr id="16" name="TextBox 15"/>
+          <p:cNvSpPr txBox="1"/>
+          <p:nvPr/>
+        </p:nvSpPr>
+        <p:spPr>
+          <a:xfrm>
+            <a:off x="8238744" y="2743200"/>
+            <a:ext cx="3017520" cy="1005840"/>
+          </a:xfrm>
+          <a:prstGeom prst="rect">
+            <a:avLst/>
+          </a:prstGeom>
+          <a:noFill/>
+        </p:spPr>
+        <p:txBody>
+          <a:bodyPr wrap="square" anchor="t">
+            <a:spAutoFit/>
+          </a:bodyPr>
+          <a:lstStyle/>
+          <a:p>
+            <a:pPr algn="ctr"/>
+            <a:r>
+              <a:rPr sz="3400" b="1">
+                <a:solidFill>
+                  <a:srgbClr val="D9A75E"/>
+                </a:solidFill>
+              </a:rPr>
+              <a:t>$125.000</a:t>
+            </a:r>
+          </a:p>
+          <a:p>
+            <a:pPr algn="ctr"/>
+            <a:r>
+              <a:rPr sz="1300" b="0">
+                <a:solidFill>
+                  <a:srgbClr val="8A7A6E"/>
+                </a:solidFill>
+              </a:rPr>
+              <a:t>por persona</a:t>
+            </a:r>
+          </a:p>
+        </p:txBody>
+      </p:sp>
+      <p:sp>
+        <p:nvSpPr>
+          <p:cNvPr id="17" name="TextBox 16"/>
+          <p:cNvSpPr txBox="1"/>
+          <p:nvPr/>
+        </p:nvSpPr>
+        <p:spPr>
+          <a:xfrm>
+            <a:off x="8284464" y="4069080"/>
+            <a:ext cx="2926080" cy="1463040"/>
+          </a:xfrm>
+          <a:prstGeom prst="rect">
+            <a:avLst/>
+          </a:prstGeom>
+          <a:noFill/>
+        </p:spPr>
+        <p:txBody>
+          <a:bodyPr wrap="square" anchor="t">
+            <a:spAutoFit/>
+          </a:bodyPr>
+          <a:lstStyle/>
+          <a:p>
+            <a:pPr algn="ctr"/>
+            <a:r>
+              <a:rPr sz="1350" b="0">
+                <a:solidFill>
+                  <a:srgbClr val="463A32"/>
+                </a:solidFill>
+              </a:rPr>
+              <a:t>Lo más barato: taxis + una van con conductor para el paseo.</a:t>
             </a:r>
           </a:p>
         </p:txBody>
@@ -4851,6 +4606,1130 @@
       <p:grpSpPr/>
       <p:sp>
         <p:nvSpPr>
+          <p:cNvPr id="2" name="Rounded Rectangle 1"/>
+          <p:cNvSpPr/>
+          <p:nvPr/>
+        </p:nvSpPr>
+        <p:spPr>
+          <a:xfrm>
+            <a:off x="365760" y="274320"/>
+            <a:ext cx="11457432" cy="749808"/>
+          </a:xfrm>
+          <a:prstGeom prst="roundRect">
+            <a:avLst>
+              <a:gd name="adj" fmla="val 50000"/>
+            </a:avLst>
+          </a:prstGeom>
+          <a:solidFill>
+            <a:srgbClr val="B5765C"/>
+          </a:solidFill>
+          <a:ln>
+            <a:noFill/>
+          </a:ln>
+          <a:effectLst>
+            <a:outerShdw blurRad="95000" dist="40000" dir="5400000" rotWithShape="0">
+              <a:srgbClr val="6E5B4E">
+                <a:alpha val="32000"/>
+              </a:srgbClr>
+            </a:outerShdw>
+          </a:effectLst>
+        </p:spPr>
+        <p:style>
+          <a:lnRef idx="1">
+            <a:schemeClr val="accent1"/>
+          </a:lnRef>
+          <a:fillRef idx="3">
+            <a:schemeClr val="accent1"/>
+          </a:fillRef>
+          <a:effectRef idx="2">
+            <a:schemeClr val="accent1"/>
+          </a:effectRef>
+          <a:fontRef idx="minor">
+            <a:schemeClr val="lt1"/>
+          </a:fontRef>
+        </p:style>
+        <p:txBody>
+          <a:bodyPr rtlCol="0" anchor="ctr"/>
+          <a:lstStyle/>
+          <a:p>
+            <a:pPr algn="ctr"/>
+          </a:p>
+        </p:txBody>
+      </p:sp>
+      <p:sp>
+        <p:nvSpPr>
+          <p:cNvPr id="3" name="TextBox 2"/>
+          <p:cNvSpPr txBox="1"/>
+          <p:nvPr/>
+        </p:nvSpPr>
+        <p:spPr>
+          <a:xfrm>
+            <a:off x="777240" y="274320"/>
+            <a:ext cx="10789920" cy="749808"/>
+          </a:xfrm>
+          <a:prstGeom prst="rect">
+            <a:avLst/>
+          </a:prstGeom>
+          <a:noFill/>
+        </p:spPr>
+        <p:txBody>
+          <a:bodyPr wrap="square" anchor="ctr">
+            <a:spAutoFit/>
+          </a:bodyPr>
+          <a:lstStyle/>
+          <a:p>
+            <a:pPr algn="l"/>
+            <a:r>
+              <a:rPr sz="2400" b="1">
+                <a:solidFill>
+                  <a:srgbClr val="FFFFFF"/>
+                </a:solidFill>
+              </a:rPr>
+              <a:t>🚙   Opciones de vehículo (7 puestos)</a:t>
+            </a:r>
+          </a:p>
+        </p:txBody>
+      </p:sp>
+      <p:sp>
+        <p:nvSpPr>
+          <p:cNvPr id="4" name="TextBox 3"/>
+          <p:cNvSpPr txBox="1"/>
+          <p:nvPr/>
+        </p:nvSpPr>
+        <p:spPr>
+          <a:xfrm>
+            <a:off x="548640" y="1097280"/>
+            <a:ext cx="11064240" cy="502920"/>
+          </a:xfrm>
+          <a:prstGeom prst="rect">
+            <a:avLst/>
+          </a:prstGeom>
+          <a:noFill/>
+        </p:spPr>
+        <p:txBody>
+          <a:bodyPr wrap="square" anchor="t">
+            <a:spAutoFit/>
+          </a:bodyPr>
+          <a:lstStyle/>
+          <a:p>
+            <a:pPr algn="l"/>
+            <a:r>
+              <a:rPr sz="1300" b="0">
+                <a:solidFill>
+                  <a:srgbClr val="463A32"/>
+                </a:solidFill>
+              </a:rPr>
+              <a:t>Lo que cambia según dónde se recoja: local (entrega, cuadra con la llegada) vs mostrador (más barato, horario rígido).</a:t>
+            </a:r>
+          </a:p>
+        </p:txBody>
+      </p:sp>
+      <p:graphicFrame>
+        <p:nvGraphicFramePr>
+          <p:cNvPr id="5" name="Table 4"/>
+          <p:cNvGraphicFramePr>
+            <a:graphicFrameLocks noGrp="1"/>
+          </p:cNvGraphicFramePr>
+          <p:nvPr/>
+        </p:nvGraphicFramePr>
+        <p:xfrm>
+          <a:off x="365760" y="1691640"/>
+          <a:ext cx="11430000" cy="3657600"/>
+        </p:xfrm>
+        <a:graphic>
+          <a:graphicData uri="http://schemas.openxmlformats.org/drawingml/2006/table">
+            <a:tbl>
+              <a:tblPr firstRow="1" bandRow="1">
+                <a:tableStyleId>{5C22544A-7EE6-4342-B048-85BDC9FD1C3A}</a:tableStyleId>
+              </a:tblPr>
+              <a:tblGrid>
+                <a:gridCol w="2468880"/>
+                <a:gridCol w="1965960"/>
+                <a:gridCol w="1828800"/>
+                <a:gridCol w="1600200"/>
+                <a:gridCol w="2834640"/>
+                <a:gridCol w="731520"/>
+              </a:tblGrid>
+              <a:tr h="522514">
+                <a:tc>
+                  <a:txBody>
+                    <a:bodyPr/>
+                    <a:lstStyle/>
+                    <a:p>
+                      <a:r>
+                        <a:rPr b="1" sz="1100">
+                          <a:solidFill>
+                            <a:srgbClr val="FFFFFF"/>
+                          </a:solidFill>
+                        </a:rPr>
+                        <a:t>Vehículo (7 puestos)</a:t>
+                      </a:r>
+                    </a:p>
+                  </a:txBody>
+                  <a:tcPr>
+                    <a:solidFill>
+                      <a:srgbClr val="B5765C"/>
+                    </a:solidFill>
+                  </a:tcPr>
+                </a:tc>
+                <a:tc>
+                  <a:txBody>
+                    <a:bodyPr/>
+                    <a:lstStyle/>
+                    <a:p>
+                      <a:r>
+                        <a:rPr b="1" sz="1100">
+                          <a:solidFill>
+                            <a:srgbClr val="FFFFFF"/>
+                          </a:solidFill>
+                        </a:rPr>
+                        <a:t>Agencia</a:t>
+                      </a:r>
+                    </a:p>
+                  </a:txBody>
+                  <a:tcPr>
+                    <a:solidFill>
+                      <a:srgbClr val="B5765C"/>
+                    </a:solidFill>
+                  </a:tcPr>
+                </a:tc>
+                <a:tc>
+                  <a:txBody>
+                    <a:bodyPr/>
+                    <a:lstStyle/>
+                    <a:p>
+                      <a:r>
+                        <a:rPr b="1" sz="1100">
+                          <a:solidFill>
+                            <a:srgbClr val="FFFFFF"/>
+                          </a:solidFill>
+                        </a:rPr>
+                        <a:t>Tarifa (3 días)</a:t>
+                      </a:r>
+                    </a:p>
+                  </a:txBody>
+                  <a:tcPr>
+                    <a:solidFill>
+                      <a:srgbClr val="B5765C"/>
+                    </a:solidFill>
+                  </a:tcPr>
+                </a:tc>
+                <a:tc>
+                  <a:txBody>
+                    <a:bodyPr/>
+                    <a:lstStyle/>
+                    <a:p>
+                      <a:r>
+                        <a:rPr b="1" sz="1100">
+                          <a:solidFill>
+                            <a:srgbClr val="FFFFFF"/>
+                          </a:solidFill>
+                        </a:rPr>
+                        <a:t>Por persona</a:t>
+                      </a:r>
+                    </a:p>
+                  </a:txBody>
+                  <a:tcPr>
+                    <a:solidFill>
+                      <a:srgbClr val="B5765C"/>
+                    </a:solidFill>
+                  </a:tcPr>
+                </a:tc>
+                <a:tc>
+                  <a:txBody>
+                    <a:bodyPr/>
+                    <a:lstStyle/>
+                    <a:p>
+                      <a:r>
+                        <a:rPr b="1" sz="1100">
+                          <a:solidFill>
+                            <a:srgbClr val="FFFFFF"/>
+                          </a:solidFill>
+                        </a:rPr>
+                        <a:t>¿Cuadra con la llegada?</a:t>
+                      </a:r>
+                    </a:p>
+                  </a:txBody>
+                  <a:tcPr>
+                    <a:solidFill>
+                      <a:srgbClr val="B5765C"/>
+                    </a:solidFill>
+                  </a:tcPr>
+                </a:tc>
+                <a:tc>
+                  <a:txBody>
+                    <a:bodyPr/>
+                    <a:lstStyle/>
+                    <a:p>
+                      <a:r>
+                        <a:rPr b="1" sz="1100">
+                          <a:solidFill>
+                            <a:srgbClr val="FFFFFF"/>
+                          </a:solidFill>
+                        </a:rPr>
+                        <a:t>Ver</a:t>
+                      </a:r>
+                    </a:p>
+                  </a:txBody>
+                  <a:tcPr>
+                    <a:solidFill>
+                      <a:srgbClr val="B5765C"/>
+                    </a:solidFill>
+                  </a:tcPr>
+                </a:tc>
+              </a:tr>
+              <a:tr h="522514">
+                <a:tc>
+                  <a:txBody>
+                    <a:bodyPr/>
+                    <a:lstStyle/>
+                    <a:p>
+                      <a:r>
+                        <a:rPr sz="1050">
+                          <a:solidFill>
+                            <a:srgbClr val="463A32"/>
+                          </a:solidFill>
+                        </a:rPr>
+                        <a:t>Chevrolet Captiva Turbo</a:t>
+                      </a:r>
+                    </a:p>
+                  </a:txBody>
+                  <a:tcPr>
+                    <a:solidFill>
+                      <a:srgbClr val="F0E0C6"/>
+                    </a:solidFill>
+                  </a:tcPr>
+                </a:tc>
+                <a:tc>
+                  <a:txBody>
+                    <a:bodyPr/>
+                    <a:lstStyle/>
+                    <a:p>
+                      <a:r>
+                        <a:rPr sz="1050">
+                          <a:solidFill>
+                            <a:srgbClr val="463A32"/>
+                          </a:solidFill>
+                        </a:rPr>
+                        <a:t>Farallones (local)</a:t>
+                      </a:r>
+                    </a:p>
+                  </a:txBody>
+                  <a:tcPr>
+                    <a:solidFill>
+                      <a:srgbClr val="F0E0C6"/>
+                    </a:solidFill>
+                  </a:tcPr>
+                </a:tc>
+                <a:tc>
+                  <a:txBody>
+                    <a:bodyPr/>
+                    <a:lstStyle/>
+                    <a:p>
+                      <a:r>
+                        <a:rPr sz="1050">
+                          <a:solidFill>
+                            <a:srgbClr val="463A32"/>
+                          </a:solidFill>
+                        </a:rPr>
+                        <a:t>~$1.200.000</a:t>
+                      </a:r>
+                    </a:p>
+                  </a:txBody>
+                  <a:tcPr>
+                    <a:solidFill>
+                      <a:srgbClr val="F0E0C6"/>
+                    </a:solidFill>
+                  </a:tcPr>
+                </a:tc>
+                <a:tc>
+                  <a:txBody>
+                    <a:bodyPr/>
+                    <a:lstStyle/>
+                    <a:p>
+                      <a:pPr algn="ctr"/>
+                      <a:r>
+                        <a:rPr sz="1050">
+                          <a:solidFill>
+                            <a:srgbClr val="463A32"/>
+                          </a:solidFill>
+                        </a:rPr>
+                        <a:t>$171.429</a:t>
+                      </a:r>
+                    </a:p>
+                  </a:txBody>
+                  <a:tcPr>
+                    <a:solidFill>
+                      <a:srgbClr val="F0E0C6"/>
+                    </a:solidFill>
+                  </a:tcPr>
+                </a:tc>
+                <a:tc>
+                  <a:txBody>
+                    <a:bodyPr/>
+                    <a:lstStyle/>
+                    <a:p>
+                      <a:r>
+                        <a:rPr sz="1050">
+                          <a:solidFill>
+                            <a:srgbClr val="463A32"/>
+                          </a:solidFill>
+                        </a:rPr>
+                        <a:t>Sí — oficina en el aeropuerto y domicilio</a:t>
+                      </a:r>
+                    </a:p>
+                  </a:txBody>
+                  <a:tcPr>
+                    <a:solidFill>
+                      <a:srgbClr val="F0E0C6"/>
+                    </a:solidFill>
+                  </a:tcPr>
+                </a:tc>
+                <a:tc>
+                  <a:txBody>
+                    <a:bodyPr/>
+                    <a:lstStyle/>
+                    <a:p>
+                      <a:pPr algn="ctr"/>
+                      <a:r>
+                        <a:rPr sz="1050" u="sng">
+                          <a:solidFill>
+                            <a:srgbClr val="8F5A44"/>
+                          </a:solidFill>
+                          <a:hlinkClick r:id="rId2"/>
+                        </a:rPr>
+                        <a:t>ver</a:t>
+                      </a:r>
+                    </a:p>
+                  </a:txBody>
+                  <a:tcPr>
+                    <a:solidFill>
+                      <a:srgbClr val="F0E0C6"/>
+                    </a:solidFill>
+                  </a:tcPr>
+                </a:tc>
+              </a:tr>
+              <a:tr h="522514">
+                <a:tc>
+                  <a:txBody>
+                    <a:bodyPr/>
+                    <a:lstStyle/>
+                    <a:p>
+                      <a:r>
+                        <a:rPr sz="1050">
+                          <a:solidFill>
+                            <a:srgbClr val="463A32"/>
+                          </a:solidFill>
+                        </a:rPr>
+                        <a:t>Toyota Fortuner</a:t>
+                      </a:r>
+                    </a:p>
+                  </a:txBody>
+                  <a:tcPr>
+                    <a:solidFill>
+                      <a:srgbClr val="F0E0C6"/>
+                    </a:solidFill>
+                  </a:tcPr>
+                </a:tc>
+                <a:tc>
+                  <a:txBody>
+                    <a:bodyPr/>
+                    <a:lstStyle/>
+                    <a:p>
+                      <a:r>
+                        <a:rPr sz="1050">
+                          <a:solidFill>
+                            <a:srgbClr val="463A32"/>
+                          </a:solidFill>
+                        </a:rPr>
+                        <a:t>Farallones (local)</a:t>
+                      </a:r>
+                    </a:p>
+                  </a:txBody>
+                  <a:tcPr>
+                    <a:solidFill>
+                      <a:srgbClr val="F0E0C6"/>
+                    </a:solidFill>
+                  </a:tcPr>
+                </a:tc>
+                <a:tc>
+                  <a:txBody>
+                    <a:bodyPr/>
+                    <a:lstStyle/>
+                    <a:p>
+                      <a:r>
+                        <a:rPr sz="1050">
+                          <a:solidFill>
+                            <a:srgbClr val="463A32"/>
+                          </a:solidFill>
+                        </a:rPr>
+                        <a:t>desde $1.140.000</a:t>
+                      </a:r>
+                    </a:p>
+                  </a:txBody>
+                  <a:tcPr>
+                    <a:solidFill>
+                      <a:srgbClr val="F0E0C6"/>
+                    </a:solidFill>
+                  </a:tcPr>
+                </a:tc>
+                <a:tc>
+                  <a:txBody>
+                    <a:bodyPr/>
+                    <a:lstStyle/>
+                    <a:p>
+                      <a:pPr algn="ctr"/>
+                      <a:r>
+                        <a:rPr sz="1050">
+                          <a:solidFill>
+                            <a:srgbClr val="463A32"/>
+                          </a:solidFill>
+                        </a:rPr>
+                        <a:t>$162.857</a:t>
+                      </a:r>
+                    </a:p>
+                  </a:txBody>
+                  <a:tcPr>
+                    <a:solidFill>
+                      <a:srgbClr val="F0E0C6"/>
+                    </a:solidFill>
+                  </a:tcPr>
+                </a:tc>
+                <a:tc>
+                  <a:txBody>
+                    <a:bodyPr/>
+                    <a:lstStyle/>
+                    <a:p>
+                      <a:r>
+                        <a:rPr sz="1050">
+                          <a:solidFill>
+                            <a:srgbClr val="463A32"/>
+                          </a:solidFill>
+                        </a:rPr>
+                        <a:t>Sí — entrega coordinando el vuelo</a:t>
+                      </a:r>
+                    </a:p>
+                  </a:txBody>
+                  <a:tcPr>
+                    <a:solidFill>
+                      <a:srgbClr val="F0E0C6"/>
+                    </a:solidFill>
+                  </a:tcPr>
+                </a:tc>
+                <a:tc>
+                  <a:txBody>
+                    <a:bodyPr/>
+                    <a:lstStyle/>
+                    <a:p>
+                      <a:pPr algn="ctr"/>
+                      <a:r>
+                        <a:rPr sz="1050" u="sng">
+                          <a:solidFill>
+                            <a:srgbClr val="8F5A44"/>
+                          </a:solidFill>
+                          <a:hlinkClick r:id="rId3"/>
+                        </a:rPr>
+                        <a:t>ver</a:t>
+                      </a:r>
+                    </a:p>
+                  </a:txBody>
+                  <a:tcPr>
+                    <a:solidFill>
+                      <a:srgbClr val="F0E0C6"/>
+                    </a:solidFill>
+                  </a:tcPr>
+                </a:tc>
+              </a:tr>
+              <a:tr h="522514">
+                <a:tc>
+                  <a:txBody>
+                    <a:bodyPr/>
+                    <a:lstStyle/>
+                    <a:p>
+                      <a:r>
+                        <a:rPr sz="1050">
+                          <a:solidFill>
+                            <a:srgbClr val="463A32"/>
+                          </a:solidFill>
+                        </a:rPr>
+                        <a:t>Mitsubishi Montero Sport</a:t>
+                      </a:r>
+                    </a:p>
+                  </a:txBody>
+                  <a:tcPr>
+                    <a:solidFill>
+                      <a:srgbClr val="F0E0C6"/>
+                    </a:solidFill>
+                  </a:tcPr>
+                </a:tc>
+                <a:tc>
+                  <a:txBody>
+                    <a:bodyPr/>
+                    <a:lstStyle/>
+                    <a:p>
+                      <a:r>
+                        <a:rPr sz="1050">
+                          <a:solidFill>
+                            <a:srgbClr val="463A32"/>
+                          </a:solidFill>
+                        </a:rPr>
+                        <a:t>Farallones (local)</a:t>
+                      </a:r>
+                    </a:p>
+                  </a:txBody>
+                  <a:tcPr>
+                    <a:solidFill>
+                      <a:srgbClr val="F0E0C6"/>
+                    </a:solidFill>
+                  </a:tcPr>
+                </a:tc>
+                <a:tc>
+                  <a:txBody>
+                    <a:bodyPr/>
+                    <a:lstStyle/>
+                    <a:p>
+                      <a:r>
+                        <a:rPr sz="1050">
+                          <a:solidFill>
+                            <a:srgbClr val="463A32"/>
+                          </a:solidFill>
+                        </a:rPr>
+                        <a:t>desde $705.000</a:t>
+                      </a:r>
+                    </a:p>
+                  </a:txBody>
+                  <a:tcPr>
+                    <a:solidFill>
+                      <a:srgbClr val="F0E0C6"/>
+                    </a:solidFill>
+                  </a:tcPr>
+                </a:tc>
+                <a:tc>
+                  <a:txBody>
+                    <a:bodyPr/>
+                    <a:lstStyle/>
+                    <a:p>
+                      <a:pPr algn="ctr"/>
+                      <a:r>
+                        <a:rPr sz="1050">
+                          <a:solidFill>
+                            <a:srgbClr val="463A32"/>
+                          </a:solidFill>
+                        </a:rPr>
+                        <a:t>$100.714</a:t>
+                      </a:r>
+                    </a:p>
+                  </a:txBody>
+                  <a:tcPr>
+                    <a:solidFill>
+                      <a:srgbClr val="F0E0C6"/>
+                    </a:solidFill>
+                  </a:tcPr>
+                </a:tc>
+                <a:tc>
+                  <a:txBody>
+                    <a:bodyPr/>
+                    <a:lstStyle/>
+                    <a:p>
+                      <a:r>
+                        <a:rPr sz="1050">
+                          <a:solidFill>
+                            <a:srgbClr val="463A32"/>
+                          </a:solidFill>
+                        </a:rPr>
+                        <a:t>Sí — entrega coordinando el vuelo</a:t>
+                      </a:r>
+                    </a:p>
+                  </a:txBody>
+                  <a:tcPr>
+                    <a:solidFill>
+                      <a:srgbClr val="F0E0C6"/>
+                    </a:solidFill>
+                  </a:tcPr>
+                </a:tc>
+                <a:tc>
+                  <a:txBody>
+                    <a:bodyPr/>
+                    <a:lstStyle/>
+                    <a:p>
+                      <a:pPr algn="ctr"/>
+                      <a:r>
+                        <a:rPr sz="1050" u="sng">
+                          <a:solidFill>
+                            <a:srgbClr val="8F5A44"/>
+                          </a:solidFill>
+                          <a:hlinkClick r:id="rId3"/>
+                        </a:rPr>
+                        <a:t>ver</a:t>
+                      </a:r>
+                    </a:p>
+                  </a:txBody>
+                  <a:tcPr>
+                    <a:solidFill>
+                      <a:srgbClr val="F0E0C6"/>
+                    </a:solidFill>
+                  </a:tcPr>
+                </a:tc>
+              </a:tr>
+              <a:tr h="522514">
+                <a:tc>
+                  <a:txBody>
+                    <a:bodyPr/>
+                    <a:lstStyle/>
+                    <a:p>
+                      <a:r>
+                        <a:rPr sz="1050">
+                          <a:solidFill>
+                            <a:srgbClr val="463A32"/>
+                          </a:solidFill>
+                        </a:rPr>
+                        <a:t>7 puestos (varios modelos)</a:t>
+                      </a:r>
+                    </a:p>
+                  </a:txBody>
+                  <a:tcPr>
+                    <a:solidFill>
+                      <a:srgbClr val="F0E0C6"/>
+                    </a:solidFill>
+                  </a:tcPr>
+                </a:tc>
+                <a:tc>
+                  <a:txBody>
+                    <a:bodyPr/>
+                    <a:lstStyle/>
+                    <a:p>
+                      <a:r>
+                        <a:rPr sz="1050">
+                          <a:solidFill>
+                            <a:srgbClr val="463A32"/>
+                          </a:solidFill>
+                        </a:rPr>
+                        <a:t>WayCarCali (local)</a:t>
+                      </a:r>
+                    </a:p>
+                  </a:txBody>
+                  <a:tcPr>
+                    <a:solidFill>
+                      <a:srgbClr val="F0E0C6"/>
+                    </a:solidFill>
+                  </a:tcPr>
+                </a:tc>
+                <a:tc>
+                  <a:txBody>
+                    <a:bodyPr/>
+                    <a:lstStyle/>
+                    <a:p>
+                      <a:r>
+                        <a:rPr sz="1050">
+                          <a:solidFill>
+                            <a:srgbClr val="463A32"/>
+                          </a:solidFill>
+                        </a:rPr>
+                        <a:t>desde $360.000</a:t>
+                      </a:r>
+                    </a:p>
+                  </a:txBody>
+                  <a:tcPr>
+                    <a:solidFill>
+                      <a:srgbClr val="F0E0C6"/>
+                    </a:solidFill>
+                  </a:tcPr>
+                </a:tc>
+                <a:tc>
+                  <a:txBody>
+                    <a:bodyPr/>
+                    <a:lstStyle/>
+                    <a:p>
+                      <a:pPr algn="ctr"/>
+                      <a:r>
+                        <a:rPr sz="1050">
+                          <a:solidFill>
+                            <a:srgbClr val="463A32"/>
+                          </a:solidFill>
+                        </a:rPr>
+                        <a:t>$51.429</a:t>
+                      </a:r>
+                    </a:p>
+                  </a:txBody>
+                  <a:tcPr>
+                    <a:solidFill>
+                      <a:srgbClr val="F0E0C6"/>
+                    </a:solidFill>
+                  </a:tcPr>
+                </a:tc>
+                <a:tc>
+                  <a:txBody>
+                    <a:bodyPr/>
+                    <a:lstStyle/>
+                    <a:p>
+                      <a:r>
+                        <a:rPr sz="1050">
+                          <a:solidFill>
+                            <a:srgbClr val="463A32"/>
+                          </a:solidFill>
+                        </a:rPr>
+                        <a:t>Sí — domicilio gratis al aeropuerto (3+ días)</a:t>
+                      </a:r>
+                    </a:p>
+                  </a:txBody>
+                  <a:tcPr>
+                    <a:solidFill>
+                      <a:srgbClr val="F0E0C6"/>
+                    </a:solidFill>
+                  </a:tcPr>
+                </a:tc>
+                <a:tc>
+                  <a:txBody>
+                    <a:bodyPr/>
+                    <a:lstStyle/>
+                    <a:p>
+                      <a:pPr algn="ctr"/>
+                      <a:r>
+                        <a:rPr sz="1050" u="sng">
+                          <a:solidFill>
+                            <a:srgbClr val="8F5A44"/>
+                          </a:solidFill>
+                          <a:hlinkClick r:id="rId4"/>
+                        </a:rPr>
+                        <a:t>ver</a:t>
+                      </a:r>
+                    </a:p>
+                  </a:txBody>
+                  <a:tcPr>
+                    <a:solidFill>
+                      <a:srgbClr val="F0E0C6"/>
+                    </a:solidFill>
+                  </a:tcPr>
+                </a:tc>
+              </a:tr>
+              <a:tr h="522514">
+                <a:tc>
+                  <a:txBody>
+                    <a:bodyPr/>
+                    <a:lstStyle/>
+                    <a:p>
+                      <a:r>
+                        <a:rPr sz="1050">
+                          <a:solidFill>
+                            <a:srgbClr val="463A32"/>
+                          </a:solidFill>
+                        </a:rPr>
+                        <a:t>Nissan X-Trail</a:t>
+                      </a:r>
+                    </a:p>
+                  </a:txBody>
+                  <a:tcPr>
+                    <a:solidFill>
+                      <a:srgbClr val="EFE6DA"/>
+                    </a:solidFill>
+                  </a:tcPr>
+                </a:tc>
+                <a:tc>
+                  <a:txBody>
+                    <a:bodyPr/>
+                    <a:lstStyle/>
+                    <a:p>
+                      <a:r>
+                        <a:rPr sz="1050">
+                          <a:solidFill>
+                            <a:srgbClr val="463A32"/>
+                          </a:solidFill>
+                        </a:rPr>
+                        <a:t>Kayak · EconomyBookings</a:t>
+                      </a:r>
+                    </a:p>
+                  </a:txBody>
+                  <a:tcPr>
+                    <a:solidFill>
+                      <a:srgbClr val="EFE6DA"/>
+                    </a:solidFill>
+                  </a:tcPr>
+                </a:tc>
+                <a:tc>
+                  <a:txBody>
+                    <a:bodyPr/>
+                    <a:lstStyle/>
+                    <a:p>
+                      <a:r>
+                        <a:rPr sz="1050">
+                          <a:solidFill>
+                            <a:srgbClr val="463A32"/>
+                          </a:solidFill>
+                        </a:rPr>
+                        <a:t>$1.033.028</a:t>
+                      </a:r>
+                    </a:p>
+                  </a:txBody>
+                  <a:tcPr>
+                    <a:solidFill>
+                      <a:srgbClr val="EFE6DA"/>
+                    </a:solidFill>
+                  </a:tcPr>
+                </a:tc>
+                <a:tc>
+                  <a:txBody>
+                    <a:bodyPr/>
+                    <a:lstStyle/>
+                    <a:p>
+                      <a:pPr algn="ctr"/>
+                      <a:r>
+                        <a:rPr sz="1050">
+                          <a:solidFill>
+                            <a:srgbClr val="463A32"/>
+                          </a:solidFill>
+                        </a:rPr>
+                        <a:t>$147.575</a:t>
+                      </a:r>
+                    </a:p>
+                  </a:txBody>
+                  <a:tcPr>
+                    <a:solidFill>
+                      <a:srgbClr val="EFE6DA"/>
+                    </a:solidFill>
+                  </a:tcPr>
+                </a:tc>
+                <a:tc>
+                  <a:txBody>
+                    <a:bodyPr/>
+                    <a:lstStyle/>
+                    <a:p>
+                      <a:r>
+                        <a:rPr sz="1050">
+                          <a:solidFill>
+                            <a:srgbClr val="463A32"/>
+                          </a:solidFill>
+                        </a:rPr>
+                        <a:t>Mostrador: cierra ~10 pm</a:t>
+                      </a:r>
+                    </a:p>
+                  </a:txBody>
+                  <a:tcPr>
+                    <a:solidFill>
+                      <a:srgbClr val="EFE6DA"/>
+                    </a:solidFill>
+                  </a:tcPr>
+                </a:tc>
+                <a:tc>
+                  <a:txBody>
+                    <a:bodyPr/>
+                    <a:lstStyle/>
+                    <a:p>
+                      <a:pPr algn="ctr"/>
+                      <a:r>
+                        <a:rPr sz="1050" u="sng">
+                          <a:solidFill>
+                            <a:srgbClr val="8F5A44"/>
+                          </a:solidFill>
+                          <a:hlinkClick r:id="rId5"/>
+                        </a:rPr>
+                        <a:t>ver</a:t>
+                      </a:r>
+                    </a:p>
+                  </a:txBody>
+                  <a:tcPr>
+                    <a:solidFill>
+                      <a:srgbClr val="EFE6DA"/>
+                    </a:solidFill>
+                  </a:tcPr>
+                </a:tc>
+              </a:tr>
+              <a:tr h="522516">
+                <a:tc>
+                  <a:txBody>
+                    <a:bodyPr/>
+                    <a:lstStyle/>
+                    <a:p>
+                      <a:r>
+                        <a:rPr sz="1050">
+                          <a:solidFill>
+                            <a:srgbClr val="463A32"/>
+                          </a:solidFill>
+                        </a:rPr>
+                        <a:t>SUV mediano híbrido</a:t>
+                      </a:r>
+                    </a:p>
+                  </a:txBody>
+                  <a:tcPr>
+                    <a:solidFill>
+                      <a:srgbClr val="EFE6DA"/>
+                    </a:solidFill>
+                  </a:tcPr>
+                </a:tc>
+                <a:tc>
+                  <a:txBody>
+                    <a:bodyPr/>
+                    <a:lstStyle/>
+                    <a:p>
+                      <a:r>
+                        <a:rPr sz="1050">
+                          <a:solidFill>
+                            <a:srgbClr val="463A32"/>
+                          </a:solidFill>
+                        </a:rPr>
+                        <a:t>Kayak · Alkilautos</a:t>
+                      </a:r>
+                    </a:p>
+                  </a:txBody>
+                  <a:tcPr>
+                    <a:solidFill>
+                      <a:srgbClr val="EFE6DA"/>
+                    </a:solidFill>
+                  </a:tcPr>
+                </a:tc>
+                <a:tc>
+                  <a:txBody>
+                    <a:bodyPr/>
+                    <a:lstStyle/>
+                    <a:p>
+                      <a:r>
+                        <a:rPr sz="1050">
+                          <a:solidFill>
+                            <a:srgbClr val="463A32"/>
+                          </a:solidFill>
+                        </a:rPr>
+                        <a:t>$1.847.639</a:t>
+                      </a:r>
+                    </a:p>
+                  </a:txBody>
+                  <a:tcPr>
+                    <a:solidFill>
+                      <a:srgbClr val="EFE6DA"/>
+                    </a:solidFill>
+                  </a:tcPr>
+                </a:tc>
+                <a:tc>
+                  <a:txBody>
+                    <a:bodyPr/>
+                    <a:lstStyle/>
+                    <a:p>
+                      <a:pPr algn="ctr"/>
+                      <a:r>
+                        <a:rPr sz="1050">
+                          <a:solidFill>
+                            <a:srgbClr val="463A32"/>
+                          </a:solidFill>
+                        </a:rPr>
+                        <a:t>$263.948</a:t>
+                      </a:r>
+                    </a:p>
+                  </a:txBody>
+                  <a:tcPr>
+                    <a:solidFill>
+                      <a:srgbClr val="EFE6DA"/>
+                    </a:solidFill>
+                  </a:tcPr>
+                </a:tc>
+                <a:tc>
+                  <a:txBody>
+                    <a:bodyPr/>
+                    <a:lstStyle/>
+                    <a:p>
+                      <a:r>
+                        <a:rPr sz="1050">
+                          <a:solidFill>
+                            <a:srgbClr val="463A32"/>
+                          </a:solidFill>
+                        </a:rPr>
+                        <a:t>Mostrador: cierra ~10 pm</a:t>
+                      </a:r>
+                    </a:p>
+                  </a:txBody>
+                  <a:tcPr>
+                    <a:solidFill>
+                      <a:srgbClr val="EFE6DA"/>
+                    </a:solidFill>
+                  </a:tcPr>
+                </a:tc>
+                <a:tc>
+                  <a:txBody>
+                    <a:bodyPr/>
+                    <a:lstStyle/>
+                    <a:p>
+                      <a:pPr algn="ctr"/>
+                      <a:r>
+                        <a:rPr sz="1050" u="sng">
+                          <a:solidFill>
+                            <a:srgbClr val="8F5A44"/>
+                          </a:solidFill>
+                          <a:hlinkClick r:id="rId5"/>
+                        </a:rPr>
+                        <a:t>ver</a:t>
+                      </a:r>
+                    </a:p>
+                  </a:txBody>
+                  <a:tcPr>
+                    <a:solidFill>
+                      <a:srgbClr val="EFE6DA"/>
+                    </a:solidFill>
+                  </a:tcPr>
+                </a:tc>
+              </a:tr>
+            </a:tbl>
+          </a:graphicData>
+        </a:graphic>
+      </p:graphicFrame>
+      <p:sp>
+        <p:nvSpPr>
+          <p:cNvPr id="6" name="TextBox 5"/>
+          <p:cNvSpPr txBox="1"/>
+          <p:nvPr/>
+        </p:nvSpPr>
+        <p:spPr>
+          <a:xfrm>
+            <a:off x="457200" y="5577840"/>
+            <a:ext cx="11338560" cy="1097280"/>
+          </a:xfrm>
+          <a:prstGeom prst="rect">
+            <a:avLst/>
+          </a:prstGeom>
+          <a:noFill/>
+        </p:spPr>
+        <p:txBody>
+          <a:bodyPr wrap="square" anchor="t">
+            <a:spAutoFit/>
+          </a:bodyPr>
+          <a:lstStyle/>
+          <a:p>
+            <a:pPr algn="l"/>
+            <a:r>
+              <a:rPr sz="1150" b="0">
+                <a:solidFill>
+                  <a:srgbClr val="8F5A44"/>
+                </a:solidFill>
+              </a:rPr>
+              <a:t>Todos los precios son por los 3 días, solo el alquiler (sin gasolina ni parqueo). Las tarifas locales 'desde' se calculan sobre la tarifa base/día × 3; en alquiler corto el total real suele ser mayor (la Captiva, confirmada, cuesta ~$1.200.000) — pidan el exacto por WhatsApp. Lo clave sigue siendo el horario: las locales entregan coordinando el vuelo; los mostradores cierran ~10 pm.</a:t>
+            </a:r>
+          </a:p>
+        </p:txBody>
+      </p:sp>
+    </p:spTree>
+  </p:cSld>
+  <p:clrMapOvr>
+    <a:masterClrMapping/>
+  </p:clrMapOvr>
+</p:sld>
+</file>
+
+<file path=ppt/slides/slide12.xml><?xml version="1.0" encoding="utf-8"?>
+<p:sld xmlns:a="http://schemas.openxmlformats.org/drawingml/2006/main" xmlns:p="http://schemas.openxmlformats.org/presentationml/2006/main" xmlns:r="http://schemas.openxmlformats.org/officeDocument/2006/relationships">
+  <p:cSld>
+    <p:bg>
+      <p:bgPr>
+        <a:solidFill>
+          <a:srgbClr val="FCF5EC"/>
+        </a:solidFill>
+        <a:effectLst/>
+      </p:bgPr>
+    </p:bg>
+    <p:spTree>
+      <p:nvGrpSpPr>
+        <p:cNvPr id="1" name=""/>
+        <p:cNvGrpSpPr/>
+        <p:nvPr/>
+      </p:nvGrpSpPr>
+      <p:grpSpPr/>
+      <p:sp>
+        <p:nvSpPr>
           <p:cNvPr id="2" name="TextBox 1"/>
           <p:cNvSpPr txBox="1"/>
           <p:nvPr/>
@@ -5293,7 +6172,7 @@
 </p:sld>
 </file>
 
-<file path=ppt/slides/slide12.xml><?xml version="1.0" encoding="utf-8"?>
+<file path=ppt/slides/slide13.xml><?xml version="1.0" encoding="utf-8"?>
 <p:sld xmlns:a="http://schemas.openxmlformats.org/drawingml/2006/main" xmlns:p="http://schemas.openxmlformats.org/presentationml/2006/main" xmlns:r="http://schemas.openxmlformats.org/officeDocument/2006/relationships">
   <p:cSld>
     <p:bg>
@@ -10124,745 +11003,143 @@
                   <a:srgbClr val="FFFFFF"/>
                 </a:solidFill>
               </a:rPr>
-              <a:t>🛏️   Airbnb — casas enteras (baños del grupo)</a:t>
-            </a:r>
-          </a:p>
-        </p:txBody>
-      </p:sp>
-      <p:sp>
-        <p:nvSpPr>
-          <p:cNvPr id="4" name="TextBox 3"/>
-          <p:cNvSpPr txBox="1"/>
-          <p:nvPr/>
-        </p:nvSpPr>
-        <p:spPr>
-          <a:xfrm>
-            <a:off x="548640" y="1097280"/>
-            <a:ext cx="11064240" cy="548640"/>
-          </a:xfrm>
-          <a:prstGeom prst="rect">
-            <a:avLst/>
-          </a:prstGeom>
-          <a:noFill/>
-        </p:spPr>
-        <p:txBody>
-          <a:bodyPr wrap="square" anchor="t">
-            <a:spAutoFit/>
-          </a:bodyPr>
-          <a:lstStyle/>
-          <a:p>
-            <a:pPr algn="l"/>
-            <a:r>
-              <a:rPr sz="1400" b="0">
-                <a:solidFill>
-                  <a:srgbClr val="463A32"/>
-                </a:solidFill>
-              </a:rPr>
-              <a:t>Alojamiento entero: ningún baño se comparte con extraños. Casa entera recomendada + carro local ≈ $278.571 por persona (en meta). Barrido real, 7 personas.</a:t>
-            </a:r>
+              <a:t>🛏️   Airbnb (occidente) — ranking, mismo puntaje</a:t>
+            </a:r>
+          </a:p>
+        </p:txBody>
+      </p:sp>
+      <p:sp>
+        <p:nvSpPr>
+          <p:cNvPr id="4" name="Rounded Rectangle 3"/>
+          <p:cNvSpPr/>
+          <p:nvPr/>
+        </p:nvSpPr>
+        <p:spPr>
+          <a:xfrm>
+            <a:off x="457200" y="1325880"/>
+            <a:ext cx="7589520" cy="4937760"/>
+          </a:xfrm>
+          <a:prstGeom prst="roundRect">
+            <a:avLst>
+              <a:gd name="adj" fmla="val 5000"/>
+            </a:avLst>
+          </a:prstGeom>
+          <a:solidFill>
+            <a:srgbClr val="FFFFFF"/>
+          </a:solidFill>
+          <a:ln>
+            <a:noFill/>
+          </a:ln>
+          <a:effectLst>
+            <a:outerShdw blurRad="95000" dist="40000" dir="5400000" rotWithShape="0">
+              <a:srgbClr val="6E5B4E">
+                <a:alpha val="32000"/>
+              </a:srgbClr>
+            </a:outerShdw>
+          </a:effectLst>
+        </p:spPr>
+        <p:style>
+          <a:lnRef idx="1">
+            <a:schemeClr val="accent1"/>
+          </a:lnRef>
+          <a:fillRef idx="3">
+            <a:schemeClr val="accent1"/>
+          </a:fillRef>
+          <a:effectRef idx="2">
+            <a:schemeClr val="accent1"/>
+          </a:effectRef>
+          <a:fontRef idx="minor">
+            <a:schemeClr val="lt1"/>
+          </a:fontRef>
+        </p:style>
+        <p:txBody>
+          <a:bodyPr rtlCol="0" anchor="ctr"/>
+          <a:lstStyle/>
+          <a:p>
+            <a:pPr algn="ctr"/>
           </a:p>
         </p:txBody>
       </p:sp>
       <p:graphicFrame>
         <p:nvGraphicFramePr>
-          <p:cNvPr id="5" name="Table 4"/>
+          <p:cNvPr id="5" name="Chart 4"/>
           <p:cNvGraphicFramePr>
             <a:graphicFrameLocks noGrp="1"/>
           </p:cNvGraphicFramePr>
           <p:nvPr/>
         </p:nvGraphicFramePr>
         <p:xfrm>
-          <a:off x="457200" y="1783080"/>
-          <a:ext cx="11274552" cy="3291840"/>
+          <a:off x="685800" y="1463040"/>
+          <a:ext cx="7223760" cy="4663440"/>
         </p:xfrm>
         <a:graphic>
-          <a:graphicData uri="http://schemas.openxmlformats.org/drawingml/2006/table">
-            <a:tbl>
-              <a:tblPr firstRow="1" bandRow="1">
-                <a:tableStyleId>{5C22544A-7EE6-4342-B048-85BDC9FD1C3A}</a:tableStyleId>
-              </a:tblPr>
-              <a:tblGrid>
-                <a:gridCol w="4206240"/>
-                <a:gridCol w="1828800"/>
-                <a:gridCol w="1097280"/>
-                <a:gridCol w="1280160"/>
-                <a:gridCol w="2130552"/>
-                <a:gridCol w="731520"/>
-              </a:tblGrid>
-              <a:tr h="658368">
-                <a:tc>
-                  <a:txBody>
-                    <a:bodyPr/>
-                    <a:lstStyle/>
-                    <a:p>
-                      <a:r>
-                        <a:rPr b="1" sz="1200">
-                          <a:solidFill>
-                            <a:srgbClr val="FFFFFF"/>
-                          </a:solidFill>
-                        </a:rPr>
-                        <a:t>Casa / apto entero</a:t>
-                      </a:r>
-                    </a:p>
-                  </a:txBody>
-                  <a:tcPr>
-                    <a:solidFill>
-                      <a:srgbClr val="B5765C"/>
-                    </a:solidFill>
-                  </a:tcPr>
-                </a:tc>
-                <a:tc>
-                  <a:txBody>
-                    <a:bodyPr/>
-                    <a:lstStyle/>
-                    <a:p>
-                      <a:r>
-                        <a:rPr b="1" sz="1200">
-                          <a:solidFill>
-                            <a:srgbClr val="FFFFFF"/>
-                          </a:solidFill>
-                        </a:rPr>
-                        <a:t>Zona</a:t>
-                      </a:r>
-                    </a:p>
-                  </a:txBody>
-                  <a:tcPr>
-                    <a:solidFill>
-                      <a:srgbClr val="B5765C"/>
-                    </a:solidFill>
-                  </a:tcPr>
-                </a:tc>
-                <a:tc>
-                  <a:txBody>
-                    <a:bodyPr/>
-                    <a:lstStyle/>
-                    <a:p>
-                      <a:r>
-                        <a:rPr b="1" sz="1200">
-                          <a:solidFill>
-                            <a:srgbClr val="FFFFFF"/>
-                          </a:solidFill>
-                        </a:rPr>
-                        <a:t>Cabe</a:t>
-                      </a:r>
-                    </a:p>
-                  </a:txBody>
-                  <a:tcPr>
-                    <a:solidFill>
-                      <a:srgbClr val="B5765C"/>
-                    </a:solidFill>
-                  </a:tcPr>
-                </a:tc>
-                <a:tc>
-                  <a:txBody>
-                    <a:bodyPr/>
-                    <a:lstStyle/>
-                    <a:p>
-                      <a:r>
-                        <a:rPr b="1" sz="1200">
-                          <a:solidFill>
-                            <a:srgbClr val="FFFFFF"/>
-                          </a:solidFill>
-                        </a:rPr>
-                        <a:t>Baños</a:t>
-                      </a:r>
-                    </a:p>
-                  </a:txBody>
-                  <a:tcPr>
-                    <a:solidFill>
-                      <a:srgbClr val="B5765C"/>
-                    </a:solidFill>
-                  </a:tcPr>
-                </a:tc>
-                <a:tc>
-                  <a:txBody>
-                    <a:bodyPr/>
-                    <a:lstStyle/>
-                    <a:p>
-                      <a:r>
-                        <a:rPr b="1" sz="1200">
-                          <a:solidFill>
-                            <a:srgbClr val="FFFFFF"/>
-                          </a:solidFill>
-                        </a:rPr>
-                        <a:t>Por persona (3n)</a:t>
-                      </a:r>
-                    </a:p>
-                  </a:txBody>
-                  <a:tcPr>
-                    <a:solidFill>
-                      <a:srgbClr val="B5765C"/>
-                    </a:solidFill>
-                  </a:tcPr>
-                </a:tc>
-                <a:tc>
-                  <a:txBody>
-                    <a:bodyPr/>
-                    <a:lstStyle/>
-                    <a:p>
-                      <a:r>
-                        <a:rPr b="1" sz="1200">
-                          <a:solidFill>
-                            <a:srgbClr val="FFFFFF"/>
-                          </a:solidFill>
-                        </a:rPr>
-                        <a:t>Ver</a:t>
-                      </a:r>
-                    </a:p>
-                  </a:txBody>
-                  <a:tcPr>
-                    <a:solidFill>
-                      <a:srgbClr val="B5765C"/>
-                    </a:solidFill>
-                  </a:tcPr>
-                </a:tc>
-              </a:tr>
-              <a:tr h="658368">
-                <a:tc>
-                  <a:txBody>
-                    <a:bodyPr/>
-                    <a:lstStyle/>
-                    <a:p>
-                      <a:r>
-                        <a:rPr sz="1100">
-                          <a:solidFill>
-                            <a:srgbClr val="463A32"/>
-                          </a:solidFill>
-                        </a:rPr>
-                        <a:t>Casa de 4 Habitaciones – Terraza y Aire/C ★</a:t>
-                      </a:r>
-                    </a:p>
-                  </a:txBody>
-                  <a:tcPr>
-                    <a:solidFill>
-                      <a:srgbClr val="F0E0C6"/>
-                    </a:solidFill>
-                  </a:tcPr>
-                </a:tc>
-                <a:tc>
-                  <a:txBody>
-                    <a:bodyPr/>
-                    <a:lstStyle/>
-                    <a:p>
-                      <a:r>
-                        <a:rPr sz="1100">
-                          <a:solidFill>
-                            <a:srgbClr val="463A32"/>
-                          </a:solidFill>
-                        </a:rPr>
-                        <a:t>San Antonio</a:t>
-                      </a:r>
-                    </a:p>
-                  </a:txBody>
-                  <a:tcPr>
-                    <a:solidFill>
-                      <a:srgbClr val="F0E0C6"/>
-                    </a:solidFill>
-                  </a:tcPr>
-                </a:tc>
-                <a:tc>
-                  <a:txBody>
-                    <a:bodyPr/>
-                    <a:lstStyle/>
-                    <a:p>
-                      <a:pPr algn="ctr"/>
-                      <a:r>
-                        <a:rPr sz="1100">
-                          <a:solidFill>
-                            <a:srgbClr val="463A32"/>
-                          </a:solidFill>
-                        </a:rPr>
-                        <a:t>9</a:t>
-                      </a:r>
-                    </a:p>
-                  </a:txBody>
-                  <a:tcPr>
-                    <a:solidFill>
-                      <a:srgbClr val="F0E0C6"/>
-                    </a:solidFill>
-                  </a:tcPr>
-                </a:tc>
-                <a:tc>
-                  <a:txBody>
-                    <a:bodyPr/>
-                    <a:lstStyle/>
-                    <a:p>
-                      <a:pPr algn="ctr"/>
-                      <a:r>
-                        <a:rPr sz="1100">
-                          <a:solidFill>
-                            <a:srgbClr val="463A32"/>
-                          </a:solidFill>
-                        </a:rPr>
-                        <a:t>1,5</a:t>
-                      </a:r>
-                    </a:p>
-                  </a:txBody>
-                  <a:tcPr>
-                    <a:solidFill>
-                      <a:srgbClr val="F0E0C6"/>
-                    </a:solidFill>
-                  </a:tcPr>
-                </a:tc>
-                <a:tc>
-                  <a:txBody>
-                    <a:bodyPr/>
-                    <a:lstStyle/>
-                    <a:p>
-                      <a:pPr algn="ctr"/>
-                      <a:r>
-                        <a:rPr sz="1100">
-                          <a:solidFill>
-                            <a:srgbClr val="463A32"/>
-                          </a:solidFill>
-                        </a:rPr>
-                        <a:t>$78.571</a:t>
-                      </a:r>
-                    </a:p>
-                  </a:txBody>
-                  <a:tcPr>
-                    <a:solidFill>
-                      <a:srgbClr val="F0E0C6"/>
-                    </a:solidFill>
-                  </a:tcPr>
-                </a:tc>
-                <a:tc>
-                  <a:txBody>
-                    <a:bodyPr/>
-                    <a:lstStyle/>
-                    <a:p>
-                      <a:pPr algn="ctr"/>
-                      <a:r>
-                        <a:rPr sz="1100" u="sng">
-                          <a:solidFill>
-                            <a:srgbClr val="8F5A44"/>
-                          </a:solidFill>
-                          <a:hlinkClick r:id="rId2"/>
-                        </a:rPr>
-                        <a:t>ver</a:t>
-                      </a:r>
-                    </a:p>
-                  </a:txBody>
-                  <a:tcPr>
-                    <a:solidFill>
-                      <a:srgbClr val="F0E0C6"/>
-                    </a:solidFill>
-                  </a:tcPr>
-                </a:tc>
-              </a:tr>
-              <a:tr h="658368">
-                <a:tc>
-                  <a:txBody>
-                    <a:bodyPr/>
-                    <a:lstStyle/>
-                    <a:p>
-                      <a:r>
-                        <a:rPr sz="1100">
-                          <a:solidFill>
-                            <a:srgbClr val="463A32"/>
-                          </a:solidFill>
-                        </a:rPr>
-                        <a:t>Casa amoblada para 7 personas con garaje</a:t>
-                      </a:r>
-                    </a:p>
-                  </a:txBody>
-                  <a:tcPr>
-                    <a:solidFill>
-                      <a:srgbClr val="F4E8DA"/>
-                    </a:solidFill>
-                  </a:tcPr>
-                </a:tc>
-                <a:tc>
-                  <a:txBody>
-                    <a:bodyPr/>
-                    <a:lstStyle/>
-                    <a:p>
-                      <a:r>
-                        <a:rPr sz="1100">
-                          <a:solidFill>
-                            <a:srgbClr val="463A32"/>
-                          </a:solidFill>
-                        </a:rPr>
-                        <a:t>San Antonio</a:t>
-                      </a:r>
-                    </a:p>
-                  </a:txBody>
-                  <a:tcPr>
-                    <a:solidFill>
-                      <a:srgbClr val="F4E8DA"/>
-                    </a:solidFill>
-                  </a:tcPr>
-                </a:tc>
-                <a:tc>
-                  <a:txBody>
-                    <a:bodyPr/>
-                    <a:lstStyle/>
-                    <a:p>
-                      <a:pPr algn="ctr"/>
-                      <a:r>
-                        <a:rPr sz="1100">
-                          <a:solidFill>
-                            <a:srgbClr val="463A32"/>
-                          </a:solidFill>
-                        </a:rPr>
-                        <a:t>7</a:t>
-                      </a:r>
-                    </a:p>
-                  </a:txBody>
-                  <a:tcPr>
-                    <a:solidFill>
-                      <a:srgbClr val="F4E8DA"/>
-                    </a:solidFill>
-                  </a:tcPr>
-                </a:tc>
-                <a:tc>
-                  <a:txBody>
-                    <a:bodyPr/>
-                    <a:lstStyle/>
-                    <a:p>
-                      <a:pPr algn="ctr"/>
-                      <a:r>
-                        <a:rPr sz="1100">
-                          <a:solidFill>
-                            <a:srgbClr val="463A32"/>
-                          </a:solidFill>
-                        </a:rPr>
-                        <a:t>2,5</a:t>
-                      </a:r>
-                    </a:p>
-                  </a:txBody>
-                  <a:tcPr>
-                    <a:solidFill>
-                      <a:srgbClr val="F4E8DA"/>
-                    </a:solidFill>
-                  </a:tcPr>
-                </a:tc>
-                <a:tc>
-                  <a:txBody>
-                    <a:bodyPr/>
-                    <a:lstStyle/>
-                    <a:p>
-                      <a:pPr algn="ctr"/>
-                      <a:r>
-                        <a:rPr sz="1100">
-                          <a:solidFill>
-                            <a:srgbClr val="463A32"/>
-                          </a:solidFill>
-                        </a:rPr>
-                        <a:t>$90.714</a:t>
-                      </a:r>
-                    </a:p>
-                  </a:txBody>
-                  <a:tcPr>
-                    <a:solidFill>
-                      <a:srgbClr val="F4E8DA"/>
-                    </a:solidFill>
-                  </a:tcPr>
-                </a:tc>
-                <a:tc>
-                  <a:txBody>
-                    <a:bodyPr/>
-                    <a:lstStyle/>
-                    <a:p>
-                      <a:pPr algn="ctr"/>
-                      <a:r>
-                        <a:rPr sz="1100" u="sng">
-                          <a:solidFill>
-                            <a:srgbClr val="8F5A44"/>
-                          </a:solidFill>
-                          <a:hlinkClick r:id="rId3"/>
-                        </a:rPr>
-                        <a:t>ver</a:t>
-                      </a:r>
-                    </a:p>
-                  </a:txBody>
-                  <a:tcPr>
-                    <a:solidFill>
-                      <a:srgbClr val="F4E8DA"/>
-                    </a:solidFill>
-                  </a:tcPr>
-                </a:tc>
-              </a:tr>
-              <a:tr h="658368">
-                <a:tc>
-                  <a:txBody>
-                    <a:bodyPr/>
-                    <a:lstStyle/>
-                    <a:p>
-                      <a:r>
-                        <a:rPr sz="1100">
-                          <a:solidFill>
-                            <a:srgbClr val="463A32"/>
-                          </a:solidFill>
-                        </a:rPr>
-                        <a:t>Casa para 8 personas</a:t>
-                      </a:r>
-                    </a:p>
-                  </a:txBody>
-                  <a:tcPr>
-                    <a:solidFill>
-                      <a:srgbClr val="FFFFFF"/>
-                    </a:solidFill>
-                  </a:tcPr>
-                </a:tc>
-                <a:tc>
-                  <a:txBody>
-                    <a:bodyPr/>
-                    <a:lstStyle/>
-                    <a:p>
-                      <a:r>
-                        <a:rPr sz="1100">
-                          <a:solidFill>
-                            <a:srgbClr val="463A32"/>
-                          </a:solidFill>
-                        </a:rPr>
-                        <a:t>Granada</a:t>
-                      </a:r>
-                    </a:p>
-                  </a:txBody>
-                  <a:tcPr>
-                    <a:solidFill>
-                      <a:srgbClr val="FFFFFF"/>
-                    </a:solidFill>
-                  </a:tcPr>
-                </a:tc>
-                <a:tc>
-                  <a:txBody>
-                    <a:bodyPr/>
-                    <a:lstStyle/>
-                    <a:p>
-                      <a:pPr algn="ctr"/>
-                      <a:r>
-                        <a:rPr sz="1100">
-                          <a:solidFill>
-                            <a:srgbClr val="463A32"/>
-                          </a:solidFill>
-                        </a:rPr>
-                        <a:t>9</a:t>
-                      </a:r>
-                    </a:p>
-                  </a:txBody>
-                  <a:tcPr>
-                    <a:solidFill>
-                      <a:srgbClr val="FFFFFF"/>
-                    </a:solidFill>
-                  </a:tcPr>
-                </a:tc>
-                <a:tc>
-                  <a:txBody>
-                    <a:bodyPr/>
-                    <a:lstStyle/>
-                    <a:p>
-                      <a:pPr algn="ctr"/>
-                      <a:r>
-                        <a:rPr sz="1100">
-                          <a:solidFill>
-                            <a:srgbClr val="463A32"/>
-                          </a:solidFill>
-                        </a:rPr>
-                        <a:t>2</a:t>
-                      </a:r>
-                    </a:p>
-                  </a:txBody>
-                  <a:tcPr>
-                    <a:solidFill>
-                      <a:srgbClr val="FFFFFF"/>
-                    </a:solidFill>
-                  </a:tcPr>
-                </a:tc>
-                <a:tc>
-                  <a:txBody>
-                    <a:bodyPr/>
-                    <a:lstStyle/>
-                    <a:p>
-                      <a:pPr algn="ctr"/>
-                      <a:r>
-                        <a:rPr sz="1100">
-                          <a:solidFill>
-                            <a:srgbClr val="463A32"/>
-                          </a:solidFill>
-                        </a:rPr>
-                        <a:t>$124.151</a:t>
-                      </a:r>
-                    </a:p>
-                  </a:txBody>
-                  <a:tcPr>
-                    <a:solidFill>
-                      <a:srgbClr val="FFFFFF"/>
-                    </a:solidFill>
-                  </a:tcPr>
-                </a:tc>
-                <a:tc>
-                  <a:txBody>
-                    <a:bodyPr/>
-                    <a:lstStyle/>
-                    <a:p>
-                      <a:pPr algn="ctr"/>
-                      <a:r>
-                        <a:rPr sz="1100" u="sng">
-                          <a:solidFill>
-                            <a:srgbClr val="8F5A44"/>
-                          </a:solidFill>
-                          <a:hlinkClick r:id="rId4"/>
-                        </a:rPr>
-                        <a:t>ver</a:t>
-                      </a:r>
-                    </a:p>
-                  </a:txBody>
-                  <a:tcPr>
-                    <a:solidFill>
-                      <a:srgbClr val="FFFFFF"/>
-                    </a:solidFill>
-                  </a:tcPr>
-                </a:tc>
-              </a:tr>
-              <a:tr h="658368">
-                <a:tc>
-                  <a:txBody>
-                    <a:bodyPr/>
-                    <a:lstStyle/>
-                    <a:p>
-                      <a:r>
-                        <a:rPr sz="1100">
-                          <a:solidFill>
-                            <a:srgbClr val="463A32"/>
-                          </a:solidFill>
-                        </a:rPr>
-                        <a:t>Casa con piscina privada</a:t>
-                      </a:r>
-                    </a:p>
-                  </a:txBody>
-                  <a:tcPr>
-                    <a:solidFill>
-                      <a:srgbClr val="F4E8DA"/>
-                    </a:solidFill>
-                  </a:tcPr>
-                </a:tc>
-                <a:tc>
-                  <a:txBody>
-                    <a:bodyPr/>
-                    <a:lstStyle/>
-                    <a:p>
-                      <a:r>
-                        <a:rPr sz="1100">
-                          <a:solidFill>
-                            <a:srgbClr val="463A32"/>
-                          </a:solidFill>
-                        </a:rPr>
-                        <a:t>San Antonio</a:t>
-                      </a:r>
-                    </a:p>
-                  </a:txBody>
-                  <a:tcPr>
-                    <a:solidFill>
-                      <a:srgbClr val="F4E8DA"/>
-                    </a:solidFill>
-                  </a:tcPr>
-                </a:tc>
-                <a:tc>
-                  <a:txBody>
-                    <a:bodyPr/>
-                    <a:lstStyle/>
-                    <a:p>
-                      <a:pPr algn="ctr"/>
-                      <a:r>
-                        <a:rPr sz="1100">
-                          <a:solidFill>
-                            <a:srgbClr val="463A32"/>
-                          </a:solidFill>
-                        </a:rPr>
-                        <a:t>8</a:t>
-                      </a:r>
-                    </a:p>
-                  </a:txBody>
-                  <a:tcPr>
-                    <a:solidFill>
-                      <a:srgbClr val="F4E8DA"/>
-                    </a:solidFill>
-                  </a:tcPr>
-                </a:tc>
-                <a:tc>
-                  <a:txBody>
-                    <a:bodyPr/>
-                    <a:lstStyle/>
-                    <a:p>
-                      <a:pPr algn="ctr"/>
-                      <a:r>
-                        <a:rPr sz="1100">
-                          <a:solidFill>
-                            <a:srgbClr val="463A32"/>
-                          </a:solidFill>
-                        </a:rPr>
-                        <a:t>2,5</a:t>
-                      </a:r>
-                    </a:p>
-                  </a:txBody>
-                  <a:tcPr>
-                    <a:solidFill>
-                      <a:srgbClr val="F4E8DA"/>
-                    </a:solidFill>
-                  </a:tcPr>
-                </a:tc>
-                <a:tc>
-                  <a:txBody>
-                    <a:bodyPr/>
-                    <a:lstStyle/>
-                    <a:p>
-                      <a:pPr algn="ctr"/>
-                      <a:r>
-                        <a:rPr sz="1100">
-                          <a:solidFill>
-                            <a:srgbClr val="463A32"/>
-                          </a:solidFill>
-                        </a:rPr>
-                        <a:t>$430.608</a:t>
-                      </a:r>
-                    </a:p>
-                  </a:txBody>
-                  <a:tcPr>
-                    <a:solidFill>
-                      <a:srgbClr val="F4E8DA"/>
-                    </a:solidFill>
-                  </a:tcPr>
-                </a:tc>
-                <a:tc>
-                  <a:txBody>
-                    <a:bodyPr/>
-                    <a:lstStyle/>
-                    <a:p>
-                      <a:pPr algn="ctr"/>
-                      <a:r>
-                        <a:rPr sz="1100" u="sng">
-                          <a:solidFill>
-                            <a:srgbClr val="8F5A44"/>
-                          </a:solidFill>
-                          <a:hlinkClick r:id="rId5"/>
-                        </a:rPr>
-                        <a:t>ver</a:t>
-                      </a:r>
-                    </a:p>
-                  </a:txBody>
-                  <a:tcPr>
-                    <a:solidFill>
-                      <a:srgbClr val="F4E8DA"/>
-                    </a:solidFill>
-                  </a:tcPr>
-                </a:tc>
-              </a:tr>
-            </a:tbl>
+          <a:graphicData uri="http://schemas.openxmlformats.org/drawingml/2006/chart">
+            <c:chart xmlns:c="http://schemas.openxmlformats.org/drawingml/2006/chart" r:id="rId2"/>
           </a:graphicData>
         </a:graphic>
       </p:graphicFrame>
       <p:sp>
         <p:nvSpPr>
-          <p:cNvPr id="6" name="TextBox 5"/>
+          <p:cNvPr id="6" name="Rounded Rectangle 5"/>
+          <p:cNvSpPr/>
+          <p:nvPr/>
+        </p:nvSpPr>
+        <p:spPr>
+          <a:xfrm>
+            <a:off x="8275320" y="1645920"/>
+            <a:ext cx="3520440" cy="3566160"/>
+          </a:xfrm>
+          <a:prstGeom prst="roundRect">
+            <a:avLst>
+              <a:gd name="adj" fmla="val 12000"/>
+            </a:avLst>
+          </a:prstGeom>
+          <a:solidFill>
+            <a:srgbClr val="F0E0C6"/>
+          </a:solidFill>
+          <a:ln>
+            <a:noFill/>
+          </a:ln>
+          <a:effectLst>
+            <a:outerShdw blurRad="95000" dist="40000" dir="5400000" rotWithShape="0">
+              <a:srgbClr val="6E5B4E">
+                <a:alpha val="32000"/>
+              </a:srgbClr>
+            </a:outerShdw>
+          </a:effectLst>
+        </p:spPr>
+        <p:style>
+          <a:lnRef idx="1">
+            <a:schemeClr val="accent1"/>
+          </a:lnRef>
+          <a:fillRef idx="3">
+            <a:schemeClr val="accent1"/>
+          </a:fillRef>
+          <a:effectRef idx="2">
+            <a:schemeClr val="accent1"/>
+          </a:effectRef>
+          <a:fontRef idx="minor">
+            <a:schemeClr val="lt1"/>
+          </a:fontRef>
+        </p:style>
+        <p:txBody>
+          <a:bodyPr rtlCol="0" anchor="ctr"/>
+          <a:lstStyle/>
+          <a:p>
+            <a:pPr algn="ctr"/>
+          </a:p>
+        </p:txBody>
+      </p:sp>
+      <p:sp>
+        <p:nvSpPr>
+          <p:cNvPr id="7" name="TextBox 6"/>
           <p:cNvSpPr txBox="1"/>
           <p:nvPr/>
         </p:nvSpPr>
         <p:spPr>
           <a:xfrm>
-            <a:off x="548640" y="5440680"/>
-            <a:ext cx="11064240" cy="548640"/>
+            <a:off x="8549640" y="1920240"/>
+            <a:ext cx="3017520" cy="3108960"/>
           </a:xfrm>
           <a:prstGeom prst="rect">
             <a:avLst/>
@@ -10870,19 +11147,74 @@
           <a:noFill/>
         </p:spPr>
         <p:txBody>
-          <a:bodyPr wrap="square" anchor="t">
+          <a:bodyPr wrap="square" anchor="ctr">
             <a:spAutoFit/>
           </a:bodyPr>
           <a:lstStyle/>
           <a:p>
-            <a:pPr algn="ctr"/>
+            <a:pPr algn="l"/>
+            <a:r>
+              <a:rPr sz="1700" b="1">
+                <a:solidFill>
+                  <a:srgbClr val="8F5A44"/>
+                </a:solidFill>
+              </a:rPr>
+              <a:t>★ Casa 7p garaje</a:t>
+            </a:r>
+          </a:p>
+          <a:p>
+            <a:pPr algn="l"/>
+            <a:r>
+              <a:rPr sz="1500" b="0">
+                <a:solidFill>
+                  <a:srgbClr val="463A32"/>
+                </a:solidFill>
+              </a:rPr>
+              <a:t>lidera con 94.6/100.</a:t>
+            </a:r>
+          </a:p>
+          <a:p>
+            <a:pPr algn="l"/>
+            <a:r>
+              <a:rPr sz="800" b="0">
+                <a:solidFill>
+                  <a:srgbClr val="463A32"/>
+                </a:solidFill>
+              </a:rPr>
+              <a:t/>
+            </a:r>
+          </a:p>
+          <a:p>
+            <a:pPr algn="l"/>
+            <a:r>
+              <a:rPr sz="1300" b="0">
+                <a:solidFill>
+                  <a:srgbClr val="463A32"/>
+                </a:solidFill>
+              </a:rPr>
+              <a:t>Con carro local ≈ $290.714 pp (en meta). Baños del grupo, cocina y privacidad.</a:t>
+            </a:r>
+          </a:p>
+          <a:p>
+            <a:pPr algn="l"/>
+            <a:r>
+              <a:rPr sz="600" b="0">
+                <a:solidFill>
+                  <a:srgbClr val="463A32"/>
+                </a:solidFill>
+              </a:rPr>
+              <a:t/>
+            </a:r>
+          </a:p>
+          <a:p>
+            <a:pPr algn="l"/>
             <a:r>
               <a:rPr sz="1200" b="0">
                 <a:solidFill>
                   <a:srgbClr val="8A7A6E"/>
                 </a:solidFill>
               </a:rPr>
-              <a:t>No cumplen: «Casa Familiar 5 Hab» (1 baño para 11) y «Apto El Ingenio» (3 camas, lejos de la rumba). Por eso se miran baños y camas, no solo el precio.</a:t>
+              <a:t>Mismo puntaje que los hostales; precio normalizado entre casas.</a:t>
             </a:r>
           </a:p>
         </p:txBody>
@@ -10994,124 +11326,21 @@
                   <a:srgbClr val="FFFFFF"/>
                 </a:solidFill>
               </a:rPr>
-              <a:t>🌙   La llegada es de noche</a:t>
-            </a:r>
-          </a:p>
-        </p:txBody>
-      </p:sp>
-      <p:sp>
-        <p:nvSpPr>
-          <p:cNvPr id="4" name="Rounded Rectangle 3"/>
-          <p:cNvSpPr/>
-          <p:nvPr/>
-        </p:nvSpPr>
-        <p:spPr>
-          <a:xfrm>
-            <a:off x="502920" y="1508760"/>
-            <a:ext cx="3566160" cy="3566160"/>
-          </a:xfrm>
-          <a:prstGeom prst="roundRect">
-            <a:avLst>
-              <a:gd name="adj" fmla="val 12000"/>
-            </a:avLst>
-          </a:prstGeom>
-          <a:solidFill>
-            <a:srgbClr val="FFFFFF"/>
-          </a:solidFill>
-          <a:ln>
-            <a:noFill/>
-          </a:ln>
-          <a:effectLst>
-            <a:outerShdw blurRad="95000" dist="40000" dir="5400000" rotWithShape="0">
-              <a:srgbClr val="6E5B4E">
-                <a:alpha val="32000"/>
-              </a:srgbClr>
-            </a:outerShdw>
-          </a:effectLst>
-        </p:spPr>
-        <p:style>
-          <a:lnRef idx="1">
-            <a:schemeClr val="accent1"/>
-          </a:lnRef>
-          <a:fillRef idx="3">
-            <a:schemeClr val="accent1"/>
-          </a:fillRef>
-          <a:effectRef idx="2">
-            <a:schemeClr val="accent1"/>
-          </a:effectRef>
-          <a:fontRef idx="minor">
-            <a:schemeClr val="lt1"/>
-          </a:fontRef>
-        </p:style>
-        <p:txBody>
-          <a:bodyPr rtlCol="0" anchor="ctr"/>
-          <a:lstStyle/>
-          <a:p>
-            <a:pPr algn="ctr"/>
-          </a:p>
-        </p:txBody>
-      </p:sp>
-      <p:sp>
-        <p:nvSpPr>
-          <p:cNvPr id="5" name="Oval 4"/>
-          <p:cNvSpPr/>
-          <p:nvPr/>
-        </p:nvSpPr>
-        <p:spPr>
-          <a:xfrm>
-            <a:off x="1828800" y="1828800"/>
-            <a:ext cx="914400" cy="914400"/>
-          </a:xfrm>
-          <a:prstGeom prst="ellipse">
-            <a:avLst/>
-          </a:prstGeom>
-          <a:solidFill>
-            <a:srgbClr val="F0E0C6"/>
-          </a:solidFill>
-          <a:ln>
-            <a:noFill/>
-          </a:ln>
-        </p:spPr>
-        <p:style>
-          <a:lnRef idx="1">
-            <a:schemeClr val="accent1"/>
-          </a:lnRef>
-          <a:fillRef idx="3">
-            <a:schemeClr val="accent1"/>
-          </a:fillRef>
-          <a:effectRef idx="2">
-            <a:schemeClr val="accent1"/>
-          </a:effectRef>
-          <a:fontRef idx="minor">
-            <a:schemeClr val="lt1"/>
-          </a:fontRef>
-        </p:style>
-        <p:txBody>
-          <a:bodyPr rtlCol="0" anchor="ctr"/>
-          <a:lstStyle/>
-          <a:p>
-            <a:pPr algn="ctr"/>
-            <a:r>
-              <a:rPr sz="3000">
-                <a:solidFill>
-                  <a:srgbClr val="463A32"/>
-                </a:solidFill>
-              </a:rPr>
-              <a:t>🕘</a:t>
-            </a:r>
-          </a:p>
-        </p:txBody>
-      </p:sp>
-      <p:sp>
-        <p:nvSpPr>
-          <p:cNvPr id="6" name="TextBox 5"/>
+              <a:t>🛏️   Airbnb (occidente) — comparación</a:t>
+            </a:r>
+          </a:p>
+        </p:txBody>
+      </p:sp>
+      <p:sp>
+        <p:nvSpPr>
+          <p:cNvPr id="4" name="TextBox 3"/>
           <p:cNvSpPr txBox="1"/>
           <p:nvPr/>
         </p:nvSpPr>
         <p:spPr>
           <a:xfrm>
-            <a:off x="777240" y="2880360"/>
-            <a:ext cx="3017520" cy="2103120"/>
+            <a:off x="548640" y="1097280"/>
+            <a:ext cx="11064240" cy="502920"/>
           </a:xfrm>
           <a:prstGeom prst="rect">
             <a:avLst/>
@@ -11124,394 +11353,1283 @@
           </a:bodyPr>
           <a:lstStyle/>
           <a:p>
-            <a:pPr algn="ctr"/>
-            <a:r>
-              <a:rPr sz="1800" b="1">
-                <a:solidFill>
-                  <a:srgbClr val="8F5A44"/>
-                </a:solidFill>
-              </a:rPr>
-              <a:t>3 días limpios</a:t>
-            </a:r>
-          </a:p>
-          <a:p>
-            <a:pPr algn="ctr"/>
-            <a:r>
-              <a:rPr sz="600" b="0">
+            <a:pPr algn="l"/>
+            <a:r>
+              <a:rPr sz="1300" b="0">
                 <a:solidFill>
                   <a:srgbClr val="463A32"/>
                 </a:solidFill>
               </a:rPr>
-              <a:t/>
-            </a:r>
-          </a:p>
-          <a:p>
-            <a:pPr algn="ctr"/>
-            <a:r>
-              <a:rPr sz="1350" b="0">
-                <a:solidFill>
-                  <a:srgbClr val="463A32"/>
-                </a:solidFill>
-              </a:rPr>
-              <a:t>Recoger esa noche y devolver ~7 pm del 2: por debajo de las 72 h.</a:t>
-            </a:r>
-          </a:p>
-        </p:txBody>
-      </p:sp>
-      <p:sp>
-        <p:nvSpPr>
-          <p:cNvPr id="7" name="Rounded Rectangle 6"/>
-          <p:cNvSpPr/>
-          <p:nvPr/>
-        </p:nvSpPr>
-        <p:spPr>
-          <a:xfrm>
-            <a:off x="4233672" y="1508760"/>
-            <a:ext cx="3566160" cy="3566160"/>
-          </a:xfrm>
-          <a:prstGeom prst="roundRect">
-            <a:avLst>
-              <a:gd name="adj" fmla="val 12000"/>
-            </a:avLst>
-          </a:prstGeom>
-          <a:solidFill>
-            <a:srgbClr val="FFFFFF"/>
-          </a:solidFill>
-          <a:ln w="25400">
-            <a:solidFill>
-              <a:srgbClr val="D9A75E"/>
-            </a:solidFill>
-          </a:ln>
-          <a:effectLst>
-            <a:outerShdw blurRad="95000" dist="40000" dir="5400000" rotWithShape="0">
-              <a:srgbClr val="6E5B4E">
-                <a:alpha val="32000"/>
-              </a:srgbClr>
-            </a:outerShdw>
-          </a:effectLst>
-        </p:spPr>
-        <p:style>
-          <a:lnRef idx="1">
-            <a:schemeClr val="accent1"/>
-          </a:lnRef>
-          <a:fillRef idx="3">
-            <a:schemeClr val="accent1"/>
-          </a:fillRef>
-          <a:effectRef idx="2">
-            <a:schemeClr val="accent1"/>
-          </a:effectRef>
-          <a:fontRef idx="minor">
-            <a:schemeClr val="lt1"/>
-          </a:fontRef>
-        </p:style>
-        <p:txBody>
-          <a:bodyPr rtlCol="0" anchor="ctr"/>
-          <a:lstStyle/>
-          <a:p>
-            <a:pPr algn="ctr"/>
-          </a:p>
-        </p:txBody>
-      </p:sp>
-      <p:sp>
-        <p:nvSpPr>
-          <p:cNvPr id="8" name="Oval 7"/>
-          <p:cNvSpPr/>
-          <p:nvPr/>
-        </p:nvSpPr>
-        <p:spPr>
-          <a:xfrm>
-            <a:off x="5559552" y="1828800"/>
-            <a:ext cx="914400" cy="914400"/>
-          </a:xfrm>
-          <a:prstGeom prst="ellipse">
-            <a:avLst/>
-          </a:prstGeom>
-          <a:solidFill>
-            <a:srgbClr val="F0E0C6"/>
-          </a:solidFill>
-          <a:ln>
-            <a:noFill/>
-          </a:ln>
-        </p:spPr>
-        <p:style>
-          <a:lnRef idx="1">
-            <a:schemeClr val="accent1"/>
-          </a:lnRef>
-          <a:fillRef idx="3">
-            <a:schemeClr val="accent1"/>
-          </a:fillRef>
-          <a:effectRef idx="2">
-            <a:schemeClr val="accent1"/>
-          </a:effectRef>
-          <a:fontRef idx="minor">
-            <a:schemeClr val="lt1"/>
-          </a:fontRef>
-        </p:style>
-        <p:txBody>
-          <a:bodyPr rtlCol="0" anchor="ctr"/>
-          <a:lstStyle/>
-          <a:p>
-            <a:pPr algn="ctr"/>
-            <a:r>
-              <a:rPr sz="3000">
-                <a:solidFill>
-                  <a:srgbClr val="463A32"/>
-                </a:solidFill>
-              </a:rPr>
-              <a:t>✅</a:t>
-            </a:r>
-          </a:p>
-        </p:txBody>
-      </p:sp>
-      <p:sp>
-        <p:nvSpPr>
-          <p:cNvPr id="9" name="TextBox 8"/>
-          <p:cNvSpPr txBox="1"/>
-          <p:nvPr/>
-        </p:nvSpPr>
-        <p:spPr>
-          <a:xfrm>
-            <a:off x="4507992" y="2880360"/>
-            <a:ext cx="3017520" cy="2103120"/>
-          </a:xfrm>
-          <a:prstGeom prst="rect">
-            <a:avLst/>
-          </a:prstGeom>
-          <a:noFill/>
-        </p:spPr>
-        <p:txBody>
-          <a:bodyPr wrap="square" anchor="t">
-            <a:spAutoFit/>
-          </a:bodyPr>
-          <a:lstStyle/>
-          <a:p>
-            <a:pPr algn="ctr"/>
-            <a:r>
-              <a:rPr sz="1800" b="1">
-                <a:solidFill>
-                  <a:srgbClr val="8F5A44"/>
-                </a:solidFill>
-              </a:rPr>
-              <a:t>Local = cuadra</a:t>
-            </a:r>
-          </a:p>
-          <a:p>
-            <a:pPr algn="ctr"/>
-            <a:r>
-              <a:rPr sz="600" b="0">
-                <a:solidFill>
-                  <a:srgbClr val="463A32"/>
-                </a:solidFill>
-              </a:rPr>
-              <a:t/>
-            </a:r>
-          </a:p>
-          <a:p>
-            <a:pPr algn="ctr"/>
-            <a:r>
-              <a:rPr sz="1350" b="0">
-                <a:solidFill>
-                  <a:srgbClr val="463A32"/>
-                </a:solidFill>
-              </a:rPr>
-              <a:t>Farallones / WayCarCali entregan el carro coordinando el vuelo de las 8 pm.</a:t>
-            </a:r>
-          </a:p>
-        </p:txBody>
-      </p:sp>
-      <p:sp>
-        <p:nvSpPr>
-          <p:cNvPr id="10" name="Rounded Rectangle 9"/>
-          <p:cNvSpPr/>
-          <p:nvPr/>
-        </p:nvSpPr>
-        <p:spPr>
-          <a:xfrm>
-            <a:off x="7964424" y="1508760"/>
-            <a:ext cx="3566160" cy="3566160"/>
-          </a:xfrm>
-          <a:prstGeom prst="roundRect">
-            <a:avLst>
-              <a:gd name="adj" fmla="val 12000"/>
-            </a:avLst>
-          </a:prstGeom>
-          <a:solidFill>
-            <a:srgbClr val="FFFFFF"/>
-          </a:solidFill>
-          <a:ln>
-            <a:noFill/>
-          </a:ln>
-          <a:effectLst>
-            <a:outerShdw blurRad="95000" dist="40000" dir="5400000" rotWithShape="0">
-              <a:srgbClr val="6E5B4E">
-                <a:alpha val="32000"/>
-              </a:srgbClr>
-            </a:outerShdw>
-          </a:effectLst>
-        </p:spPr>
-        <p:style>
-          <a:lnRef idx="1">
-            <a:schemeClr val="accent1"/>
-          </a:lnRef>
-          <a:fillRef idx="3">
-            <a:schemeClr val="accent1"/>
-          </a:fillRef>
-          <a:effectRef idx="2">
-            <a:schemeClr val="accent1"/>
-          </a:effectRef>
-          <a:fontRef idx="minor">
-            <a:schemeClr val="lt1"/>
-          </a:fontRef>
-        </p:style>
-        <p:txBody>
-          <a:bodyPr rtlCol="0" anchor="ctr"/>
-          <a:lstStyle/>
-          <a:p>
-            <a:pPr algn="ctr"/>
-          </a:p>
-        </p:txBody>
-      </p:sp>
-      <p:sp>
-        <p:nvSpPr>
-          <p:cNvPr id="11" name="Oval 10"/>
-          <p:cNvSpPr/>
-          <p:nvPr/>
-        </p:nvSpPr>
-        <p:spPr>
-          <a:xfrm>
-            <a:off x="9290304" y="1828800"/>
-            <a:ext cx="914400" cy="914400"/>
-          </a:xfrm>
-          <a:prstGeom prst="ellipse">
-            <a:avLst/>
-          </a:prstGeom>
-          <a:solidFill>
-            <a:srgbClr val="F0E0C6"/>
-          </a:solidFill>
-          <a:ln>
-            <a:noFill/>
-          </a:ln>
-        </p:spPr>
-        <p:style>
-          <a:lnRef idx="1">
-            <a:schemeClr val="accent1"/>
-          </a:lnRef>
-          <a:fillRef idx="3">
-            <a:schemeClr val="accent1"/>
-          </a:fillRef>
-          <a:effectRef idx="2">
-            <a:schemeClr val="accent1"/>
-          </a:effectRef>
-          <a:fontRef idx="minor">
-            <a:schemeClr val="lt1"/>
-          </a:fontRef>
-        </p:style>
-        <p:txBody>
-          <a:bodyPr rtlCol="0" anchor="ctr"/>
-          <a:lstStyle/>
-          <a:p>
-            <a:pPr algn="ctr"/>
-            <a:r>
-              <a:rPr sz="3000">
-                <a:solidFill>
-                  <a:srgbClr val="463A32"/>
-                </a:solidFill>
-              </a:rPr>
-              <a:t>⚠️</a:t>
-            </a:r>
-          </a:p>
-        </p:txBody>
-      </p:sp>
-      <p:sp>
-        <p:nvSpPr>
-          <p:cNvPr id="12" name="TextBox 11"/>
-          <p:cNvSpPr txBox="1"/>
-          <p:nvPr/>
-        </p:nvSpPr>
-        <p:spPr>
-          <a:xfrm>
-            <a:off x="8238744" y="2880360"/>
-            <a:ext cx="3017520" cy="2103120"/>
-          </a:xfrm>
-          <a:prstGeom prst="rect">
-            <a:avLst/>
-          </a:prstGeom>
-          <a:noFill/>
-        </p:spPr>
-        <p:txBody>
-          <a:bodyPr wrap="square" anchor="t">
-            <a:spAutoFit/>
-          </a:bodyPr>
-          <a:lstStyle/>
-          <a:p>
-            <a:pPr algn="ctr"/>
-            <a:r>
-              <a:rPr sz="1800" b="1">
-                <a:solidFill>
-                  <a:srgbClr val="8F5A44"/>
-                </a:solidFill>
-              </a:rPr>
-              <a:t>Mostrador = ojo</a:t>
-            </a:r>
-          </a:p>
-          <a:p>
-            <a:pPr algn="ctr"/>
-            <a:r>
-              <a:rPr sz="600" b="0">
-                <a:solidFill>
-                  <a:srgbClr val="463A32"/>
-                </a:solidFill>
-              </a:rPr>
-              <a:t/>
-            </a:r>
-          </a:p>
-          <a:p>
-            <a:pPr algn="ctr"/>
-            <a:r>
-              <a:rPr sz="1350" b="0">
-                <a:solidFill>
-                  <a:srgbClr val="463A32"/>
-                </a:solidFill>
-              </a:rPr>
-              <a:t>Alamo / Localiza: más baratos, pero cierran ~10 pm. Reservar fuera de horario (24 h).</a:t>
-            </a:r>
-          </a:p>
-        </p:txBody>
-      </p:sp>
-      <p:sp>
-        <p:nvSpPr>
-          <p:cNvPr id="13" name="TextBox 12"/>
-          <p:cNvSpPr txBox="1"/>
-          <p:nvPr/>
-        </p:nvSpPr>
-        <p:spPr>
-          <a:xfrm>
-            <a:off x="548640" y="5303520"/>
-            <a:ext cx="11064240" cy="548640"/>
-          </a:xfrm>
-          <a:prstGeom prst="rect">
-            <a:avLst/>
-          </a:prstGeom>
-          <a:noFill/>
-        </p:spPr>
-        <p:txBody>
-          <a:bodyPr wrap="square" anchor="t">
-            <a:spAutoFit/>
-          </a:bodyPr>
-          <a:lstStyle/>
-          <a:p>
-            <a:pPr algn="ctr"/>
-            <a:r>
-              <a:rPr sz="1300" b="0">
-                <a:solidFill>
-                  <a:srgbClr val="8A7A6E"/>
-                </a:solidFill>
-              </a:rPr>
-              <a:t>Red de seguridad: los taxis oficiales del aeropuerto operan 24/7 (distintivo amarillo, tarifados).</a:t>
-            </a:r>
-          </a:p>
-        </p:txBody>
-      </p:sp>
+              <a:t>Alojamiento entero: ningún baño se comparte. Aire y piscina «según el anuncio» (confirmar). Ordenadas por nuestro puntaje.</a:t>
+            </a:r>
+          </a:p>
+        </p:txBody>
+      </p:sp>
+      <p:graphicFrame>
+        <p:nvGraphicFramePr>
+          <p:cNvPr id="5" name="Table 4"/>
+          <p:cNvGraphicFramePr>
+            <a:graphicFrameLocks noGrp="1"/>
+          </p:cNvGraphicFramePr>
+          <p:nvPr/>
+        </p:nvGraphicFramePr>
+        <p:xfrm>
+          <a:off x="457200" y="1737360"/>
+          <a:ext cx="11274552" cy="3931920"/>
+        </p:xfrm>
+        <a:graphic>
+          <a:graphicData uri="http://schemas.openxmlformats.org/drawingml/2006/table">
+            <a:tbl>
+              <a:tblPr firstRow="1" bandRow="1">
+                <a:tableStyleId>{5C22544A-7EE6-4342-B048-85BDC9FD1C3A}</a:tableStyleId>
+              </a:tblPr>
+              <a:tblGrid>
+                <a:gridCol w="3931920"/>
+                <a:gridCol w="1737360"/>
+                <a:gridCol w="1188720"/>
+                <a:gridCol w="822960"/>
+                <a:gridCol w="914400"/>
+                <a:gridCol w="1947672"/>
+                <a:gridCol w="731520"/>
+              </a:tblGrid>
+              <a:tr h="491490">
+                <a:tc>
+                  <a:txBody>
+                    <a:bodyPr/>
+                    <a:lstStyle/>
+                    <a:p>
+                      <a:r>
+                        <a:rPr b="1" sz="1150">
+                          <a:solidFill>
+                            <a:srgbClr val="FFFFFF"/>
+                          </a:solidFill>
+                        </a:rPr>
+                        <a:t>Casa / apto entero</a:t>
+                      </a:r>
+                    </a:p>
+                  </a:txBody>
+                  <a:tcPr>
+                    <a:solidFill>
+                      <a:srgbClr val="B5765C"/>
+                    </a:solidFill>
+                  </a:tcPr>
+                </a:tc>
+                <a:tc>
+                  <a:txBody>
+                    <a:bodyPr/>
+                    <a:lstStyle/>
+                    <a:p>
+                      <a:r>
+                        <a:rPr b="1" sz="1150">
+                          <a:solidFill>
+                            <a:srgbClr val="FFFFFF"/>
+                          </a:solidFill>
+                        </a:rPr>
+                        <a:t>Zona</a:t>
+                      </a:r>
+                    </a:p>
+                  </a:txBody>
+                  <a:tcPr>
+                    <a:solidFill>
+                      <a:srgbClr val="B5765C"/>
+                    </a:solidFill>
+                  </a:tcPr>
+                </a:tc>
+                <a:tc>
+                  <a:txBody>
+                    <a:bodyPr/>
+                    <a:lstStyle/>
+                    <a:p>
+                      <a:r>
+                        <a:rPr b="1" sz="1150">
+                          <a:solidFill>
+                            <a:srgbClr val="FFFFFF"/>
+                          </a:solidFill>
+                        </a:rPr>
+                        <a:t>Puntaje</a:t>
+                      </a:r>
+                    </a:p>
+                  </a:txBody>
+                  <a:tcPr>
+                    <a:solidFill>
+                      <a:srgbClr val="B5765C"/>
+                    </a:solidFill>
+                  </a:tcPr>
+                </a:tc>
+                <a:tc>
+                  <a:txBody>
+                    <a:bodyPr/>
+                    <a:lstStyle/>
+                    <a:p>
+                      <a:r>
+                        <a:rPr b="1" sz="1150">
+                          <a:solidFill>
+                            <a:srgbClr val="FFFFFF"/>
+                          </a:solidFill>
+                        </a:rPr>
+                        <a:t>Cabe</a:t>
+                      </a:r>
+                    </a:p>
+                  </a:txBody>
+                  <a:tcPr>
+                    <a:solidFill>
+                      <a:srgbClr val="B5765C"/>
+                    </a:solidFill>
+                  </a:tcPr>
+                </a:tc>
+                <a:tc>
+                  <a:txBody>
+                    <a:bodyPr/>
+                    <a:lstStyle/>
+                    <a:p>
+                      <a:r>
+                        <a:rPr b="1" sz="1150">
+                          <a:solidFill>
+                            <a:srgbClr val="FFFFFF"/>
+                          </a:solidFill>
+                        </a:rPr>
+                        <a:t>Baños</a:t>
+                      </a:r>
+                    </a:p>
+                  </a:txBody>
+                  <a:tcPr>
+                    <a:solidFill>
+                      <a:srgbClr val="B5765C"/>
+                    </a:solidFill>
+                  </a:tcPr>
+                </a:tc>
+                <a:tc>
+                  <a:txBody>
+                    <a:bodyPr/>
+                    <a:lstStyle/>
+                    <a:p>
+                      <a:r>
+                        <a:rPr b="1" sz="1150">
+                          <a:solidFill>
+                            <a:srgbClr val="FFFFFF"/>
+                          </a:solidFill>
+                        </a:rPr>
+                        <a:t>Por persona (3n)</a:t>
+                      </a:r>
+                    </a:p>
+                  </a:txBody>
+                  <a:tcPr>
+                    <a:solidFill>
+                      <a:srgbClr val="B5765C"/>
+                    </a:solidFill>
+                  </a:tcPr>
+                </a:tc>
+                <a:tc>
+                  <a:txBody>
+                    <a:bodyPr/>
+                    <a:lstStyle/>
+                    <a:p>
+                      <a:r>
+                        <a:rPr b="1" sz="1150">
+                          <a:solidFill>
+                            <a:srgbClr val="FFFFFF"/>
+                          </a:solidFill>
+                        </a:rPr>
+                        <a:t>Ver</a:t>
+                      </a:r>
+                    </a:p>
+                  </a:txBody>
+                  <a:tcPr>
+                    <a:solidFill>
+                      <a:srgbClr val="B5765C"/>
+                    </a:solidFill>
+                  </a:tcPr>
+                </a:tc>
+              </a:tr>
+              <a:tr h="491490">
+                <a:tc>
+                  <a:txBody>
+                    <a:bodyPr/>
+                    <a:lstStyle/>
+                    <a:p>
+                      <a:r>
+                        <a:rPr sz="1050">
+                          <a:solidFill>
+                            <a:srgbClr val="463A32"/>
+                          </a:solidFill>
+                        </a:rPr>
+                        <a:t>Casa 7p garaje ★</a:t>
+                      </a:r>
+                    </a:p>
+                  </a:txBody>
+                  <a:tcPr>
+                    <a:solidFill>
+                      <a:srgbClr val="F0E0C6"/>
+                    </a:solidFill>
+                  </a:tcPr>
+                </a:tc>
+                <a:tc>
+                  <a:txBody>
+                    <a:bodyPr/>
+                    <a:lstStyle/>
+                    <a:p>
+                      <a:r>
+                        <a:rPr sz="1050">
+                          <a:solidFill>
+                            <a:srgbClr val="463A32"/>
+                          </a:solidFill>
+                        </a:rPr>
+                        <a:t>San Antonio</a:t>
+                      </a:r>
+                    </a:p>
+                  </a:txBody>
+                  <a:tcPr>
+                    <a:solidFill>
+                      <a:srgbClr val="F0E0C6"/>
+                    </a:solidFill>
+                  </a:tcPr>
+                </a:tc>
+                <a:tc>
+                  <a:txBody>
+                    <a:bodyPr/>
+                    <a:lstStyle/>
+                    <a:p>
+                      <a:pPr algn="ctr"/>
+                      <a:r>
+                        <a:rPr sz="1050" b="1">
+                          <a:solidFill>
+                            <a:srgbClr val="463A32"/>
+                          </a:solidFill>
+                        </a:rPr>
+                        <a:t>94.6</a:t>
+                      </a:r>
+                    </a:p>
+                  </a:txBody>
+                  <a:tcPr>
+                    <a:solidFill>
+                      <a:srgbClr val="F0E0C6"/>
+                    </a:solidFill>
+                  </a:tcPr>
+                </a:tc>
+                <a:tc>
+                  <a:txBody>
+                    <a:bodyPr/>
+                    <a:lstStyle/>
+                    <a:p>
+                      <a:pPr algn="ctr"/>
+                      <a:r>
+                        <a:rPr sz="1050">
+                          <a:solidFill>
+                            <a:srgbClr val="463A32"/>
+                          </a:solidFill>
+                        </a:rPr>
+                        <a:t>7</a:t>
+                      </a:r>
+                    </a:p>
+                  </a:txBody>
+                  <a:tcPr>
+                    <a:solidFill>
+                      <a:srgbClr val="F0E0C6"/>
+                    </a:solidFill>
+                  </a:tcPr>
+                </a:tc>
+                <a:tc>
+                  <a:txBody>
+                    <a:bodyPr/>
+                    <a:lstStyle/>
+                    <a:p>
+                      <a:pPr algn="ctr"/>
+                      <a:r>
+                        <a:rPr sz="1050">
+                          <a:solidFill>
+                            <a:srgbClr val="463A32"/>
+                          </a:solidFill>
+                        </a:rPr>
+                        <a:t>2,5</a:t>
+                      </a:r>
+                    </a:p>
+                  </a:txBody>
+                  <a:tcPr>
+                    <a:solidFill>
+                      <a:srgbClr val="F0E0C6"/>
+                    </a:solidFill>
+                  </a:tcPr>
+                </a:tc>
+                <a:tc>
+                  <a:txBody>
+                    <a:bodyPr/>
+                    <a:lstStyle/>
+                    <a:p>
+                      <a:pPr algn="ctr"/>
+                      <a:r>
+                        <a:rPr sz="1050">
+                          <a:solidFill>
+                            <a:srgbClr val="463A32"/>
+                          </a:solidFill>
+                        </a:rPr>
+                        <a:t>$90.714</a:t>
+                      </a:r>
+                    </a:p>
+                  </a:txBody>
+                  <a:tcPr>
+                    <a:solidFill>
+                      <a:srgbClr val="F0E0C6"/>
+                    </a:solidFill>
+                  </a:tcPr>
+                </a:tc>
+                <a:tc>
+                  <a:txBody>
+                    <a:bodyPr/>
+                    <a:lstStyle/>
+                    <a:p>
+                      <a:pPr algn="ctr"/>
+                      <a:r>
+                        <a:rPr sz="1050" u="sng">
+                          <a:solidFill>
+                            <a:srgbClr val="8F5A44"/>
+                          </a:solidFill>
+                          <a:hlinkClick r:id="rId2"/>
+                        </a:rPr>
+                        <a:t>ver</a:t>
+                      </a:r>
+                    </a:p>
+                  </a:txBody>
+                  <a:tcPr>
+                    <a:solidFill>
+                      <a:srgbClr val="F0E0C6"/>
+                    </a:solidFill>
+                  </a:tcPr>
+                </a:tc>
+              </a:tr>
+              <a:tr h="491490">
+                <a:tc>
+                  <a:txBody>
+                    <a:bodyPr/>
+                    <a:lstStyle/>
+                    <a:p>
+                      <a:r>
+                        <a:rPr sz="1050">
+                          <a:solidFill>
+                            <a:srgbClr val="463A32"/>
+                          </a:solidFill>
+                        </a:rPr>
+                        <a:t>Casa Bella S.Antonio</a:t>
+                      </a:r>
+                    </a:p>
+                  </a:txBody>
+                  <a:tcPr>
+                    <a:solidFill>
+                      <a:srgbClr val="F4E8DA"/>
+                    </a:solidFill>
+                  </a:tcPr>
+                </a:tc>
+                <a:tc>
+                  <a:txBody>
+                    <a:bodyPr/>
+                    <a:lstStyle/>
+                    <a:p>
+                      <a:r>
+                        <a:rPr sz="1050">
+                          <a:solidFill>
+                            <a:srgbClr val="463A32"/>
+                          </a:solidFill>
+                        </a:rPr>
+                        <a:t>San Antonio</a:t>
+                      </a:r>
+                    </a:p>
+                  </a:txBody>
+                  <a:tcPr>
+                    <a:solidFill>
+                      <a:srgbClr val="F4E8DA"/>
+                    </a:solidFill>
+                  </a:tcPr>
+                </a:tc>
+                <a:tc>
+                  <a:txBody>
+                    <a:bodyPr/>
+                    <a:lstStyle/>
+                    <a:p>
+                      <a:pPr algn="ctr"/>
+                      <a:r>
+                        <a:rPr sz="1050" b="1">
+                          <a:solidFill>
+                            <a:srgbClr val="463A32"/>
+                          </a:solidFill>
+                        </a:rPr>
+                        <a:t>89.7</a:t>
+                      </a:r>
+                    </a:p>
+                  </a:txBody>
+                  <a:tcPr>
+                    <a:solidFill>
+                      <a:srgbClr val="F4E8DA"/>
+                    </a:solidFill>
+                  </a:tcPr>
+                </a:tc>
+                <a:tc>
+                  <a:txBody>
+                    <a:bodyPr/>
+                    <a:lstStyle/>
+                    <a:p>
+                      <a:pPr algn="ctr"/>
+                      <a:r>
+                        <a:rPr sz="1050">
+                          <a:solidFill>
+                            <a:srgbClr val="463A32"/>
+                          </a:solidFill>
+                        </a:rPr>
+                        <a:t>8</a:t>
+                      </a:r>
+                    </a:p>
+                  </a:txBody>
+                  <a:tcPr>
+                    <a:solidFill>
+                      <a:srgbClr val="F4E8DA"/>
+                    </a:solidFill>
+                  </a:tcPr>
+                </a:tc>
+                <a:tc>
+                  <a:txBody>
+                    <a:bodyPr/>
+                    <a:lstStyle/>
+                    <a:p>
+                      <a:pPr algn="ctr"/>
+                      <a:r>
+                        <a:rPr sz="1050">
+                          <a:solidFill>
+                            <a:srgbClr val="463A32"/>
+                          </a:solidFill>
+                        </a:rPr>
+                        <a:t>2</a:t>
+                      </a:r>
+                    </a:p>
+                  </a:txBody>
+                  <a:tcPr>
+                    <a:solidFill>
+                      <a:srgbClr val="F4E8DA"/>
+                    </a:solidFill>
+                  </a:tcPr>
+                </a:tc>
+                <a:tc>
+                  <a:txBody>
+                    <a:bodyPr/>
+                    <a:lstStyle/>
+                    <a:p>
+                      <a:pPr algn="ctr"/>
+                      <a:r>
+                        <a:rPr sz="1050">
+                          <a:solidFill>
+                            <a:srgbClr val="463A32"/>
+                          </a:solidFill>
+                        </a:rPr>
+                        <a:t>$156.186</a:t>
+                      </a:r>
+                    </a:p>
+                  </a:txBody>
+                  <a:tcPr>
+                    <a:solidFill>
+                      <a:srgbClr val="F4E8DA"/>
+                    </a:solidFill>
+                  </a:tcPr>
+                </a:tc>
+                <a:tc>
+                  <a:txBody>
+                    <a:bodyPr/>
+                    <a:lstStyle/>
+                    <a:p>
+                      <a:pPr algn="ctr"/>
+                      <a:r>
+                        <a:rPr sz="1050" u="sng">
+                          <a:solidFill>
+                            <a:srgbClr val="8F5A44"/>
+                          </a:solidFill>
+                          <a:hlinkClick r:id="rId3"/>
+                        </a:rPr>
+                        <a:t>ver</a:t>
+                      </a:r>
+                    </a:p>
+                  </a:txBody>
+                  <a:tcPr>
+                    <a:solidFill>
+                      <a:srgbClr val="F4E8DA"/>
+                    </a:solidFill>
+                  </a:tcPr>
+                </a:tc>
+              </a:tr>
+              <a:tr h="491490">
+                <a:tc>
+                  <a:txBody>
+                    <a:bodyPr/>
+                    <a:lstStyle/>
+                    <a:p>
+                      <a:r>
+                        <a:rPr sz="1050">
+                          <a:solidFill>
+                            <a:srgbClr val="463A32"/>
+                          </a:solidFill>
+                        </a:rPr>
+                        <a:t>Casa 4 Hab Aire</a:t>
+                      </a:r>
+                    </a:p>
+                  </a:txBody>
+                  <a:tcPr>
+                    <a:solidFill>
+                      <a:srgbClr val="FFFFFF"/>
+                    </a:solidFill>
+                  </a:tcPr>
+                </a:tc>
+                <a:tc>
+                  <a:txBody>
+                    <a:bodyPr/>
+                    <a:lstStyle/>
+                    <a:p>
+                      <a:r>
+                        <a:rPr sz="1050">
+                          <a:solidFill>
+                            <a:srgbClr val="463A32"/>
+                          </a:solidFill>
+                        </a:rPr>
+                        <a:t>San Antonio</a:t>
+                      </a:r>
+                    </a:p>
+                  </a:txBody>
+                  <a:tcPr>
+                    <a:solidFill>
+                      <a:srgbClr val="FFFFFF"/>
+                    </a:solidFill>
+                  </a:tcPr>
+                </a:tc>
+                <a:tc>
+                  <a:txBody>
+                    <a:bodyPr/>
+                    <a:lstStyle/>
+                    <a:p>
+                      <a:pPr algn="ctr"/>
+                      <a:r>
+                        <a:rPr sz="1050" b="1">
+                          <a:solidFill>
+                            <a:srgbClr val="463A32"/>
+                          </a:solidFill>
+                        </a:rPr>
+                        <a:t>89.2</a:t>
+                      </a:r>
+                    </a:p>
+                  </a:txBody>
+                  <a:tcPr>
+                    <a:solidFill>
+                      <a:srgbClr val="FFFFFF"/>
+                    </a:solidFill>
+                  </a:tcPr>
+                </a:tc>
+                <a:tc>
+                  <a:txBody>
+                    <a:bodyPr/>
+                    <a:lstStyle/>
+                    <a:p>
+                      <a:pPr algn="ctr"/>
+                      <a:r>
+                        <a:rPr sz="1050">
+                          <a:solidFill>
+                            <a:srgbClr val="463A32"/>
+                          </a:solidFill>
+                        </a:rPr>
+                        <a:t>9</a:t>
+                      </a:r>
+                    </a:p>
+                  </a:txBody>
+                  <a:tcPr>
+                    <a:solidFill>
+                      <a:srgbClr val="FFFFFF"/>
+                    </a:solidFill>
+                  </a:tcPr>
+                </a:tc>
+                <a:tc>
+                  <a:txBody>
+                    <a:bodyPr/>
+                    <a:lstStyle/>
+                    <a:p>
+                      <a:pPr algn="ctr"/>
+                      <a:r>
+                        <a:rPr sz="1050">
+                          <a:solidFill>
+                            <a:srgbClr val="463A32"/>
+                          </a:solidFill>
+                        </a:rPr>
+                        <a:t>1,5</a:t>
+                      </a:r>
+                    </a:p>
+                  </a:txBody>
+                  <a:tcPr>
+                    <a:solidFill>
+                      <a:srgbClr val="FFFFFF"/>
+                    </a:solidFill>
+                  </a:tcPr>
+                </a:tc>
+                <a:tc>
+                  <a:txBody>
+                    <a:bodyPr/>
+                    <a:lstStyle/>
+                    <a:p>
+                      <a:pPr algn="ctr"/>
+                      <a:r>
+                        <a:rPr sz="1050">
+                          <a:solidFill>
+                            <a:srgbClr val="463A32"/>
+                          </a:solidFill>
+                        </a:rPr>
+                        <a:t>$78.571</a:t>
+                      </a:r>
+                    </a:p>
+                  </a:txBody>
+                  <a:tcPr>
+                    <a:solidFill>
+                      <a:srgbClr val="FFFFFF"/>
+                    </a:solidFill>
+                  </a:tcPr>
+                </a:tc>
+                <a:tc>
+                  <a:txBody>
+                    <a:bodyPr/>
+                    <a:lstStyle/>
+                    <a:p>
+                      <a:pPr algn="ctr"/>
+                      <a:r>
+                        <a:rPr sz="1050" u="sng">
+                          <a:solidFill>
+                            <a:srgbClr val="8F5A44"/>
+                          </a:solidFill>
+                          <a:hlinkClick r:id="rId4"/>
+                        </a:rPr>
+                        <a:t>ver</a:t>
+                      </a:r>
+                    </a:p>
+                  </a:txBody>
+                  <a:tcPr>
+                    <a:solidFill>
+                      <a:srgbClr val="FFFFFF"/>
+                    </a:solidFill>
+                  </a:tcPr>
+                </a:tc>
+              </a:tr>
+              <a:tr h="491490">
+                <a:tc>
+                  <a:txBody>
+                    <a:bodyPr/>
+                    <a:lstStyle/>
+                    <a:p>
+                      <a:r>
+                        <a:rPr sz="1050">
+                          <a:solidFill>
+                            <a:srgbClr val="463A32"/>
+                          </a:solidFill>
+                        </a:rPr>
+                        <a:t>Apto moderno Granada</a:t>
+                      </a:r>
+                    </a:p>
+                  </a:txBody>
+                  <a:tcPr>
+                    <a:solidFill>
+                      <a:srgbClr val="F4E8DA"/>
+                    </a:solidFill>
+                  </a:tcPr>
+                </a:tc>
+                <a:tc>
+                  <a:txBody>
+                    <a:bodyPr/>
+                    <a:lstStyle/>
+                    <a:p>
+                      <a:r>
+                        <a:rPr sz="1050">
+                          <a:solidFill>
+                            <a:srgbClr val="463A32"/>
+                          </a:solidFill>
+                        </a:rPr>
+                        <a:t>Granada</a:t>
+                      </a:r>
+                    </a:p>
+                  </a:txBody>
+                  <a:tcPr>
+                    <a:solidFill>
+                      <a:srgbClr val="F4E8DA"/>
+                    </a:solidFill>
+                  </a:tcPr>
+                </a:tc>
+                <a:tc>
+                  <a:txBody>
+                    <a:bodyPr/>
+                    <a:lstStyle/>
+                    <a:p>
+                      <a:pPr algn="ctr"/>
+                      <a:r>
+                        <a:rPr sz="1050" b="1">
+                          <a:solidFill>
+                            <a:srgbClr val="463A32"/>
+                          </a:solidFill>
+                        </a:rPr>
+                        <a:t>80.9</a:t>
+                      </a:r>
+                    </a:p>
+                  </a:txBody>
+                  <a:tcPr>
+                    <a:solidFill>
+                      <a:srgbClr val="F4E8DA"/>
+                    </a:solidFill>
+                  </a:tcPr>
+                </a:tc>
+                <a:tc>
+                  <a:txBody>
+                    <a:bodyPr/>
+                    <a:lstStyle/>
+                    <a:p>
+                      <a:pPr algn="ctr"/>
+                      <a:r>
+                        <a:rPr sz="1050">
+                          <a:solidFill>
+                            <a:srgbClr val="463A32"/>
+                          </a:solidFill>
+                        </a:rPr>
+                        <a:t>8</a:t>
+                      </a:r>
+                    </a:p>
+                  </a:txBody>
+                  <a:tcPr>
+                    <a:solidFill>
+                      <a:srgbClr val="F4E8DA"/>
+                    </a:solidFill>
+                  </a:tcPr>
+                </a:tc>
+                <a:tc>
+                  <a:txBody>
+                    <a:bodyPr/>
+                    <a:lstStyle/>
+                    <a:p>
+                      <a:pPr algn="ctr"/>
+                      <a:r>
+                        <a:rPr sz="1050">
+                          <a:solidFill>
+                            <a:srgbClr val="463A32"/>
+                          </a:solidFill>
+                        </a:rPr>
+                        <a:t>2</a:t>
+                      </a:r>
+                    </a:p>
+                  </a:txBody>
+                  <a:tcPr>
+                    <a:solidFill>
+                      <a:srgbClr val="F4E8DA"/>
+                    </a:solidFill>
+                  </a:tcPr>
+                </a:tc>
+                <a:tc>
+                  <a:txBody>
+                    <a:bodyPr/>
+                    <a:lstStyle/>
+                    <a:p>
+                      <a:pPr algn="ctr"/>
+                      <a:r>
+                        <a:rPr sz="1050">
+                          <a:solidFill>
+                            <a:srgbClr val="463A32"/>
+                          </a:solidFill>
+                        </a:rPr>
+                        <a:t>$172.576</a:t>
+                      </a:r>
+                    </a:p>
+                  </a:txBody>
+                  <a:tcPr>
+                    <a:solidFill>
+                      <a:srgbClr val="F4E8DA"/>
+                    </a:solidFill>
+                  </a:tcPr>
+                </a:tc>
+                <a:tc>
+                  <a:txBody>
+                    <a:bodyPr/>
+                    <a:lstStyle/>
+                    <a:p>
+                      <a:pPr algn="ctr"/>
+                      <a:r>
+                        <a:rPr sz="1050" u="sng">
+                          <a:solidFill>
+                            <a:srgbClr val="8F5A44"/>
+                          </a:solidFill>
+                          <a:hlinkClick r:id="rId5"/>
+                        </a:rPr>
+                        <a:t>ver</a:t>
+                      </a:r>
+                    </a:p>
+                  </a:txBody>
+                  <a:tcPr>
+                    <a:solidFill>
+                      <a:srgbClr val="F4E8DA"/>
+                    </a:solidFill>
+                  </a:tcPr>
+                </a:tc>
+              </a:tr>
+              <a:tr h="491490">
+                <a:tc>
+                  <a:txBody>
+                    <a:bodyPr/>
+                    <a:lstStyle/>
+                    <a:p>
+                      <a:r>
+                        <a:rPr sz="1050">
+                          <a:solidFill>
+                            <a:srgbClr val="463A32"/>
+                          </a:solidFill>
+                        </a:rPr>
+                        <a:t>Casa Las Flores</a:t>
+                      </a:r>
+                    </a:p>
+                  </a:txBody>
+                  <a:tcPr>
+                    <a:solidFill>
+                      <a:srgbClr val="FFFFFF"/>
+                    </a:solidFill>
+                  </a:tcPr>
+                </a:tc>
+                <a:tc>
+                  <a:txBody>
+                    <a:bodyPr/>
+                    <a:lstStyle/>
+                    <a:p>
+                      <a:r>
+                        <a:rPr sz="1050">
+                          <a:solidFill>
+                            <a:srgbClr val="463A32"/>
+                          </a:solidFill>
+                        </a:rPr>
+                        <a:t>Las Flores (norte)</a:t>
+                      </a:r>
+                    </a:p>
+                  </a:txBody>
+                  <a:tcPr>
+                    <a:solidFill>
+                      <a:srgbClr val="FFFFFF"/>
+                    </a:solidFill>
+                  </a:tcPr>
+                </a:tc>
+                <a:tc>
+                  <a:txBody>
+                    <a:bodyPr/>
+                    <a:lstStyle/>
+                    <a:p>
+                      <a:pPr algn="ctr"/>
+                      <a:r>
+                        <a:rPr sz="1050" b="1">
+                          <a:solidFill>
+                            <a:srgbClr val="463A32"/>
+                          </a:solidFill>
+                        </a:rPr>
+                        <a:t>76.1</a:t>
+                      </a:r>
+                    </a:p>
+                  </a:txBody>
+                  <a:tcPr>
+                    <a:solidFill>
+                      <a:srgbClr val="FFFFFF"/>
+                    </a:solidFill>
+                  </a:tcPr>
+                </a:tc>
+                <a:tc>
+                  <a:txBody>
+                    <a:bodyPr/>
+                    <a:lstStyle/>
+                    <a:p>
+                      <a:pPr algn="ctr"/>
+                      <a:r>
+                        <a:rPr sz="1050">
+                          <a:solidFill>
+                            <a:srgbClr val="463A32"/>
+                          </a:solidFill>
+                        </a:rPr>
+                        <a:t>8</a:t>
+                      </a:r>
+                    </a:p>
+                  </a:txBody>
+                  <a:tcPr>
+                    <a:solidFill>
+                      <a:srgbClr val="FFFFFF"/>
+                    </a:solidFill>
+                  </a:tcPr>
+                </a:tc>
+                <a:tc>
+                  <a:txBody>
+                    <a:bodyPr/>
+                    <a:lstStyle/>
+                    <a:p>
+                      <a:pPr algn="ctr"/>
+                      <a:r>
+                        <a:rPr sz="1050">
+                          <a:solidFill>
+                            <a:srgbClr val="463A32"/>
+                          </a:solidFill>
+                        </a:rPr>
+                        <a:t>2</a:t>
+                      </a:r>
+                    </a:p>
+                  </a:txBody>
+                  <a:tcPr>
+                    <a:solidFill>
+                      <a:srgbClr val="FFFFFF"/>
+                    </a:solidFill>
+                  </a:tcPr>
+                </a:tc>
+                <a:tc>
+                  <a:txBody>
+                    <a:bodyPr/>
+                    <a:lstStyle/>
+                    <a:p>
+                      <a:pPr algn="ctr"/>
+                      <a:r>
+                        <a:rPr sz="1050">
+                          <a:solidFill>
+                            <a:srgbClr val="463A32"/>
+                          </a:solidFill>
+                        </a:rPr>
+                        <a:t>$94.285</a:t>
+                      </a:r>
+                    </a:p>
+                  </a:txBody>
+                  <a:tcPr>
+                    <a:solidFill>
+                      <a:srgbClr val="FFFFFF"/>
+                    </a:solidFill>
+                  </a:tcPr>
+                </a:tc>
+                <a:tc>
+                  <a:txBody>
+                    <a:bodyPr/>
+                    <a:lstStyle/>
+                    <a:p>
+                      <a:pPr algn="ctr"/>
+                      <a:r>
+                        <a:rPr sz="1050" u="sng">
+                          <a:solidFill>
+                            <a:srgbClr val="8F5A44"/>
+                          </a:solidFill>
+                          <a:hlinkClick r:id="rId6"/>
+                        </a:rPr>
+                        <a:t>ver</a:t>
+                      </a:r>
+                    </a:p>
+                  </a:txBody>
+                  <a:tcPr>
+                    <a:solidFill>
+                      <a:srgbClr val="FFFFFF"/>
+                    </a:solidFill>
+                  </a:tcPr>
+                </a:tc>
+              </a:tr>
+              <a:tr h="491490">
+                <a:tc>
+                  <a:txBody>
+                    <a:bodyPr/>
+                    <a:lstStyle/>
+                    <a:p>
+                      <a:r>
+                        <a:rPr sz="1050">
+                          <a:solidFill>
+                            <a:srgbClr val="463A32"/>
+                          </a:solidFill>
+                        </a:rPr>
+                        <a:t>Casa 8p Granada</a:t>
+                      </a:r>
+                    </a:p>
+                  </a:txBody>
+                  <a:tcPr>
+                    <a:solidFill>
+                      <a:srgbClr val="F4E8DA"/>
+                    </a:solidFill>
+                  </a:tcPr>
+                </a:tc>
+                <a:tc>
+                  <a:txBody>
+                    <a:bodyPr/>
+                    <a:lstStyle/>
+                    <a:p>
+                      <a:r>
+                        <a:rPr sz="1050">
+                          <a:solidFill>
+                            <a:srgbClr val="463A32"/>
+                          </a:solidFill>
+                        </a:rPr>
+                        <a:t>Granada</a:t>
+                      </a:r>
+                    </a:p>
+                  </a:txBody>
+                  <a:tcPr>
+                    <a:solidFill>
+                      <a:srgbClr val="F4E8DA"/>
+                    </a:solidFill>
+                  </a:tcPr>
+                </a:tc>
+                <a:tc>
+                  <a:txBody>
+                    <a:bodyPr/>
+                    <a:lstStyle/>
+                    <a:p>
+                      <a:pPr algn="ctr"/>
+                      <a:r>
+                        <a:rPr sz="1050" b="1">
+                          <a:solidFill>
+                            <a:srgbClr val="463A32"/>
+                          </a:solidFill>
+                        </a:rPr>
+                        <a:t>71.1</a:t>
+                      </a:r>
+                    </a:p>
+                  </a:txBody>
+                  <a:tcPr>
+                    <a:solidFill>
+                      <a:srgbClr val="F4E8DA"/>
+                    </a:solidFill>
+                  </a:tcPr>
+                </a:tc>
+                <a:tc>
+                  <a:txBody>
+                    <a:bodyPr/>
+                    <a:lstStyle/>
+                    <a:p>
+                      <a:pPr algn="ctr"/>
+                      <a:r>
+                        <a:rPr sz="1050">
+                          <a:solidFill>
+                            <a:srgbClr val="463A32"/>
+                          </a:solidFill>
+                        </a:rPr>
+                        <a:t>9</a:t>
+                      </a:r>
+                    </a:p>
+                  </a:txBody>
+                  <a:tcPr>
+                    <a:solidFill>
+                      <a:srgbClr val="F4E8DA"/>
+                    </a:solidFill>
+                  </a:tcPr>
+                </a:tc>
+                <a:tc>
+                  <a:txBody>
+                    <a:bodyPr/>
+                    <a:lstStyle/>
+                    <a:p>
+                      <a:pPr algn="ctr"/>
+                      <a:r>
+                        <a:rPr sz="1050">
+                          <a:solidFill>
+                            <a:srgbClr val="463A32"/>
+                          </a:solidFill>
+                        </a:rPr>
+                        <a:t>2</a:t>
+                      </a:r>
+                    </a:p>
+                  </a:txBody>
+                  <a:tcPr>
+                    <a:solidFill>
+                      <a:srgbClr val="F4E8DA"/>
+                    </a:solidFill>
+                  </a:tcPr>
+                </a:tc>
+                <a:tc>
+                  <a:txBody>
+                    <a:bodyPr/>
+                    <a:lstStyle/>
+                    <a:p>
+                      <a:pPr algn="ctr"/>
+                      <a:r>
+                        <a:rPr sz="1050">
+                          <a:solidFill>
+                            <a:srgbClr val="463A32"/>
+                          </a:solidFill>
+                        </a:rPr>
+                        <a:t>$124.151</a:t>
+                      </a:r>
+                    </a:p>
+                  </a:txBody>
+                  <a:tcPr>
+                    <a:solidFill>
+                      <a:srgbClr val="F4E8DA"/>
+                    </a:solidFill>
+                  </a:tcPr>
+                </a:tc>
+                <a:tc>
+                  <a:txBody>
+                    <a:bodyPr/>
+                    <a:lstStyle/>
+                    <a:p>
+                      <a:pPr algn="ctr"/>
+                      <a:r>
+                        <a:rPr sz="1050" u="sng">
+                          <a:solidFill>
+                            <a:srgbClr val="8F5A44"/>
+                          </a:solidFill>
+                          <a:hlinkClick r:id="rId7"/>
+                        </a:rPr>
+                        <a:t>ver</a:t>
+                      </a:r>
+                    </a:p>
+                  </a:txBody>
+                  <a:tcPr>
+                    <a:solidFill>
+                      <a:srgbClr val="F4E8DA"/>
+                    </a:solidFill>
+                  </a:tcPr>
+                </a:tc>
+              </a:tr>
+              <a:tr h="491490">
+                <a:tc>
+                  <a:txBody>
+                    <a:bodyPr/>
+                    <a:lstStyle/>
+                    <a:p>
+                      <a:r>
+                        <a:rPr sz="1050">
+                          <a:solidFill>
+                            <a:srgbClr val="463A32"/>
+                          </a:solidFill>
+                        </a:rPr>
+                        <a:t>Casa piscina privada</a:t>
+                      </a:r>
+                    </a:p>
+                  </a:txBody>
+                  <a:tcPr>
+                    <a:solidFill>
+                      <a:srgbClr val="FFFFFF"/>
+                    </a:solidFill>
+                  </a:tcPr>
+                </a:tc>
+                <a:tc>
+                  <a:txBody>
+                    <a:bodyPr/>
+                    <a:lstStyle/>
+                    <a:p>
+                      <a:r>
+                        <a:rPr sz="1050">
+                          <a:solidFill>
+                            <a:srgbClr val="463A32"/>
+                          </a:solidFill>
+                        </a:rPr>
+                        <a:t>San Antonio</a:t>
+                      </a:r>
+                    </a:p>
+                  </a:txBody>
+                  <a:tcPr>
+                    <a:solidFill>
+                      <a:srgbClr val="FFFFFF"/>
+                    </a:solidFill>
+                  </a:tcPr>
+                </a:tc>
+                <a:tc>
+                  <a:txBody>
+                    <a:bodyPr/>
+                    <a:lstStyle/>
+                    <a:p>
+                      <a:pPr algn="ctr"/>
+                      <a:r>
+                        <a:rPr sz="1050" b="1">
+                          <a:solidFill>
+                            <a:srgbClr val="463A32"/>
+                          </a:solidFill>
+                        </a:rPr>
+                        <a:t>66.8</a:t>
+                      </a:r>
+                    </a:p>
+                  </a:txBody>
+                  <a:tcPr>
+                    <a:solidFill>
+                      <a:srgbClr val="FFFFFF"/>
+                    </a:solidFill>
+                  </a:tcPr>
+                </a:tc>
+                <a:tc>
+                  <a:txBody>
+                    <a:bodyPr/>
+                    <a:lstStyle/>
+                    <a:p>
+                      <a:pPr algn="ctr"/>
+                      <a:r>
+                        <a:rPr sz="1050">
+                          <a:solidFill>
+                            <a:srgbClr val="463A32"/>
+                          </a:solidFill>
+                        </a:rPr>
+                        <a:t>8</a:t>
+                      </a:r>
+                    </a:p>
+                  </a:txBody>
+                  <a:tcPr>
+                    <a:solidFill>
+                      <a:srgbClr val="FFFFFF"/>
+                    </a:solidFill>
+                  </a:tcPr>
+                </a:tc>
+                <a:tc>
+                  <a:txBody>
+                    <a:bodyPr/>
+                    <a:lstStyle/>
+                    <a:p>
+                      <a:pPr algn="ctr"/>
+                      <a:r>
+                        <a:rPr sz="1050">
+                          <a:solidFill>
+                            <a:srgbClr val="463A32"/>
+                          </a:solidFill>
+                        </a:rPr>
+                        <a:t>2,5</a:t>
+                      </a:r>
+                    </a:p>
+                  </a:txBody>
+                  <a:tcPr>
+                    <a:solidFill>
+                      <a:srgbClr val="FFFFFF"/>
+                    </a:solidFill>
+                  </a:tcPr>
+                </a:tc>
+                <a:tc>
+                  <a:txBody>
+                    <a:bodyPr/>
+                    <a:lstStyle/>
+                    <a:p>
+                      <a:pPr algn="ctr"/>
+                      <a:r>
+                        <a:rPr sz="1050">
+                          <a:solidFill>
+                            <a:srgbClr val="463A32"/>
+                          </a:solidFill>
+                        </a:rPr>
+                        <a:t>$430.608</a:t>
+                      </a:r>
+                    </a:p>
+                  </a:txBody>
+                  <a:tcPr>
+                    <a:solidFill>
+                      <a:srgbClr val="FFFFFF"/>
+                    </a:solidFill>
+                  </a:tcPr>
+                </a:tc>
+                <a:tc>
+                  <a:txBody>
+                    <a:bodyPr/>
+                    <a:lstStyle/>
+                    <a:p>
+                      <a:pPr algn="ctr"/>
+                      <a:r>
+                        <a:rPr sz="1050" u="sng">
+                          <a:solidFill>
+                            <a:srgbClr val="8F5A44"/>
+                          </a:solidFill>
+                          <a:hlinkClick r:id="rId8"/>
+                        </a:rPr>
+                        <a:t>ver</a:t>
+                      </a:r>
+                    </a:p>
+                  </a:txBody>
+                  <a:tcPr>
+                    <a:solidFill>
+                      <a:srgbClr val="FFFFFF"/>
+                    </a:solidFill>
+                  </a:tcPr>
+                </a:tc>
+              </a:tr>
+            </a:tbl>
+          </a:graphicData>
+        </a:graphic>
+      </p:graphicFrame>
     </p:spTree>
   </p:cSld>
   <p:clrMapOvr>
@@ -11619,7 +12737,7 @@
                   <a:srgbClr val="FFFFFF"/>
                 </a:solidFill>
               </a:rPr>
-              <a:t>🚗   Cómo moverse — tres opciones</a:t>
+              <a:t>🌙   La llegada es de noche</a:t>
             </a:r>
           </a:p>
         </p:txBody>
@@ -11632,8 +12750,8 @@
         </p:nvSpPr>
         <p:spPr>
           <a:xfrm>
-            <a:off x="502920" y="1554480"/>
-            <a:ext cx="3566160" cy="4114800"/>
+            <a:off x="502920" y="1508760"/>
+            <a:ext cx="3566160" cy="3566160"/>
           </a:xfrm>
           <a:prstGeom prst="roundRect">
             <a:avLst>
@@ -11641,7 +12759,166 @@
             </a:avLst>
           </a:prstGeom>
           <a:solidFill>
+            <a:srgbClr val="FFFFFF"/>
+          </a:solidFill>
+          <a:ln>
+            <a:noFill/>
+          </a:ln>
+          <a:effectLst>
+            <a:outerShdw blurRad="95000" dist="40000" dir="5400000" rotWithShape="0">
+              <a:srgbClr val="6E5B4E">
+                <a:alpha val="32000"/>
+              </a:srgbClr>
+            </a:outerShdw>
+          </a:effectLst>
+        </p:spPr>
+        <p:style>
+          <a:lnRef idx="1">
+            <a:schemeClr val="accent1"/>
+          </a:lnRef>
+          <a:fillRef idx="3">
+            <a:schemeClr val="accent1"/>
+          </a:fillRef>
+          <a:effectRef idx="2">
+            <a:schemeClr val="accent1"/>
+          </a:effectRef>
+          <a:fontRef idx="minor">
+            <a:schemeClr val="lt1"/>
+          </a:fontRef>
+        </p:style>
+        <p:txBody>
+          <a:bodyPr rtlCol="0" anchor="ctr"/>
+          <a:lstStyle/>
+          <a:p>
+            <a:pPr algn="ctr"/>
+          </a:p>
+        </p:txBody>
+      </p:sp>
+      <p:sp>
+        <p:nvSpPr>
+          <p:cNvPr id="5" name="Oval 4"/>
+          <p:cNvSpPr/>
+          <p:nvPr/>
+        </p:nvSpPr>
+        <p:spPr>
+          <a:xfrm>
+            <a:off x="1828800" y="1828800"/>
+            <a:ext cx="914400" cy="914400"/>
+          </a:xfrm>
+          <a:prstGeom prst="ellipse">
+            <a:avLst/>
+          </a:prstGeom>
+          <a:solidFill>
             <a:srgbClr val="F0E0C6"/>
+          </a:solidFill>
+          <a:ln>
+            <a:noFill/>
+          </a:ln>
+        </p:spPr>
+        <p:style>
+          <a:lnRef idx="1">
+            <a:schemeClr val="accent1"/>
+          </a:lnRef>
+          <a:fillRef idx="3">
+            <a:schemeClr val="accent1"/>
+          </a:fillRef>
+          <a:effectRef idx="2">
+            <a:schemeClr val="accent1"/>
+          </a:effectRef>
+          <a:fontRef idx="minor">
+            <a:schemeClr val="lt1"/>
+          </a:fontRef>
+        </p:style>
+        <p:txBody>
+          <a:bodyPr rtlCol="0" anchor="ctr"/>
+          <a:lstStyle/>
+          <a:p>
+            <a:pPr algn="ctr"/>
+            <a:r>
+              <a:rPr sz="3000">
+                <a:solidFill>
+                  <a:srgbClr val="463A32"/>
+                </a:solidFill>
+              </a:rPr>
+              <a:t>🕘</a:t>
+            </a:r>
+          </a:p>
+        </p:txBody>
+      </p:sp>
+      <p:sp>
+        <p:nvSpPr>
+          <p:cNvPr id="6" name="TextBox 5"/>
+          <p:cNvSpPr txBox="1"/>
+          <p:nvPr/>
+        </p:nvSpPr>
+        <p:spPr>
+          <a:xfrm>
+            <a:off x="777240" y="2880360"/>
+            <a:ext cx="3017520" cy="2103120"/>
+          </a:xfrm>
+          <a:prstGeom prst="rect">
+            <a:avLst/>
+          </a:prstGeom>
+          <a:noFill/>
+        </p:spPr>
+        <p:txBody>
+          <a:bodyPr wrap="square" anchor="t">
+            <a:spAutoFit/>
+          </a:bodyPr>
+          <a:lstStyle/>
+          <a:p>
+            <a:pPr algn="ctr"/>
+            <a:r>
+              <a:rPr sz="1800" b="1">
+                <a:solidFill>
+                  <a:srgbClr val="8F5A44"/>
+                </a:solidFill>
+              </a:rPr>
+              <a:t>3 días limpios</a:t>
+            </a:r>
+          </a:p>
+          <a:p>
+            <a:pPr algn="ctr"/>
+            <a:r>
+              <a:rPr sz="600" b="0">
+                <a:solidFill>
+                  <a:srgbClr val="463A32"/>
+                </a:solidFill>
+              </a:rPr>
+              <a:t/>
+            </a:r>
+          </a:p>
+          <a:p>
+            <a:pPr algn="ctr"/>
+            <a:r>
+              <a:rPr sz="1350" b="0">
+                <a:solidFill>
+                  <a:srgbClr val="463A32"/>
+                </a:solidFill>
+              </a:rPr>
+              <a:t>Recoger esa noche y devolver ~7 pm del 2: por debajo de las 72 h.</a:t>
+            </a:r>
+          </a:p>
+        </p:txBody>
+      </p:sp>
+      <p:sp>
+        <p:nvSpPr>
+          <p:cNvPr id="7" name="Rounded Rectangle 6"/>
+          <p:cNvSpPr/>
+          <p:nvPr/>
+        </p:nvSpPr>
+        <p:spPr>
+          <a:xfrm>
+            <a:off x="4233672" y="1508760"/>
+            <a:ext cx="3566160" cy="3566160"/>
+          </a:xfrm>
+          <a:prstGeom prst="roundRect">
+            <a:avLst>
+              <a:gd name="adj" fmla="val 12000"/>
+            </a:avLst>
+          </a:prstGeom>
+          <a:solidFill>
+            <a:srgbClr val="FFFFFF"/>
           </a:solidFill>
           <a:ln w="25400">
             <a:solidFill>
@@ -11680,22 +12957,20 @@
       </p:sp>
       <p:sp>
         <p:nvSpPr>
-          <p:cNvPr id="5" name="Rounded Rectangle 4"/>
+          <p:cNvPr id="8" name="Oval 7"/>
           <p:cNvSpPr/>
           <p:nvPr/>
         </p:nvSpPr>
         <p:spPr>
           <a:xfrm>
-            <a:off x="1508760" y="1325880"/>
-            <a:ext cx="1554480" cy="457200"/>
-          </a:xfrm>
-          <a:prstGeom prst="roundRect">
-            <a:avLst>
-              <a:gd name="adj" fmla="val 50000"/>
-            </a:avLst>
+            <a:off x="5559552" y="1828800"/>
+            <a:ext cx="914400" cy="914400"/>
+          </a:xfrm>
+          <a:prstGeom prst="ellipse">
+            <a:avLst/>
           </a:prstGeom>
           <a:solidFill>
-            <a:srgbClr val="D9A75E"/>
+            <a:srgbClr val="F0E0C6"/>
           </a:solidFill>
           <a:ln>
             <a:noFill/>
@@ -11720,53 +12995,27 @@
           <a:lstStyle/>
           <a:p>
             <a:pPr algn="ctr"/>
-          </a:p>
-        </p:txBody>
-      </p:sp>
-      <p:sp>
-        <p:nvSpPr>
-          <p:cNvPr id="6" name="TextBox 5"/>
+            <a:r>
+              <a:rPr sz="3000">
+                <a:solidFill>
+                  <a:srgbClr val="463A32"/>
+                </a:solidFill>
+              </a:rPr>
+              <a:t>✅</a:t>
+            </a:r>
+          </a:p>
+        </p:txBody>
+      </p:sp>
+      <p:sp>
+        <p:nvSpPr>
+          <p:cNvPr id="9" name="TextBox 8"/>
           <p:cNvSpPr txBox="1"/>
           <p:nvPr/>
         </p:nvSpPr>
         <p:spPr>
           <a:xfrm>
-            <a:off x="1508760" y="1325880"/>
-            <a:ext cx="1554480" cy="457200"/>
-          </a:xfrm>
-          <a:prstGeom prst="rect">
-            <a:avLst/>
-          </a:prstGeom>
-          <a:noFill/>
-        </p:spPr>
-        <p:txBody>
-          <a:bodyPr wrap="square" anchor="ctr">
-            <a:spAutoFit/>
-          </a:bodyPr>
-          <a:lstStyle/>
-          <a:p>
-            <a:pPr algn="ctr"/>
-            <a:r>
-              <a:rPr sz="1200" b="1">
-                <a:solidFill>
-                  <a:srgbClr val="463A32"/>
-                </a:solidFill>
-              </a:rPr>
-              <a:t>★ Recomendado</a:t>
-            </a:r>
-          </a:p>
-        </p:txBody>
-      </p:sp>
-      <p:sp>
-        <p:nvSpPr>
-          <p:cNvPr id="7" name="TextBox 6"/>
-          <p:cNvSpPr txBox="1"/>
-          <p:nvPr/>
-        </p:nvSpPr>
-        <p:spPr>
-          <a:xfrm>
-            <a:off x="777240" y="1920240"/>
-            <a:ext cx="3017520" cy="731520"/>
+            <a:off x="4507992" y="2880360"/>
+            <a:ext cx="3017520" cy="2103120"/>
           </a:xfrm>
           <a:prstGeom prst="rect">
             <a:avLst/>
@@ -11786,86 +13035,29 @@
                   <a:srgbClr val="8F5A44"/>
                 </a:solidFill>
               </a:rPr>
-              <a:t>Carro local (entrega)</a:t>
-            </a:r>
-          </a:p>
-        </p:txBody>
-      </p:sp>
-      <p:sp>
-        <p:nvSpPr>
-          <p:cNvPr id="8" name="TextBox 7"/>
-          <p:cNvSpPr txBox="1"/>
-          <p:nvPr/>
-        </p:nvSpPr>
-        <p:spPr>
-          <a:xfrm>
-            <a:off x="777240" y="2743200"/>
-            <a:ext cx="3017520" cy="1005840"/>
-          </a:xfrm>
-          <a:prstGeom prst="rect">
-            <a:avLst/>
-          </a:prstGeom>
-          <a:noFill/>
-        </p:spPr>
-        <p:txBody>
-          <a:bodyPr wrap="square" anchor="t">
-            <a:spAutoFit/>
-          </a:bodyPr>
-          <a:lstStyle/>
+              <a:t>Local = cuadra</a:t>
+            </a:r>
+          </a:p>
           <a:p>
             <a:pPr algn="ctr"/>
             <a:r>
-              <a:rPr sz="3400" b="1">
-                <a:solidFill>
-                  <a:srgbClr val="D9A75E"/>
-                </a:solidFill>
-              </a:rPr>
-              <a:t>$200.000</a:t>
+              <a:rPr sz="600" b="0">
+                <a:solidFill>
+                  <a:srgbClr val="463A32"/>
+                </a:solidFill>
+              </a:rPr>
+              <a:t/>
             </a:r>
           </a:p>
           <a:p>
             <a:pPr algn="ctr"/>
             <a:r>
-              <a:rPr sz="1300" b="0">
-                <a:solidFill>
-                  <a:srgbClr val="8A7A6E"/>
-                </a:solidFill>
-              </a:rPr>
-              <a:t>por persona</a:t>
-            </a:r>
-          </a:p>
-        </p:txBody>
-      </p:sp>
-      <p:sp>
-        <p:nvSpPr>
-          <p:cNvPr id="9" name="TextBox 8"/>
-          <p:cNvSpPr txBox="1"/>
-          <p:nvPr/>
-        </p:nvSpPr>
-        <p:spPr>
-          <a:xfrm>
-            <a:off x="822960" y="4069080"/>
-            <a:ext cx="2926080" cy="1463040"/>
-          </a:xfrm>
-          <a:prstGeom prst="rect">
-            <a:avLst/>
-          </a:prstGeom>
-          <a:noFill/>
-        </p:spPr>
-        <p:txBody>
-          <a:bodyPr wrap="square" anchor="t">
-            <a:spAutoFit/>
-          </a:bodyPr>
-          <a:lstStyle/>
-          <a:p>
-            <a:pPr algn="ctr"/>
-            <a:r>
               <a:rPr sz="1350" b="0">
                 <a:solidFill>
                   <a:srgbClr val="463A32"/>
                 </a:solidFill>
               </a:rPr>
-              <a:t>Cuadra con la llegada de noche; libertad para salir de Cali.</a:t>
+              <a:t>Farallones / WayCarCali entregan el carro coordinando el vuelo de las 8 pm.</a:t>
             </a:r>
           </a:p>
         </p:txBody>
@@ -11878,8 +13070,8 @@
         </p:nvSpPr>
         <p:spPr>
           <a:xfrm>
-            <a:off x="4233672" y="1554480"/>
-            <a:ext cx="3566160" cy="4114800"/>
+            <a:off x="7964424" y="1508760"/>
+            <a:ext cx="3566160" cy="3566160"/>
           </a:xfrm>
           <a:prstGeom prst="roundRect">
             <a:avLst>
@@ -11924,146 +13116,24 @@
       </p:sp>
       <p:sp>
         <p:nvSpPr>
-          <p:cNvPr id="11" name="TextBox 10"/>
-          <p:cNvSpPr txBox="1"/>
-          <p:nvPr/>
-        </p:nvSpPr>
-        <p:spPr>
-          <a:xfrm>
-            <a:off x="4507992" y="1920240"/>
-            <a:ext cx="3017520" cy="731520"/>
-          </a:xfrm>
-          <a:prstGeom prst="rect">
+          <p:cNvPr id="11" name="Oval 10"/>
+          <p:cNvSpPr/>
+          <p:nvPr/>
+        </p:nvSpPr>
+        <p:spPr>
+          <a:xfrm>
+            <a:off x="9290304" y="1828800"/>
+            <a:ext cx="914400" cy="914400"/>
+          </a:xfrm>
+          <a:prstGeom prst="ellipse">
             <a:avLst/>
           </a:prstGeom>
-          <a:noFill/>
-        </p:spPr>
-        <p:txBody>
-          <a:bodyPr wrap="square" anchor="t">
-            <a:spAutoFit/>
-          </a:bodyPr>
-          <a:lstStyle/>
-          <a:p>
-            <a:pPr algn="ctr"/>
-            <a:r>
-              <a:rPr sz="1800" b="1">
-                <a:solidFill>
-                  <a:srgbClr val="8F5A44"/>
-                </a:solidFill>
-              </a:rPr>
-              <a:t>Mostrador (Kayak)</a:t>
-            </a:r>
-          </a:p>
-        </p:txBody>
-      </p:sp>
-      <p:sp>
-        <p:nvSpPr>
-          <p:cNvPr id="12" name="TextBox 11"/>
-          <p:cNvSpPr txBox="1"/>
-          <p:nvPr/>
-        </p:nvSpPr>
-        <p:spPr>
-          <a:xfrm>
-            <a:off x="4507992" y="2743200"/>
-            <a:ext cx="3017520" cy="1005840"/>
-          </a:xfrm>
-          <a:prstGeom prst="rect">
-            <a:avLst/>
-          </a:prstGeom>
-          <a:noFill/>
-        </p:spPr>
-        <p:txBody>
-          <a:bodyPr wrap="square" anchor="t">
-            <a:spAutoFit/>
-          </a:bodyPr>
-          <a:lstStyle/>
-          <a:p>
-            <a:pPr algn="ctr"/>
-            <a:r>
-              <a:rPr sz="3400" b="1">
-                <a:solidFill>
-                  <a:srgbClr val="D9A75E"/>
-                </a:solidFill>
-              </a:rPr>
-              <a:t>$180.000</a:t>
-            </a:r>
-          </a:p>
-          <a:p>
-            <a:pPr algn="ctr"/>
-            <a:r>
-              <a:rPr sz="1300" b="0">
-                <a:solidFill>
-                  <a:srgbClr val="8A7A6E"/>
-                </a:solidFill>
-              </a:rPr>
-              <a:t>por persona</a:t>
-            </a:r>
-          </a:p>
-        </p:txBody>
-      </p:sp>
-      <p:sp>
-        <p:nvSpPr>
-          <p:cNvPr id="13" name="TextBox 12"/>
-          <p:cNvSpPr txBox="1"/>
-          <p:nvPr/>
-        </p:nvSpPr>
-        <p:spPr>
-          <a:xfrm>
-            <a:off x="4553712" y="4069080"/>
-            <a:ext cx="2926080" cy="1463040"/>
-          </a:xfrm>
-          <a:prstGeom prst="rect">
-            <a:avLst/>
-          </a:prstGeom>
-          <a:noFill/>
-        </p:spPr>
-        <p:txBody>
-          <a:bodyPr wrap="square" anchor="t">
-            <a:spAutoFit/>
-          </a:bodyPr>
-          <a:lstStyle/>
-          <a:p>
-            <a:pPr algn="ctr"/>
-            <a:r>
-              <a:rPr sz="1350" b="0">
-                <a:solidFill>
-                  <a:srgbClr val="463A32"/>
-                </a:solidFill>
-              </a:rPr>
-              <a:t>Más barato, pero el mostrador cierra ~10 pm.</a:t>
-            </a:r>
-          </a:p>
-        </p:txBody>
-      </p:sp>
-      <p:sp>
-        <p:nvSpPr>
-          <p:cNvPr id="14" name="Rounded Rectangle 13"/>
-          <p:cNvSpPr/>
-          <p:nvPr/>
-        </p:nvSpPr>
-        <p:spPr>
-          <a:xfrm>
-            <a:off x="7964424" y="1554480"/>
-            <a:ext cx="3566160" cy="4114800"/>
-          </a:xfrm>
-          <a:prstGeom prst="roundRect">
-            <a:avLst>
-              <a:gd name="adj" fmla="val 12000"/>
-            </a:avLst>
-          </a:prstGeom>
           <a:solidFill>
-            <a:srgbClr val="FFFFFF"/>
+            <a:srgbClr val="F0E0C6"/>
           </a:solidFill>
           <a:ln>
             <a:noFill/>
           </a:ln>
-          <a:effectLst>
-            <a:outerShdw blurRad="95000" dist="40000" dir="5400000" rotWithShape="0">
-              <a:srgbClr val="6E5B4E">
-                <a:alpha val="32000"/>
-              </a:srgbClr>
-            </a:outerShdw>
-          </a:effectLst>
         </p:spPr>
         <p:style>
           <a:lnRef idx="1">
@@ -12084,19 +13154,27 @@
           <a:lstStyle/>
           <a:p>
             <a:pPr algn="ctr"/>
-          </a:p>
-        </p:txBody>
-      </p:sp>
-      <p:sp>
-        <p:nvSpPr>
-          <p:cNvPr id="15" name="TextBox 14"/>
+            <a:r>
+              <a:rPr sz="3000">
+                <a:solidFill>
+                  <a:srgbClr val="463A32"/>
+                </a:solidFill>
+              </a:rPr>
+              <a:t>⚠️</a:t>
+            </a:r>
+          </a:p>
+        </p:txBody>
+      </p:sp>
+      <p:sp>
+        <p:nvSpPr>
+          <p:cNvPr id="12" name="TextBox 11"/>
           <p:cNvSpPr txBox="1"/>
           <p:nvPr/>
         </p:nvSpPr>
         <p:spPr>
           <a:xfrm>
-            <a:off x="8238744" y="1920240"/>
-            <a:ext cx="3017520" cy="731520"/>
+            <a:off x="8238744" y="2880360"/>
+            <a:ext cx="3017520" cy="2103120"/>
           </a:xfrm>
           <a:prstGeom prst="rect">
             <a:avLst/>
@@ -12116,21 +13194,43 @@
                   <a:srgbClr val="8F5A44"/>
                 </a:solidFill>
               </a:rPr>
-              <a:t>Sin carro propio</a:t>
-            </a:r>
-          </a:p>
-        </p:txBody>
-      </p:sp>
-      <p:sp>
-        <p:nvSpPr>
-          <p:cNvPr id="16" name="TextBox 15"/>
+              <a:t>Mostrador = ojo</a:t>
+            </a:r>
+          </a:p>
+          <a:p>
+            <a:pPr algn="ctr"/>
+            <a:r>
+              <a:rPr sz="600" b="0">
+                <a:solidFill>
+                  <a:srgbClr val="463A32"/>
+                </a:solidFill>
+              </a:rPr>
+              <a:t/>
+            </a:r>
+          </a:p>
+          <a:p>
+            <a:pPr algn="ctr"/>
+            <a:r>
+              <a:rPr sz="1350" b="0">
+                <a:solidFill>
+                  <a:srgbClr val="463A32"/>
+                </a:solidFill>
+              </a:rPr>
+              <a:t>Alamo / Localiza: más baratos, pero cierran ~10 pm. Reservar fuera de horario (24 h).</a:t>
+            </a:r>
+          </a:p>
+        </p:txBody>
+      </p:sp>
+      <p:sp>
+        <p:nvSpPr>
+          <p:cNvPr id="13" name="TextBox 12"/>
           <p:cNvSpPr txBox="1"/>
           <p:nvPr/>
         </p:nvSpPr>
         <p:spPr>
           <a:xfrm>
-            <a:off x="8238744" y="2743200"/>
-            <a:ext cx="3017520" cy="1005840"/>
+            <a:off x="548640" y="5303520"/>
+            <a:ext cx="11064240" cy="548640"/>
           </a:xfrm>
           <a:prstGeom prst="rect">
             <a:avLst/>
@@ -12145,57 +13245,12 @@
           <a:p>
             <a:pPr algn="ctr"/>
             <a:r>
-              <a:rPr sz="3400" b="1">
-                <a:solidFill>
-                  <a:srgbClr val="D9A75E"/>
-                </a:solidFill>
-              </a:rPr>
-              <a:t>$125.000</a:t>
-            </a:r>
-          </a:p>
-          <a:p>
-            <a:pPr algn="ctr"/>
-            <a:r>
               <a:rPr sz="1300" b="0">
                 <a:solidFill>
                   <a:srgbClr val="8A7A6E"/>
                 </a:solidFill>
               </a:rPr>
-              <a:t>por persona</a:t>
-            </a:r>
-          </a:p>
-        </p:txBody>
-      </p:sp>
-      <p:sp>
-        <p:nvSpPr>
-          <p:cNvPr id="17" name="TextBox 16"/>
-          <p:cNvSpPr txBox="1"/>
-          <p:nvPr/>
-        </p:nvSpPr>
-        <p:spPr>
-          <a:xfrm>
-            <a:off x="8284464" y="4069080"/>
-            <a:ext cx="2926080" cy="1463040"/>
-          </a:xfrm>
-          <a:prstGeom prst="rect">
-            <a:avLst/>
-          </a:prstGeom>
-          <a:noFill/>
-        </p:spPr>
-        <p:txBody>
-          <a:bodyPr wrap="square" anchor="t">
-            <a:spAutoFit/>
-          </a:bodyPr>
-          <a:lstStyle/>
-          <a:p>
-            <a:pPr algn="ctr"/>
-            <a:r>
-              <a:rPr sz="1350" b="0">
-                <a:solidFill>
-                  <a:srgbClr val="463A32"/>
-                </a:solidFill>
-              </a:rPr>
-              <a:t>Lo más barato: taxis + una van con conductor para el paseo.</a:t>
+              <a:t>Red de seguridad: los taxis oficiales del aeropuerto operan 24/7 (distintivo amarillo, tarifados).</a:t>
             </a:r>
           </a:p>
         </p:txBody>

--- a/output/Mini-Boom-en-Cali_Presentacion.pptx
+++ b/output/Mini-Boom-en-Cali_Presentacion.pptx
@@ -342,93 +342,37 @@
               </a:solidFill>
             </c:spPr>
           </c:dPt>
-          <c:dPt>
-            <c:idx val="3"/>
-            <c:spPr>
-              <a:solidFill>
-                <a:srgbClr val="D8C4B2"/>
-              </a:solidFill>
-            </c:spPr>
-          </c:dPt>
-          <c:dPt>
-            <c:idx val="4"/>
-            <c:spPr>
-              <a:solidFill>
-                <a:srgbClr val="D8C4B2"/>
-              </a:solidFill>
-            </c:spPr>
-          </c:dPt>
-          <c:dPt>
-            <c:idx val="5"/>
-            <c:spPr>
-              <a:solidFill>
-                <a:srgbClr val="D8C4B2"/>
-              </a:solidFill>
-            </c:spPr>
-          </c:dPt>
-          <c:dPt>
-            <c:idx val="6"/>
-            <c:spPr>
-              <a:solidFill>
-                <a:srgbClr val="D8C4B2"/>
-              </a:solidFill>
-            </c:spPr>
-          </c:dPt>
           <c:cat>
             <c:strRef>
-              <c:f>Sheet1!$A$2:$A$8</c:f>
+              <c:f>Sheet1!$A$2:$A$4</c:f>
               <c:strCache>
-                <c:ptCount val="7"/>
+                <c:ptCount val="3"/>
                 <c:pt idx="0">
+                  <c:v>Apto cerca Estadio</c:v>
+                </c:pt>
+                <c:pt idx="1">
                   <c:v>Casa 7p garaje</c:v>
                 </c:pt>
-                <c:pt idx="1">
-                  <c:v>Casa Bella S.Antonio</c:v>
-                </c:pt>
                 <c:pt idx="2">
-                  <c:v>Casa 4 Hab Aire</c:v>
-                </c:pt>
-                <c:pt idx="3">
-                  <c:v>Apto moderno Granada</c:v>
-                </c:pt>
-                <c:pt idx="4">
-                  <c:v>Casa Las Flores</c:v>
-                </c:pt>
-                <c:pt idx="5">
-                  <c:v>Casa 8p Granada</c:v>
-                </c:pt>
-                <c:pt idx="6">
-                  <c:v>Casa piscina privada</c:v>
+                  <c:v>Refugio Vistas</c:v>
                 </c:pt>
               </c:strCache>
             </c:strRef>
           </c:cat>
           <c:val>
             <c:numRef>
-              <c:f>Sheet1!$B$2:$B$8</c:f>
+              <c:f>Sheet1!$B$2:$B$4</c:f>
               <c:numCache>
                 <c:formatCode>General</c:formatCode>
-                <c:ptCount val="7"/>
+                <c:ptCount val="3"/>
                 <c:pt idx="0">
-                  <c:v>94.6</c:v>
+                  <c:v>79.2</c:v>
                 </c:pt>
                 <c:pt idx="1">
-                  <c:v>89.7</c:v>
+                  <c:v>78.4</c:v>
                 </c:pt>
                 <c:pt idx="2">
-                  <c:v>89.2</c:v>
-                </c:pt>
-                <c:pt idx="3">
-                  <c:v>80.9</c:v>
-                </c:pt>
-                <c:pt idx="4">
-                  <c:v>76.1</c:v>
-                </c:pt>
-                <c:pt idx="5">
-                  <c:v>71.1</c:v>
-                </c:pt>
-                <c:pt idx="6">
-                  <c:v>66.8</c:v>
+                  <c:v>63.2</c:v>
                 </c:pt>
               </c:numCache>
             </c:numRef>
@@ -11003,7 +10947,7 @@
                   <a:srgbClr val="FFFFFF"/>
                 </a:solidFill>
               </a:rPr>
-              <a:t>🛏️   Airbnb (occidente) — ranking, mismo puntaje</a:t>
+              <a:t>🛏️   Airbnb (noroeste/oeste) — ranking por puntaje</a:t>
             </a:r>
           </a:p>
         </p:txBody>
@@ -11159,7 +11103,7 @@
                   <a:srgbClr val="8F5A44"/>
                 </a:solidFill>
               </a:rPr>
-              <a:t>★ Casa 7p garaje</a:t>
+              <a:t>★ Apto cerca Estadio</a:t>
             </a:r>
           </a:p>
           <a:p>
@@ -11170,7 +11114,7 @@
                   <a:srgbClr val="463A32"/>
                 </a:solidFill>
               </a:rPr>
-              <a:t>lidera con 94.6/100.</a:t>
+              <a:t>lidera con 79.2/100.</a:t>
             </a:r>
           </a:p>
           <a:p>
@@ -11192,7 +11136,7 @@
                   <a:srgbClr val="463A32"/>
                 </a:solidFill>
               </a:rPr>
-              <a:t>Con carro local ≈ $290.714 pp (en meta). Baños del grupo, cocina y privacidad.</a:t>
+              <a:t>A ~1.9 km de la rumba. Con carro local ≈ $286.407 pp.</a:t>
             </a:r>
           </a:p>
           <a:p>
@@ -11214,7 +11158,7 @@
                   <a:srgbClr val="8A7A6E"/>
                 </a:solidFill>
               </a:rPr>
-              <a:t>Mismo puntaje que los hostales; precio normalizado entre casas.</a:t>
+              <a:t>Ubicación verificada por coordenadas. Confirmar disponibilidad del 30.</a:t>
             </a:r>
           </a:p>
         </p:txBody>
@@ -11326,7 +11270,7 @@
                   <a:srgbClr val="FFFFFF"/>
                 </a:solidFill>
               </a:rPr>
-              <a:t>🛏️   Airbnb (occidente) — comparación</a:t>
+              <a:t>🛏️   Airbnb (noroeste/oeste) — comparación</a:t>
             </a:r>
           </a:p>
         </p:txBody>
@@ -11360,7 +11304,7 @@
                   <a:srgbClr val="463A32"/>
                 </a:solidFill>
               </a:rPr>
-              <a:t>Alojamiento entero: ningún baño se comparte. Aire y piscina «según el anuncio» (confirmar). Ordenadas por nuestro puntaje.</a:t>
+              <a:t>Alojamiento entero (ningún baño se comparte). «Dist.» = km a la zona de actividades (coordenadas). Aire «según anuncio» y disponibilidad del 30: confirmar.</a:t>
             </a:r>
           </a:p>
         </p:txBody>
@@ -11375,7 +11319,7 @@
         </p:nvGraphicFramePr>
         <p:xfrm>
           <a:off x="457200" y="1737360"/>
-          <a:ext cx="11274552" cy="3931920"/>
+          <a:ext cx="11274551" cy="3931920"/>
         </p:xfrm>
         <a:graphic>
           <a:graphicData uri="http://schemas.openxmlformats.org/drawingml/2006/table">
@@ -11387,12 +11331,12 @@
                 <a:gridCol w="3931920"/>
                 <a:gridCol w="1737360"/>
                 <a:gridCol w="1188720"/>
-                <a:gridCol w="822960"/>
                 <a:gridCol w="914400"/>
-                <a:gridCol w="1947672"/>
+                <a:gridCol w="914400"/>
+                <a:gridCol w="1856231"/>
                 <a:gridCol w="731520"/>
               </a:tblGrid>
-              <a:tr h="491490">
+              <a:tr h="982980">
                 <a:tc>
                   <a:txBody>
                     <a:bodyPr/>
@@ -11425,7 +11369,28 @@
                             <a:srgbClr val="FFFFFF"/>
                           </a:solidFill>
                         </a:rPr>
-                        <a:t>Zona</a:t>
+                        <a:t>Sector</a:t>
+                      </a:r>
+                    </a:p>
+                  </a:txBody>
+                  <a:tcPr>
+                    <a:solidFill>
+                      <a:srgbClr val="B5765C"/>
+                    </a:solidFill>
+                  </a:tcPr>
+                </a:tc>
+                <a:tc>
+                  <a:txBody>
+                    <a:bodyPr/>
+                    <a:lstStyle/>
+                    <a:p>
+                      <a:r>
+                        <a:rPr b="1" sz="1150">
+                          <a:solidFill>
+                            <a:srgbClr val="FFFFFF"/>
+                          </a:solidFill>
+                        </a:rPr>
+                        <a:t>Dist. act.</a:t>
                       </a:r>
                     </a:p>
                   </a:txBody>
@@ -11447,27 +11412,6 @@
                           </a:solidFill>
                         </a:rPr>
                         <a:t>Puntaje</a:t>
-                      </a:r>
-                    </a:p>
-                  </a:txBody>
-                  <a:tcPr>
-                    <a:solidFill>
-                      <a:srgbClr val="B5765C"/>
-                    </a:solidFill>
-                  </a:tcPr>
-                </a:tc>
-                <a:tc>
-                  <a:txBody>
-                    <a:bodyPr/>
-                    <a:lstStyle/>
-                    <a:p>
-                      <a:r>
-                        <a:rPr b="1" sz="1150">
-                          <a:solidFill>
-                            <a:srgbClr val="FFFFFF"/>
-                          </a:solidFill>
-                        </a:rPr>
-                        <a:t>Cabe</a:t>
                       </a:r>
                     </a:p>
                   </a:txBody>
@@ -11541,7 +11485,7 @@
                   </a:tcPr>
                 </a:tc>
               </a:tr>
-              <a:tr h="491490">
+              <a:tr h="982980">
                 <a:tc>
                   <a:txBody>
                     <a:bodyPr/>
@@ -11553,7 +11497,7 @@
                             <a:srgbClr val="463A32"/>
                           </a:solidFill>
                         </a:rPr>
-                        <a:t>Casa 7p garaje ★</a:t>
+                        <a:t>Apto cerca Estadio ★</a:t>
                       </a:r>
                     </a:p>
                   </a:txBody>
@@ -11574,7 +11518,7 @@
                             <a:srgbClr val="463A32"/>
                           </a:solidFill>
                         </a:rPr>
-                        <a:t>San Antonio</a:t>
+                        <a:t>Oeste</a:t>
                       </a:r>
                     </a:p>
                   </a:txBody>
@@ -11596,7 +11540,7 @@
                             <a:srgbClr val="463A32"/>
                           </a:solidFill>
                         </a:rPr>
-                        <a:t>94.6</a:t>
+                        <a:t>~1.9 km</a:t>
                       </a:r>
                     </a:p>
                   </a:txBody>
@@ -11618,7 +11562,7 @@
                             <a:srgbClr val="463A32"/>
                           </a:solidFill>
                         </a:rPr>
-                        <a:t>7</a:t>
+                        <a:t>79.2</a:t>
                       </a:r>
                     </a:p>
                   </a:txBody>
@@ -11640,7 +11584,7 @@
                             <a:srgbClr val="463A32"/>
                           </a:solidFill>
                         </a:rPr>
-                        <a:t>2,5</a:t>
+                        <a:t>2</a:t>
                       </a:r>
                     </a:p>
                   </a:txBody>
@@ -11662,7 +11606,7 @@
                             <a:srgbClr val="463A32"/>
                           </a:solidFill>
                         </a:rPr>
-                        <a:t>$90.714</a:t>
+                        <a:t>$86.407</a:t>
                       </a:r>
                     </a:p>
                   </a:txBody>
@@ -11696,7 +11640,7 @@
                   </a:tcPr>
                 </a:tc>
               </a:tr>
-              <a:tr h="491490">
+              <a:tr h="982980">
                 <a:tc>
                   <a:txBody>
                     <a:bodyPr/>
@@ -11708,7 +11652,7 @@
                             <a:srgbClr val="463A32"/>
                           </a:solidFill>
                         </a:rPr>
-                        <a:t>Casa Bella S.Antonio</a:t>
+                        <a:t>Casa 7p garaje</a:t>
                       </a:r>
                     </a:p>
                   </a:txBody>
@@ -11729,7 +11673,7 @@
                             <a:srgbClr val="463A32"/>
                           </a:solidFill>
                         </a:rPr>
-                        <a:t>San Antonio</a:t>
+                        <a:t>Centro-oeste</a:t>
                       </a:r>
                     </a:p>
                   </a:txBody>
@@ -11751,7 +11695,7 @@
                             <a:srgbClr val="463A32"/>
                           </a:solidFill>
                         </a:rPr>
-                        <a:t>89.7</a:t>
+                        <a:t>~3.6 km</a:t>
                       </a:r>
                     </a:p>
                   </a:txBody>
@@ -11773,7 +11717,7 @@
                             <a:srgbClr val="463A32"/>
                           </a:solidFill>
                         </a:rPr>
-                        <a:t>8</a:t>
+                        <a:t>78.4</a:t>
                       </a:r>
                     </a:p>
                   </a:txBody>
@@ -11795,7 +11739,7 @@
                             <a:srgbClr val="463A32"/>
                           </a:solidFill>
                         </a:rPr>
-                        <a:t>2</a:t>
+                        <a:t>2,5</a:t>
                       </a:r>
                     </a:p>
                   </a:txBody>
@@ -11817,7 +11761,7 @@
                             <a:srgbClr val="463A32"/>
                           </a:solidFill>
                         </a:rPr>
-                        <a:t>$156.186</a:t>
+                        <a:t>$90.714</a:t>
                       </a:r>
                     </a:p>
                   </a:txBody>
@@ -11851,7 +11795,7 @@
                   </a:tcPr>
                 </a:tc>
               </a:tr>
-              <a:tr h="491490">
+              <a:tr h="982980">
                 <a:tc>
                   <a:txBody>
                     <a:bodyPr/>
@@ -11863,7 +11807,7 @@
                             <a:srgbClr val="463A32"/>
                           </a:solidFill>
                         </a:rPr>
-                        <a:t>Casa 4 Hab Aire</a:t>
+                        <a:t>Refugio Vistas</a:t>
                       </a:r>
                     </a:p>
                   </a:txBody>
@@ -11884,7 +11828,7 @@
                             <a:srgbClr val="463A32"/>
                           </a:solidFill>
                         </a:rPr>
-                        <a:t>San Antonio</a:t>
+                        <a:t>Oeste (ladera)</a:t>
                       </a:r>
                     </a:p>
                   </a:txBody>
@@ -11906,7 +11850,7 @@
                             <a:srgbClr val="463A32"/>
                           </a:solidFill>
                         </a:rPr>
-                        <a:t>89.2</a:t>
+                        <a:t>~2.4 km</a:t>
                       </a:r>
                     </a:p>
                   </a:txBody>
@@ -11928,7 +11872,7 @@
                             <a:srgbClr val="463A32"/>
                           </a:solidFill>
                         </a:rPr>
-                        <a:t>9</a:t>
+                        <a:t>63.2</a:t>
                       </a:r>
                     </a:p>
                   </a:txBody>
@@ -11950,7 +11894,7 @@
                             <a:srgbClr val="463A32"/>
                           </a:solidFill>
                         </a:rPr>
-                        <a:t>1,5</a:t>
+                        <a:t>3</a:t>
                       </a:r>
                     </a:p>
                   </a:txBody>
@@ -11972,7 +11916,7 @@
                             <a:srgbClr val="463A32"/>
                           </a:solidFill>
                         </a:rPr>
-                        <a:t>$78.571</a:t>
+                        <a:t>$282.068</a:t>
                       </a:r>
                     </a:p>
                   </a:txBody>
@@ -11994,626 +11938,6 @@
                             <a:srgbClr val="8F5A44"/>
                           </a:solidFill>
                           <a:hlinkClick r:id="rId4"/>
-                        </a:rPr>
-                        <a:t>ver</a:t>
-                      </a:r>
-                    </a:p>
-                  </a:txBody>
-                  <a:tcPr>
-                    <a:solidFill>
-                      <a:srgbClr val="FFFFFF"/>
-                    </a:solidFill>
-                  </a:tcPr>
-                </a:tc>
-              </a:tr>
-              <a:tr h="491490">
-                <a:tc>
-                  <a:txBody>
-                    <a:bodyPr/>
-                    <a:lstStyle/>
-                    <a:p>
-                      <a:r>
-                        <a:rPr sz="1050">
-                          <a:solidFill>
-                            <a:srgbClr val="463A32"/>
-                          </a:solidFill>
-                        </a:rPr>
-                        <a:t>Apto moderno Granada</a:t>
-                      </a:r>
-                    </a:p>
-                  </a:txBody>
-                  <a:tcPr>
-                    <a:solidFill>
-                      <a:srgbClr val="F4E8DA"/>
-                    </a:solidFill>
-                  </a:tcPr>
-                </a:tc>
-                <a:tc>
-                  <a:txBody>
-                    <a:bodyPr/>
-                    <a:lstStyle/>
-                    <a:p>
-                      <a:r>
-                        <a:rPr sz="1050">
-                          <a:solidFill>
-                            <a:srgbClr val="463A32"/>
-                          </a:solidFill>
-                        </a:rPr>
-                        <a:t>Granada</a:t>
-                      </a:r>
-                    </a:p>
-                  </a:txBody>
-                  <a:tcPr>
-                    <a:solidFill>
-                      <a:srgbClr val="F4E8DA"/>
-                    </a:solidFill>
-                  </a:tcPr>
-                </a:tc>
-                <a:tc>
-                  <a:txBody>
-                    <a:bodyPr/>
-                    <a:lstStyle/>
-                    <a:p>
-                      <a:pPr algn="ctr"/>
-                      <a:r>
-                        <a:rPr sz="1050" b="1">
-                          <a:solidFill>
-                            <a:srgbClr val="463A32"/>
-                          </a:solidFill>
-                        </a:rPr>
-                        <a:t>80.9</a:t>
-                      </a:r>
-                    </a:p>
-                  </a:txBody>
-                  <a:tcPr>
-                    <a:solidFill>
-                      <a:srgbClr val="F4E8DA"/>
-                    </a:solidFill>
-                  </a:tcPr>
-                </a:tc>
-                <a:tc>
-                  <a:txBody>
-                    <a:bodyPr/>
-                    <a:lstStyle/>
-                    <a:p>
-                      <a:pPr algn="ctr"/>
-                      <a:r>
-                        <a:rPr sz="1050">
-                          <a:solidFill>
-                            <a:srgbClr val="463A32"/>
-                          </a:solidFill>
-                        </a:rPr>
-                        <a:t>8</a:t>
-                      </a:r>
-                    </a:p>
-                  </a:txBody>
-                  <a:tcPr>
-                    <a:solidFill>
-                      <a:srgbClr val="F4E8DA"/>
-                    </a:solidFill>
-                  </a:tcPr>
-                </a:tc>
-                <a:tc>
-                  <a:txBody>
-                    <a:bodyPr/>
-                    <a:lstStyle/>
-                    <a:p>
-                      <a:pPr algn="ctr"/>
-                      <a:r>
-                        <a:rPr sz="1050">
-                          <a:solidFill>
-                            <a:srgbClr val="463A32"/>
-                          </a:solidFill>
-                        </a:rPr>
-                        <a:t>2</a:t>
-                      </a:r>
-                    </a:p>
-                  </a:txBody>
-                  <a:tcPr>
-                    <a:solidFill>
-                      <a:srgbClr val="F4E8DA"/>
-                    </a:solidFill>
-                  </a:tcPr>
-                </a:tc>
-                <a:tc>
-                  <a:txBody>
-                    <a:bodyPr/>
-                    <a:lstStyle/>
-                    <a:p>
-                      <a:pPr algn="ctr"/>
-                      <a:r>
-                        <a:rPr sz="1050">
-                          <a:solidFill>
-                            <a:srgbClr val="463A32"/>
-                          </a:solidFill>
-                        </a:rPr>
-                        <a:t>$172.576</a:t>
-                      </a:r>
-                    </a:p>
-                  </a:txBody>
-                  <a:tcPr>
-                    <a:solidFill>
-                      <a:srgbClr val="F4E8DA"/>
-                    </a:solidFill>
-                  </a:tcPr>
-                </a:tc>
-                <a:tc>
-                  <a:txBody>
-                    <a:bodyPr/>
-                    <a:lstStyle/>
-                    <a:p>
-                      <a:pPr algn="ctr"/>
-                      <a:r>
-                        <a:rPr sz="1050" u="sng">
-                          <a:solidFill>
-                            <a:srgbClr val="8F5A44"/>
-                          </a:solidFill>
-                          <a:hlinkClick r:id="rId5"/>
-                        </a:rPr>
-                        <a:t>ver</a:t>
-                      </a:r>
-                    </a:p>
-                  </a:txBody>
-                  <a:tcPr>
-                    <a:solidFill>
-                      <a:srgbClr val="F4E8DA"/>
-                    </a:solidFill>
-                  </a:tcPr>
-                </a:tc>
-              </a:tr>
-              <a:tr h="491490">
-                <a:tc>
-                  <a:txBody>
-                    <a:bodyPr/>
-                    <a:lstStyle/>
-                    <a:p>
-                      <a:r>
-                        <a:rPr sz="1050">
-                          <a:solidFill>
-                            <a:srgbClr val="463A32"/>
-                          </a:solidFill>
-                        </a:rPr>
-                        <a:t>Casa Las Flores</a:t>
-                      </a:r>
-                    </a:p>
-                  </a:txBody>
-                  <a:tcPr>
-                    <a:solidFill>
-                      <a:srgbClr val="FFFFFF"/>
-                    </a:solidFill>
-                  </a:tcPr>
-                </a:tc>
-                <a:tc>
-                  <a:txBody>
-                    <a:bodyPr/>
-                    <a:lstStyle/>
-                    <a:p>
-                      <a:r>
-                        <a:rPr sz="1050">
-                          <a:solidFill>
-                            <a:srgbClr val="463A32"/>
-                          </a:solidFill>
-                        </a:rPr>
-                        <a:t>Las Flores (norte)</a:t>
-                      </a:r>
-                    </a:p>
-                  </a:txBody>
-                  <a:tcPr>
-                    <a:solidFill>
-                      <a:srgbClr val="FFFFFF"/>
-                    </a:solidFill>
-                  </a:tcPr>
-                </a:tc>
-                <a:tc>
-                  <a:txBody>
-                    <a:bodyPr/>
-                    <a:lstStyle/>
-                    <a:p>
-                      <a:pPr algn="ctr"/>
-                      <a:r>
-                        <a:rPr sz="1050" b="1">
-                          <a:solidFill>
-                            <a:srgbClr val="463A32"/>
-                          </a:solidFill>
-                        </a:rPr>
-                        <a:t>76.1</a:t>
-                      </a:r>
-                    </a:p>
-                  </a:txBody>
-                  <a:tcPr>
-                    <a:solidFill>
-                      <a:srgbClr val="FFFFFF"/>
-                    </a:solidFill>
-                  </a:tcPr>
-                </a:tc>
-                <a:tc>
-                  <a:txBody>
-                    <a:bodyPr/>
-                    <a:lstStyle/>
-                    <a:p>
-                      <a:pPr algn="ctr"/>
-                      <a:r>
-                        <a:rPr sz="1050">
-                          <a:solidFill>
-                            <a:srgbClr val="463A32"/>
-                          </a:solidFill>
-                        </a:rPr>
-                        <a:t>8</a:t>
-                      </a:r>
-                    </a:p>
-                  </a:txBody>
-                  <a:tcPr>
-                    <a:solidFill>
-                      <a:srgbClr val="FFFFFF"/>
-                    </a:solidFill>
-                  </a:tcPr>
-                </a:tc>
-                <a:tc>
-                  <a:txBody>
-                    <a:bodyPr/>
-                    <a:lstStyle/>
-                    <a:p>
-                      <a:pPr algn="ctr"/>
-                      <a:r>
-                        <a:rPr sz="1050">
-                          <a:solidFill>
-                            <a:srgbClr val="463A32"/>
-                          </a:solidFill>
-                        </a:rPr>
-                        <a:t>2</a:t>
-                      </a:r>
-                    </a:p>
-                  </a:txBody>
-                  <a:tcPr>
-                    <a:solidFill>
-                      <a:srgbClr val="FFFFFF"/>
-                    </a:solidFill>
-                  </a:tcPr>
-                </a:tc>
-                <a:tc>
-                  <a:txBody>
-                    <a:bodyPr/>
-                    <a:lstStyle/>
-                    <a:p>
-                      <a:pPr algn="ctr"/>
-                      <a:r>
-                        <a:rPr sz="1050">
-                          <a:solidFill>
-                            <a:srgbClr val="463A32"/>
-                          </a:solidFill>
-                        </a:rPr>
-                        <a:t>$94.285</a:t>
-                      </a:r>
-                    </a:p>
-                  </a:txBody>
-                  <a:tcPr>
-                    <a:solidFill>
-                      <a:srgbClr val="FFFFFF"/>
-                    </a:solidFill>
-                  </a:tcPr>
-                </a:tc>
-                <a:tc>
-                  <a:txBody>
-                    <a:bodyPr/>
-                    <a:lstStyle/>
-                    <a:p>
-                      <a:pPr algn="ctr"/>
-                      <a:r>
-                        <a:rPr sz="1050" u="sng">
-                          <a:solidFill>
-                            <a:srgbClr val="8F5A44"/>
-                          </a:solidFill>
-                          <a:hlinkClick r:id="rId6"/>
-                        </a:rPr>
-                        <a:t>ver</a:t>
-                      </a:r>
-                    </a:p>
-                  </a:txBody>
-                  <a:tcPr>
-                    <a:solidFill>
-                      <a:srgbClr val="FFFFFF"/>
-                    </a:solidFill>
-                  </a:tcPr>
-                </a:tc>
-              </a:tr>
-              <a:tr h="491490">
-                <a:tc>
-                  <a:txBody>
-                    <a:bodyPr/>
-                    <a:lstStyle/>
-                    <a:p>
-                      <a:r>
-                        <a:rPr sz="1050">
-                          <a:solidFill>
-                            <a:srgbClr val="463A32"/>
-                          </a:solidFill>
-                        </a:rPr>
-                        <a:t>Casa 8p Granada</a:t>
-                      </a:r>
-                    </a:p>
-                  </a:txBody>
-                  <a:tcPr>
-                    <a:solidFill>
-                      <a:srgbClr val="F4E8DA"/>
-                    </a:solidFill>
-                  </a:tcPr>
-                </a:tc>
-                <a:tc>
-                  <a:txBody>
-                    <a:bodyPr/>
-                    <a:lstStyle/>
-                    <a:p>
-                      <a:r>
-                        <a:rPr sz="1050">
-                          <a:solidFill>
-                            <a:srgbClr val="463A32"/>
-                          </a:solidFill>
-                        </a:rPr>
-                        <a:t>Granada</a:t>
-                      </a:r>
-                    </a:p>
-                  </a:txBody>
-                  <a:tcPr>
-                    <a:solidFill>
-                      <a:srgbClr val="F4E8DA"/>
-                    </a:solidFill>
-                  </a:tcPr>
-                </a:tc>
-                <a:tc>
-                  <a:txBody>
-                    <a:bodyPr/>
-                    <a:lstStyle/>
-                    <a:p>
-                      <a:pPr algn="ctr"/>
-                      <a:r>
-                        <a:rPr sz="1050" b="1">
-                          <a:solidFill>
-                            <a:srgbClr val="463A32"/>
-                          </a:solidFill>
-                        </a:rPr>
-                        <a:t>71.1</a:t>
-                      </a:r>
-                    </a:p>
-                  </a:txBody>
-                  <a:tcPr>
-                    <a:solidFill>
-                      <a:srgbClr val="F4E8DA"/>
-                    </a:solidFill>
-                  </a:tcPr>
-                </a:tc>
-                <a:tc>
-                  <a:txBody>
-                    <a:bodyPr/>
-                    <a:lstStyle/>
-                    <a:p>
-                      <a:pPr algn="ctr"/>
-                      <a:r>
-                        <a:rPr sz="1050">
-                          <a:solidFill>
-                            <a:srgbClr val="463A32"/>
-                          </a:solidFill>
-                        </a:rPr>
-                        <a:t>9</a:t>
-                      </a:r>
-                    </a:p>
-                  </a:txBody>
-                  <a:tcPr>
-                    <a:solidFill>
-                      <a:srgbClr val="F4E8DA"/>
-                    </a:solidFill>
-                  </a:tcPr>
-                </a:tc>
-                <a:tc>
-                  <a:txBody>
-                    <a:bodyPr/>
-                    <a:lstStyle/>
-                    <a:p>
-                      <a:pPr algn="ctr"/>
-                      <a:r>
-                        <a:rPr sz="1050">
-                          <a:solidFill>
-                            <a:srgbClr val="463A32"/>
-                          </a:solidFill>
-                        </a:rPr>
-                        <a:t>2</a:t>
-                      </a:r>
-                    </a:p>
-                  </a:txBody>
-                  <a:tcPr>
-                    <a:solidFill>
-                      <a:srgbClr val="F4E8DA"/>
-                    </a:solidFill>
-                  </a:tcPr>
-                </a:tc>
-                <a:tc>
-                  <a:txBody>
-                    <a:bodyPr/>
-                    <a:lstStyle/>
-                    <a:p>
-                      <a:pPr algn="ctr"/>
-                      <a:r>
-                        <a:rPr sz="1050">
-                          <a:solidFill>
-                            <a:srgbClr val="463A32"/>
-                          </a:solidFill>
-                        </a:rPr>
-                        <a:t>$124.151</a:t>
-                      </a:r>
-                    </a:p>
-                  </a:txBody>
-                  <a:tcPr>
-                    <a:solidFill>
-                      <a:srgbClr val="F4E8DA"/>
-                    </a:solidFill>
-                  </a:tcPr>
-                </a:tc>
-                <a:tc>
-                  <a:txBody>
-                    <a:bodyPr/>
-                    <a:lstStyle/>
-                    <a:p>
-                      <a:pPr algn="ctr"/>
-                      <a:r>
-                        <a:rPr sz="1050" u="sng">
-                          <a:solidFill>
-                            <a:srgbClr val="8F5A44"/>
-                          </a:solidFill>
-                          <a:hlinkClick r:id="rId7"/>
-                        </a:rPr>
-                        <a:t>ver</a:t>
-                      </a:r>
-                    </a:p>
-                  </a:txBody>
-                  <a:tcPr>
-                    <a:solidFill>
-                      <a:srgbClr val="F4E8DA"/>
-                    </a:solidFill>
-                  </a:tcPr>
-                </a:tc>
-              </a:tr>
-              <a:tr h="491490">
-                <a:tc>
-                  <a:txBody>
-                    <a:bodyPr/>
-                    <a:lstStyle/>
-                    <a:p>
-                      <a:r>
-                        <a:rPr sz="1050">
-                          <a:solidFill>
-                            <a:srgbClr val="463A32"/>
-                          </a:solidFill>
-                        </a:rPr>
-                        <a:t>Casa piscina privada</a:t>
-                      </a:r>
-                    </a:p>
-                  </a:txBody>
-                  <a:tcPr>
-                    <a:solidFill>
-                      <a:srgbClr val="FFFFFF"/>
-                    </a:solidFill>
-                  </a:tcPr>
-                </a:tc>
-                <a:tc>
-                  <a:txBody>
-                    <a:bodyPr/>
-                    <a:lstStyle/>
-                    <a:p>
-                      <a:r>
-                        <a:rPr sz="1050">
-                          <a:solidFill>
-                            <a:srgbClr val="463A32"/>
-                          </a:solidFill>
-                        </a:rPr>
-                        <a:t>San Antonio</a:t>
-                      </a:r>
-                    </a:p>
-                  </a:txBody>
-                  <a:tcPr>
-                    <a:solidFill>
-                      <a:srgbClr val="FFFFFF"/>
-                    </a:solidFill>
-                  </a:tcPr>
-                </a:tc>
-                <a:tc>
-                  <a:txBody>
-                    <a:bodyPr/>
-                    <a:lstStyle/>
-                    <a:p>
-                      <a:pPr algn="ctr"/>
-                      <a:r>
-                        <a:rPr sz="1050" b="1">
-                          <a:solidFill>
-                            <a:srgbClr val="463A32"/>
-                          </a:solidFill>
-                        </a:rPr>
-                        <a:t>66.8</a:t>
-                      </a:r>
-                    </a:p>
-                  </a:txBody>
-                  <a:tcPr>
-                    <a:solidFill>
-                      <a:srgbClr val="FFFFFF"/>
-                    </a:solidFill>
-                  </a:tcPr>
-                </a:tc>
-                <a:tc>
-                  <a:txBody>
-                    <a:bodyPr/>
-                    <a:lstStyle/>
-                    <a:p>
-                      <a:pPr algn="ctr"/>
-                      <a:r>
-                        <a:rPr sz="1050">
-                          <a:solidFill>
-                            <a:srgbClr val="463A32"/>
-                          </a:solidFill>
-                        </a:rPr>
-                        <a:t>8</a:t>
-                      </a:r>
-                    </a:p>
-                  </a:txBody>
-                  <a:tcPr>
-                    <a:solidFill>
-                      <a:srgbClr val="FFFFFF"/>
-                    </a:solidFill>
-                  </a:tcPr>
-                </a:tc>
-                <a:tc>
-                  <a:txBody>
-                    <a:bodyPr/>
-                    <a:lstStyle/>
-                    <a:p>
-                      <a:pPr algn="ctr"/>
-                      <a:r>
-                        <a:rPr sz="1050">
-                          <a:solidFill>
-                            <a:srgbClr val="463A32"/>
-                          </a:solidFill>
-                        </a:rPr>
-                        <a:t>2,5</a:t>
-                      </a:r>
-                    </a:p>
-                  </a:txBody>
-                  <a:tcPr>
-                    <a:solidFill>
-                      <a:srgbClr val="FFFFFF"/>
-                    </a:solidFill>
-                  </a:tcPr>
-                </a:tc>
-                <a:tc>
-                  <a:txBody>
-                    <a:bodyPr/>
-                    <a:lstStyle/>
-                    <a:p>
-                      <a:pPr algn="ctr"/>
-                      <a:r>
-                        <a:rPr sz="1050">
-                          <a:solidFill>
-                            <a:srgbClr val="463A32"/>
-                          </a:solidFill>
-                        </a:rPr>
-                        <a:t>$430.608</a:t>
-                      </a:r>
-                    </a:p>
-                  </a:txBody>
-                  <a:tcPr>
-                    <a:solidFill>
-                      <a:srgbClr val="FFFFFF"/>
-                    </a:solidFill>
-                  </a:tcPr>
-                </a:tc>
-                <a:tc>
-                  <a:txBody>
-                    <a:bodyPr/>
-                    <a:lstStyle/>
-                    <a:p>
-                      <a:pPr algn="ctr"/>
-                      <a:r>
-                        <a:rPr sz="1050" u="sng">
-                          <a:solidFill>
-                            <a:srgbClr val="8F5A44"/>
-                          </a:solidFill>
-                          <a:hlinkClick r:id="rId8"/>
                         </a:rPr>
                         <a:t>ver</a:t>
                       </a:r>

--- a/output/Mini-Boom-en-Cali_Presentacion.pptx
+++ b/output/Mini-Boom-en-Cali_Presentacion.pptx
@@ -266,7 +266,10 @@
       </c:catAx>
       <c:valAx>
         <c:axId val="-2113994440"/>
-        <c:scaling/>
+        <c:scaling>
+          <c:max val="100.0"/>
+          <c:min val="0.0"/>
+        </c:scaling>
         <c:delete val="0"/>
         <c:axPos val="b"/>
         <c:majorGridlines/>
@@ -342,18 +345,29 @@
               </a:solidFill>
             </c:spPr>
           </c:dPt>
+          <c:dPt>
+            <c:idx val="3"/>
+            <c:spPr>
+              <a:solidFill>
+                <a:srgbClr val="D8C4B2"/>
+              </a:solidFill>
+            </c:spPr>
+          </c:dPt>
           <c:cat>
             <c:strRef>
-              <c:f>Sheet1!$A$2:$A$4</c:f>
+              <c:f>Sheet1!$A$2:$A$5</c:f>
               <c:strCache>
-                <c:ptCount val="3"/>
+                <c:ptCount val="4"/>
                 <c:pt idx="0">
-                  <c:v>Apto cerca Estadio</c:v>
+                  <c:v>Apto La Flora (7 camas)</c:v>
                 </c:pt>
                 <c:pt idx="1">
                   <c:v>Casa 7p garaje</c:v>
                 </c:pt>
                 <c:pt idx="2">
+                  <c:v>Casa-museo S.Antonio</c:v>
+                </c:pt>
+                <c:pt idx="3">
                   <c:v>Refugio Vistas</c:v>
                 </c:pt>
               </c:strCache>
@@ -361,17 +375,20 @@
           </c:cat>
           <c:val>
             <c:numRef>
-              <c:f>Sheet1!$B$2:$B$4</c:f>
+              <c:f>Sheet1!$B$2:$B$5</c:f>
               <c:numCache>
                 <c:formatCode>General</c:formatCode>
-                <c:ptCount val="3"/>
+                <c:ptCount val="4"/>
                 <c:pt idx="0">
-                  <c:v>79.2</c:v>
+                  <c:v>72.4</c:v>
                 </c:pt>
                 <c:pt idx="1">
-                  <c:v>78.4</c:v>
+                  <c:v>70.8</c:v>
                 </c:pt>
                 <c:pt idx="2">
+                  <c:v>65.3</c:v>
+                </c:pt>
+                <c:pt idx="3">
                   <c:v>63.2</c:v>
                 </c:pt>
               </c:numCache>
@@ -400,7 +417,10 @@
       </c:catAx>
       <c:valAx>
         <c:axId val="-2113994440"/>
-        <c:scaling/>
+        <c:scaling>
+          <c:max val="100.0"/>
+          <c:min val="0.0"/>
+        </c:scaling>
         <c:delete val="0"/>
         <c:axPos val="b"/>
         <c:majorGridlines/>
@@ -11103,7 +11123,7 @@
                   <a:srgbClr val="8F5A44"/>
                 </a:solidFill>
               </a:rPr>
-              <a:t>★ Apto cerca Estadio</a:t>
+              <a:t>★ Apto La Flora (7 camas)</a:t>
             </a:r>
           </a:p>
           <a:p>
@@ -11114,7 +11134,7 @@
                   <a:srgbClr val="463A32"/>
                 </a:solidFill>
               </a:rPr>
-              <a:t>lidera con 79.2/100.</a:t>
+              <a:t>lidera con 72.4/100.</a:t>
             </a:r>
           </a:p>
           <a:p>
@@ -11136,7 +11156,7 @@
                   <a:srgbClr val="463A32"/>
                 </a:solidFill>
               </a:rPr>
-              <a:t>A ~1.9 km de la rumba. Con carro local ≈ $286.407 pp.</a:t>
+              <a:t>A ~4.8 km de la rumba. Con carro local ≈ $385.894 pp.</a:t>
             </a:r>
           </a:p>
           <a:p>
@@ -11158,7 +11178,7 @@
                   <a:srgbClr val="8A7A6E"/>
                 </a:solidFill>
               </a:rPr>
-              <a:t>Ubicación verificada por coordenadas. Confirmar disponibilidad del 30.</a:t>
+              <a:t>Ubicación verificada por coordenadas. Confirmar disponibilidad del rango 30→2.</a:t>
             </a:r>
           </a:p>
         </p:txBody>
@@ -11304,7 +11324,7 @@
                   <a:srgbClr val="463A32"/>
                 </a:solidFill>
               </a:rPr>
-              <a:t>Alojamiento entero (ningún baño se comparte). «Dist.» = km a la zona de actividades (coordenadas). Aire «según anuncio» y disponibilidad del 30: confirmar.</a:t>
+              <a:t>Alojamiento entero (ningún baño se comparte). «Dist.» = km a la zona de actividades (coordenadas). Aire «según anuncio» y disponibilidad del 30→2: confirmar.</a:t>
             </a:r>
           </a:p>
         </p:txBody>
@@ -11336,7 +11356,7 @@
                 <a:gridCol w="1856231"/>
                 <a:gridCol w="731520"/>
               </a:tblGrid>
-              <a:tr h="982980">
+              <a:tr h="786384">
                 <a:tc>
                   <a:txBody>
                     <a:bodyPr/>
@@ -11485,7 +11505,7 @@
                   </a:tcPr>
                 </a:tc>
               </a:tr>
-              <a:tr h="982980">
+              <a:tr h="786384">
                 <a:tc>
                   <a:txBody>
                     <a:bodyPr/>
@@ -11497,7 +11517,7 @@
                             <a:srgbClr val="463A32"/>
                           </a:solidFill>
                         </a:rPr>
-                        <a:t>Apto cerca Estadio ★</a:t>
+                        <a:t>Apto La Flora (7 camas) ★</a:t>
                       </a:r>
                     </a:p>
                   </a:txBody>
@@ -11518,7 +11538,7 @@
                             <a:srgbClr val="463A32"/>
                           </a:solidFill>
                         </a:rPr>
-                        <a:t>Oeste</a:t>
+                        <a:t>Norte (La Flora)</a:t>
                       </a:r>
                     </a:p>
                   </a:txBody>
@@ -11540,7 +11560,7 @@
                             <a:srgbClr val="463A32"/>
                           </a:solidFill>
                         </a:rPr>
-                        <a:t>~1.9 km</a:t>
+                        <a:t>~4.8 km</a:t>
                       </a:r>
                     </a:p>
                   </a:txBody>
@@ -11562,7 +11582,7 @@
                             <a:srgbClr val="463A32"/>
                           </a:solidFill>
                         </a:rPr>
-                        <a:t>79.2</a:t>
+                        <a:t>72.4</a:t>
                       </a:r>
                     </a:p>
                   </a:txBody>
@@ -11606,7 +11626,7 @@
                             <a:srgbClr val="463A32"/>
                           </a:solidFill>
                         </a:rPr>
-                        <a:t>$86.407</a:t>
+                        <a:t>$185.894</a:t>
                       </a:r>
                     </a:p>
                   </a:txBody>
@@ -11640,7 +11660,7 @@
                   </a:tcPr>
                 </a:tc>
               </a:tr>
-              <a:tr h="982980">
+              <a:tr h="786384">
                 <a:tc>
                   <a:txBody>
                     <a:bodyPr/>
@@ -11717,7 +11737,7 @@
                             <a:srgbClr val="463A32"/>
                           </a:solidFill>
                         </a:rPr>
-                        <a:t>78.4</a:t>
+                        <a:t>70.8</a:t>
                       </a:r>
                     </a:p>
                   </a:txBody>
@@ -11795,7 +11815,7 @@
                   </a:tcPr>
                 </a:tc>
               </a:tr>
-              <a:tr h="982980">
+              <a:tr h="786384">
                 <a:tc>
                   <a:txBody>
                     <a:bodyPr/>
@@ -11807,7 +11827,7 @@
                             <a:srgbClr val="463A32"/>
                           </a:solidFill>
                         </a:rPr>
-                        <a:t>Refugio Vistas</a:t>
+                        <a:t>Casa-museo S.Antonio</a:t>
                       </a:r>
                     </a:p>
                   </a:txBody>
@@ -11828,7 +11848,7 @@
                             <a:srgbClr val="463A32"/>
                           </a:solidFill>
                         </a:rPr>
-                        <a:t>Oeste (ladera)</a:t>
+                        <a:t>Oeste (San Antonio)</a:t>
                       </a:r>
                     </a:p>
                   </a:txBody>
@@ -11850,7 +11870,7 @@
                             <a:srgbClr val="463A32"/>
                           </a:solidFill>
                         </a:rPr>
-                        <a:t>~2.4 km</a:t>
+                        <a:t>~0.6 km</a:t>
                       </a:r>
                     </a:p>
                   </a:txBody>
@@ -11872,7 +11892,7 @@
                             <a:srgbClr val="463A32"/>
                           </a:solidFill>
                         </a:rPr>
-                        <a:t>63.2</a:t>
+                        <a:t>65.3</a:t>
                       </a:r>
                     </a:p>
                   </a:txBody>
@@ -11894,7 +11914,7 @@
                             <a:srgbClr val="463A32"/>
                           </a:solidFill>
                         </a:rPr>
-                        <a:t>3</a:t>
+                        <a:t>2,5</a:t>
                       </a:r>
                     </a:p>
                   </a:txBody>
@@ -11916,7 +11936,7 @@
                             <a:srgbClr val="463A32"/>
                           </a:solidFill>
                         </a:rPr>
-                        <a:t>$282.068</a:t>
+                        <a:t>$184.885</a:t>
                       </a:r>
                     </a:p>
                   </a:txBody>
@@ -11946,6 +11966,161 @@
                   <a:tcPr>
                     <a:solidFill>
                       <a:srgbClr val="FFFFFF"/>
+                    </a:solidFill>
+                  </a:tcPr>
+                </a:tc>
+              </a:tr>
+              <a:tr h="786384">
+                <a:tc>
+                  <a:txBody>
+                    <a:bodyPr/>
+                    <a:lstStyle/>
+                    <a:p>
+                      <a:r>
+                        <a:rPr sz="1050">
+                          <a:solidFill>
+                            <a:srgbClr val="463A32"/>
+                          </a:solidFill>
+                        </a:rPr>
+                        <a:t>Refugio Vistas</a:t>
+                      </a:r>
+                    </a:p>
+                  </a:txBody>
+                  <a:tcPr>
+                    <a:solidFill>
+                      <a:srgbClr val="F4E8DA"/>
+                    </a:solidFill>
+                  </a:tcPr>
+                </a:tc>
+                <a:tc>
+                  <a:txBody>
+                    <a:bodyPr/>
+                    <a:lstStyle/>
+                    <a:p>
+                      <a:r>
+                        <a:rPr sz="1050">
+                          <a:solidFill>
+                            <a:srgbClr val="463A32"/>
+                          </a:solidFill>
+                        </a:rPr>
+                        <a:t>Oeste (ladera)</a:t>
+                      </a:r>
+                    </a:p>
+                  </a:txBody>
+                  <a:tcPr>
+                    <a:solidFill>
+                      <a:srgbClr val="F4E8DA"/>
+                    </a:solidFill>
+                  </a:tcPr>
+                </a:tc>
+                <a:tc>
+                  <a:txBody>
+                    <a:bodyPr/>
+                    <a:lstStyle/>
+                    <a:p>
+                      <a:pPr algn="ctr"/>
+                      <a:r>
+                        <a:rPr sz="1050" b="1">
+                          <a:solidFill>
+                            <a:srgbClr val="463A32"/>
+                          </a:solidFill>
+                        </a:rPr>
+                        <a:t>~2.4 km</a:t>
+                      </a:r>
+                    </a:p>
+                  </a:txBody>
+                  <a:tcPr>
+                    <a:solidFill>
+                      <a:srgbClr val="F4E8DA"/>
+                    </a:solidFill>
+                  </a:tcPr>
+                </a:tc>
+                <a:tc>
+                  <a:txBody>
+                    <a:bodyPr/>
+                    <a:lstStyle/>
+                    <a:p>
+                      <a:pPr algn="ctr"/>
+                      <a:r>
+                        <a:rPr sz="1050">
+                          <a:solidFill>
+                            <a:srgbClr val="463A32"/>
+                          </a:solidFill>
+                        </a:rPr>
+                        <a:t>63.2</a:t>
+                      </a:r>
+                    </a:p>
+                  </a:txBody>
+                  <a:tcPr>
+                    <a:solidFill>
+                      <a:srgbClr val="F4E8DA"/>
+                    </a:solidFill>
+                  </a:tcPr>
+                </a:tc>
+                <a:tc>
+                  <a:txBody>
+                    <a:bodyPr/>
+                    <a:lstStyle/>
+                    <a:p>
+                      <a:pPr algn="ctr"/>
+                      <a:r>
+                        <a:rPr sz="1050">
+                          <a:solidFill>
+                            <a:srgbClr val="463A32"/>
+                          </a:solidFill>
+                        </a:rPr>
+                        <a:t>3</a:t>
+                      </a:r>
+                    </a:p>
+                  </a:txBody>
+                  <a:tcPr>
+                    <a:solidFill>
+                      <a:srgbClr val="F4E8DA"/>
+                    </a:solidFill>
+                  </a:tcPr>
+                </a:tc>
+                <a:tc>
+                  <a:txBody>
+                    <a:bodyPr/>
+                    <a:lstStyle/>
+                    <a:p>
+                      <a:pPr algn="ctr"/>
+                      <a:r>
+                        <a:rPr sz="1050">
+                          <a:solidFill>
+                            <a:srgbClr val="463A32"/>
+                          </a:solidFill>
+                        </a:rPr>
+                        <a:t>$282.068</a:t>
+                      </a:r>
+                    </a:p>
+                  </a:txBody>
+                  <a:tcPr>
+                    <a:solidFill>
+                      <a:srgbClr val="F4E8DA"/>
+                    </a:solidFill>
+                  </a:tcPr>
+                </a:tc>
+                <a:tc>
+                  <a:txBody>
+                    <a:bodyPr/>
+                    <a:lstStyle/>
+                    <a:p>
+                      <a:pPr algn="ctr"/>
+                      <a:r>
+                        <a:rPr sz="1050" u="sng">
+                          <a:solidFill>
+                            <a:srgbClr val="8F5A44"/>
+                          </a:solidFill>
+                          <a:hlinkClick r:id="rId5"/>
+                        </a:rPr>
+                        <a:t>ver</a:t>
+                      </a:r>
+                    </a:p>
+                  </a:txBody>
+                  <a:tcPr>
+                    <a:solidFill>
+                      <a:srgbClr val="F4E8DA"/>
                     </a:solidFill>
                   </a:tcPr>
                 </a:tc>

--- a/output/Mini-Boom-en-Cali_Presentacion.pptx
+++ b/output/Mini-Boom-en-Cali_Presentacion.pptx
@@ -325,7 +325,7 @@
             <c:idx val="0"/>
             <c:spPr>
               <a:solidFill>
-                <a:srgbClr val="D9A75E"/>
+                <a:srgbClr val="D8C4B2"/>
               </a:solidFill>
             </c:spPr>
           </c:dPt>
@@ -333,7 +333,7 @@
             <c:idx val="1"/>
             <c:spPr>
               <a:solidFill>
-                <a:srgbClr val="D8C4B2"/>
+                <a:srgbClr val="D9A75E"/>
               </a:solidFill>
             </c:spPr>
           </c:dPt>
@@ -359,16 +359,16 @@
               <c:strCache>
                 <c:ptCount val="4"/>
                 <c:pt idx="0">
-                  <c:v>Apto La Flora (7 camas)</c:v>
+                  <c:v>Apto Granada/Chipichape</c:v>
                 </c:pt>
                 <c:pt idx="1">
-                  <c:v>Casa 7p garaje</c:v>
+                  <c:v>Apto La Flora (7 camas)</c:v>
                 </c:pt>
                 <c:pt idx="2">
                   <c:v>Casa-museo S.Antonio</c:v>
                 </c:pt>
                 <c:pt idx="3">
-                  <c:v>Refugio Vistas</c:v>
+                  <c:v>Torre Gardes</c:v>
                 </c:pt>
               </c:strCache>
             </c:strRef>
@@ -380,16 +380,16 @@
                 <c:formatCode>General</c:formatCode>
                 <c:ptCount val="4"/>
                 <c:pt idx="0">
-                  <c:v>72.4</c:v>
+                  <c:v>77.2</c:v>
                 </c:pt>
                 <c:pt idx="1">
-                  <c:v>70.8</c:v>
+                  <c:v>74.6</c:v>
                 </c:pt>
                 <c:pt idx="2">
-                  <c:v>65.3</c:v>
+                  <c:v>67.6</c:v>
                 </c:pt>
                 <c:pt idx="3">
-                  <c:v>63.2</c:v>
+                  <c:v>66.8</c:v>
                 </c:pt>
               </c:numCache>
             </c:numRef>
@@ -11118,7 +11118,7 @@
           <a:p>
             <a:pPr algn="l"/>
             <a:r>
-              <a:rPr sz="1700" b="1">
+              <a:rPr sz="1600" b="1">
                 <a:solidFill>
                   <a:srgbClr val="8F5A44"/>
                 </a:solidFill>
@@ -11129,12 +11129,12 @@
           <a:p>
             <a:pPr algn="l"/>
             <a:r>
-              <a:rPr sz="1500" b="0">
+              <a:rPr sz="1400" b="0">
                 <a:solidFill>
                   <a:srgbClr val="463A32"/>
                 </a:solidFill>
               </a:rPr>
-              <a:t>lidera con 72.4/100.</a:t>
+              <a:t>La mejor CON cama para los 7 (7 camas, 74.6/100).</a:t>
             </a:r>
           </a:p>
           <a:p>
@@ -11156,7 +11156,7 @@
                   <a:srgbClr val="463A32"/>
                 </a:solidFill>
               </a:rPr>
-              <a:t>A ~4.8 km de la rumba. Con carro local ≈ $385.894 pp.</a:t>
+              <a:t>A ~4.8 km. Con carro local ≈ $385.894 pp.</a:t>
             </a:r>
           </a:p>
           <a:p>
@@ -11173,12 +11173,12 @@
           <a:p>
             <a:pPr algn="l"/>
             <a:r>
-              <a:rPr sz="1200" b="0">
+              <a:rPr sz="1150" b="0">
                 <a:solidFill>
                   <a:srgbClr val="8A7A6E"/>
                 </a:solidFill>
               </a:rPr>
-              <a:t>Ubicación verificada por coordenadas. Confirmar disponibilidad del rango 30→2.</a:t>
+              <a:t>La #1 por puntaje es más barata/céntrica pero trae 4 camas. Confirmá disponibilidad 30→2.</a:t>
             </a:r>
           </a:p>
         </p:txBody>
@@ -11517,6 +11517,161 @@
                             <a:srgbClr val="463A32"/>
                           </a:solidFill>
                         </a:rPr>
+                        <a:t>Apto Granada/Chipichape</a:t>
+                      </a:r>
+                    </a:p>
+                  </a:txBody>
+                  <a:tcPr>
+                    <a:solidFill>
+                      <a:srgbClr val="FFFFFF"/>
+                    </a:solidFill>
+                  </a:tcPr>
+                </a:tc>
+                <a:tc>
+                  <a:txBody>
+                    <a:bodyPr/>
+                    <a:lstStyle/>
+                    <a:p>
+                      <a:r>
+                        <a:rPr sz="1050">
+                          <a:solidFill>
+                            <a:srgbClr val="463A32"/>
+                          </a:solidFill>
+                        </a:rPr>
+                        <a:t>Noroeste</a:t>
+                      </a:r>
+                    </a:p>
+                  </a:txBody>
+                  <a:tcPr>
+                    <a:solidFill>
+                      <a:srgbClr val="FFFFFF"/>
+                    </a:solidFill>
+                  </a:tcPr>
+                </a:tc>
+                <a:tc>
+                  <a:txBody>
+                    <a:bodyPr/>
+                    <a:lstStyle/>
+                    <a:p>
+                      <a:pPr algn="ctr"/>
+                      <a:r>
+                        <a:rPr sz="1050" b="1">
+                          <a:solidFill>
+                            <a:srgbClr val="463A32"/>
+                          </a:solidFill>
+                        </a:rPr>
+                        <a:t>~1.8 km</a:t>
+                      </a:r>
+                    </a:p>
+                  </a:txBody>
+                  <a:tcPr>
+                    <a:solidFill>
+                      <a:srgbClr val="FFFFFF"/>
+                    </a:solidFill>
+                  </a:tcPr>
+                </a:tc>
+                <a:tc>
+                  <a:txBody>
+                    <a:bodyPr/>
+                    <a:lstStyle/>
+                    <a:p>
+                      <a:pPr algn="ctr"/>
+                      <a:r>
+                        <a:rPr sz="1050">
+                          <a:solidFill>
+                            <a:srgbClr val="463A32"/>
+                          </a:solidFill>
+                        </a:rPr>
+                        <a:t>77.2</a:t>
+                      </a:r>
+                    </a:p>
+                  </a:txBody>
+                  <a:tcPr>
+                    <a:solidFill>
+                      <a:srgbClr val="FFFFFF"/>
+                    </a:solidFill>
+                  </a:tcPr>
+                </a:tc>
+                <a:tc>
+                  <a:txBody>
+                    <a:bodyPr/>
+                    <a:lstStyle/>
+                    <a:p>
+                      <a:pPr algn="ctr"/>
+                      <a:r>
+                        <a:rPr sz="1050">
+                          <a:solidFill>
+                            <a:srgbClr val="463A32"/>
+                          </a:solidFill>
+                        </a:rPr>
+                        <a:t>2,5</a:t>
+                      </a:r>
+                    </a:p>
+                  </a:txBody>
+                  <a:tcPr>
+                    <a:solidFill>
+                      <a:srgbClr val="FFFFFF"/>
+                    </a:solidFill>
+                  </a:tcPr>
+                </a:tc>
+                <a:tc>
+                  <a:txBody>
+                    <a:bodyPr/>
+                    <a:lstStyle/>
+                    <a:p>
+                      <a:pPr algn="ctr"/>
+                      <a:r>
+                        <a:rPr sz="1050">
+                          <a:solidFill>
+                            <a:srgbClr val="463A32"/>
+                          </a:solidFill>
+                        </a:rPr>
+                        <a:t>$129.771</a:t>
+                      </a:r>
+                    </a:p>
+                  </a:txBody>
+                  <a:tcPr>
+                    <a:solidFill>
+                      <a:srgbClr val="FFFFFF"/>
+                    </a:solidFill>
+                  </a:tcPr>
+                </a:tc>
+                <a:tc>
+                  <a:txBody>
+                    <a:bodyPr/>
+                    <a:lstStyle/>
+                    <a:p>
+                      <a:pPr algn="ctr"/>
+                      <a:r>
+                        <a:rPr sz="1050" u="sng">
+                          <a:solidFill>
+                            <a:srgbClr val="8F5A44"/>
+                          </a:solidFill>
+                          <a:hlinkClick r:id="rId2"/>
+                        </a:rPr>
+                        <a:t>ver</a:t>
+                      </a:r>
+                    </a:p>
+                  </a:txBody>
+                  <a:tcPr>
+                    <a:solidFill>
+                      <a:srgbClr val="FFFFFF"/>
+                    </a:solidFill>
+                  </a:tcPr>
+                </a:tc>
+              </a:tr>
+              <a:tr h="786384">
+                <a:tc>
+                  <a:txBody>
+                    <a:bodyPr/>
+                    <a:lstStyle/>
+                    <a:p>
+                      <a:r>
+                        <a:rPr sz="1050">
+                          <a:solidFill>
+                            <a:srgbClr val="463A32"/>
+                          </a:solidFill>
+                        </a:rPr>
                         <a:t>Apto La Flora (7 camas) ★</a:t>
                       </a:r>
                     </a:p>
@@ -11582,7 +11737,7 @@
                             <a:srgbClr val="463A32"/>
                           </a:solidFill>
                         </a:rPr>
-                        <a:t>72.4</a:t>
+                        <a:t>74.6</a:t>
                       </a:r>
                     </a:p>
                   </a:txBody>
@@ -11647,7 +11802,7 @@
                           <a:solidFill>
                             <a:srgbClr val="8F5A44"/>
                           </a:solidFill>
-                          <a:hlinkClick r:id="rId2"/>
+                          <a:hlinkClick r:id="rId3"/>
                         </a:rPr>
                         <a:t>ver</a:t>
                       </a:r>
@@ -11656,161 +11811,6 @@
                   <a:tcPr>
                     <a:solidFill>
                       <a:srgbClr val="F0E0C6"/>
-                    </a:solidFill>
-                  </a:tcPr>
-                </a:tc>
-              </a:tr>
-              <a:tr h="786384">
-                <a:tc>
-                  <a:txBody>
-                    <a:bodyPr/>
-                    <a:lstStyle/>
-                    <a:p>
-                      <a:r>
-                        <a:rPr sz="1050">
-                          <a:solidFill>
-                            <a:srgbClr val="463A32"/>
-                          </a:solidFill>
-                        </a:rPr>
-                        <a:t>Casa 7p garaje</a:t>
-                      </a:r>
-                    </a:p>
-                  </a:txBody>
-                  <a:tcPr>
-                    <a:solidFill>
-                      <a:srgbClr val="F4E8DA"/>
-                    </a:solidFill>
-                  </a:tcPr>
-                </a:tc>
-                <a:tc>
-                  <a:txBody>
-                    <a:bodyPr/>
-                    <a:lstStyle/>
-                    <a:p>
-                      <a:r>
-                        <a:rPr sz="1050">
-                          <a:solidFill>
-                            <a:srgbClr val="463A32"/>
-                          </a:solidFill>
-                        </a:rPr>
-                        <a:t>Centro-oeste</a:t>
-                      </a:r>
-                    </a:p>
-                  </a:txBody>
-                  <a:tcPr>
-                    <a:solidFill>
-                      <a:srgbClr val="F4E8DA"/>
-                    </a:solidFill>
-                  </a:tcPr>
-                </a:tc>
-                <a:tc>
-                  <a:txBody>
-                    <a:bodyPr/>
-                    <a:lstStyle/>
-                    <a:p>
-                      <a:pPr algn="ctr"/>
-                      <a:r>
-                        <a:rPr sz="1050" b="1">
-                          <a:solidFill>
-                            <a:srgbClr val="463A32"/>
-                          </a:solidFill>
-                        </a:rPr>
-                        <a:t>~3.6 km</a:t>
-                      </a:r>
-                    </a:p>
-                  </a:txBody>
-                  <a:tcPr>
-                    <a:solidFill>
-                      <a:srgbClr val="F4E8DA"/>
-                    </a:solidFill>
-                  </a:tcPr>
-                </a:tc>
-                <a:tc>
-                  <a:txBody>
-                    <a:bodyPr/>
-                    <a:lstStyle/>
-                    <a:p>
-                      <a:pPr algn="ctr"/>
-                      <a:r>
-                        <a:rPr sz="1050">
-                          <a:solidFill>
-                            <a:srgbClr val="463A32"/>
-                          </a:solidFill>
-                        </a:rPr>
-                        <a:t>70.8</a:t>
-                      </a:r>
-                    </a:p>
-                  </a:txBody>
-                  <a:tcPr>
-                    <a:solidFill>
-                      <a:srgbClr val="F4E8DA"/>
-                    </a:solidFill>
-                  </a:tcPr>
-                </a:tc>
-                <a:tc>
-                  <a:txBody>
-                    <a:bodyPr/>
-                    <a:lstStyle/>
-                    <a:p>
-                      <a:pPr algn="ctr"/>
-                      <a:r>
-                        <a:rPr sz="1050">
-                          <a:solidFill>
-                            <a:srgbClr val="463A32"/>
-                          </a:solidFill>
-                        </a:rPr>
-                        <a:t>2,5</a:t>
-                      </a:r>
-                    </a:p>
-                  </a:txBody>
-                  <a:tcPr>
-                    <a:solidFill>
-                      <a:srgbClr val="F4E8DA"/>
-                    </a:solidFill>
-                  </a:tcPr>
-                </a:tc>
-                <a:tc>
-                  <a:txBody>
-                    <a:bodyPr/>
-                    <a:lstStyle/>
-                    <a:p>
-                      <a:pPr algn="ctr"/>
-                      <a:r>
-                        <a:rPr sz="1050">
-                          <a:solidFill>
-                            <a:srgbClr val="463A32"/>
-                          </a:solidFill>
-                        </a:rPr>
-                        <a:t>$90.714</a:t>
-                      </a:r>
-                    </a:p>
-                  </a:txBody>
-                  <a:tcPr>
-                    <a:solidFill>
-                      <a:srgbClr val="F4E8DA"/>
-                    </a:solidFill>
-                  </a:tcPr>
-                </a:tc>
-                <a:tc>
-                  <a:txBody>
-                    <a:bodyPr/>
-                    <a:lstStyle/>
-                    <a:p>
-                      <a:pPr algn="ctr"/>
-                      <a:r>
-                        <a:rPr sz="1050" u="sng">
-                          <a:solidFill>
-                            <a:srgbClr val="8F5A44"/>
-                          </a:solidFill>
-                          <a:hlinkClick r:id="rId3"/>
-                        </a:rPr>
-                        <a:t>ver</a:t>
-                      </a:r>
-                    </a:p>
-                  </a:txBody>
-                  <a:tcPr>
-                    <a:solidFill>
-                      <a:srgbClr val="F4E8DA"/>
                     </a:solidFill>
                   </a:tcPr>
                 </a:tc>
@@ -11892,7 +11892,7 @@
                             <a:srgbClr val="463A32"/>
                           </a:solidFill>
                         </a:rPr>
-                        <a:t>65.3</a:t>
+                        <a:t>67.6</a:t>
                       </a:r>
                     </a:p>
                   </a:txBody>
@@ -11982,7 +11982,7 @@
                             <a:srgbClr val="463A32"/>
                           </a:solidFill>
                         </a:rPr>
-                        <a:t>Refugio Vistas</a:t>
+                        <a:t>Torre Gardes</a:t>
                       </a:r>
                     </a:p>
                   </a:txBody>
@@ -12003,7 +12003,7 @@
                             <a:srgbClr val="463A32"/>
                           </a:solidFill>
                         </a:rPr>
-                        <a:t>Oeste (ladera)</a:t>
+                        <a:t>Noroeste</a:t>
                       </a:r>
                     </a:p>
                   </a:txBody>
@@ -12025,7 +12025,7 @@
                             <a:srgbClr val="463A32"/>
                           </a:solidFill>
                         </a:rPr>
-                        <a:t>~2.4 km</a:t>
+                        <a:t>~3.0 km</a:t>
                       </a:r>
                     </a:p>
                   </a:txBody>
@@ -12047,7 +12047,7 @@
                             <a:srgbClr val="463A32"/>
                           </a:solidFill>
                         </a:rPr>
-                        <a:t>63.2</a:t>
+                        <a:t>66.8</a:t>
                       </a:r>
                     </a:p>
                   </a:txBody>
@@ -12069,7 +12069,7 @@
                             <a:srgbClr val="463A32"/>
                           </a:solidFill>
                         </a:rPr>
-                        <a:t>3</a:t>
+                        <a:t>4</a:t>
                       </a:r>
                     </a:p>
                   </a:txBody>
@@ -12091,7 +12091,7 @@
                             <a:srgbClr val="463A32"/>
                           </a:solidFill>
                         </a:rPr>
-                        <a:t>$282.068</a:t>
+                        <a:t>$285.714</a:t>
                       </a:r>
                     </a:p>
                   </a:txBody>

--- a/output/Mini-Boom-en-Cali_Presentacion.pptx
+++ b/output/Mini-Boom-en-Cali_Presentacion.pptx
@@ -325,7 +325,7 @@
             <c:idx val="0"/>
             <c:spPr>
               <a:solidFill>
-                <a:srgbClr val="D8C4B2"/>
+                <a:srgbClr val="D9A75E"/>
               </a:solidFill>
             </c:spPr>
           </c:dPt>
@@ -333,7 +333,7 @@
             <c:idx val="1"/>
             <c:spPr>
               <a:solidFill>
-                <a:srgbClr val="D9A75E"/>
+                <a:srgbClr val="D8C4B2"/>
               </a:solidFill>
             </c:spPr>
           </c:dPt>
@@ -345,50 +345,36 @@
               </a:solidFill>
             </c:spPr>
           </c:dPt>
-          <c:dPt>
-            <c:idx val="3"/>
-            <c:spPr>
-              <a:solidFill>
-                <a:srgbClr val="D8C4B2"/>
-              </a:solidFill>
-            </c:spPr>
-          </c:dPt>
           <c:cat>
             <c:strRef>
-              <c:f>Sheet1!$A$2:$A$5</c:f>
+              <c:f>Sheet1!$A$2:$A$4</c:f>
               <c:strCache>
-                <c:ptCount val="4"/>
+                <c:ptCount val="3"/>
                 <c:pt idx="0">
-                  <c:v>Apto Granada/Chipichape</c:v>
+                  <c:v>La Flora (7 camas)</c:v>
                 </c:pt>
                 <c:pt idx="1">
-                  <c:v>Apto La Flora (7 camas)</c:v>
+                  <c:v>Casa-museo S.Antonio</c:v>
                 </c:pt>
                 <c:pt idx="2">
-                  <c:v>Casa-museo S.Antonio</c:v>
-                </c:pt>
-                <c:pt idx="3">
-                  <c:v>Torre Gardes</c:v>
+                  <c:v>Apto entero servicios</c:v>
                 </c:pt>
               </c:strCache>
             </c:strRef>
           </c:cat>
           <c:val>
             <c:numRef>
-              <c:f>Sheet1!$B$2:$B$5</c:f>
+              <c:f>Sheet1!$B$2:$B$4</c:f>
               <c:numCache>
                 <c:formatCode>General</c:formatCode>
-                <c:ptCount val="4"/>
+                <c:ptCount val="3"/>
                 <c:pt idx="0">
-                  <c:v>77.2</c:v>
+                  <c:v>80.1</c:v>
                 </c:pt>
                 <c:pt idx="1">
-                  <c:v>74.6</c:v>
+                  <c:v>73.2</c:v>
                 </c:pt>
                 <c:pt idx="2">
-                  <c:v>67.6</c:v>
-                </c:pt>
-                <c:pt idx="3">
                   <c:v>66.8</c:v>
                 </c:pt>
               </c:numCache>
@@ -11123,7 +11109,7 @@
                   <a:srgbClr val="8F5A44"/>
                 </a:solidFill>
               </a:rPr>
-              <a:t>★ Apto La Flora (7 camas)</a:t>
+              <a:t>★ La Flora (7 camas)</a:t>
             </a:r>
           </a:p>
           <a:p>
@@ -11134,7 +11120,7 @@
                   <a:srgbClr val="463A32"/>
                 </a:solidFill>
               </a:rPr>
-              <a:t>La mejor CON cama para los 7 (7 camas, 74.6/100).</a:t>
+              <a:t>La mejor CON cama para los 7 (7 camas, 80.1/100).</a:t>
             </a:r>
           </a:p>
           <a:p>
@@ -11156,7 +11142,7 @@
                   <a:srgbClr val="463A32"/>
                 </a:solidFill>
               </a:rPr>
-              <a:t>A ~4.8 km. Con carro local ≈ $385.894 pp.</a:t>
+              <a:t>Total $1.301.262 ($185.894 pp). Con carro local ≈ $385.894 pp.</a:t>
             </a:r>
           </a:p>
           <a:p>
@@ -11178,7 +11164,7 @@
                   <a:srgbClr val="8A7A6E"/>
                 </a:solidFill>
               </a:rPr>
-              <a:t>La #1 por puntaje es más barata/céntrica pero trae 4 camas. Confirmá disponibilidad 30→2.</a:t>
+              <a:t>Disponibilidad 30→2 verificada en el calendario. A ~4.8 km.</a:t>
             </a:r>
           </a:p>
         </p:txBody>
@@ -11324,7 +11310,7 @@
                   <a:srgbClr val="463A32"/>
                 </a:solidFill>
               </a:rPr>
-              <a:t>Alojamiento entero (ningún baño se comparte). «Dist.» = km a la zona de actividades (coordenadas). Aire «según anuncio» y disponibilidad del 30→2: confirmar.</a:t>
+              <a:t>Solo alojamientos enteros (ningún baño se comparte). «Dist.» = km a la zona de actividades. Rango 30→2 verificado en el calendario. Aire: confirmar.</a:t>
             </a:r>
           </a:p>
         </p:txBody>
@@ -11338,8 +11324,8 @@
           <p:nvPr/>
         </p:nvGraphicFramePr>
         <p:xfrm>
-          <a:off x="457200" y="1737360"/>
-          <a:ext cx="11274551" cy="3931920"/>
+          <a:off x="365760" y="1737360"/>
+          <a:ext cx="11430000" cy="3291840"/>
         </p:xfrm>
         <a:graphic>
           <a:graphicData uri="http://schemas.openxmlformats.org/drawingml/2006/table">
@@ -11348,22 +11334,23 @@
                 <a:tableStyleId>{5C22544A-7EE6-4342-B048-85BDC9FD1C3A}</a:tableStyleId>
               </a:tblPr>
               <a:tblGrid>
-                <a:gridCol w="3931920"/>
-                <a:gridCol w="1737360"/>
-                <a:gridCol w="1188720"/>
+                <a:gridCol w="3200400"/>
+                <a:gridCol w="1554480"/>
                 <a:gridCol w="914400"/>
                 <a:gridCol w="914400"/>
-                <a:gridCol w="1856231"/>
+                <a:gridCol w="822960"/>
+                <a:gridCol w="1783080"/>
+                <a:gridCol w="1508760"/>
                 <a:gridCol w="731520"/>
               </a:tblGrid>
-              <a:tr h="786384">
+              <a:tr h="822960">
                 <a:tc>
                   <a:txBody>
                     <a:bodyPr/>
                     <a:lstStyle/>
                     <a:p>
                       <a:r>
-                        <a:rPr b="1" sz="1150">
+                        <a:rPr b="1" sz="1100">
                           <a:solidFill>
                             <a:srgbClr val="FFFFFF"/>
                           </a:solidFill>
@@ -11384,7 +11371,7 @@
                     <a:lstStyle/>
                     <a:p>
                       <a:r>
-                        <a:rPr b="1" sz="1150">
+                        <a:rPr b="1" sz="1100">
                           <a:solidFill>
                             <a:srgbClr val="FFFFFF"/>
                           </a:solidFill>
@@ -11405,12 +11392,12 @@
                     <a:lstStyle/>
                     <a:p>
                       <a:r>
-                        <a:rPr b="1" sz="1150">
+                        <a:rPr b="1" sz="1100">
                           <a:solidFill>
                             <a:srgbClr val="FFFFFF"/>
                           </a:solidFill>
                         </a:rPr>
-                        <a:t>Dist. act.</a:t>
+                        <a:t>Dist.</a:t>
                       </a:r>
                     </a:p>
                   </a:txBody>
@@ -11426,7 +11413,7 @@
                     <a:lstStyle/>
                     <a:p>
                       <a:r>
-                        <a:rPr b="1" sz="1150">
+                        <a:rPr b="1" sz="1100">
                           <a:solidFill>
                             <a:srgbClr val="FFFFFF"/>
                           </a:solidFill>
@@ -11447,7 +11434,7 @@
                     <a:lstStyle/>
                     <a:p>
                       <a:r>
-                        <a:rPr b="1" sz="1150">
+                        <a:rPr b="1" sz="1100">
                           <a:solidFill>
                             <a:srgbClr val="FFFFFF"/>
                           </a:solidFill>
@@ -11468,12 +11455,12 @@
                     <a:lstStyle/>
                     <a:p>
                       <a:r>
-                        <a:rPr b="1" sz="1150">
+                        <a:rPr b="1" sz="1100">
                           <a:solidFill>
                             <a:srgbClr val="FFFFFF"/>
                           </a:solidFill>
                         </a:rPr>
-                        <a:t>Por persona (3n)</a:t>
+                        <a:t>Total (3n)</a:t>
                       </a:r>
                     </a:p>
                   </a:txBody>
@@ -11489,7 +11476,28 @@
                     <a:lstStyle/>
                     <a:p>
                       <a:r>
-                        <a:rPr b="1" sz="1150">
+                        <a:rPr b="1" sz="1100">
+                          <a:solidFill>
+                            <a:srgbClr val="FFFFFF"/>
+                          </a:solidFill>
+                        </a:rPr>
+                        <a:t>Por persona</a:t>
+                      </a:r>
+                    </a:p>
+                  </a:txBody>
+                  <a:tcPr>
+                    <a:solidFill>
+                      <a:srgbClr val="B5765C"/>
+                    </a:solidFill>
+                  </a:tcPr>
+                </a:tc>
+                <a:tc>
+                  <a:txBody>
+                    <a:bodyPr/>
+                    <a:lstStyle/>
+                    <a:p>
+                      <a:r>
+                        <a:rPr b="1" sz="1100">
                           <a:solidFill>
                             <a:srgbClr val="FFFFFF"/>
                           </a:solidFill>
@@ -11505,174 +11513,19 @@
                   </a:tcPr>
                 </a:tc>
               </a:tr>
-              <a:tr h="786384">
+              <a:tr h="822960">
                 <a:tc>
                   <a:txBody>
                     <a:bodyPr/>
                     <a:lstStyle/>
                     <a:p>
                       <a:r>
-                        <a:rPr sz="1050">
+                        <a:rPr sz="1000">
                           <a:solidFill>
                             <a:srgbClr val="463A32"/>
                           </a:solidFill>
                         </a:rPr>
-                        <a:t>Apto Granada/Chipichape</a:t>
-                      </a:r>
-                    </a:p>
-                  </a:txBody>
-                  <a:tcPr>
-                    <a:solidFill>
-                      <a:srgbClr val="FFFFFF"/>
-                    </a:solidFill>
-                  </a:tcPr>
-                </a:tc>
-                <a:tc>
-                  <a:txBody>
-                    <a:bodyPr/>
-                    <a:lstStyle/>
-                    <a:p>
-                      <a:r>
-                        <a:rPr sz="1050">
-                          <a:solidFill>
-                            <a:srgbClr val="463A32"/>
-                          </a:solidFill>
-                        </a:rPr>
-                        <a:t>Noroeste</a:t>
-                      </a:r>
-                    </a:p>
-                  </a:txBody>
-                  <a:tcPr>
-                    <a:solidFill>
-                      <a:srgbClr val="FFFFFF"/>
-                    </a:solidFill>
-                  </a:tcPr>
-                </a:tc>
-                <a:tc>
-                  <a:txBody>
-                    <a:bodyPr/>
-                    <a:lstStyle/>
-                    <a:p>
-                      <a:pPr algn="ctr"/>
-                      <a:r>
-                        <a:rPr sz="1050" b="1">
-                          <a:solidFill>
-                            <a:srgbClr val="463A32"/>
-                          </a:solidFill>
-                        </a:rPr>
-                        <a:t>~1.8 km</a:t>
-                      </a:r>
-                    </a:p>
-                  </a:txBody>
-                  <a:tcPr>
-                    <a:solidFill>
-                      <a:srgbClr val="FFFFFF"/>
-                    </a:solidFill>
-                  </a:tcPr>
-                </a:tc>
-                <a:tc>
-                  <a:txBody>
-                    <a:bodyPr/>
-                    <a:lstStyle/>
-                    <a:p>
-                      <a:pPr algn="ctr"/>
-                      <a:r>
-                        <a:rPr sz="1050">
-                          <a:solidFill>
-                            <a:srgbClr val="463A32"/>
-                          </a:solidFill>
-                        </a:rPr>
-                        <a:t>77.2</a:t>
-                      </a:r>
-                    </a:p>
-                  </a:txBody>
-                  <a:tcPr>
-                    <a:solidFill>
-                      <a:srgbClr val="FFFFFF"/>
-                    </a:solidFill>
-                  </a:tcPr>
-                </a:tc>
-                <a:tc>
-                  <a:txBody>
-                    <a:bodyPr/>
-                    <a:lstStyle/>
-                    <a:p>
-                      <a:pPr algn="ctr"/>
-                      <a:r>
-                        <a:rPr sz="1050">
-                          <a:solidFill>
-                            <a:srgbClr val="463A32"/>
-                          </a:solidFill>
-                        </a:rPr>
-                        <a:t>2,5</a:t>
-                      </a:r>
-                    </a:p>
-                  </a:txBody>
-                  <a:tcPr>
-                    <a:solidFill>
-                      <a:srgbClr val="FFFFFF"/>
-                    </a:solidFill>
-                  </a:tcPr>
-                </a:tc>
-                <a:tc>
-                  <a:txBody>
-                    <a:bodyPr/>
-                    <a:lstStyle/>
-                    <a:p>
-                      <a:pPr algn="ctr"/>
-                      <a:r>
-                        <a:rPr sz="1050">
-                          <a:solidFill>
-                            <a:srgbClr val="463A32"/>
-                          </a:solidFill>
-                        </a:rPr>
-                        <a:t>$129.771</a:t>
-                      </a:r>
-                    </a:p>
-                  </a:txBody>
-                  <a:tcPr>
-                    <a:solidFill>
-                      <a:srgbClr val="FFFFFF"/>
-                    </a:solidFill>
-                  </a:tcPr>
-                </a:tc>
-                <a:tc>
-                  <a:txBody>
-                    <a:bodyPr/>
-                    <a:lstStyle/>
-                    <a:p>
-                      <a:pPr algn="ctr"/>
-                      <a:r>
-                        <a:rPr sz="1050" u="sng">
-                          <a:solidFill>
-                            <a:srgbClr val="8F5A44"/>
-                          </a:solidFill>
-                          <a:hlinkClick r:id="rId2"/>
-                        </a:rPr>
-                        <a:t>ver</a:t>
-                      </a:r>
-                    </a:p>
-                  </a:txBody>
-                  <a:tcPr>
-                    <a:solidFill>
-                      <a:srgbClr val="FFFFFF"/>
-                    </a:solidFill>
-                  </a:tcPr>
-                </a:tc>
-              </a:tr>
-              <a:tr h="786384">
-                <a:tc>
-                  <a:txBody>
-                    <a:bodyPr/>
-                    <a:lstStyle/>
-                    <a:p>
-                      <a:r>
-                        <a:rPr sz="1050">
-                          <a:solidFill>
-                            <a:srgbClr val="463A32"/>
-                          </a:solidFill>
-                        </a:rPr>
-                        <a:t>Apto La Flora (7 camas) ★</a:t>
+                        <a:t>La Flora (7 camas) ★</a:t>
                       </a:r>
                     </a:p>
                   </a:txBody>
@@ -11688,7 +11541,7 @@
                     <a:lstStyle/>
                     <a:p>
                       <a:r>
-                        <a:rPr sz="1050">
+                        <a:rPr sz="1000">
                           <a:solidFill>
                             <a:srgbClr val="463A32"/>
                           </a:solidFill>
@@ -11710,7 +11563,7 @@
                     <a:p>
                       <a:pPr algn="ctr"/>
                       <a:r>
-                        <a:rPr sz="1050" b="1">
+                        <a:rPr sz="1000">
                           <a:solidFill>
                             <a:srgbClr val="463A32"/>
                           </a:solidFill>
@@ -11732,12 +11585,12 @@
                     <a:p>
                       <a:pPr algn="ctr"/>
                       <a:r>
-                        <a:rPr sz="1050">
+                        <a:rPr sz="1000" b="1">
                           <a:solidFill>
                             <a:srgbClr val="463A32"/>
                           </a:solidFill>
                         </a:rPr>
-                        <a:t>74.6</a:t>
+                        <a:t>80.1</a:t>
                       </a:r>
                     </a:p>
                   </a:txBody>
@@ -11754,7 +11607,7 @@
                     <a:p>
                       <a:pPr algn="ctr"/>
                       <a:r>
-                        <a:rPr sz="1050">
+                        <a:rPr sz="1000">
                           <a:solidFill>
                             <a:srgbClr val="463A32"/>
                           </a:solidFill>
@@ -11776,7 +11629,29 @@
                     <a:p>
                       <a:pPr algn="ctr"/>
                       <a:r>
-                        <a:rPr sz="1050">
+                        <a:rPr sz="1000">
+                          <a:solidFill>
+                            <a:srgbClr val="463A32"/>
+                          </a:solidFill>
+                        </a:rPr>
+                        <a:t>$1.301.262</a:t>
+                      </a:r>
+                    </a:p>
+                  </a:txBody>
+                  <a:tcPr>
+                    <a:solidFill>
+                      <a:srgbClr val="F0E0C6"/>
+                    </a:solidFill>
+                  </a:tcPr>
+                </a:tc>
+                <a:tc>
+                  <a:txBody>
+                    <a:bodyPr/>
+                    <a:lstStyle/>
+                    <a:p>
+                      <a:pPr algn="ctr"/>
+                      <a:r>
+                        <a:rPr sz="1000">
                           <a:solidFill>
                             <a:srgbClr val="463A32"/>
                           </a:solidFill>
@@ -11798,11 +11673,11 @@
                     <a:p>
                       <a:pPr algn="ctr"/>
                       <a:r>
-                        <a:rPr sz="1050" u="sng">
+                        <a:rPr sz="1000" u="sng">
                           <a:solidFill>
                             <a:srgbClr val="8F5A44"/>
                           </a:solidFill>
-                          <a:hlinkClick r:id="rId3"/>
+                          <a:hlinkClick r:id="rId2"/>
                         </a:rPr>
                         <a:t>ver</a:t>
                       </a:r>
@@ -11815,19 +11690,196 @@
                   </a:tcPr>
                 </a:tc>
               </a:tr>
-              <a:tr h="786384">
+              <a:tr h="822960">
                 <a:tc>
                   <a:txBody>
                     <a:bodyPr/>
                     <a:lstStyle/>
                     <a:p>
                       <a:r>
-                        <a:rPr sz="1050">
+                        <a:rPr sz="1000">
                           <a:solidFill>
                             <a:srgbClr val="463A32"/>
                           </a:solidFill>
                         </a:rPr>
                         <a:t>Casa-museo S.Antonio</a:t>
+                      </a:r>
+                    </a:p>
+                  </a:txBody>
+                  <a:tcPr>
+                    <a:solidFill>
+                      <a:srgbClr val="F4E8DA"/>
+                    </a:solidFill>
+                  </a:tcPr>
+                </a:tc>
+                <a:tc>
+                  <a:txBody>
+                    <a:bodyPr/>
+                    <a:lstStyle/>
+                    <a:p>
+                      <a:r>
+                        <a:rPr sz="1000">
+                          <a:solidFill>
+                            <a:srgbClr val="463A32"/>
+                          </a:solidFill>
+                        </a:rPr>
+                        <a:t>Oeste (San Antonio)</a:t>
+                      </a:r>
+                    </a:p>
+                  </a:txBody>
+                  <a:tcPr>
+                    <a:solidFill>
+                      <a:srgbClr val="F4E8DA"/>
+                    </a:solidFill>
+                  </a:tcPr>
+                </a:tc>
+                <a:tc>
+                  <a:txBody>
+                    <a:bodyPr/>
+                    <a:lstStyle/>
+                    <a:p>
+                      <a:pPr algn="ctr"/>
+                      <a:r>
+                        <a:rPr sz="1000">
+                          <a:solidFill>
+                            <a:srgbClr val="463A32"/>
+                          </a:solidFill>
+                        </a:rPr>
+                        <a:t>~0.6 km</a:t>
+                      </a:r>
+                    </a:p>
+                  </a:txBody>
+                  <a:tcPr>
+                    <a:solidFill>
+                      <a:srgbClr val="F4E8DA"/>
+                    </a:solidFill>
+                  </a:tcPr>
+                </a:tc>
+                <a:tc>
+                  <a:txBody>
+                    <a:bodyPr/>
+                    <a:lstStyle/>
+                    <a:p>
+                      <a:pPr algn="ctr"/>
+                      <a:r>
+                        <a:rPr sz="1000" b="1">
+                          <a:solidFill>
+                            <a:srgbClr val="463A32"/>
+                          </a:solidFill>
+                        </a:rPr>
+                        <a:t>73.2</a:t>
+                      </a:r>
+                    </a:p>
+                  </a:txBody>
+                  <a:tcPr>
+                    <a:solidFill>
+                      <a:srgbClr val="F4E8DA"/>
+                    </a:solidFill>
+                  </a:tcPr>
+                </a:tc>
+                <a:tc>
+                  <a:txBody>
+                    <a:bodyPr/>
+                    <a:lstStyle/>
+                    <a:p>
+                      <a:pPr algn="ctr"/>
+                      <a:r>
+                        <a:rPr sz="1000">
+                          <a:solidFill>
+                            <a:srgbClr val="463A32"/>
+                          </a:solidFill>
+                        </a:rPr>
+                        <a:t>2,5</a:t>
+                      </a:r>
+                    </a:p>
+                  </a:txBody>
+                  <a:tcPr>
+                    <a:solidFill>
+                      <a:srgbClr val="F4E8DA"/>
+                    </a:solidFill>
+                  </a:tcPr>
+                </a:tc>
+                <a:tc>
+                  <a:txBody>
+                    <a:bodyPr/>
+                    <a:lstStyle/>
+                    <a:p>
+                      <a:pPr algn="ctr"/>
+                      <a:r>
+                        <a:rPr sz="1000">
+                          <a:solidFill>
+                            <a:srgbClr val="463A32"/>
+                          </a:solidFill>
+                        </a:rPr>
+                        <a:t>$1.294.200</a:t>
+                      </a:r>
+                    </a:p>
+                  </a:txBody>
+                  <a:tcPr>
+                    <a:solidFill>
+                      <a:srgbClr val="F4E8DA"/>
+                    </a:solidFill>
+                  </a:tcPr>
+                </a:tc>
+                <a:tc>
+                  <a:txBody>
+                    <a:bodyPr/>
+                    <a:lstStyle/>
+                    <a:p>
+                      <a:pPr algn="ctr"/>
+                      <a:r>
+                        <a:rPr sz="1000">
+                          <a:solidFill>
+                            <a:srgbClr val="463A32"/>
+                          </a:solidFill>
+                        </a:rPr>
+                        <a:t>$184.885</a:t>
+                      </a:r>
+                    </a:p>
+                  </a:txBody>
+                  <a:tcPr>
+                    <a:solidFill>
+                      <a:srgbClr val="F4E8DA"/>
+                    </a:solidFill>
+                  </a:tcPr>
+                </a:tc>
+                <a:tc>
+                  <a:txBody>
+                    <a:bodyPr/>
+                    <a:lstStyle/>
+                    <a:p>
+                      <a:pPr algn="ctr"/>
+                      <a:r>
+                        <a:rPr sz="1000" u="sng">
+                          <a:solidFill>
+                            <a:srgbClr val="8F5A44"/>
+                          </a:solidFill>
+                          <a:hlinkClick r:id="rId3"/>
+                        </a:rPr>
+                        <a:t>ver</a:t>
+                      </a:r>
+                    </a:p>
+                  </a:txBody>
+                  <a:tcPr>
+                    <a:solidFill>
+                      <a:srgbClr val="F4E8DA"/>
+                    </a:solidFill>
+                  </a:tcPr>
+                </a:tc>
+              </a:tr>
+              <a:tr h="822960">
+                <a:tc>
+                  <a:txBody>
+                    <a:bodyPr/>
+                    <a:lstStyle/>
+                    <a:p>
+                      <a:r>
+                        <a:rPr sz="1000">
+                          <a:solidFill>
+                            <a:srgbClr val="463A32"/>
+                          </a:solidFill>
+                        </a:rPr>
+                        <a:t>Apto entero servicios</a:t>
                       </a:r>
                     </a:p>
                   </a:txBody>
@@ -11843,12 +11895,12 @@
                     <a:lstStyle/>
                     <a:p>
                       <a:r>
-                        <a:rPr sz="1050">
+                        <a:rPr sz="1000">
                           <a:solidFill>
                             <a:srgbClr val="463A32"/>
                           </a:solidFill>
                         </a:rPr>
-                        <a:t>Oeste (San Antonio)</a:t>
+                        <a:t>Oeste</a:t>
                       </a:r>
                     </a:p>
                   </a:txBody>
@@ -11865,12 +11917,12 @@
                     <a:p>
                       <a:pPr algn="ctr"/>
                       <a:r>
-                        <a:rPr sz="1050" b="1">
+                        <a:rPr sz="1000">
                           <a:solidFill>
                             <a:srgbClr val="463A32"/>
                           </a:solidFill>
                         </a:rPr>
-                        <a:t>~0.6 km</a:t>
+                        <a:t>~3.6 km</a:t>
                       </a:r>
                     </a:p>
                   </a:txBody>
@@ -11887,12 +11939,12 @@
                     <a:p>
                       <a:pPr algn="ctr"/>
                       <a:r>
-                        <a:rPr sz="1050">
+                        <a:rPr sz="1000" b="1">
                           <a:solidFill>
                             <a:srgbClr val="463A32"/>
                           </a:solidFill>
                         </a:rPr>
-                        <a:t>67.6</a:t>
+                        <a:t>66.8</a:t>
                       </a:r>
                     </a:p>
                   </a:txBody>
@@ -11909,12 +11961,12 @@
                     <a:p>
                       <a:pPr algn="ctr"/>
                       <a:r>
-                        <a:rPr sz="1050">
+                        <a:rPr sz="1000">
                           <a:solidFill>
                             <a:srgbClr val="463A32"/>
                           </a:solidFill>
                         </a:rPr>
-                        <a:t>2,5</a:t>
+                        <a:t>4</a:t>
                       </a:r>
                     </a:p>
                   </a:txBody>
@@ -11931,12 +11983,12 @@
                     <a:p>
                       <a:pPr algn="ctr"/>
                       <a:r>
-                        <a:rPr sz="1050">
+                        <a:rPr sz="1000">
                           <a:solidFill>
                             <a:srgbClr val="463A32"/>
                           </a:solidFill>
                         </a:rPr>
-                        <a:t>$184.885</a:t>
+                        <a:t>$1.723.404</a:t>
                       </a:r>
                     </a:p>
                   </a:txBody>
@@ -11953,7 +12005,29 @@
                     <a:p>
                       <a:pPr algn="ctr"/>
                       <a:r>
-                        <a:rPr sz="1050" u="sng">
+                        <a:rPr sz="1000">
+                          <a:solidFill>
+                            <a:srgbClr val="463A32"/>
+                          </a:solidFill>
+                        </a:rPr>
+                        <a:t>$246.200</a:t>
+                      </a:r>
+                    </a:p>
+                  </a:txBody>
+                  <a:tcPr>
+                    <a:solidFill>
+                      <a:srgbClr val="FFFFFF"/>
+                    </a:solidFill>
+                  </a:tcPr>
+                </a:tc>
+                <a:tc>
+                  <a:txBody>
+                    <a:bodyPr/>
+                    <a:lstStyle/>
+                    <a:p>
+                      <a:pPr algn="ctr"/>
+                      <a:r>
+                        <a:rPr sz="1000" u="sng">
                           <a:solidFill>
                             <a:srgbClr val="8F5A44"/>
                           </a:solidFill>
@@ -11966,161 +12040,6 @@
                   <a:tcPr>
                     <a:solidFill>
                       <a:srgbClr val="FFFFFF"/>
-                    </a:solidFill>
-                  </a:tcPr>
-                </a:tc>
-              </a:tr>
-              <a:tr h="786384">
-                <a:tc>
-                  <a:txBody>
-                    <a:bodyPr/>
-                    <a:lstStyle/>
-                    <a:p>
-                      <a:r>
-                        <a:rPr sz="1050">
-                          <a:solidFill>
-                            <a:srgbClr val="463A32"/>
-                          </a:solidFill>
-                        </a:rPr>
-                        <a:t>Torre Gardes</a:t>
-                      </a:r>
-                    </a:p>
-                  </a:txBody>
-                  <a:tcPr>
-                    <a:solidFill>
-                      <a:srgbClr val="F4E8DA"/>
-                    </a:solidFill>
-                  </a:tcPr>
-                </a:tc>
-                <a:tc>
-                  <a:txBody>
-                    <a:bodyPr/>
-                    <a:lstStyle/>
-                    <a:p>
-                      <a:r>
-                        <a:rPr sz="1050">
-                          <a:solidFill>
-                            <a:srgbClr val="463A32"/>
-                          </a:solidFill>
-                        </a:rPr>
-                        <a:t>Noroeste</a:t>
-                      </a:r>
-                    </a:p>
-                  </a:txBody>
-                  <a:tcPr>
-                    <a:solidFill>
-                      <a:srgbClr val="F4E8DA"/>
-                    </a:solidFill>
-                  </a:tcPr>
-                </a:tc>
-                <a:tc>
-                  <a:txBody>
-                    <a:bodyPr/>
-                    <a:lstStyle/>
-                    <a:p>
-                      <a:pPr algn="ctr"/>
-                      <a:r>
-                        <a:rPr sz="1050" b="1">
-                          <a:solidFill>
-                            <a:srgbClr val="463A32"/>
-                          </a:solidFill>
-                        </a:rPr>
-                        <a:t>~3.0 km</a:t>
-                      </a:r>
-                    </a:p>
-                  </a:txBody>
-                  <a:tcPr>
-                    <a:solidFill>
-                      <a:srgbClr val="F4E8DA"/>
-                    </a:solidFill>
-                  </a:tcPr>
-                </a:tc>
-                <a:tc>
-                  <a:txBody>
-                    <a:bodyPr/>
-                    <a:lstStyle/>
-                    <a:p>
-                      <a:pPr algn="ctr"/>
-                      <a:r>
-                        <a:rPr sz="1050">
-                          <a:solidFill>
-                            <a:srgbClr val="463A32"/>
-                          </a:solidFill>
-                        </a:rPr>
-                        <a:t>66.8</a:t>
-                      </a:r>
-                    </a:p>
-                  </a:txBody>
-                  <a:tcPr>
-                    <a:solidFill>
-                      <a:srgbClr val="F4E8DA"/>
-                    </a:solidFill>
-                  </a:tcPr>
-                </a:tc>
-                <a:tc>
-                  <a:txBody>
-                    <a:bodyPr/>
-                    <a:lstStyle/>
-                    <a:p>
-                      <a:pPr algn="ctr"/>
-                      <a:r>
-                        <a:rPr sz="1050">
-                          <a:solidFill>
-                            <a:srgbClr val="463A32"/>
-                          </a:solidFill>
-                        </a:rPr>
-                        <a:t>4</a:t>
-                      </a:r>
-                    </a:p>
-                  </a:txBody>
-                  <a:tcPr>
-                    <a:solidFill>
-                      <a:srgbClr val="F4E8DA"/>
-                    </a:solidFill>
-                  </a:tcPr>
-                </a:tc>
-                <a:tc>
-                  <a:txBody>
-                    <a:bodyPr/>
-                    <a:lstStyle/>
-                    <a:p>
-                      <a:pPr algn="ctr"/>
-                      <a:r>
-                        <a:rPr sz="1050">
-                          <a:solidFill>
-                            <a:srgbClr val="463A32"/>
-                          </a:solidFill>
-                        </a:rPr>
-                        <a:t>$285.714</a:t>
-                      </a:r>
-                    </a:p>
-                  </a:txBody>
-                  <a:tcPr>
-                    <a:solidFill>
-                      <a:srgbClr val="F4E8DA"/>
-                    </a:solidFill>
-                  </a:tcPr>
-                </a:tc>
-                <a:tc>
-                  <a:txBody>
-                    <a:bodyPr/>
-                    <a:lstStyle/>
-                    <a:p>
-                      <a:pPr algn="ctr"/>
-                      <a:r>
-                        <a:rPr sz="1050" u="sng">
-                          <a:solidFill>
-                            <a:srgbClr val="8F5A44"/>
-                          </a:solidFill>
-                          <a:hlinkClick r:id="rId5"/>
-                        </a:rPr>
-                        <a:t>ver</a:t>
-                      </a:r>
-                    </a:p>
-                  </a:txBody>
-                  <a:tcPr>
-                    <a:solidFill>
-                      <a:srgbClr val="F4E8DA"/>
                     </a:solidFill>
                   </a:tcPr>
                 </a:tc>

--- a/output/Mini-Boom-en-Cali_Presentacion.pptx
+++ b/output/Mini-Boom-en-Cali_Presentacion.pptx
@@ -345,18 +345,51 @@
               </a:solidFill>
             </c:spPr>
           </c:dPt>
+          <c:dPt>
+            <c:idx val="3"/>
+            <c:spPr>
+              <a:solidFill>
+                <a:srgbClr val="D8C4B2"/>
+              </a:solidFill>
+            </c:spPr>
+          </c:dPt>
+          <c:dPt>
+            <c:idx val="4"/>
+            <c:spPr>
+              <a:solidFill>
+                <a:srgbClr val="D8C4B2"/>
+              </a:solidFill>
+            </c:spPr>
+          </c:dPt>
+          <c:dPt>
+            <c:idx val="5"/>
+            <c:spPr>
+              <a:solidFill>
+                <a:srgbClr val="D8C4B2"/>
+              </a:solidFill>
+            </c:spPr>
+          </c:dPt>
           <c:cat>
             <c:strRef>
-              <c:f>Sheet1!$A$2:$A$4</c:f>
+              <c:f>Sheet1!$A$2:$A$7</c:f>
               <c:strCache>
-                <c:ptCount val="3"/>
+                <c:ptCount val="6"/>
                 <c:pt idx="0">
                   <c:v>La Flora (7 camas)</c:v>
                 </c:pt>
                 <c:pt idx="1">
+                  <c:v>Lofthouse (apartahotel)</c:v>
+                </c:pt>
+                <c:pt idx="2">
+                  <c:v>Hotel</c:v>
+                </c:pt>
+                <c:pt idx="3">
+                  <c:v>Hab. compartida</c:v>
+                </c:pt>
+                <c:pt idx="4">
                   <c:v>Casa-museo S.Antonio</c:v>
                 </c:pt>
-                <c:pt idx="2">
+                <c:pt idx="5">
                   <c:v>Apto entero servicios</c:v>
                 </c:pt>
               </c:strCache>
@@ -364,17 +397,26 @@
           </c:cat>
           <c:val>
             <c:numRef>
-              <c:f>Sheet1!$B$2:$B$4</c:f>
+              <c:f>Sheet1!$B$2:$B$7</c:f>
               <c:numCache>
                 <c:formatCode>General</c:formatCode>
-                <c:ptCount val="3"/>
+                <c:ptCount val="6"/>
                 <c:pt idx="0">
                   <c:v>80.1</c:v>
                 </c:pt>
                 <c:pt idx="1">
+                  <c:v>77.9</c:v>
+                </c:pt>
+                <c:pt idx="2">
+                  <c:v>77.9</c:v>
+                </c:pt>
+                <c:pt idx="3">
+                  <c:v>75.0</c:v>
+                </c:pt>
+                <c:pt idx="4">
                   <c:v>73.2</c:v>
                 </c:pt>
-                <c:pt idx="2">
+                <c:pt idx="5">
                   <c:v>66.8</c:v>
                 </c:pt>
               </c:numCache>
@@ -11276,7 +11318,7 @@
                   <a:srgbClr val="FFFFFF"/>
                 </a:solidFill>
               </a:rPr>
-              <a:t>🛏️   Airbnb (noroeste/oeste) — comparación</a:t>
+              <a:t>🛏️   Airbnb — todas las opciones, medidas</a:t>
             </a:r>
           </a:p>
         </p:txBody>
@@ -11310,7 +11352,7 @@
                   <a:srgbClr val="463A32"/>
                 </a:solidFill>
               </a:rPr>
-              <a:t>Solo alojamientos enteros (ningún baño se comparte). «Dist.» = km a la zona de actividades. Rango 30→2 verificado en el calendario. Aire: confirmar.</a:t>
+              <a:t>Todas marcadas por tipo. Apartahotel/hotel = unidad privada; la hab. compartida comparte baños. Rango 30→2 verificado en el calendario.</a:t>
             </a:r>
           </a:p>
         </p:txBody>
@@ -11324,8 +11366,8 @@
           <p:nvPr/>
         </p:nvGraphicFramePr>
         <p:xfrm>
-          <a:off x="365760" y="1737360"/>
-          <a:ext cx="11430000" cy="3291840"/>
+          <a:off x="365760" y="1691640"/>
+          <a:ext cx="11430000" cy="4023360"/>
         </p:xfrm>
         <a:graphic>
           <a:graphicData uri="http://schemas.openxmlformats.org/drawingml/2006/table">
@@ -11335,15 +11377,14 @@
               </a:tblPr>
               <a:tblGrid>
                 <a:gridCol w="3200400"/>
-                <a:gridCol w="1554480"/>
+                <a:gridCol w="2103120"/>
                 <a:gridCol w="914400"/>
                 <a:gridCol w="914400"/>
-                <a:gridCol w="822960"/>
-                <a:gridCol w="1783080"/>
-                <a:gridCol w="1508760"/>
+                <a:gridCol w="1828800"/>
+                <a:gridCol w="1737360"/>
                 <a:gridCol w="731520"/>
               </a:tblGrid>
-              <a:tr h="822960">
+              <a:tr h="574765">
                 <a:tc>
                   <a:txBody>
                     <a:bodyPr/>
@@ -11355,7 +11396,7 @@
                             <a:srgbClr val="FFFFFF"/>
                           </a:solidFill>
                         </a:rPr>
-                        <a:t>Casa / apto entero</a:t>
+                        <a:t>Alojamiento</a:t>
                       </a:r>
                     </a:p>
                   </a:txBody>
@@ -11376,7 +11417,7 @@
                             <a:srgbClr val="FFFFFF"/>
                           </a:solidFill>
                         </a:rPr>
-                        <a:t>Sector</a:t>
+                        <a:t>Tipo</a:t>
                       </a:r>
                     </a:p>
                   </a:txBody>
@@ -11419,27 +11460,6 @@
                           </a:solidFill>
                         </a:rPr>
                         <a:t>Puntaje</a:t>
-                      </a:r>
-                    </a:p>
-                  </a:txBody>
-                  <a:tcPr>
-                    <a:solidFill>
-                      <a:srgbClr val="B5765C"/>
-                    </a:solidFill>
-                  </a:tcPr>
-                </a:tc>
-                <a:tc>
-                  <a:txBody>
-                    <a:bodyPr/>
-                    <a:lstStyle/>
-                    <a:p>
-                      <a:r>
-                        <a:rPr b="1" sz="1100">
-                          <a:solidFill>
-                            <a:srgbClr val="FFFFFF"/>
-                          </a:solidFill>
-                        </a:rPr>
-                        <a:t>Baños</a:t>
                       </a:r>
                     </a:p>
                   </a:txBody>
@@ -11513,7 +11533,7 @@
                   </a:tcPr>
                 </a:tc>
               </a:tr>
-              <a:tr h="822960">
+              <a:tr h="574765">
                 <a:tc>
                   <a:txBody>
                     <a:bodyPr/>
@@ -11546,7 +11566,7 @@
                             <a:srgbClr val="463A32"/>
                           </a:solidFill>
                         </a:rPr>
-                        <a:t>Norte (La Flora)</a:t>
+                        <a:t>Entero</a:t>
                       </a:r>
                     </a:p>
                   </a:txBody>
@@ -11591,28 +11611,6 @@
                           </a:solidFill>
                         </a:rPr>
                         <a:t>80.1</a:t>
-                      </a:r>
-                    </a:p>
-                  </a:txBody>
-                  <a:tcPr>
-                    <a:solidFill>
-                      <a:srgbClr val="F0E0C6"/>
-                    </a:solidFill>
-                  </a:tcPr>
-                </a:tc>
-                <a:tc>
-                  <a:txBody>
-                    <a:bodyPr/>
-                    <a:lstStyle/>
-                    <a:p>
-                      <a:pPr algn="ctr"/>
-                      <a:r>
-                        <a:rPr sz="1000">
-                          <a:solidFill>
-                            <a:srgbClr val="463A32"/>
-                          </a:solidFill>
-                        </a:rPr>
-                        <a:t>2</a:t>
                       </a:r>
                     </a:p>
                   </a:txBody>
@@ -11690,7 +11688,7 @@
                   </a:tcPr>
                 </a:tc>
               </a:tr>
-              <a:tr h="822960">
+              <a:tr h="574765">
                 <a:tc>
                   <a:txBody>
                     <a:bodyPr/>
@@ -11702,7 +11700,7 @@
                             <a:srgbClr val="463A32"/>
                           </a:solidFill>
                         </a:rPr>
-                        <a:t>Casa-museo S.Antonio</a:t>
+                        <a:t>Lofthouse (apartahotel)</a:t>
                       </a:r>
                     </a:p>
                   </a:txBody>
@@ -11723,7 +11721,7 @@
                             <a:srgbClr val="463A32"/>
                           </a:solidFill>
                         </a:rPr>
-                        <a:t>Oeste (San Antonio)</a:t>
+                        <a:t>Apartahotel</a:t>
                       </a:r>
                     </a:p>
                   </a:txBody>
@@ -11745,7 +11743,7 @@
                             <a:srgbClr val="463A32"/>
                           </a:solidFill>
                         </a:rPr>
-                        <a:t>~0.6 km</a:t>
+                        <a:t>~2.0 km</a:t>
                       </a:r>
                     </a:p>
                   </a:txBody>
@@ -11767,7 +11765,7 @@
                             <a:srgbClr val="463A32"/>
                           </a:solidFill>
                         </a:rPr>
-                        <a:t>73.2</a:t>
+                        <a:t>77.9</a:t>
                       </a:r>
                     </a:p>
                   </a:txBody>
@@ -11789,7 +11787,7 @@
                             <a:srgbClr val="463A32"/>
                           </a:solidFill>
                         </a:rPr>
-                        <a:t>2,5</a:t>
+                        <a:t>$1.489.745</a:t>
                       </a:r>
                     </a:p>
                   </a:txBody>
@@ -11811,29 +11809,7 @@
                             <a:srgbClr val="463A32"/>
                           </a:solidFill>
                         </a:rPr>
-                        <a:t>$1.294.200</a:t>
-                      </a:r>
-                    </a:p>
-                  </a:txBody>
-                  <a:tcPr>
-                    <a:solidFill>
-                      <a:srgbClr val="F4E8DA"/>
-                    </a:solidFill>
-                  </a:tcPr>
-                </a:tc>
-                <a:tc>
-                  <a:txBody>
-                    <a:bodyPr/>
-                    <a:lstStyle/>
-                    <a:p>
-                      <a:pPr algn="ctr"/>
-                      <a:r>
-                        <a:rPr sz="1000">
-                          <a:solidFill>
-                            <a:srgbClr val="463A32"/>
-                          </a:solidFill>
-                        </a:rPr>
-                        <a:t>$184.885</a:t>
+                        <a:t>$212.820</a:t>
                       </a:r>
                     </a:p>
                   </a:txBody>
@@ -11867,7 +11843,7 @@
                   </a:tcPr>
                 </a:tc>
               </a:tr>
-              <a:tr h="822960">
+              <a:tr h="574765">
                 <a:tc>
                   <a:txBody>
                     <a:bodyPr/>
@@ -11879,7 +11855,7 @@
                             <a:srgbClr val="463A32"/>
                           </a:solidFill>
                         </a:rPr>
-                        <a:t>Apto entero servicios</a:t>
+                        <a:t>Hotel</a:t>
                       </a:r>
                     </a:p>
                   </a:txBody>
@@ -11900,7 +11876,7 @@
                             <a:srgbClr val="463A32"/>
                           </a:solidFill>
                         </a:rPr>
-                        <a:t>Oeste</a:t>
+                        <a:t>Hotel</a:t>
                       </a:r>
                     </a:p>
                   </a:txBody>
@@ -11922,7 +11898,7 @@
                             <a:srgbClr val="463A32"/>
                           </a:solidFill>
                         </a:rPr>
-                        <a:t>~3.6 km</a:t>
+                        <a:t>~2.1 km</a:t>
                       </a:r>
                     </a:p>
                   </a:txBody>
@@ -11944,7 +11920,7 @@
                             <a:srgbClr val="463A32"/>
                           </a:solidFill>
                         </a:rPr>
-                        <a:t>66.8</a:t>
+                        <a:t>77.9</a:t>
                       </a:r>
                     </a:p>
                   </a:txBody>
@@ -11966,7 +11942,7 @@
                             <a:srgbClr val="463A32"/>
                           </a:solidFill>
                         </a:rPr>
-                        <a:t>4</a:t>
+                        <a:t>$1.489.745</a:t>
                       </a:r>
                     </a:p>
                   </a:txBody>
@@ -11988,29 +11964,7 @@
                             <a:srgbClr val="463A32"/>
                           </a:solidFill>
                         </a:rPr>
-                        <a:t>$1.723.404</a:t>
-                      </a:r>
-                    </a:p>
-                  </a:txBody>
-                  <a:tcPr>
-                    <a:solidFill>
-                      <a:srgbClr val="FFFFFF"/>
-                    </a:solidFill>
-                  </a:tcPr>
-                </a:tc>
-                <a:tc>
-                  <a:txBody>
-                    <a:bodyPr/>
-                    <a:lstStyle/>
-                    <a:p>
-                      <a:pPr algn="ctr"/>
-                      <a:r>
-                        <a:rPr sz="1000">
-                          <a:solidFill>
-                            <a:srgbClr val="463A32"/>
-                          </a:solidFill>
-                        </a:rPr>
-                        <a:t>$246.200</a:t>
+                        <a:t>$212.820</a:t>
                       </a:r>
                     </a:p>
                   </a:txBody>
@@ -12040,6 +11994,471 @@
                   <a:tcPr>
                     <a:solidFill>
                       <a:srgbClr val="FFFFFF"/>
+                    </a:solidFill>
+                  </a:tcPr>
+                </a:tc>
+              </a:tr>
+              <a:tr h="574765">
+                <a:tc>
+                  <a:txBody>
+                    <a:bodyPr/>
+                    <a:lstStyle/>
+                    <a:p>
+                      <a:r>
+                        <a:rPr sz="1000">
+                          <a:solidFill>
+                            <a:srgbClr val="463A32"/>
+                          </a:solidFill>
+                        </a:rPr>
+                        <a:t>Hab. compartida</a:t>
+                      </a:r>
+                    </a:p>
+                  </a:txBody>
+                  <a:tcPr>
+                    <a:solidFill>
+                      <a:srgbClr val="F4E8DA"/>
+                    </a:solidFill>
+                  </a:tcPr>
+                </a:tc>
+                <a:tc>
+                  <a:txBody>
+                    <a:bodyPr/>
+                    <a:lstStyle/>
+                    <a:p>
+                      <a:r>
+                        <a:rPr sz="1000">
+                          <a:solidFill>
+                            <a:srgbClr val="463A32"/>
+                          </a:solidFill>
+                        </a:rPr>
+                        <a:t>Hab. compartida</a:t>
+                      </a:r>
+                    </a:p>
+                  </a:txBody>
+                  <a:tcPr>
+                    <a:solidFill>
+                      <a:srgbClr val="F4E8DA"/>
+                    </a:solidFill>
+                  </a:tcPr>
+                </a:tc>
+                <a:tc>
+                  <a:txBody>
+                    <a:bodyPr/>
+                    <a:lstStyle/>
+                    <a:p>
+                      <a:pPr algn="ctr"/>
+                      <a:r>
+                        <a:rPr sz="1000">
+                          <a:solidFill>
+                            <a:srgbClr val="463A32"/>
+                          </a:solidFill>
+                        </a:rPr>
+                        <a:t>~3.1 km</a:t>
+                      </a:r>
+                    </a:p>
+                  </a:txBody>
+                  <a:tcPr>
+                    <a:solidFill>
+                      <a:srgbClr val="F4E8DA"/>
+                    </a:solidFill>
+                  </a:tcPr>
+                </a:tc>
+                <a:tc>
+                  <a:txBody>
+                    <a:bodyPr/>
+                    <a:lstStyle/>
+                    <a:p>
+                      <a:pPr algn="ctr"/>
+                      <a:r>
+                        <a:rPr sz="1000" b="1">
+                          <a:solidFill>
+                            <a:srgbClr val="463A32"/>
+                          </a:solidFill>
+                        </a:rPr>
+                        <a:t>75.0</a:t>
+                      </a:r>
+                    </a:p>
+                  </a:txBody>
+                  <a:tcPr>
+                    <a:solidFill>
+                      <a:srgbClr val="F4E8DA"/>
+                    </a:solidFill>
+                  </a:tcPr>
+                </a:tc>
+                <a:tc>
+                  <a:txBody>
+                    <a:bodyPr/>
+                    <a:lstStyle/>
+                    <a:p>
+                      <a:pPr algn="ctr"/>
+                      <a:r>
+                        <a:rPr sz="1000">
+                          <a:solidFill>
+                            <a:srgbClr val="463A32"/>
+                          </a:solidFill>
+                        </a:rPr>
+                        <a:t>$1.440.622</a:t>
+                      </a:r>
+                    </a:p>
+                  </a:txBody>
+                  <a:tcPr>
+                    <a:solidFill>
+                      <a:srgbClr val="F4E8DA"/>
+                    </a:solidFill>
+                  </a:tcPr>
+                </a:tc>
+                <a:tc>
+                  <a:txBody>
+                    <a:bodyPr/>
+                    <a:lstStyle/>
+                    <a:p>
+                      <a:pPr algn="ctr"/>
+                      <a:r>
+                        <a:rPr sz="1000">
+                          <a:solidFill>
+                            <a:srgbClr val="463A32"/>
+                          </a:solidFill>
+                        </a:rPr>
+                        <a:t>$205.803</a:t>
+                      </a:r>
+                    </a:p>
+                  </a:txBody>
+                  <a:tcPr>
+                    <a:solidFill>
+                      <a:srgbClr val="F4E8DA"/>
+                    </a:solidFill>
+                  </a:tcPr>
+                </a:tc>
+                <a:tc>
+                  <a:txBody>
+                    <a:bodyPr/>
+                    <a:lstStyle/>
+                    <a:p>
+                      <a:pPr algn="ctr"/>
+                      <a:r>
+                        <a:rPr sz="1000" u="sng">
+                          <a:solidFill>
+                            <a:srgbClr val="8F5A44"/>
+                          </a:solidFill>
+                          <a:hlinkClick r:id="rId5"/>
+                        </a:rPr>
+                        <a:t>ver</a:t>
+                      </a:r>
+                    </a:p>
+                  </a:txBody>
+                  <a:tcPr>
+                    <a:solidFill>
+                      <a:srgbClr val="F4E8DA"/>
+                    </a:solidFill>
+                  </a:tcPr>
+                </a:tc>
+              </a:tr>
+              <a:tr h="574765">
+                <a:tc>
+                  <a:txBody>
+                    <a:bodyPr/>
+                    <a:lstStyle/>
+                    <a:p>
+                      <a:r>
+                        <a:rPr sz="1000">
+                          <a:solidFill>
+                            <a:srgbClr val="463A32"/>
+                          </a:solidFill>
+                        </a:rPr>
+                        <a:t>Casa-museo S.Antonio</a:t>
+                      </a:r>
+                    </a:p>
+                  </a:txBody>
+                  <a:tcPr>
+                    <a:solidFill>
+                      <a:srgbClr val="FFFFFF"/>
+                    </a:solidFill>
+                  </a:tcPr>
+                </a:tc>
+                <a:tc>
+                  <a:txBody>
+                    <a:bodyPr/>
+                    <a:lstStyle/>
+                    <a:p>
+                      <a:r>
+                        <a:rPr sz="1000">
+                          <a:solidFill>
+                            <a:srgbClr val="463A32"/>
+                          </a:solidFill>
+                        </a:rPr>
+                        <a:t>Entero</a:t>
+                      </a:r>
+                    </a:p>
+                  </a:txBody>
+                  <a:tcPr>
+                    <a:solidFill>
+                      <a:srgbClr val="FFFFFF"/>
+                    </a:solidFill>
+                  </a:tcPr>
+                </a:tc>
+                <a:tc>
+                  <a:txBody>
+                    <a:bodyPr/>
+                    <a:lstStyle/>
+                    <a:p>
+                      <a:pPr algn="ctr"/>
+                      <a:r>
+                        <a:rPr sz="1000">
+                          <a:solidFill>
+                            <a:srgbClr val="463A32"/>
+                          </a:solidFill>
+                        </a:rPr>
+                        <a:t>~0.6 km</a:t>
+                      </a:r>
+                    </a:p>
+                  </a:txBody>
+                  <a:tcPr>
+                    <a:solidFill>
+                      <a:srgbClr val="FFFFFF"/>
+                    </a:solidFill>
+                  </a:tcPr>
+                </a:tc>
+                <a:tc>
+                  <a:txBody>
+                    <a:bodyPr/>
+                    <a:lstStyle/>
+                    <a:p>
+                      <a:pPr algn="ctr"/>
+                      <a:r>
+                        <a:rPr sz="1000" b="1">
+                          <a:solidFill>
+                            <a:srgbClr val="463A32"/>
+                          </a:solidFill>
+                        </a:rPr>
+                        <a:t>73.2</a:t>
+                      </a:r>
+                    </a:p>
+                  </a:txBody>
+                  <a:tcPr>
+                    <a:solidFill>
+                      <a:srgbClr val="FFFFFF"/>
+                    </a:solidFill>
+                  </a:tcPr>
+                </a:tc>
+                <a:tc>
+                  <a:txBody>
+                    <a:bodyPr/>
+                    <a:lstStyle/>
+                    <a:p>
+                      <a:pPr algn="ctr"/>
+                      <a:r>
+                        <a:rPr sz="1000">
+                          <a:solidFill>
+                            <a:srgbClr val="463A32"/>
+                          </a:solidFill>
+                        </a:rPr>
+                        <a:t>$1.294.200</a:t>
+                      </a:r>
+                    </a:p>
+                  </a:txBody>
+                  <a:tcPr>
+                    <a:solidFill>
+                      <a:srgbClr val="FFFFFF"/>
+                    </a:solidFill>
+                  </a:tcPr>
+                </a:tc>
+                <a:tc>
+                  <a:txBody>
+                    <a:bodyPr/>
+                    <a:lstStyle/>
+                    <a:p>
+                      <a:pPr algn="ctr"/>
+                      <a:r>
+                        <a:rPr sz="1000">
+                          <a:solidFill>
+                            <a:srgbClr val="463A32"/>
+                          </a:solidFill>
+                        </a:rPr>
+                        <a:t>$184.885</a:t>
+                      </a:r>
+                    </a:p>
+                  </a:txBody>
+                  <a:tcPr>
+                    <a:solidFill>
+                      <a:srgbClr val="FFFFFF"/>
+                    </a:solidFill>
+                  </a:tcPr>
+                </a:tc>
+                <a:tc>
+                  <a:txBody>
+                    <a:bodyPr/>
+                    <a:lstStyle/>
+                    <a:p>
+                      <a:pPr algn="ctr"/>
+                      <a:r>
+                        <a:rPr sz="1000" u="sng">
+                          <a:solidFill>
+                            <a:srgbClr val="8F5A44"/>
+                          </a:solidFill>
+                          <a:hlinkClick r:id="rId6"/>
+                        </a:rPr>
+                        <a:t>ver</a:t>
+                      </a:r>
+                    </a:p>
+                  </a:txBody>
+                  <a:tcPr>
+                    <a:solidFill>
+                      <a:srgbClr val="FFFFFF"/>
+                    </a:solidFill>
+                  </a:tcPr>
+                </a:tc>
+              </a:tr>
+              <a:tr h="574770">
+                <a:tc>
+                  <a:txBody>
+                    <a:bodyPr/>
+                    <a:lstStyle/>
+                    <a:p>
+                      <a:r>
+                        <a:rPr sz="1000">
+                          <a:solidFill>
+                            <a:srgbClr val="463A32"/>
+                          </a:solidFill>
+                        </a:rPr>
+                        <a:t>Apto entero servicios</a:t>
+                      </a:r>
+                    </a:p>
+                  </a:txBody>
+                  <a:tcPr>
+                    <a:solidFill>
+                      <a:srgbClr val="F4E8DA"/>
+                    </a:solidFill>
+                  </a:tcPr>
+                </a:tc>
+                <a:tc>
+                  <a:txBody>
+                    <a:bodyPr/>
+                    <a:lstStyle/>
+                    <a:p>
+                      <a:r>
+                        <a:rPr sz="1000">
+                          <a:solidFill>
+                            <a:srgbClr val="463A32"/>
+                          </a:solidFill>
+                        </a:rPr>
+                        <a:t>Entero</a:t>
+                      </a:r>
+                    </a:p>
+                  </a:txBody>
+                  <a:tcPr>
+                    <a:solidFill>
+                      <a:srgbClr val="F4E8DA"/>
+                    </a:solidFill>
+                  </a:tcPr>
+                </a:tc>
+                <a:tc>
+                  <a:txBody>
+                    <a:bodyPr/>
+                    <a:lstStyle/>
+                    <a:p>
+                      <a:pPr algn="ctr"/>
+                      <a:r>
+                        <a:rPr sz="1000">
+                          <a:solidFill>
+                            <a:srgbClr val="463A32"/>
+                          </a:solidFill>
+                        </a:rPr>
+                        <a:t>~3.6 km</a:t>
+                      </a:r>
+                    </a:p>
+                  </a:txBody>
+                  <a:tcPr>
+                    <a:solidFill>
+                      <a:srgbClr val="F4E8DA"/>
+                    </a:solidFill>
+                  </a:tcPr>
+                </a:tc>
+                <a:tc>
+                  <a:txBody>
+                    <a:bodyPr/>
+                    <a:lstStyle/>
+                    <a:p>
+                      <a:pPr algn="ctr"/>
+                      <a:r>
+                        <a:rPr sz="1000" b="1">
+                          <a:solidFill>
+                            <a:srgbClr val="463A32"/>
+                          </a:solidFill>
+                        </a:rPr>
+                        <a:t>66.8</a:t>
+                      </a:r>
+                    </a:p>
+                  </a:txBody>
+                  <a:tcPr>
+                    <a:solidFill>
+                      <a:srgbClr val="F4E8DA"/>
+                    </a:solidFill>
+                  </a:tcPr>
+                </a:tc>
+                <a:tc>
+                  <a:txBody>
+                    <a:bodyPr/>
+                    <a:lstStyle/>
+                    <a:p>
+                      <a:pPr algn="ctr"/>
+                      <a:r>
+                        <a:rPr sz="1000">
+                          <a:solidFill>
+                            <a:srgbClr val="463A32"/>
+                          </a:solidFill>
+                        </a:rPr>
+                        <a:t>$1.723.404</a:t>
+                      </a:r>
+                    </a:p>
+                  </a:txBody>
+                  <a:tcPr>
+                    <a:solidFill>
+                      <a:srgbClr val="F4E8DA"/>
+                    </a:solidFill>
+                  </a:tcPr>
+                </a:tc>
+                <a:tc>
+                  <a:txBody>
+                    <a:bodyPr/>
+                    <a:lstStyle/>
+                    <a:p>
+                      <a:pPr algn="ctr"/>
+                      <a:r>
+                        <a:rPr sz="1000">
+                          <a:solidFill>
+                            <a:srgbClr val="463A32"/>
+                          </a:solidFill>
+                        </a:rPr>
+                        <a:t>$246.200</a:t>
+                      </a:r>
+                    </a:p>
+                  </a:txBody>
+                  <a:tcPr>
+                    <a:solidFill>
+                      <a:srgbClr val="F4E8DA"/>
+                    </a:solidFill>
+                  </a:tcPr>
+                </a:tc>
+                <a:tc>
+                  <a:txBody>
+                    <a:bodyPr/>
+                    <a:lstStyle/>
+                    <a:p>
+                      <a:pPr algn="ctr"/>
+                      <a:r>
+                        <a:rPr sz="1000" u="sng">
+                          <a:solidFill>
+                            <a:srgbClr val="8F5A44"/>
+                          </a:solidFill>
+                          <a:hlinkClick r:id="rId7"/>
+                        </a:rPr>
+                        <a:t>ver</a:t>
+                      </a:r>
+                    </a:p>
+                  </a:txBody>
+                  <a:tcPr>
+                    <a:solidFill>
+                      <a:srgbClr val="F4E8DA"/>
                     </a:solidFill>
                   </a:tcPr>
                 </a:tc>
